--- a/docs/presentation/HuskiesPaws-BigRedHacks-2026.pptx
+++ b/docs/presentation/HuskiesPaws-BigRedHacks-2026.pptx
@@ -2056,8 +2056,8 @@
         </p:nvSpPr>
         <p:spPr>
           <a:xfrm>
-            <a:off x="777240" y="3931920"/>
-            <a:ext cx="4937760" cy="1463040"/>
+            <a:off x="777240" y="3703320"/>
+            <a:ext cx="4937760" cy="1097280"/>
           </a:xfrm>
           <a:prstGeom prst="rect">
             <a:avLst/>
@@ -3393,9 +3393,31 @@
           </a:p>
         </p:txBody>
       </p:sp>
+      <p:sp>
+        <p:nvSpPr>
+          <p:cNvPr id="3" name="Shape 1"/>
+          <p:cNvSpPr/>
+          <p:nvPr/>
+        </p:nvSpPr>
+        <p:spPr>
+          <a:xfrm>
+            <a:off x="941832" y="1024128"/>
+            <a:ext cx="2505456" cy="4187952"/>
+          </a:xfrm>
+          <a:prstGeom prst="roundRect">
+            <a:avLst>
+              <a:gd name="adj" fmla="val 8029"/>
+            </a:avLst>
+          </a:prstGeom>
+          <a:solidFill>
+            <a:srgbClr val="0B1F3A"/>
+          </a:solidFill>
+          <a:ln/>
+        </p:spPr>
+      </p:sp>
       <p:pic>
         <p:nvPicPr>
-          <p:cNvPr id="3" name="Image 0" descr="G:\broswer download\big-red-hacks2026\docs\presentation\assets\placeholder-map.png">    </p:cNvPr>
+          <p:cNvPr id="4" name="Image 0" descr="G:\broswer download\big-red-hacks2026\docs\presentation\assets\placeholder-map.png">    </p:cNvPr>
           <p:cNvPicPr>
             <a:picLocks noChangeAspect="1"/>
           </p:cNvPicPr>
@@ -3409,17 +3431,17 @@
         </p:blipFill>
         <p:spPr>
           <a:xfrm>
-            <a:off x="1005840" y="1051560"/>
-            <a:ext cx="2331720" cy="4142232"/>
-          </a:xfrm>
-          <a:prstGeom prst="ellipse">
+            <a:off x="1033272" y="1115568"/>
+            <a:ext cx="2322576" cy="4005072"/>
+          </a:xfrm>
+          <a:prstGeom prst="rect">
             <a:avLst/>
           </a:prstGeom>
         </p:spPr>
       </p:pic>
       <p:sp>
         <p:nvSpPr>
-          <p:cNvPr id="4" name="Text 1"/>
+          <p:cNvPr id="5" name="Text 2"/>
           <p:cNvSpPr txBox="1"/>
           <p:nvPr/>
         </p:nvSpPr>
@@ -3456,9 +3478,31 @@
           </a:p>
         </p:txBody>
       </p:sp>
+      <p:sp>
+        <p:nvSpPr>
+          <p:cNvPr id="6" name="Shape 3"/>
+          <p:cNvSpPr/>
+          <p:nvPr/>
+        </p:nvSpPr>
+        <p:spPr>
+          <a:xfrm>
+            <a:off x="4782312" y="1024128"/>
+            <a:ext cx="2505456" cy="4187952"/>
+          </a:xfrm>
+          <a:prstGeom prst="roundRect">
+            <a:avLst>
+              <a:gd name="adj" fmla="val 8029"/>
+            </a:avLst>
+          </a:prstGeom>
+          <a:solidFill>
+            <a:srgbClr val="0B1F3A"/>
+          </a:solidFill>
+          <a:ln/>
+        </p:spPr>
+      </p:sp>
       <p:pic>
         <p:nvPicPr>
-          <p:cNvPr id="5" name="Image 1" descr="G:\broswer download\big-red-hacks2026\docs\presentation\assets\placeholder-walk.png">    </p:cNvPr>
+          <p:cNvPr id="7" name="Image 1" descr="G:\broswer download\big-red-hacks2026\docs\presentation\assets\placeholder-walk.png">    </p:cNvPr>
           <p:cNvPicPr>
             <a:picLocks noChangeAspect="1"/>
           </p:cNvPicPr>
@@ -3472,17 +3516,17 @@
         </p:blipFill>
         <p:spPr>
           <a:xfrm>
-            <a:off x="4846320" y="1051560"/>
-            <a:ext cx="2331720" cy="4142232"/>
-          </a:xfrm>
-          <a:prstGeom prst="ellipse">
+            <a:off x="4873752" y="1115568"/>
+            <a:ext cx="2322576" cy="4005072"/>
+          </a:xfrm>
+          <a:prstGeom prst="rect">
             <a:avLst/>
           </a:prstGeom>
         </p:spPr>
       </p:pic>
       <p:sp>
         <p:nvSpPr>
-          <p:cNvPr id="6" name="Text 2"/>
+          <p:cNvPr id="8" name="Text 4"/>
           <p:cNvSpPr txBox="1"/>
           <p:nvPr/>
         </p:nvSpPr>
@@ -3519,9 +3563,31 @@
           </a:p>
         </p:txBody>
       </p:sp>
+      <p:sp>
+        <p:nvSpPr>
+          <p:cNvPr id="9" name="Shape 5"/>
+          <p:cNvSpPr/>
+          <p:nvPr/>
+        </p:nvSpPr>
+        <p:spPr>
+          <a:xfrm>
+            <a:off x="8622792" y="1024128"/>
+            <a:ext cx="2505456" cy="4187952"/>
+          </a:xfrm>
+          <a:prstGeom prst="roundRect">
+            <a:avLst>
+              <a:gd name="adj" fmla="val 8029"/>
+            </a:avLst>
+          </a:prstGeom>
+          <a:solidFill>
+            <a:srgbClr val="0B1F3A"/>
+          </a:solidFill>
+          <a:ln/>
+        </p:spPr>
+      </p:sp>
       <p:pic>
         <p:nvPicPr>
-          <p:cNvPr id="7" name="Image 2" descr="G:\broswer download\big-red-hacks2026\docs\presentation\assets\placeholder-capture.png">    </p:cNvPr>
+          <p:cNvPr id="10" name="Image 2" descr="G:\broswer download\big-red-hacks2026\docs\presentation\assets\placeholder-capture.png">    </p:cNvPr>
           <p:cNvPicPr>
             <a:picLocks noChangeAspect="1"/>
           </p:cNvPicPr>
@@ -3535,17 +3601,17 @@
         </p:blipFill>
         <p:spPr>
           <a:xfrm>
-            <a:off x="8686800" y="1051560"/>
-            <a:ext cx="2331720" cy="4142232"/>
-          </a:xfrm>
-          <a:prstGeom prst="ellipse">
+            <a:off x="8714232" y="1115568"/>
+            <a:ext cx="2322576" cy="4005072"/>
+          </a:xfrm>
+          <a:prstGeom prst="rect">
             <a:avLst/>
           </a:prstGeom>
         </p:spPr>
       </p:pic>
       <p:sp>
         <p:nvSpPr>
-          <p:cNvPr id="8" name="Text 3"/>
+          <p:cNvPr id="11" name="Text 6"/>
           <p:cNvSpPr txBox="1"/>
           <p:nvPr/>
         </p:nvSpPr>
@@ -3584,7 +3650,7 @@
       </p:sp>
       <p:sp>
         <p:nvSpPr>
-          <p:cNvPr id="9" name="Text 4"/>
+          <p:cNvPr id="12" name="Text 7"/>
           <p:cNvSpPr txBox="1"/>
           <p:nvPr/>
         </p:nvSpPr>
@@ -3615,7 +3681,7 @@
                 <a:ea typeface="Calibri" pitchFamily="34" charset="-122"/>
                 <a:cs typeface="Calibri" pitchFamily="34" charset="-120"/>
               </a:rPr>
-              <a:t>Sequence: Send Pip exploring  →  choose a place  →  start a walk  →  capture the landmark.  Demo Walk simulates steps at the judging table.</a:t>
+              <a:t>Sequence: Send Pip exploring  →  choose a place  →  start a walk  →  capture.  Demo Walk simulates steps at the table.</a:t>
             </a:r>
             <a:endParaRPr lang="en-US" sz="1600" dirty="0"/>
           </a:p>
@@ -4975,7 +5041,7 @@
       </p:sp>
       <p:pic>
         <p:nvPicPr>
-          <p:cNvPr id="12" name="Image 2" descr="G:\broswer download\big-red-hacks2026\mobile\assets\icon.png">    </p:cNvPr>
+          <p:cNvPr id="12" name="Image 2" descr="G:\broswer download\big-red-hacks2026\mobile\assets\logo-badge.png">    </p:cNvPr>
           <p:cNvPicPr>
             <a:picLocks noChangeAspect="1"/>
           </p:cNvPicPr>

--- a/docs/presentation/HuskiesPaws-BigRedHacks-2026.pptx
+++ b/docs/presentation/HuskiesPaws-BigRedHacks-2026.pptx
@@ -508,7 +508,7 @@
           <a:p>
             <a:r>
               <a:rPr lang="en-US" dirty="0"/>
-              <a:t>About 25 seconds. Open on the title. Say: We are HuskiesPaws. Ordinary walks become a creature-collecting adventure. Team is Luis Mendez and Abdullah Rashid, BigRed Hacks 2026, Navigation track. The product is the phone app you can hold. Invite them to watch the loop, not a website.</a:t>
+              <a:t>About 25 seconds. We are HuskiesPaws. Ordinary walks become a creature-collecting adventure. Team is Luis Mendez and Abdullah Rashid, BigRed Hacks 2026, Navigation. The product is the phone app. Invite them to watch the loop.</a:t>
             </a:r>
             <a:endParaRPr lang="en-US" dirty="0"/>
           </a:p>
@@ -596,7 +596,7 @@
           <a:p>
             <a:r>
               <a:rPr lang="en-US" dirty="0"/>
-              <a:t>About 25 seconds. Do not invent numbers. Typical maps optimize for arrival. People miss buildings, plaques, and corners they walk past every day. Walking is healthy and social; the missing piece is a reason to notice the route. That is the gap we designed for on campus.</a:t>
+              <a:t>About 25 seconds. Do not invent numbers. Typical maps optimize for arrival. People miss buildings and corners they walk past every day. Walking already happens; discovery and progress do not. That is the gap on campus.</a:t>
             </a:r>
             <a:endParaRPr lang="en-US" dirty="0"/>
           </a:p>
@@ -684,7 +684,7 @@
           <a:p>
             <a:r>
               <a:rPr lang="en-US" dirty="0"/>
-              <a:t>About 30 seconds. The loop is Explore, Walk, Discover, Collect. Pip scouts with Wikipedia and OpenStreetMap. Fern starts the walk. Moss tells the story from those facts. Capture and eggs reward the walk. Squad names are starters; your own pets can take those roles. Keep it visual — then go to the live phone.</a:t>
+              <a:t>About 30 seconds. Loop: Explore, Walk, Discover, Collect. Pip scouts with Wikipedia and OpenStreetMap. Fern starts the walk. Moss tells the story from those facts. Capture and eggs reward the walk. Then go to the live phone.</a:t>
             </a:r>
             <a:endParaRPr lang="en-US" dirty="0"/>
           </a:p>
@@ -772,7 +772,7 @@
           <a:p>
             <a:r>
               <a:rPr lang="en-US" dirty="0"/>
-              <a:t>Keep this slide visible. Hand the phone over if they want it. Demo Walk ON — say that walks are simulated at the table. Sequence: Squad, Pip, Explore. Pick the postcard. Start walk. Watch the blooming trail. Capture. If Grok or voice is slow, keep going — on-device speech and drawn art still work. Hide the Expo tools button. Do not claim a live server unless /api/health is actually up.</a:t>
+              <a:t>Keep this slide visible. Hand the phone over if they want it. Demo Walk ON — say walks are simulated. Sequence: Squad, Pip, Explore. Pick the postcard. Start walk. Watch the blooming trail. Capture. If Grok is slow, keep going. Hide the Expo tools button. Do not claim a live server unless /api/health is up.</a:t>
             </a:r>
             <a:endParaRPr lang="en-US" dirty="0"/>
           </a:p>
@@ -860,7 +860,7 @@
           <a:p>
             <a:r>
               <a:rPr lang="en-US" dirty="0"/>
-              <a:t>About 25 seconds. Phone talks to our Node API. Secrets never ship in the app. Wikipedia and OSM ground the adventure. Speech and Imagine are optional — we demo with fallbacks if keys or the server are down. Shared core keeps pets, ranks, and walks consistent. Photon is the iMessage track. Built in Cursor. Do not say we are live on Render unless health checks green today.</a:t>
+              <a:t>About 25 seconds. Phone talks to our Node API. Secrets never ship in the app. Wikipedia and OSM ground the adventure. Speech and Imagine are optional. Shared core keeps pets, ranks, and walks consistent. Photon is iMessage. Built in Cursor. Do not say Render is live unless health is green.</a:t>
             </a:r>
             <a:endParaRPr lang="en-US" dirty="0"/>
           </a:p>
@@ -948,7 +948,7 @@
           <a:p>
             <a:r>
               <a:rPr lang="en-US" dirty="0"/>
-              <a:t>About 25 seconds. Three things they just saw: navigation is exploration plus progression; walking is the currency for pets and captures; the squad can live in iMessage. Mention ISS only if you want a sparkle — it is implemented in shared logic with live orbital data, not a fake stat. Be honest about Grok keys, deploy, and background GPS. Sample pets on the map are labeled samples.</a:t>
+              <a:t>About 25 seconds. Three things they saw: navigation is play; walking earns creatures; the squad can live in iMessage. ISS rare-hatch boost is in shared logic. Be honest about Grok keys, deploy, and background GPS.</a:t>
             </a:r>
             <a:endParaRPr lang="en-US" dirty="0"/>
           </a:p>
@@ -1036,7 +1036,7 @@
           <a:p>
             <a:r>
               <a:rPr lang="en-US" dirty="0"/>
-              <a:t>About 25 seconds. Close on campus exploration and enjoyable walking — not inflated impact stats. Next is planned: background tracking, accessibility, a deploy that stays awake, richer social play. Line: Everyday walks. Extraordinary company. Hand them the phone. Stop talking so they can ask questions.</a:t>
+              <a:t>About 25 seconds. Close on campus exploration — not inflated stats. Next is planned: background tracking, accessibility, a deploy that stays awake, richer social play. Line: Everyday walks. Extraordinary company. Hand them the phone.</a:t>
             </a:r>
             <a:endParaRPr lang="en-US" dirty="0"/>
           </a:p>
@@ -1174,8 +1174,8 @@
         </p:nvSpPr>
         <p:spPr>
           <a:xfrm>
-            <a:off x="502920" y="292608"/>
-            <a:ext cx="11155680" cy="640080"/>
+            <a:off x="502920" y="256032"/>
+            <a:ext cx="11155680" cy="566928"/>
           </a:xfrm>
           <a:prstGeom prst="rect">
             <a:avLst/>
@@ -1188,7 +1188,7 @@
           <a:lstStyle>
             <a:lvl1pPr algn="l" indent="0" marL="0">
               <a:buNone/>
-              <a:defRPr lang="en-US" sz="3600" b="1" dirty="0">
+              <a:defRPr lang="en-US" sz="3200" b="1" dirty="0">
                 <a:solidFill>
                   <a:srgbClr val="0B1F3A"/>
                 </a:solidFill>
@@ -1202,7 +1202,7 @@
             <a:pPr algn="l" indent="0" marL="0">
               <a:buNone/>
             </a:pPr>
-            <a:endParaRPr lang="en-US" sz="3600" dirty="0"/>
+            <a:endParaRPr lang="en-US" sz="3200" dirty="0"/>
           </a:p>
         </p:txBody>
       </p:sp>
@@ -1214,8 +1214,8 @@
         </p:nvSpPr>
         <p:spPr>
           <a:xfrm>
-            <a:off x="502920" y="6510528"/>
-            <a:ext cx="7315200" cy="219456"/>
+            <a:off x="502920" y="6528816"/>
+            <a:ext cx="11155680" cy="201168"/>
           </a:xfrm>
           <a:prstGeom prst="rect">
             <a:avLst/>
@@ -1590,8 +1590,8 @@
         </p:nvSpPr>
         <p:spPr>
           <a:xfrm>
-            <a:off x="9509760" y="-1280160"/>
-            <a:ext cx="4023360" cy="4023360"/>
+            <a:off x="9692640" y="-1463040"/>
+            <a:ext cx="4206240" cy="4206240"/>
           </a:xfrm>
           <a:prstGeom prst="ellipse">
             <a:avLst/>
@@ -1610,8 +1610,8 @@
         </p:nvSpPr>
         <p:spPr>
           <a:xfrm>
-            <a:off x="-1097280" y="4754880"/>
-            <a:ext cx="3291840" cy="3291840"/>
+            <a:off x="-1463040" y="4937760"/>
+            <a:ext cx="3474720" cy="3474720"/>
           </a:xfrm>
           <a:prstGeom prst="ellipse">
             <a:avLst/>
@@ -1624,7 +1624,7 @@
       </p:sp>
       <p:pic>
         <p:nvPicPr>
-          <p:cNvPr id="4" name="Image 0" descr="G:\broswer download\big-red-hacks2026\mobile\assets\icon.png">    </p:cNvPr>
+          <p:cNvPr id="4" name="Image 0" descr="G:\broswer download\big-red-hacks2026\mobile\assets\splash-icon.png">    </p:cNvPr>
           <p:cNvPicPr>
             <a:picLocks noChangeAspect="1"/>
           </p:cNvPicPr>
@@ -1638,24 +1638,48 @@
         </p:blipFill>
         <p:spPr>
           <a:xfrm>
-            <a:off x="640080" y="1417320"/>
-            <a:ext cx="1234440" cy="1234440"/>
+            <a:off x="8549640" y="1874520"/>
+            <a:ext cx="2880360" cy="2880360"/>
           </a:xfrm>
           <a:prstGeom prst="rect">
             <a:avLst/>
           </a:prstGeom>
         </p:spPr>
       </p:pic>
-      <p:sp>
-        <p:nvSpPr>
-          <p:cNvPr id="5" name="Text 2"/>
-          <p:cNvSpPr txBox="1"/>
-          <p:nvPr/>
-        </p:nvSpPr>
-        <p:spPr>
-          <a:xfrm>
-            <a:off x="2011680" y="1417320"/>
-            <a:ext cx="9144000" cy="777240"/>
+      <p:pic>
+        <p:nvPicPr>
+          <p:cNvPr id="5" name="Image 1" descr="G:\broswer download\big-red-hacks2026\mobile\assets\icon.png">    </p:cNvPr>
+          <p:cNvPicPr>
+            <a:picLocks noChangeAspect="1"/>
+          </p:cNvPicPr>
+          <p:nvPr/>
+        </p:nvPicPr>
+        <p:blipFill>
+          <a:blip r:embed="rId2"/>
+          <a:stretch>
+            <a:fillRect/>
+          </a:stretch>
+        </p:blipFill>
+        <p:spPr>
+          <a:xfrm>
+            <a:off x="640080" y="1691640"/>
+            <a:ext cx="1051560" cy="1051560"/>
+          </a:xfrm>
+          <a:prstGeom prst="rect">
+            <a:avLst/>
+          </a:prstGeom>
+        </p:spPr>
+      </p:pic>
+      <p:sp>
+        <p:nvSpPr>
+          <p:cNvPr id="6" name="Text 2"/>
+          <p:cNvSpPr txBox="1"/>
+          <p:nvPr/>
+        </p:nvSpPr>
+        <p:spPr>
+          <a:xfrm>
+            <a:off x="1874520" y="1691640"/>
+            <a:ext cx="6400800" cy="640080"/>
           </a:xfrm>
           <a:prstGeom prst="rect">
             <a:avLst/>
@@ -1671,7 +1695,7 @@
               <a:buNone/>
             </a:pPr>
             <a:r>
-              <a:rPr lang="en-US" sz="4800" b="1" dirty="0">
+              <a:rPr lang="en-US" sz="4400" b="1" dirty="0">
                 <a:solidFill>
                   <a:srgbClr val="FFFFFF"/>
                 </a:solidFill>
@@ -1681,20 +1705,20 @@
               </a:rPr>
               <a:t>HuskiesPaws</a:t>
             </a:r>
-            <a:endParaRPr lang="en-US" sz="4800" dirty="0"/>
-          </a:p>
-        </p:txBody>
-      </p:sp>
-      <p:sp>
-        <p:nvSpPr>
-          <p:cNvPr id="6" name="Text 3"/>
-          <p:cNvSpPr txBox="1"/>
-          <p:nvPr/>
-        </p:nvSpPr>
-        <p:spPr>
-          <a:xfrm>
-            <a:off x="2011680" y="2240280"/>
-            <a:ext cx="9326880" cy="640080"/>
+            <a:endParaRPr lang="en-US" sz="4400" dirty="0"/>
+          </a:p>
+        </p:txBody>
+      </p:sp>
+      <p:sp>
+        <p:nvSpPr>
+          <p:cNvPr id="7" name="Text 3"/>
+          <p:cNvSpPr txBox="1"/>
+          <p:nvPr/>
+        </p:nvSpPr>
+        <p:spPr>
+          <a:xfrm>
+            <a:off x="1874520" y="2331720"/>
+            <a:ext cx="6492240" cy="457200"/>
           </a:xfrm>
           <a:prstGeom prst="rect">
             <a:avLst/>
@@ -1710,7 +1734,7 @@
               <a:buNone/>
             </a:pPr>
             <a:r>
-              <a:rPr lang="en-US" sz="2400" i="1" dirty="0">
+              <a:rPr lang="en-US" sz="1800" i="1" dirty="0">
                 <a:solidFill>
                   <a:srgbClr val="6EC6FF"/>
                 </a:solidFill>
@@ -1720,20 +1744,49 @@
               </a:rPr>
               <a:t>Turn everyday walks into a creature-collecting adventure.</a:t>
             </a:r>
-            <a:endParaRPr lang="en-US" sz="2400" dirty="0"/>
-          </a:p>
-        </p:txBody>
-      </p:sp>
-      <p:sp>
-        <p:nvSpPr>
-          <p:cNvPr id="7" name="Text 4"/>
-          <p:cNvSpPr txBox="1"/>
-          <p:nvPr/>
-        </p:nvSpPr>
-        <p:spPr>
-          <a:xfrm>
-            <a:off x="640080" y="3977640"/>
-            <a:ext cx="7315200" cy="365760"/>
+            <a:endParaRPr lang="en-US" sz="1800" dirty="0"/>
+          </a:p>
+        </p:txBody>
+      </p:sp>
+      <p:sp>
+        <p:nvSpPr>
+          <p:cNvPr id="8" name="Shape 4"/>
+          <p:cNvSpPr/>
+          <p:nvPr/>
+        </p:nvSpPr>
+        <p:spPr>
+          <a:xfrm>
+            <a:off x="640080" y="3520440"/>
+            <a:ext cx="7040880" cy="1965960"/>
+          </a:xfrm>
+          <a:prstGeom prst="roundRect">
+            <a:avLst>
+              <a:gd name="adj" fmla="val 5581"/>
+            </a:avLst>
+          </a:prstGeom>
+          <a:solidFill>
+            <a:srgbClr val="123252"/>
+          </a:solidFill>
+          <a:ln/>
+          <a:effectLst>
+            <a:outerShdw sx="100000" sy="100000" kx="0" ky="0" algn="bl" rotWithShape="0" blurRad="101600" dist="25400" dir="5400000">
+              <a:srgbClr val="0B1F3A">
+                <a:alpha val="10000"/>
+              </a:srgbClr>
+            </a:outerShdw>
+          </a:effectLst>
+        </p:spPr>
+      </p:sp>
+      <p:sp>
+        <p:nvSpPr>
+          <p:cNvPr id="9" name="Text 5"/>
+          <p:cNvSpPr txBox="1"/>
+          <p:nvPr/>
+        </p:nvSpPr>
+        <p:spPr>
+          <a:xfrm>
+            <a:off x="868680" y="3703320"/>
+            <a:ext cx="6583680" cy="365760"/>
           </a:xfrm>
           <a:prstGeom prst="rect">
             <a:avLst/>
@@ -1765,14 +1818,14 @@
       </p:sp>
       <p:sp>
         <p:nvSpPr>
-          <p:cNvPr id="8" name="Text 5"/>
-          <p:cNvSpPr txBox="1"/>
-          <p:nvPr/>
-        </p:nvSpPr>
-        <p:spPr>
-          <a:xfrm>
-            <a:off x="640080" y="4434840"/>
-            <a:ext cx="7315200" cy="365760"/>
+          <p:cNvPr id="10" name="Text 6"/>
+          <p:cNvSpPr txBox="1"/>
+          <p:nvPr/>
+        </p:nvSpPr>
+        <p:spPr>
+          <a:xfrm>
+            <a:off x="868680" y="4114800"/>
+            <a:ext cx="6583680" cy="411480"/>
           </a:xfrm>
           <a:prstGeom prst="rect">
             <a:avLst/>
@@ -1788,7 +1841,7 @@
               <a:buNone/>
             </a:pPr>
             <a:r>
-              <a:rPr lang="en-US" sz="2000" dirty="0">
+              <a:rPr lang="en-US" sz="2200" b="1" dirty="0">
                 <a:solidFill>
                   <a:srgbClr val="FFFFFF"/>
                 </a:solidFill>
@@ -1798,20 +1851,20 @@
               </a:rPr>
               <a:t>Luis Mendez  ·  Abdullah Rashid</a:t>
             </a:r>
-            <a:endParaRPr lang="en-US" sz="2000" dirty="0"/>
-          </a:p>
-        </p:txBody>
-      </p:sp>
-      <p:sp>
-        <p:nvSpPr>
-          <p:cNvPr id="9" name="Text 6"/>
-          <p:cNvSpPr txBox="1"/>
-          <p:nvPr/>
-        </p:nvSpPr>
-        <p:spPr>
-          <a:xfrm>
-            <a:off x="640080" y="5989320"/>
-            <a:ext cx="9144000" cy="320040"/>
+            <a:endParaRPr lang="en-US" sz="2200" dirty="0"/>
+          </a:p>
+        </p:txBody>
+      </p:sp>
+      <p:sp>
+        <p:nvSpPr>
+          <p:cNvPr id="11" name="Text 7"/>
+          <p:cNvSpPr txBox="1"/>
+          <p:nvPr/>
+        </p:nvSpPr>
+        <p:spPr>
+          <a:xfrm>
+            <a:off x="868680" y="4617720"/>
+            <a:ext cx="6583680" cy="320040"/>
           </a:xfrm>
           <a:prstGeom prst="rect">
             <a:avLst/>
@@ -1827,17 +1880,17 @@
               <a:buNone/>
             </a:pPr>
             <a:r>
-              <a:rPr lang="en-US" sz="1400" dirty="0">
-                <a:solidFill>
-                  <a:srgbClr val="9BB0C4"/>
-                </a:solidFill>
-                <a:latin typeface="Calibri" pitchFamily="34" charset="0"/>
-                <a:ea typeface="Calibri" pitchFamily="34" charset="-122"/>
-                <a:cs typeface="Calibri" pitchFamily="34" charset="-120"/>
-              </a:rPr>
-              <a:t>Phone app  ·  Expo Go demo  ·  Built with Cursor</a:t>
-            </a:r>
-            <a:endParaRPr lang="en-US" sz="1400" dirty="0"/>
+              <a:rPr lang="en-US" sz="1600" dirty="0">
+                <a:solidFill>
+                  <a:srgbClr val="6EC6FF"/>
+                </a:solidFill>
+                <a:latin typeface="Calibri" pitchFamily="34" charset="0"/>
+                <a:ea typeface="Calibri" pitchFamily="34" charset="-122"/>
+                <a:cs typeface="Calibri" pitchFamily="34" charset="-120"/>
+              </a:rPr>
+              <a:t>Phone app  ·  Expo Go  ·  Built with Cursor</a:t>
+            </a:r>
+            <a:endParaRPr lang="en-US" sz="1600" dirty="0"/>
           </a:p>
         </p:txBody>
       </p:sp>
@@ -1876,8 +1929,8 @@
         </p:nvSpPr>
         <p:spPr>
           <a:xfrm>
-            <a:off x="502920" y="292608"/>
-            <a:ext cx="11155680" cy="640080"/>
+            <a:off x="502920" y="256032"/>
+            <a:ext cx="11155680" cy="566928"/>
           </a:xfrm>
           <a:prstGeom prst="rect">
             <a:avLst/>
@@ -1893,7 +1946,7 @@
               <a:buNone/>
             </a:pPr>
             <a:r>
-              <a:rPr lang="en-US" sz="3600" b="1" dirty="0">
+              <a:rPr lang="en-US" sz="3200" b="1" dirty="0">
                 <a:solidFill>
                   <a:srgbClr val="0B1F3A"/>
                 </a:solidFill>
@@ -1903,24 +1956,102 @@
               </a:rPr>
               <a:t>People walk past the interesting places</a:t>
             </a:r>
-            <a:endParaRPr lang="en-US" sz="3600" dirty="0"/>
-          </a:p>
-        </p:txBody>
-      </p:sp>
-      <p:sp>
-        <p:nvSpPr>
-          <p:cNvPr id="3" name="Shape 1"/>
+            <a:endParaRPr lang="en-US" sz="3200" dirty="0"/>
+          </a:p>
+        </p:txBody>
+      </p:sp>
+      <p:sp>
+        <p:nvSpPr>
+          <p:cNvPr id="3" name="Text 1"/>
+          <p:cNvSpPr txBox="1"/>
+          <p:nvPr/>
+        </p:nvSpPr>
+        <p:spPr>
+          <a:xfrm>
+            <a:off x="502920" y="932688"/>
+            <a:ext cx="5349240" cy="292608"/>
+          </a:xfrm>
+          <a:prstGeom prst="rect">
+            <a:avLst/>
+          </a:prstGeom>
+          <a:noFill/>
+          <a:ln/>
+        </p:spPr>
+        <p:txBody>
+          <a:bodyPr wrap="square" lIns="0" tIns="0" rIns="0" bIns="0" rtlCol="0" anchor="ctr"/>
+          <a:lstStyle/>
+          <a:p>
+            <a:pPr indent="0" marL="0">
+              <a:buNone/>
+            </a:pPr>
+            <a:r>
+              <a:rPr lang="en-US" sz="1600" b="1" dirty="0">
+                <a:solidFill>
+                  <a:srgbClr val="FF7A59"/>
+                </a:solidFill>
+                <a:latin typeface="Calibri" pitchFamily="34" charset="0"/>
+                <a:ea typeface="Calibri" pitchFamily="34" charset="-122"/>
+                <a:cs typeface="Calibri" pitchFamily="34" charset="-120"/>
+              </a:rPr>
+              <a:t>Typical navigation</a:t>
+            </a:r>
+            <a:endParaRPr lang="en-US" sz="1600" dirty="0"/>
+          </a:p>
+        </p:txBody>
+      </p:sp>
+      <p:sp>
+        <p:nvSpPr>
+          <p:cNvPr id="4" name="Text 2"/>
+          <p:cNvSpPr txBox="1"/>
+          <p:nvPr/>
+        </p:nvSpPr>
+        <p:spPr>
+          <a:xfrm>
+            <a:off x="6355080" y="932688"/>
+            <a:ext cx="5349240" cy="292608"/>
+          </a:xfrm>
+          <a:prstGeom prst="rect">
+            <a:avLst/>
+          </a:prstGeom>
+          <a:noFill/>
+          <a:ln/>
+        </p:spPr>
+        <p:txBody>
+          <a:bodyPr wrap="square" lIns="0" tIns="0" rIns="0" bIns="0" rtlCol="0" anchor="ctr"/>
+          <a:lstStyle/>
+          <a:p>
+            <a:pPr indent="0" marL="0">
+              <a:buNone/>
+            </a:pPr>
+            <a:r>
+              <a:rPr lang="en-US" sz="1600" b="1" dirty="0">
+                <a:solidFill>
+                  <a:srgbClr val="1F6B45"/>
+                </a:solidFill>
+                <a:latin typeface="Calibri" pitchFamily="34" charset="0"/>
+                <a:ea typeface="Calibri" pitchFamily="34" charset="-122"/>
+                <a:cs typeface="Calibri" pitchFamily="34" charset="-120"/>
+              </a:rPr>
+              <a:t>What walking could be</a:t>
+            </a:r>
+            <a:endParaRPr lang="en-US" sz="1600" dirty="0"/>
+          </a:p>
+        </p:txBody>
+      </p:sp>
+      <p:sp>
+        <p:nvSpPr>
+          <p:cNvPr id="5" name="Shape 3"/>
           <p:cNvSpPr/>
           <p:nvPr/>
         </p:nvSpPr>
         <p:spPr>
           <a:xfrm>
-            <a:off x="502920" y="1143000"/>
-            <a:ext cx="5486400" cy="4892040"/>
+            <a:off x="502920" y="1280160"/>
+            <a:ext cx="5349240" cy="1508760"/>
           </a:xfrm>
           <a:prstGeom prst="roundRect">
             <a:avLst>
-              <a:gd name="adj" fmla="val 2617"/>
+              <a:gd name="adj" fmla="val 7273"/>
             </a:avLst>
           </a:prstGeom>
           <a:solidFill>
@@ -1928,9 +2059,9 @@
           </a:solidFill>
           <a:ln/>
           <a:effectLst>
-            <a:outerShdw sx="100000" sy="100000" kx="0" ky="0" algn="bl" rotWithShape="0" blurRad="127000" dist="38100" dir="5400000">
+            <a:outerShdw sx="100000" sy="100000" kx="0" ky="0" algn="bl" rotWithShape="0" blurRad="101600" dist="25400" dir="5400000">
               <a:srgbClr val="0B1F3A">
-                <a:alpha val="8000"/>
+                <a:alpha val="10000"/>
               </a:srgbClr>
             </a:outerShdw>
           </a:effectLst>
@@ -1938,14 +2069,14 @@
       </p:sp>
       <p:sp>
         <p:nvSpPr>
-          <p:cNvPr id="4" name="Text 2"/>
-          <p:cNvSpPr txBox="1"/>
-          <p:nvPr/>
-        </p:nvSpPr>
-        <p:spPr>
-          <a:xfrm>
-            <a:off x="777240" y="1371600"/>
-            <a:ext cx="4937760" cy="365760"/>
+          <p:cNvPr id="6" name="Text 4"/>
+          <p:cNvSpPr txBox="1"/>
+          <p:nvPr/>
+        </p:nvSpPr>
+        <p:spPr>
+          <a:xfrm>
+            <a:off x="731520" y="1600200"/>
+            <a:ext cx="4892040" cy="868680"/>
           </a:xfrm>
           <a:prstGeom prst="rect">
             <a:avLst/>
@@ -1961,7 +2092,7 @@
               <a:buNone/>
             </a:pPr>
             <a:r>
-              <a:rPr lang="en-US" sz="2000" b="1" dirty="0">
+              <a:rPr lang="en-US" sz="2200" b="1" dirty="0">
                 <a:solidFill>
                   <a:srgbClr val="0B1F3A"/>
                 </a:solidFill>
@@ -1969,138 +2100,65 @@
                 <a:ea typeface="Calibri" pitchFamily="34" charset="-122"/>
                 <a:cs typeface="Calibri" pitchFamily="34" charset="-120"/>
               </a:rPr>
-              <a:t>Typical navigation</a:t>
-            </a:r>
-            <a:endParaRPr lang="en-US" sz="2000" dirty="0"/>
-          </a:p>
-        </p:txBody>
-      </p:sp>
-      <p:sp>
-        <p:nvSpPr>
-          <p:cNvPr id="5" name="Text 3"/>
-          <p:cNvSpPr txBox="1"/>
-          <p:nvPr/>
-        </p:nvSpPr>
-        <p:spPr>
-          <a:xfrm>
-            <a:off x="777240" y="1920240"/>
-            <a:ext cx="4937760" cy="1645920"/>
-          </a:xfrm>
-          <a:prstGeom prst="rect">
-            <a:avLst/>
-          </a:prstGeom>
-          <a:noFill/>
-          <a:ln/>
-        </p:spPr>
-        <p:txBody>
-          <a:bodyPr wrap="square" lIns="0" tIns="0" rIns="0" bIns="0" rtlCol="0" anchor="t"/>
-          <a:lstStyle/>
-          <a:p>
-            <a:pPr indent="0" marL="0">
-              <a:buNone/>
-            </a:pPr>
-            <a:r>
-              <a:rPr lang="en-US" sz="2000" dirty="0">
-                <a:solidFill>
-                  <a:srgbClr val="4A6358"/>
-                </a:solidFill>
-                <a:latin typeface="Calibri" pitchFamily="34" charset="0"/>
-                <a:ea typeface="Calibri" pitchFamily="34" charset="-122"/>
-                <a:cs typeface="Calibri" pitchFamily="34" charset="-120"/>
-              </a:rPr>
-              <a:t>Get there fast.</a:t>
-            </a:r>
-            <a:endParaRPr lang="en-US" sz="2000" dirty="0"/>
-          </a:p>
-          <a:p>
-            <a:pPr indent="0" marL="0">
-              <a:buNone/>
-            </a:pPr>
-            <a:r>
-              <a:rPr lang="en-US" sz="2000" dirty="0">
-                <a:solidFill>
-                  <a:srgbClr val="4A6358"/>
-                </a:solidFill>
-                <a:latin typeface="Calibri" pitchFamily="34" charset="0"/>
-                <a:ea typeface="Calibri" pitchFamily="34" charset="-122"/>
-                <a:cs typeface="Calibri" pitchFamily="34" charset="-120"/>
-              </a:rPr>
-              <a:t>Stay on the shortest path.</a:t>
-            </a:r>
-            <a:endParaRPr lang="en-US" sz="2000" dirty="0"/>
-          </a:p>
-          <a:p>
-            <a:pPr indent="0" marL="0">
-              <a:buNone/>
-            </a:pPr>
-            <a:r>
-              <a:rPr lang="en-US" sz="2000" dirty="0">
-                <a:solidFill>
-                  <a:srgbClr val="4A6358"/>
-                </a:solidFill>
-                <a:latin typeface="Calibri" pitchFamily="34" charset="0"/>
-                <a:ea typeface="Calibri" pitchFamily="34" charset="-122"/>
-                <a:cs typeface="Calibri" pitchFamily="34" charset="-120"/>
-              </a:rPr>
-              <a:t>Put the phone away at the door.</a:t>
-            </a:r>
-            <a:endParaRPr lang="en-US" sz="2000" dirty="0"/>
-          </a:p>
-        </p:txBody>
-      </p:sp>
-      <p:sp>
-        <p:nvSpPr>
-          <p:cNvPr id="6" name="Text 4"/>
-          <p:cNvSpPr txBox="1"/>
-          <p:nvPr/>
-        </p:nvSpPr>
-        <p:spPr>
-          <a:xfrm>
-            <a:off x="777240" y="3703320"/>
-            <a:ext cx="4937760" cy="1097280"/>
-          </a:xfrm>
-          <a:prstGeom prst="rect">
-            <a:avLst/>
-          </a:prstGeom>
-          <a:noFill/>
-          <a:ln/>
-        </p:spPr>
-        <p:txBody>
-          <a:bodyPr wrap="square" lIns="0" tIns="0" rIns="0" bIns="0" rtlCol="0" anchor="ctr"/>
-          <a:lstStyle/>
-          <a:p>
-            <a:pPr indent="0" marL="0">
-              <a:buNone/>
-            </a:pPr>
-            <a:r>
-              <a:rPr lang="en-US" sz="1800" i="1" dirty="0">
-                <a:solidFill>
-                  <a:srgbClr val="FF7A59"/>
-                </a:solidFill>
-                <a:latin typeface="Calibri" pitchFamily="34" charset="0"/>
-                <a:ea typeface="Calibri" pitchFamily="34" charset="-122"/>
-                <a:cs typeface="Calibri" pitchFamily="34" charset="-120"/>
-              </a:rPr>
-              <a:t>Little reason to look around on the way.</a:t>
-            </a:r>
-            <a:endParaRPr lang="en-US" sz="1800" dirty="0"/>
-          </a:p>
-        </p:txBody>
-      </p:sp>
-      <p:sp>
-        <p:nvSpPr>
-          <p:cNvPr id="7" name="Shape 5"/>
+              <a:t>Get there as fast as possible</a:t>
+            </a:r>
+            <a:endParaRPr lang="en-US" sz="2200" dirty="0"/>
+          </a:p>
+        </p:txBody>
+      </p:sp>
+      <p:sp>
+        <p:nvSpPr>
+          <p:cNvPr id="7" name="Text 5"/>
+          <p:cNvSpPr txBox="1"/>
+          <p:nvPr/>
+        </p:nvSpPr>
+        <p:spPr>
+          <a:xfrm>
+            <a:off x="5852160" y="1737360"/>
+            <a:ext cx="457200" cy="502920"/>
+          </a:xfrm>
+          <a:prstGeom prst="rect">
+            <a:avLst/>
+          </a:prstGeom>
+          <a:noFill/>
+          <a:ln/>
+        </p:spPr>
+        <p:txBody>
+          <a:bodyPr wrap="square" lIns="0" tIns="0" rIns="0" bIns="0" rtlCol="0" anchor="ctr"/>
+          <a:lstStyle/>
+          <a:p>
+            <a:pPr algn="ctr" indent="0" marL="0">
+              <a:buNone/>
+            </a:pPr>
+            <a:r>
+              <a:rPr lang="en-US" sz="2400" b="1" dirty="0">
+                <a:solidFill>
+                  <a:srgbClr val="2E9D4F"/>
+                </a:solidFill>
+                <a:latin typeface="Calibri" pitchFamily="34" charset="0"/>
+                <a:ea typeface="Calibri" pitchFamily="34" charset="-122"/>
+                <a:cs typeface="Calibri" pitchFamily="34" charset="-120"/>
+              </a:rPr>
+              <a:t>→</a:t>
+            </a:r>
+            <a:endParaRPr lang="en-US" sz="2400" dirty="0"/>
+          </a:p>
+        </p:txBody>
+      </p:sp>
+      <p:sp>
+        <p:nvSpPr>
+          <p:cNvPr id="8" name="Shape 6"/>
           <p:cNvSpPr/>
           <p:nvPr/>
         </p:nvSpPr>
         <p:spPr>
           <a:xfrm>
-            <a:off x="6263640" y="1143000"/>
-            <a:ext cx="5440680" cy="4892040"/>
+            <a:off x="6355080" y="1280160"/>
+            <a:ext cx="5349240" cy="1508760"/>
           </a:xfrm>
           <a:prstGeom prst="roundRect">
             <a:avLst>
-              <a:gd name="adj" fmla="val 2617"/>
+              <a:gd name="adj" fmla="val 7273"/>
             </a:avLst>
           </a:prstGeom>
           <a:solidFill>
@@ -2108,9 +2166,9 @@
           </a:solidFill>
           <a:ln/>
           <a:effectLst>
-            <a:outerShdw sx="100000" sy="100000" kx="0" ky="0" algn="bl" rotWithShape="0" blurRad="127000" dist="38100" dir="5400000">
+            <a:outerShdw sx="100000" sy="100000" kx="0" ky="0" algn="bl" rotWithShape="0" blurRad="101600" dist="25400" dir="5400000">
               <a:srgbClr val="0B1F3A">
-                <a:alpha val="8000"/>
+                <a:alpha val="10000"/>
               </a:srgbClr>
             </a:outerShdw>
           </a:effectLst>
@@ -2118,14 +2176,14 @@
       </p:sp>
       <p:sp>
         <p:nvSpPr>
-          <p:cNvPr id="8" name="Text 6"/>
-          <p:cNvSpPr txBox="1"/>
-          <p:nvPr/>
-        </p:nvSpPr>
-        <p:spPr>
-          <a:xfrm>
-            <a:off x="6537960" y="1371600"/>
-            <a:ext cx="4937760" cy="365760"/>
+          <p:cNvPr id="9" name="Text 7"/>
+          <p:cNvSpPr txBox="1"/>
+          <p:nvPr/>
+        </p:nvSpPr>
+        <p:spPr>
+          <a:xfrm>
+            <a:off x="6583680" y="1600200"/>
+            <a:ext cx="4892040" cy="868680"/>
           </a:xfrm>
           <a:prstGeom prst="rect">
             <a:avLst/>
@@ -2141,46 +2199,182 @@
               <a:buNone/>
             </a:pPr>
             <a:r>
-              <a:rPr lang="en-US" sz="2000" b="1" dirty="0">
-                <a:solidFill>
-                  <a:srgbClr val="1F6B45"/>
-                </a:solidFill>
-                <a:latin typeface="Calibri" pitchFamily="34" charset="0"/>
-                <a:ea typeface="Calibri" pitchFamily="34" charset="-122"/>
-                <a:cs typeface="Calibri" pitchFamily="34" charset="-120"/>
-              </a:rPr>
-              <a:t>What walking could be</a:t>
-            </a:r>
-            <a:endParaRPr lang="en-US" sz="2000" dirty="0"/>
-          </a:p>
-        </p:txBody>
-      </p:sp>
-      <p:sp>
-        <p:nvSpPr>
-          <p:cNvPr id="9" name="Text 7"/>
-          <p:cNvSpPr txBox="1"/>
-          <p:nvPr/>
-        </p:nvSpPr>
-        <p:spPr>
-          <a:xfrm>
-            <a:off x="6537960" y="1920240"/>
-            <a:ext cx="4892040" cy="3474720"/>
-          </a:xfrm>
-          <a:prstGeom prst="rect">
-            <a:avLst/>
-          </a:prstGeom>
-          <a:noFill/>
-          <a:ln/>
-        </p:spPr>
-        <p:txBody>
-          <a:bodyPr wrap="square" lIns="0" tIns="0" rIns="0" bIns="0" rtlCol="0" anchor="t"/>
+              <a:rPr lang="en-US" sz="2200" b="1" dirty="0">
+                <a:solidFill>
+                  <a:srgbClr val="163528"/>
+                </a:solidFill>
+                <a:latin typeface="Calibri" pitchFamily="34" charset="0"/>
+                <a:ea typeface="Calibri" pitchFamily="34" charset="-122"/>
+                <a:cs typeface="Calibri" pitchFamily="34" charset="-120"/>
+              </a:rPr>
+              <a:t>Notice the route, not only the pin</a:t>
+            </a:r>
+            <a:endParaRPr lang="en-US" sz="2200" dirty="0"/>
+          </a:p>
+        </p:txBody>
+      </p:sp>
+      <p:sp>
+        <p:nvSpPr>
+          <p:cNvPr id="10" name="Shape 8"/>
+          <p:cNvSpPr/>
+          <p:nvPr/>
+        </p:nvSpPr>
+        <p:spPr>
+          <a:xfrm>
+            <a:off x="502920" y="2971800"/>
+            <a:ext cx="5349240" cy="1508760"/>
+          </a:xfrm>
+          <a:prstGeom prst="roundRect">
+            <a:avLst>
+              <a:gd name="adj" fmla="val 7273"/>
+            </a:avLst>
+          </a:prstGeom>
+          <a:solidFill>
+            <a:srgbClr val="FFFFFF"/>
+          </a:solidFill>
+          <a:ln/>
+          <a:effectLst>
+            <a:outerShdw sx="100000" sy="100000" kx="0" ky="0" algn="bl" rotWithShape="0" blurRad="101600" dist="25400" dir="5400000">
+              <a:srgbClr val="0B1F3A">
+                <a:alpha val="10000"/>
+              </a:srgbClr>
+            </a:outerShdw>
+          </a:effectLst>
+        </p:spPr>
+      </p:sp>
+      <p:sp>
+        <p:nvSpPr>
+          <p:cNvPr id="11" name="Text 9"/>
+          <p:cNvSpPr txBox="1"/>
+          <p:nvPr/>
+        </p:nvSpPr>
+        <p:spPr>
+          <a:xfrm>
+            <a:off x="731520" y="3291840"/>
+            <a:ext cx="4892040" cy="868680"/>
+          </a:xfrm>
+          <a:prstGeom prst="rect">
+            <a:avLst/>
+          </a:prstGeom>
+          <a:noFill/>
+          <a:ln/>
+        </p:spPr>
+        <p:txBody>
+          <a:bodyPr wrap="square" lIns="0" tIns="0" rIns="0" bIns="0" rtlCol="0" anchor="ctr"/>
           <a:lstStyle/>
           <a:p>
             <a:pPr indent="0" marL="0">
               <a:buNone/>
             </a:pPr>
             <a:r>
-              <a:rPr lang="en-US" sz="2000" dirty="0">
+              <a:rPr lang="en-US" sz="2200" b="1" dirty="0">
+                <a:solidFill>
+                  <a:srgbClr val="0B1F3A"/>
+                </a:solidFill>
+                <a:latin typeface="Calibri" pitchFamily="34" charset="0"/>
+                <a:ea typeface="Calibri" pitchFamily="34" charset="-122"/>
+                <a:cs typeface="Calibri" pitchFamily="34" charset="-120"/>
+              </a:rPr>
+              <a:t>Stay on the shortest path</a:t>
+            </a:r>
+            <a:endParaRPr lang="en-US" sz="2200" dirty="0"/>
+          </a:p>
+        </p:txBody>
+      </p:sp>
+      <p:sp>
+        <p:nvSpPr>
+          <p:cNvPr id="12" name="Text 10"/>
+          <p:cNvSpPr txBox="1"/>
+          <p:nvPr/>
+        </p:nvSpPr>
+        <p:spPr>
+          <a:xfrm>
+            <a:off x="5852160" y="3429000"/>
+            <a:ext cx="457200" cy="502920"/>
+          </a:xfrm>
+          <a:prstGeom prst="rect">
+            <a:avLst/>
+          </a:prstGeom>
+          <a:noFill/>
+          <a:ln/>
+        </p:spPr>
+        <p:txBody>
+          <a:bodyPr wrap="square" lIns="0" tIns="0" rIns="0" bIns="0" rtlCol="0" anchor="ctr"/>
+          <a:lstStyle/>
+          <a:p>
+            <a:pPr algn="ctr" indent="0" marL="0">
+              <a:buNone/>
+            </a:pPr>
+            <a:r>
+              <a:rPr lang="en-US" sz="2400" b="1" dirty="0">
+                <a:solidFill>
+                  <a:srgbClr val="2E9D4F"/>
+                </a:solidFill>
+                <a:latin typeface="Calibri" pitchFamily="34" charset="0"/>
+                <a:ea typeface="Calibri" pitchFamily="34" charset="-122"/>
+                <a:cs typeface="Calibri" pitchFamily="34" charset="-120"/>
+              </a:rPr>
+              <a:t>→</a:t>
+            </a:r>
+            <a:endParaRPr lang="en-US" sz="2400" dirty="0"/>
+          </a:p>
+        </p:txBody>
+      </p:sp>
+      <p:sp>
+        <p:nvSpPr>
+          <p:cNvPr id="13" name="Shape 11"/>
+          <p:cNvSpPr/>
+          <p:nvPr/>
+        </p:nvSpPr>
+        <p:spPr>
+          <a:xfrm>
+            <a:off x="6355080" y="2971800"/>
+            <a:ext cx="5349240" cy="1508760"/>
+          </a:xfrm>
+          <a:prstGeom prst="roundRect">
+            <a:avLst>
+              <a:gd name="adj" fmla="val 7273"/>
+            </a:avLst>
+          </a:prstGeom>
+          <a:solidFill>
+            <a:srgbClr val="E7F3E4"/>
+          </a:solidFill>
+          <a:ln/>
+          <a:effectLst>
+            <a:outerShdw sx="100000" sy="100000" kx="0" ky="0" algn="bl" rotWithShape="0" blurRad="101600" dist="25400" dir="5400000">
+              <a:srgbClr val="0B1F3A">
+                <a:alpha val="10000"/>
+              </a:srgbClr>
+            </a:outerShdw>
+          </a:effectLst>
+        </p:spPr>
+      </p:sp>
+      <p:sp>
+        <p:nvSpPr>
+          <p:cNvPr id="14" name="Text 12"/>
+          <p:cNvSpPr txBox="1"/>
+          <p:nvPr/>
+        </p:nvSpPr>
+        <p:spPr>
+          <a:xfrm>
+            <a:off x="6583680" y="3291840"/>
+            <a:ext cx="4892040" cy="868680"/>
+          </a:xfrm>
+          <a:prstGeom prst="rect">
+            <a:avLst/>
+          </a:prstGeom>
+          <a:noFill/>
+          <a:ln/>
+        </p:spPr>
+        <p:txBody>
+          <a:bodyPr wrap="square" lIns="0" tIns="0" rIns="0" bIns="0" rtlCol="0" anchor="ctr"/>
+          <a:lstStyle/>
+          <a:p>
+            <a:pPr indent="0" marL="0">
+              <a:buNone/>
+            </a:pPr>
+            <a:r>
+              <a:rPr lang="en-US" sz="2200" b="1" dirty="0">
                 <a:solidFill>
                   <a:srgbClr val="163528"/>
                 </a:solidFill>
@@ -2188,22 +2382,174 @@
                 <a:ea typeface="Calibri" pitchFamily="34" charset="-122"/>
                 <a:cs typeface="Calibri" pitchFamily="34" charset="-120"/>
               </a:rPr>
-              <a:t>Campus and neighborhoods are full of named places with real stories.</a:t>
-            </a:r>
-            <a:endParaRPr lang="en-US" sz="2000" dirty="0"/>
-          </a:p>
+              <a:t>Named places with real stories</a:t>
+            </a:r>
+            <a:endParaRPr lang="en-US" sz="2200" dirty="0"/>
+          </a:p>
+        </p:txBody>
+      </p:sp>
+      <p:sp>
+        <p:nvSpPr>
+          <p:cNvPr id="15" name="Shape 13"/>
+          <p:cNvSpPr/>
+          <p:nvPr/>
+        </p:nvSpPr>
+        <p:spPr>
+          <a:xfrm>
+            <a:off x="502920" y="4663440"/>
+            <a:ext cx="5349240" cy="1508760"/>
+          </a:xfrm>
+          <a:prstGeom prst="roundRect">
+            <a:avLst>
+              <a:gd name="adj" fmla="val 7273"/>
+            </a:avLst>
+          </a:prstGeom>
+          <a:solidFill>
+            <a:srgbClr val="FFFFFF"/>
+          </a:solidFill>
+          <a:ln/>
+          <a:effectLst>
+            <a:outerShdw sx="100000" sy="100000" kx="0" ky="0" algn="bl" rotWithShape="0" blurRad="101600" dist="25400" dir="5400000">
+              <a:srgbClr val="0B1F3A">
+                <a:alpha val="10000"/>
+              </a:srgbClr>
+            </a:outerShdw>
+          </a:effectLst>
+        </p:spPr>
+      </p:sp>
+      <p:sp>
+        <p:nvSpPr>
+          <p:cNvPr id="16" name="Text 14"/>
+          <p:cNvSpPr txBox="1"/>
+          <p:nvPr/>
+        </p:nvSpPr>
+        <p:spPr>
+          <a:xfrm>
+            <a:off x="731520" y="4983480"/>
+            <a:ext cx="4892040" cy="868680"/>
+          </a:xfrm>
+          <a:prstGeom prst="rect">
+            <a:avLst/>
+          </a:prstGeom>
+          <a:noFill/>
+          <a:ln/>
+        </p:spPr>
+        <p:txBody>
+          <a:bodyPr wrap="square" lIns="0" tIns="0" rIns="0" bIns="0" rtlCol="0" anchor="ctr"/>
+          <a:lstStyle/>
           <a:p>
             <a:pPr indent="0" marL="0">
               <a:buNone/>
             </a:pPr>
-            <a:endParaRPr lang="en-US" sz="2000" dirty="0"/>
-          </a:p>
+            <a:r>
+              <a:rPr lang="en-US" sz="2200" b="1" dirty="0">
+                <a:solidFill>
+                  <a:srgbClr val="0B1F3A"/>
+                </a:solidFill>
+                <a:latin typeface="Calibri" pitchFamily="34" charset="0"/>
+                <a:ea typeface="Calibri" pitchFamily="34" charset="-122"/>
+                <a:cs typeface="Calibri" pitchFamily="34" charset="-120"/>
+              </a:rPr>
+              <a:t>Put the phone away at the door</a:t>
+            </a:r>
+            <a:endParaRPr lang="en-US" sz="2200" dirty="0"/>
+          </a:p>
+        </p:txBody>
+      </p:sp>
+      <p:sp>
+        <p:nvSpPr>
+          <p:cNvPr id="17" name="Text 15"/>
+          <p:cNvSpPr txBox="1"/>
+          <p:nvPr/>
+        </p:nvSpPr>
+        <p:spPr>
+          <a:xfrm>
+            <a:off x="5852160" y="5120640"/>
+            <a:ext cx="457200" cy="502920"/>
+          </a:xfrm>
+          <a:prstGeom prst="rect">
+            <a:avLst/>
+          </a:prstGeom>
+          <a:noFill/>
+          <a:ln/>
+        </p:spPr>
+        <p:txBody>
+          <a:bodyPr wrap="square" lIns="0" tIns="0" rIns="0" bIns="0" rtlCol="0" anchor="ctr"/>
+          <a:lstStyle/>
+          <a:p>
+            <a:pPr algn="ctr" indent="0" marL="0">
+              <a:buNone/>
+            </a:pPr>
+            <a:r>
+              <a:rPr lang="en-US" sz="2400" b="1" dirty="0">
+                <a:solidFill>
+                  <a:srgbClr val="2E9D4F"/>
+                </a:solidFill>
+                <a:latin typeface="Calibri" pitchFamily="34" charset="0"/>
+                <a:ea typeface="Calibri" pitchFamily="34" charset="-122"/>
+                <a:cs typeface="Calibri" pitchFamily="34" charset="-120"/>
+              </a:rPr>
+              <a:t>→</a:t>
+            </a:r>
+            <a:endParaRPr lang="en-US" sz="2400" dirty="0"/>
+          </a:p>
+        </p:txBody>
+      </p:sp>
+      <p:sp>
+        <p:nvSpPr>
+          <p:cNvPr id="18" name="Shape 16"/>
+          <p:cNvSpPr/>
+          <p:nvPr/>
+        </p:nvSpPr>
+        <p:spPr>
+          <a:xfrm>
+            <a:off x="6355080" y="4663440"/>
+            <a:ext cx="5349240" cy="1508760"/>
+          </a:xfrm>
+          <a:prstGeom prst="roundRect">
+            <a:avLst>
+              <a:gd name="adj" fmla="val 7273"/>
+            </a:avLst>
+          </a:prstGeom>
+          <a:solidFill>
+            <a:srgbClr val="E7F3E4"/>
+          </a:solidFill>
+          <a:ln/>
+          <a:effectLst>
+            <a:outerShdw sx="100000" sy="100000" kx="0" ky="0" algn="bl" rotWithShape="0" blurRad="101600" dist="25400" dir="5400000">
+              <a:srgbClr val="0B1F3A">
+                <a:alpha val="10000"/>
+              </a:srgbClr>
+            </a:outerShdw>
+          </a:effectLst>
+        </p:spPr>
+      </p:sp>
+      <p:sp>
+        <p:nvSpPr>
+          <p:cNvPr id="19" name="Text 17"/>
+          <p:cNvSpPr txBox="1"/>
+          <p:nvPr/>
+        </p:nvSpPr>
+        <p:spPr>
+          <a:xfrm>
+            <a:off x="6583680" y="4983480"/>
+            <a:ext cx="4892040" cy="868680"/>
+          </a:xfrm>
+          <a:prstGeom prst="rect">
+            <a:avLst/>
+          </a:prstGeom>
+          <a:noFill/>
+          <a:ln/>
+        </p:spPr>
+        <p:txBody>
+          <a:bodyPr wrap="square" lIns="0" tIns="0" rIns="0" bIns="0" rtlCol="0" anchor="ctr"/>
+          <a:lstStyle/>
           <a:p>
             <a:pPr indent="0" marL="0">
               <a:buNone/>
             </a:pPr>
             <a:r>
-              <a:rPr lang="en-US" sz="2000" dirty="0">
+              <a:rPr lang="en-US" sz="2200" b="1" dirty="0">
                 <a:solidFill>
                   <a:srgbClr val="163528"/>
                 </a:solidFill>
@@ -2211,9 +2557,9 @@
                 <a:ea typeface="Calibri" pitchFamily="34" charset="-122"/>
                 <a:cs typeface="Calibri" pitchFamily="34" charset="-120"/>
               </a:rPr>
-              <a:t>Walking is already happening. Discovery and progress are not.</a:t>
-            </a:r>
-            <a:endParaRPr lang="en-US" sz="2000" dirty="0"/>
+              <a:t>Walking earns progress and company</a:t>
+            </a:r>
+            <a:endParaRPr lang="en-US" sz="2200" dirty="0"/>
           </a:p>
         </p:txBody>
       </p:sp>
@@ -2252,8 +2598,8 @@
         </p:nvSpPr>
         <p:spPr>
           <a:xfrm>
-            <a:off x="502920" y="292608"/>
-            <a:ext cx="11155680" cy="640080"/>
+            <a:off x="502920" y="256032"/>
+            <a:ext cx="11155680" cy="566928"/>
           </a:xfrm>
           <a:prstGeom prst="rect">
             <a:avLst/>
@@ -2269,7 +2615,7 @@
               <a:buNone/>
             </a:pPr>
             <a:r>
-              <a:rPr lang="en-US" sz="3600" b="1" dirty="0">
+              <a:rPr lang="en-US" sz="3200" b="1" dirty="0">
                 <a:solidFill>
                   <a:srgbClr val="0B1F3A"/>
                 </a:solidFill>
@@ -2279,7 +2625,7 @@
               </a:rPr>
               <a:t>Explore  →  Walk  →  Discover  →  Collect</a:t>
             </a:r>
-            <a:endParaRPr lang="en-US" sz="3600" dirty="0"/>
+            <a:endParaRPr lang="en-US" sz="3200" dirty="0"/>
           </a:p>
         </p:txBody>
       </p:sp>
@@ -2291,12 +2637,12 @@
         </p:nvSpPr>
         <p:spPr>
           <a:xfrm>
-            <a:off x="502920" y="1097280"/>
-            <a:ext cx="2743200" cy="2606040"/>
+            <a:off x="502920" y="960120"/>
+            <a:ext cx="2743200" cy="2468880"/>
           </a:xfrm>
           <a:prstGeom prst="roundRect">
             <a:avLst>
-              <a:gd name="adj" fmla="val 4912"/>
+              <a:gd name="adj" fmla="val 4444"/>
             </a:avLst>
           </a:prstGeom>
           <a:solidFill>
@@ -2304,9 +2650,9 @@
           </a:solidFill>
           <a:ln/>
           <a:effectLst>
-            <a:outerShdw sx="100000" sy="100000" kx="0" ky="0" algn="bl" rotWithShape="0" blurRad="127000" dist="38100" dir="5400000">
+            <a:outerShdw sx="100000" sy="100000" kx="0" ky="0" algn="bl" rotWithShape="0" blurRad="101600" dist="25400" dir="5400000">
               <a:srgbClr val="0B1F3A">
-                <a:alpha val="8000"/>
+                <a:alpha val="10000"/>
               </a:srgbClr>
             </a:outerShdw>
           </a:effectLst>
@@ -2320,8 +2666,8 @@
         </p:nvSpPr>
         <p:spPr>
           <a:xfrm>
-            <a:off x="1508760" y="1280160"/>
-            <a:ext cx="640080" cy="640080"/>
+            <a:off x="1527048" y="1115568"/>
+            <a:ext cx="658368" cy="658368"/>
           </a:xfrm>
           <a:prstGeom prst="ellipse">
             <a:avLst/>
@@ -2340,8 +2686,8 @@
         </p:nvSpPr>
         <p:spPr>
           <a:xfrm>
-            <a:off x="1508760" y="1353312"/>
-            <a:ext cx="640080" cy="502920"/>
+            <a:off x="1527048" y="1188720"/>
+            <a:ext cx="658368" cy="512064"/>
           </a:xfrm>
           <a:prstGeom prst="rect">
             <a:avLst/>
@@ -2379,7 +2725,7 @@
         </p:nvSpPr>
         <p:spPr>
           <a:xfrm>
-            <a:off x="640080" y="2011680"/>
+            <a:off x="640080" y="1874520"/>
             <a:ext cx="2468880" cy="365760"/>
           </a:xfrm>
           <a:prstGeom prst="rect">
@@ -2396,7 +2742,7 @@
               <a:buNone/>
             </a:pPr>
             <a:r>
-              <a:rPr lang="en-US" sz="2000" b="1" dirty="0">
+              <a:rPr lang="en-US" sz="2200" b="1" dirty="0">
                 <a:solidFill>
                   <a:srgbClr val="0B1F3A"/>
                 </a:solidFill>
@@ -2406,7 +2752,7 @@
               </a:rPr>
               <a:t>Explore</a:t>
             </a:r>
-            <a:endParaRPr lang="en-US" sz="2000" dirty="0"/>
+            <a:endParaRPr lang="en-US" sz="2200" dirty="0"/>
           </a:p>
         </p:txBody>
       </p:sp>
@@ -2418,8 +2764,8 @@
         </p:nvSpPr>
         <p:spPr>
           <a:xfrm>
-            <a:off x="667512" y="2423160"/>
-            <a:ext cx="2414016" cy="1097280"/>
+            <a:off x="667512" y="2286000"/>
+            <a:ext cx="2414016" cy="960120"/>
           </a:xfrm>
           <a:prstGeom prst="rect">
             <a:avLst/>
@@ -2457,12 +2803,12 @@
         </p:nvSpPr>
         <p:spPr>
           <a:xfrm>
-            <a:off x="3429000" y="1097280"/>
-            <a:ext cx="2743200" cy="2606040"/>
+            <a:off x="3429000" y="960120"/>
+            <a:ext cx="2743200" cy="2468880"/>
           </a:xfrm>
           <a:prstGeom prst="roundRect">
             <a:avLst>
-              <a:gd name="adj" fmla="val 4912"/>
+              <a:gd name="adj" fmla="val 4444"/>
             </a:avLst>
           </a:prstGeom>
           <a:solidFill>
@@ -2470,9 +2816,9 @@
           </a:solidFill>
           <a:ln/>
           <a:effectLst>
-            <a:outerShdw sx="100000" sy="100000" kx="0" ky="0" algn="bl" rotWithShape="0" blurRad="127000" dist="38100" dir="5400000">
+            <a:outerShdw sx="100000" sy="100000" kx="0" ky="0" algn="bl" rotWithShape="0" blurRad="101600" dist="25400" dir="5400000">
               <a:srgbClr val="0B1F3A">
-                <a:alpha val="8000"/>
+                <a:alpha val="10000"/>
               </a:srgbClr>
             </a:outerShdw>
           </a:effectLst>
@@ -2486,8 +2832,8 @@
         </p:nvSpPr>
         <p:spPr>
           <a:xfrm>
-            <a:off x="4434840" y="1280160"/>
-            <a:ext cx="640080" cy="640080"/>
+            <a:off x="4453128" y="1115568"/>
+            <a:ext cx="658368" cy="658368"/>
           </a:xfrm>
           <a:prstGeom prst="ellipse">
             <a:avLst/>
@@ -2506,8 +2852,8 @@
         </p:nvSpPr>
         <p:spPr>
           <a:xfrm>
-            <a:off x="4434840" y="1353312"/>
-            <a:ext cx="640080" cy="502920"/>
+            <a:off x="4453128" y="1188720"/>
+            <a:ext cx="658368" cy="512064"/>
           </a:xfrm>
           <a:prstGeom prst="rect">
             <a:avLst/>
@@ -2545,7 +2891,7 @@
         </p:nvSpPr>
         <p:spPr>
           <a:xfrm>
-            <a:off x="3566160" y="2011680"/>
+            <a:off x="3566160" y="1874520"/>
             <a:ext cx="2468880" cy="365760"/>
           </a:xfrm>
           <a:prstGeom prst="rect">
@@ -2562,7 +2908,7 @@
               <a:buNone/>
             </a:pPr>
             <a:r>
-              <a:rPr lang="en-US" sz="2000" b="1" dirty="0">
+              <a:rPr lang="en-US" sz="2200" b="1" dirty="0">
                 <a:solidFill>
                   <a:srgbClr val="0B1F3A"/>
                 </a:solidFill>
@@ -2572,7 +2918,7 @@
               </a:rPr>
               <a:t>Walk</a:t>
             </a:r>
-            <a:endParaRPr lang="en-US" sz="2000" dirty="0"/>
+            <a:endParaRPr lang="en-US" sz="2200" dirty="0"/>
           </a:p>
         </p:txBody>
       </p:sp>
@@ -2584,8 +2930,8 @@
         </p:nvSpPr>
         <p:spPr>
           <a:xfrm>
-            <a:off x="3593592" y="2423160"/>
-            <a:ext cx="2414016" cy="1097280"/>
+            <a:off x="3593592" y="2286000"/>
+            <a:ext cx="2414016" cy="960120"/>
           </a:xfrm>
           <a:prstGeom prst="rect">
             <a:avLst/>
@@ -2609,7 +2955,7 @@
                 <a:ea typeface="Calibri" pitchFamily="34" charset="-122"/>
                 <a:cs typeface="Calibri" pitchFamily="34" charset="-120"/>
               </a:rPr>
-              <a:t>Fern guides the route. The trail blooms as you move — or in labeled demo walk.</a:t>
+              <a:t>Fern guides the route. The trail blooms as you move.</a:t>
             </a:r>
             <a:endParaRPr lang="en-US" sz="1400" dirty="0"/>
           </a:p>
@@ -2623,12 +2969,12 @@
         </p:nvSpPr>
         <p:spPr>
           <a:xfrm>
-            <a:off x="6355080" y="1097280"/>
-            <a:ext cx="2743200" cy="2606040"/>
+            <a:off x="6355080" y="960120"/>
+            <a:ext cx="2743200" cy="2468880"/>
           </a:xfrm>
           <a:prstGeom prst="roundRect">
             <a:avLst>
-              <a:gd name="adj" fmla="val 4912"/>
+              <a:gd name="adj" fmla="val 4444"/>
             </a:avLst>
           </a:prstGeom>
           <a:solidFill>
@@ -2636,9 +2982,9 @@
           </a:solidFill>
           <a:ln/>
           <a:effectLst>
-            <a:outerShdw sx="100000" sy="100000" kx="0" ky="0" algn="bl" rotWithShape="0" blurRad="127000" dist="38100" dir="5400000">
+            <a:outerShdw sx="100000" sy="100000" kx="0" ky="0" algn="bl" rotWithShape="0" blurRad="101600" dist="25400" dir="5400000">
               <a:srgbClr val="0B1F3A">
-                <a:alpha val="8000"/>
+                <a:alpha val="10000"/>
               </a:srgbClr>
             </a:outerShdw>
           </a:effectLst>
@@ -2652,8 +2998,8 @@
         </p:nvSpPr>
         <p:spPr>
           <a:xfrm>
-            <a:off x="7360920" y="1280160"/>
-            <a:ext cx="640080" cy="640080"/>
+            <a:off x="7379208" y="1115568"/>
+            <a:ext cx="658368" cy="658368"/>
           </a:xfrm>
           <a:prstGeom prst="ellipse">
             <a:avLst/>
@@ -2672,8 +3018,8 @@
         </p:nvSpPr>
         <p:spPr>
           <a:xfrm>
-            <a:off x="7360920" y="1353312"/>
-            <a:ext cx="640080" cy="502920"/>
+            <a:off x="7379208" y="1188720"/>
+            <a:ext cx="658368" cy="512064"/>
           </a:xfrm>
           <a:prstGeom prst="rect">
             <a:avLst/>
@@ -2711,7 +3057,7 @@
         </p:nvSpPr>
         <p:spPr>
           <a:xfrm>
-            <a:off x="6492240" y="2011680"/>
+            <a:off x="6492240" y="1874520"/>
             <a:ext cx="2468880" cy="365760"/>
           </a:xfrm>
           <a:prstGeom prst="rect">
@@ -2728,7 +3074,7 @@
               <a:buNone/>
             </a:pPr>
             <a:r>
-              <a:rPr lang="en-US" sz="2000" b="1" dirty="0">
+              <a:rPr lang="en-US" sz="2200" b="1" dirty="0">
                 <a:solidFill>
                   <a:srgbClr val="0B1F3A"/>
                 </a:solidFill>
@@ -2738,7 +3084,7 @@
               </a:rPr>
               <a:t>Discover</a:t>
             </a:r>
-            <a:endParaRPr lang="en-US" sz="2000" dirty="0"/>
+            <a:endParaRPr lang="en-US" sz="2200" dirty="0"/>
           </a:p>
         </p:txBody>
       </p:sp>
@@ -2750,8 +3096,8 @@
         </p:nvSpPr>
         <p:spPr>
           <a:xfrm>
-            <a:off x="6519672" y="2423160"/>
-            <a:ext cx="2414016" cy="1097280"/>
+            <a:off x="6519672" y="2286000"/>
+            <a:ext cx="2414016" cy="960120"/>
           </a:xfrm>
           <a:prstGeom prst="rect">
             <a:avLst/>
@@ -2775,7 +3121,7 @@
                 <a:ea typeface="Calibri" pitchFamily="34" charset="-122"/>
                 <a:cs typeface="Calibri" pitchFamily="34" charset="-120"/>
               </a:rPr>
-              <a:t>Moss tells the grounded story. You arrive at a real landmark.</a:t>
+              <a:t>Moss tells the grounded story at a real landmark.</a:t>
             </a:r>
             <a:endParaRPr lang="en-US" sz="1400" dirty="0"/>
           </a:p>
@@ -2789,12 +3135,12 @@
         </p:nvSpPr>
         <p:spPr>
           <a:xfrm>
-            <a:off x="9281160" y="1097280"/>
-            <a:ext cx="2743200" cy="2606040"/>
+            <a:off x="9281160" y="960120"/>
+            <a:ext cx="2743200" cy="2468880"/>
           </a:xfrm>
           <a:prstGeom prst="roundRect">
             <a:avLst>
-              <a:gd name="adj" fmla="val 4912"/>
+              <a:gd name="adj" fmla="val 4444"/>
             </a:avLst>
           </a:prstGeom>
           <a:solidFill>
@@ -2802,9 +3148,9 @@
           </a:solidFill>
           <a:ln/>
           <a:effectLst>
-            <a:outerShdw sx="100000" sy="100000" kx="0" ky="0" algn="bl" rotWithShape="0" blurRad="127000" dist="38100" dir="5400000">
+            <a:outerShdw sx="100000" sy="100000" kx="0" ky="0" algn="bl" rotWithShape="0" blurRad="101600" dist="25400" dir="5400000">
               <a:srgbClr val="0B1F3A">
-                <a:alpha val="8000"/>
+                <a:alpha val="10000"/>
               </a:srgbClr>
             </a:outerShdw>
           </a:effectLst>
@@ -2818,8 +3164,8 @@
         </p:nvSpPr>
         <p:spPr>
           <a:xfrm>
-            <a:off x="10287000" y="1280160"/>
-            <a:ext cx="640080" cy="640080"/>
+            <a:off x="10305288" y="1115568"/>
+            <a:ext cx="658368" cy="658368"/>
           </a:xfrm>
           <a:prstGeom prst="ellipse">
             <a:avLst/>
@@ -2838,8 +3184,8 @@
         </p:nvSpPr>
         <p:spPr>
           <a:xfrm>
-            <a:off x="10287000" y="1353312"/>
-            <a:ext cx="640080" cy="502920"/>
+            <a:off x="10305288" y="1188720"/>
+            <a:ext cx="658368" cy="512064"/>
           </a:xfrm>
           <a:prstGeom prst="rect">
             <a:avLst/>
@@ -2877,7 +3223,7 @@
         </p:nvSpPr>
         <p:spPr>
           <a:xfrm>
-            <a:off x="9418320" y="2011680"/>
+            <a:off x="9418320" y="1874520"/>
             <a:ext cx="2468880" cy="365760"/>
           </a:xfrm>
           <a:prstGeom prst="rect">
@@ -2894,7 +3240,7 @@
               <a:buNone/>
             </a:pPr>
             <a:r>
-              <a:rPr lang="en-US" sz="2000" b="1" dirty="0">
+              <a:rPr lang="en-US" sz="2200" b="1" dirty="0">
                 <a:solidFill>
                   <a:srgbClr val="0B1F3A"/>
                 </a:solidFill>
@@ -2904,7 +3250,7 @@
               </a:rPr>
               <a:t>Collect</a:t>
             </a:r>
-            <a:endParaRPr lang="en-US" sz="2000" dirty="0"/>
+            <a:endParaRPr lang="en-US" sz="2200" dirty="0"/>
           </a:p>
         </p:txBody>
       </p:sp>
@@ -2916,8 +3262,8 @@
         </p:nvSpPr>
         <p:spPr>
           <a:xfrm>
-            <a:off x="9445752" y="2423160"/>
-            <a:ext cx="2414016" cy="1097280"/>
+            <a:off x="9445752" y="2286000"/>
+            <a:ext cx="2414016" cy="960120"/>
           </a:xfrm>
           <a:prstGeom prst="rect">
             <a:avLst/>
@@ -2941,7 +3287,7 @@
                 <a:ea typeface="Calibri" pitchFamily="34" charset="-122"/>
                 <a:cs typeface="Calibri" pitchFamily="34" charset="-120"/>
               </a:rPr>
-              <a:t>Capture the place. Walking fills eggs and grows your squad.</a:t>
+              <a:t>Capture the place. Walking fills eggs and grows the squad.</a:t>
             </a:r>
             <a:endParaRPr lang="en-US" sz="1400" dirty="0"/>
           </a:p>
@@ -2955,12 +3301,12 @@
         </p:nvSpPr>
         <p:spPr>
           <a:xfrm>
-            <a:off x="502920" y="3886200"/>
-            <a:ext cx="11201400" cy="2286000"/>
+            <a:off x="502920" y="3611880"/>
+            <a:ext cx="11201400" cy="2651760"/>
           </a:xfrm>
           <a:prstGeom prst="roundRect">
             <a:avLst>
-              <a:gd name="adj" fmla="val 5600"/>
+              <a:gd name="adj" fmla="val 4138"/>
             </a:avLst>
           </a:prstGeom>
           <a:solidFill>
@@ -2968,9 +3314,9 @@
           </a:solidFill>
           <a:ln/>
           <a:effectLst>
-            <a:outerShdw sx="100000" sy="100000" kx="0" ky="0" algn="bl" rotWithShape="0" blurRad="127000" dist="38100" dir="5400000">
+            <a:outerShdw sx="100000" sy="100000" kx="0" ky="0" algn="bl" rotWithShape="0" blurRad="101600" dist="25400" dir="5400000">
               <a:srgbClr val="0B1F3A">
-                <a:alpha val="8000"/>
+                <a:alpha val="10000"/>
               </a:srgbClr>
             </a:outerShdw>
           </a:effectLst>
@@ -2984,8 +3330,8 @@
         </p:nvSpPr>
         <p:spPr>
           <a:xfrm>
-            <a:off x="731520" y="4069080"/>
-            <a:ext cx="3383280" cy="365760"/>
+            <a:off x="777240" y="3840480"/>
+            <a:ext cx="3383280" cy="384048"/>
           </a:xfrm>
           <a:prstGeom prst="rect">
             <a:avLst/>
@@ -3001,7 +3347,7 @@
               <a:buNone/>
             </a:pPr>
             <a:r>
-              <a:rPr lang="en-US" sz="2200" b="1" dirty="0">
+              <a:rPr lang="en-US" sz="2400" b="1" dirty="0">
                 <a:solidFill>
                   <a:srgbClr val="E8A317"/>
                 </a:solidFill>
@@ -3011,7 +3357,7 @@
               </a:rPr>
               <a:t>Pip</a:t>
             </a:r>
-            <a:endParaRPr lang="en-US" sz="2200" dirty="0"/>
+            <a:endParaRPr lang="en-US" sz="2400" dirty="0"/>
           </a:p>
         </p:txBody>
       </p:sp>
@@ -3023,8 +3369,8 @@
         </p:nvSpPr>
         <p:spPr>
           <a:xfrm>
-            <a:off x="731520" y="4434840"/>
-            <a:ext cx="3383280" cy="274320"/>
+            <a:off x="777240" y="4251960"/>
+            <a:ext cx="3383280" cy="292608"/>
           </a:xfrm>
           <a:prstGeom prst="rect">
             <a:avLst/>
@@ -3040,7 +3386,7 @@
               <a:buNone/>
             </a:pPr>
             <a:r>
-              <a:rPr lang="en-US" sz="1400" dirty="0">
+              <a:rPr lang="en-US" sz="1600" dirty="0">
                 <a:solidFill>
                   <a:srgbClr val="6EC6FF"/>
                 </a:solidFill>
@@ -3050,7 +3396,7 @@
               </a:rPr>
               <a:t>Scout</a:t>
             </a:r>
-            <a:endParaRPr lang="en-US" sz="1400" dirty="0"/>
+            <a:endParaRPr lang="en-US" sz="1600" dirty="0"/>
           </a:p>
         </p:txBody>
       </p:sp>
@@ -3062,8 +3408,8 @@
         </p:nvSpPr>
         <p:spPr>
           <a:xfrm>
-            <a:off x="731520" y="4800600"/>
-            <a:ext cx="3383280" cy="1051560"/>
+            <a:off x="777240" y="4663440"/>
+            <a:ext cx="3383280" cy="1234440"/>
           </a:xfrm>
           <a:prstGeom prst="rect">
             <a:avLst/>
@@ -3079,15 +3425,210 @@
               <a:buNone/>
             </a:pPr>
             <a:r>
+              <a:rPr lang="en-US" sz="1800" dirty="0">
+                <a:solidFill>
+                  <a:srgbClr val="FFFFFF"/>
+                </a:solidFill>
+                <a:latin typeface="Calibri" pitchFamily="34" charset="0"/>
+                <a:ea typeface="Calibri" pitchFamily="34" charset="-122"/>
+                <a:cs typeface="Calibri" pitchFamily="34" charset="-120"/>
+              </a:rPr>
+              <a:t>Finds a nearby place and a fact from tools, not guesswork.</a:t>
+            </a:r>
+            <a:endParaRPr lang="en-US" sz="1800" dirty="0"/>
+          </a:p>
+        </p:txBody>
+      </p:sp>
+      <p:sp>
+        <p:nvSpPr>
+          <p:cNvPr id="27" name="Text 25"/>
+          <p:cNvSpPr txBox="1"/>
+          <p:nvPr/>
+        </p:nvSpPr>
+        <p:spPr>
+          <a:xfrm>
+            <a:off x="4434840" y="3840480"/>
+            <a:ext cx="3383280" cy="384048"/>
+          </a:xfrm>
+          <a:prstGeom prst="rect">
+            <a:avLst/>
+          </a:prstGeom>
+          <a:noFill/>
+          <a:ln/>
+        </p:spPr>
+        <p:txBody>
+          <a:bodyPr wrap="square" lIns="0" tIns="0" rIns="0" bIns="0" rtlCol="0" anchor="ctr"/>
+          <a:lstStyle/>
+          <a:p>
+            <a:pPr indent="0" marL="0">
+              <a:buNone/>
+            </a:pPr>
+            <a:r>
+              <a:rPr lang="en-US" sz="2400" b="1" dirty="0">
+                <a:solidFill>
+                  <a:srgbClr val="E8A317"/>
+                </a:solidFill>
+                <a:latin typeface="Calibri" pitchFamily="34" charset="0"/>
+                <a:ea typeface="Calibri" pitchFamily="34" charset="-122"/>
+                <a:cs typeface="Calibri" pitchFamily="34" charset="-120"/>
+              </a:rPr>
+              <a:t>Moss</a:t>
+            </a:r>
+            <a:endParaRPr lang="en-US" sz="2400" dirty="0"/>
+          </a:p>
+        </p:txBody>
+      </p:sp>
+      <p:sp>
+        <p:nvSpPr>
+          <p:cNvPr id="28" name="Text 26"/>
+          <p:cNvSpPr txBox="1"/>
+          <p:nvPr/>
+        </p:nvSpPr>
+        <p:spPr>
+          <a:xfrm>
+            <a:off x="4434840" y="4251960"/>
+            <a:ext cx="3383280" cy="292608"/>
+          </a:xfrm>
+          <a:prstGeom prst="rect">
+            <a:avLst/>
+          </a:prstGeom>
+          <a:noFill/>
+          <a:ln/>
+        </p:spPr>
+        <p:txBody>
+          <a:bodyPr wrap="square" lIns="0" tIns="0" rIns="0" bIns="0" rtlCol="0" anchor="ctr"/>
+          <a:lstStyle/>
+          <a:p>
+            <a:pPr indent="0" marL="0">
+              <a:buNone/>
+            </a:pPr>
+            <a:r>
               <a:rPr lang="en-US" sz="1600" dirty="0">
                 <a:solidFill>
+                  <a:srgbClr val="6EC6FF"/>
+                </a:solidFill>
+                <a:latin typeface="Calibri" pitchFamily="34" charset="0"/>
+                <a:ea typeface="Calibri" pitchFamily="34" charset="-122"/>
+                <a:cs typeface="Calibri" pitchFamily="34" charset="-120"/>
+              </a:rPr>
+              <a:t>Storyteller</a:t>
+            </a:r>
+            <a:endParaRPr lang="en-US" sz="1600" dirty="0"/>
+          </a:p>
+        </p:txBody>
+      </p:sp>
+      <p:sp>
+        <p:nvSpPr>
+          <p:cNvPr id="29" name="Text 27"/>
+          <p:cNvSpPr txBox="1"/>
+          <p:nvPr/>
+        </p:nvSpPr>
+        <p:spPr>
+          <a:xfrm>
+            <a:off x="4434840" y="4663440"/>
+            <a:ext cx="3383280" cy="1234440"/>
+          </a:xfrm>
+          <a:prstGeom prst="rect">
+            <a:avLst/>
+          </a:prstGeom>
+          <a:noFill/>
+          <a:ln/>
+        </p:spPr>
+        <p:txBody>
+          <a:bodyPr wrap="square" lIns="0" tIns="0" rIns="0" bIns="0" rtlCol="0" anchor="ctr"/>
+          <a:lstStyle/>
+          <a:p>
+            <a:pPr indent="0" marL="0">
+              <a:buNone/>
+            </a:pPr>
+            <a:r>
+              <a:rPr lang="en-US" sz="1800" dirty="0">
+                <a:solidFill>
                   <a:srgbClr val="FFFFFF"/>
                 </a:solidFill>
                 <a:latin typeface="Calibri" pitchFamily="34" charset="0"/>
                 <a:ea typeface="Calibri" pitchFamily="34" charset="-122"/>
                 <a:cs typeface="Calibri" pitchFamily="34" charset="-120"/>
               </a:rPr>
-              <a:t>Finds a nearby place and a fact from tools, not guesswork.</a:t>
+              <a:t>Reads the landmark’s history in a short voice memo.</a:t>
+            </a:r>
+            <a:endParaRPr lang="en-US" sz="1800" dirty="0"/>
+          </a:p>
+        </p:txBody>
+      </p:sp>
+      <p:sp>
+        <p:nvSpPr>
+          <p:cNvPr id="30" name="Text 28"/>
+          <p:cNvSpPr txBox="1"/>
+          <p:nvPr/>
+        </p:nvSpPr>
+        <p:spPr>
+          <a:xfrm>
+            <a:off x="8092440" y="3840480"/>
+            <a:ext cx="3383280" cy="384048"/>
+          </a:xfrm>
+          <a:prstGeom prst="rect">
+            <a:avLst/>
+          </a:prstGeom>
+          <a:noFill/>
+          <a:ln/>
+        </p:spPr>
+        <p:txBody>
+          <a:bodyPr wrap="square" lIns="0" tIns="0" rIns="0" bIns="0" rtlCol="0" anchor="ctr"/>
+          <a:lstStyle/>
+          <a:p>
+            <a:pPr indent="0" marL="0">
+              <a:buNone/>
+            </a:pPr>
+            <a:r>
+              <a:rPr lang="en-US" sz="2400" b="1" dirty="0">
+                <a:solidFill>
+                  <a:srgbClr val="E8A317"/>
+                </a:solidFill>
+                <a:latin typeface="Calibri" pitchFamily="34" charset="0"/>
+                <a:ea typeface="Calibri" pitchFamily="34" charset="-122"/>
+                <a:cs typeface="Calibri" pitchFamily="34" charset="-120"/>
+              </a:rPr>
+              <a:t>Fern</a:t>
+            </a:r>
+            <a:endParaRPr lang="en-US" sz="2400" dirty="0"/>
+          </a:p>
+        </p:txBody>
+      </p:sp>
+      <p:sp>
+        <p:nvSpPr>
+          <p:cNvPr id="31" name="Text 29"/>
+          <p:cNvSpPr txBox="1"/>
+          <p:nvPr/>
+        </p:nvSpPr>
+        <p:spPr>
+          <a:xfrm>
+            <a:off x="8092440" y="4251960"/>
+            <a:ext cx="3383280" cy="292608"/>
+          </a:xfrm>
+          <a:prstGeom prst="rect">
+            <a:avLst/>
+          </a:prstGeom>
+          <a:noFill/>
+          <a:ln/>
+        </p:spPr>
+        <p:txBody>
+          <a:bodyPr wrap="square" lIns="0" tIns="0" rIns="0" bIns="0" rtlCol="0" anchor="ctr"/>
+          <a:lstStyle/>
+          <a:p>
+            <a:pPr indent="0" marL="0">
+              <a:buNone/>
+            </a:pPr>
+            <a:r>
+              <a:rPr lang="en-US" sz="1600" dirty="0">
+                <a:solidFill>
+                  <a:srgbClr val="6EC6FF"/>
+                </a:solidFill>
+                <a:latin typeface="Calibri" pitchFamily="34" charset="0"/>
+                <a:ea typeface="Calibri" pitchFamily="34" charset="-122"/>
+                <a:cs typeface="Calibri" pitchFamily="34" charset="-120"/>
+              </a:rPr>
+              <a:t>Pathfinder</a:t>
             </a:r>
             <a:endParaRPr lang="en-US" sz="1600" dirty="0"/>
           </a:p>
@@ -3095,14 +3636,14 @@
       </p:sp>
       <p:sp>
         <p:nvSpPr>
-          <p:cNvPr id="27" name="Text 25"/>
-          <p:cNvSpPr txBox="1"/>
-          <p:nvPr/>
-        </p:nvSpPr>
-        <p:spPr>
-          <a:xfrm>
-            <a:off x="4389120" y="4069080"/>
-            <a:ext cx="3383280" cy="365760"/>
+          <p:cNvPr id="32" name="Text 30"/>
+          <p:cNvSpPr txBox="1"/>
+          <p:nvPr/>
+        </p:nvSpPr>
+        <p:spPr>
+          <a:xfrm>
+            <a:off x="8092440" y="4663440"/>
+            <a:ext cx="3383280" cy="1234440"/>
           </a:xfrm>
           <a:prstGeom prst="rect">
             <a:avLst/>
@@ -3118,85 +3659,7 @@
               <a:buNone/>
             </a:pPr>
             <a:r>
-              <a:rPr lang="en-US" sz="2200" b="1" dirty="0">
-                <a:solidFill>
-                  <a:srgbClr val="E8A317"/>
-                </a:solidFill>
-                <a:latin typeface="Calibri" pitchFamily="34" charset="0"/>
-                <a:ea typeface="Calibri" pitchFamily="34" charset="-122"/>
-                <a:cs typeface="Calibri" pitchFamily="34" charset="-120"/>
-              </a:rPr>
-              <a:t>Moss</a:t>
-            </a:r>
-            <a:endParaRPr lang="en-US" sz="2200" dirty="0"/>
-          </a:p>
-        </p:txBody>
-      </p:sp>
-      <p:sp>
-        <p:nvSpPr>
-          <p:cNvPr id="28" name="Text 26"/>
-          <p:cNvSpPr txBox="1"/>
-          <p:nvPr/>
-        </p:nvSpPr>
-        <p:spPr>
-          <a:xfrm>
-            <a:off x="4389120" y="4434840"/>
-            <a:ext cx="3383280" cy="274320"/>
-          </a:xfrm>
-          <a:prstGeom prst="rect">
-            <a:avLst/>
-          </a:prstGeom>
-          <a:noFill/>
-          <a:ln/>
-        </p:spPr>
-        <p:txBody>
-          <a:bodyPr wrap="square" lIns="0" tIns="0" rIns="0" bIns="0" rtlCol="0" anchor="ctr"/>
-          <a:lstStyle/>
-          <a:p>
-            <a:pPr indent="0" marL="0">
-              <a:buNone/>
-            </a:pPr>
-            <a:r>
-              <a:rPr lang="en-US" sz="1400" dirty="0">
-                <a:solidFill>
-                  <a:srgbClr val="6EC6FF"/>
-                </a:solidFill>
-                <a:latin typeface="Calibri" pitchFamily="34" charset="0"/>
-                <a:ea typeface="Calibri" pitchFamily="34" charset="-122"/>
-                <a:cs typeface="Calibri" pitchFamily="34" charset="-120"/>
-              </a:rPr>
-              <a:t>Storyteller</a:t>
-            </a:r>
-            <a:endParaRPr lang="en-US" sz="1400" dirty="0"/>
-          </a:p>
-        </p:txBody>
-      </p:sp>
-      <p:sp>
-        <p:nvSpPr>
-          <p:cNvPr id="29" name="Text 27"/>
-          <p:cNvSpPr txBox="1"/>
-          <p:nvPr/>
-        </p:nvSpPr>
-        <p:spPr>
-          <a:xfrm>
-            <a:off x="4389120" y="4800600"/>
-            <a:ext cx="3383280" cy="1051560"/>
-          </a:xfrm>
-          <a:prstGeom prst="rect">
-            <a:avLst/>
-          </a:prstGeom>
-          <a:noFill/>
-          <a:ln/>
-        </p:spPr>
-        <p:txBody>
-          <a:bodyPr wrap="square" lIns="0" tIns="0" rIns="0" bIns="0" rtlCol="0" anchor="ctr"/>
-          <a:lstStyle/>
-          <a:p>
-            <a:pPr indent="0" marL="0">
-              <a:buNone/>
-            </a:pPr>
-            <a:r>
-              <a:rPr lang="en-US" sz="1600" dirty="0">
+              <a:rPr lang="en-US" sz="1800" dirty="0">
                 <a:solidFill>
                   <a:srgbClr val="FFFFFF"/>
                 </a:solidFill>
@@ -3204,126 +3667,9 @@
                 <a:ea typeface="Calibri" pitchFamily="34" charset="-122"/>
                 <a:cs typeface="Calibri" pitchFamily="34" charset="-120"/>
               </a:rPr>
-              <a:t>Reads the landmark’s history in a short voice memo.</a:t>
-            </a:r>
-            <a:endParaRPr lang="en-US" sz="1600" dirty="0"/>
-          </a:p>
-        </p:txBody>
-      </p:sp>
-      <p:sp>
-        <p:nvSpPr>
-          <p:cNvPr id="30" name="Text 28"/>
-          <p:cNvSpPr txBox="1"/>
-          <p:nvPr/>
-        </p:nvSpPr>
-        <p:spPr>
-          <a:xfrm>
-            <a:off x="8046720" y="4069080"/>
-            <a:ext cx="3383280" cy="365760"/>
-          </a:xfrm>
-          <a:prstGeom prst="rect">
-            <a:avLst/>
-          </a:prstGeom>
-          <a:noFill/>
-          <a:ln/>
-        </p:spPr>
-        <p:txBody>
-          <a:bodyPr wrap="square" lIns="0" tIns="0" rIns="0" bIns="0" rtlCol="0" anchor="ctr"/>
-          <a:lstStyle/>
-          <a:p>
-            <a:pPr indent="0" marL="0">
-              <a:buNone/>
-            </a:pPr>
-            <a:r>
-              <a:rPr lang="en-US" sz="2200" b="1" dirty="0">
-                <a:solidFill>
-                  <a:srgbClr val="E8A317"/>
-                </a:solidFill>
-                <a:latin typeface="Calibri" pitchFamily="34" charset="0"/>
-                <a:ea typeface="Calibri" pitchFamily="34" charset="-122"/>
-                <a:cs typeface="Calibri" pitchFamily="34" charset="-120"/>
-              </a:rPr>
-              <a:t>Fern</a:t>
-            </a:r>
-            <a:endParaRPr lang="en-US" sz="2200" dirty="0"/>
-          </a:p>
-        </p:txBody>
-      </p:sp>
-      <p:sp>
-        <p:nvSpPr>
-          <p:cNvPr id="31" name="Text 29"/>
-          <p:cNvSpPr txBox="1"/>
-          <p:nvPr/>
-        </p:nvSpPr>
-        <p:spPr>
-          <a:xfrm>
-            <a:off x="8046720" y="4434840"/>
-            <a:ext cx="3383280" cy="274320"/>
-          </a:xfrm>
-          <a:prstGeom prst="rect">
-            <a:avLst/>
-          </a:prstGeom>
-          <a:noFill/>
-          <a:ln/>
-        </p:spPr>
-        <p:txBody>
-          <a:bodyPr wrap="square" lIns="0" tIns="0" rIns="0" bIns="0" rtlCol="0" anchor="ctr"/>
-          <a:lstStyle/>
-          <a:p>
-            <a:pPr indent="0" marL="0">
-              <a:buNone/>
-            </a:pPr>
-            <a:r>
-              <a:rPr lang="en-US" sz="1400" dirty="0">
-                <a:solidFill>
-                  <a:srgbClr val="6EC6FF"/>
-                </a:solidFill>
-                <a:latin typeface="Calibri" pitchFamily="34" charset="0"/>
-                <a:ea typeface="Calibri" pitchFamily="34" charset="-122"/>
-                <a:cs typeface="Calibri" pitchFamily="34" charset="-120"/>
-              </a:rPr>
-              <a:t>Pathfinder</a:t>
-            </a:r>
-            <a:endParaRPr lang="en-US" sz="1400" dirty="0"/>
-          </a:p>
-        </p:txBody>
-      </p:sp>
-      <p:sp>
-        <p:nvSpPr>
-          <p:cNvPr id="32" name="Text 30"/>
-          <p:cNvSpPr txBox="1"/>
-          <p:nvPr/>
-        </p:nvSpPr>
-        <p:spPr>
-          <a:xfrm>
-            <a:off x="8046720" y="4800600"/>
-            <a:ext cx="3383280" cy="1051560"/>
-          </a:xfrm>
-          <a:prstGeom prst="rect">
-            <a:avLst/>
-          </a:prstGeom>
-          <a:noFill/>
-          <a:ln/>
-        </p:spPr>
-        <p:txBody>
-          <a:bodyPr wrap="square" lIns="0" tIns="0" rIns="0" bIns="0" rtlCol="0" anchor="ctr"/>
-          <a:lstStyle/>
-          <a:p>
-            <a:pPr indent="0" marL="0">
-              <a:buNone/>
-            </a:pPr>
-            <a:r>
-              <a:rPr lang="en-US" sz="1600" dirty="0">
-                <a:solidFill>
-                  <a:srgbClr val="FFFFFF"/>
-                </a:solidFill>
-                <a:latin typeface="Calibri" pitchFamily="34" charset="0"/>
-                <a:ea typeface="Calibri" pitchFamily="34" charset="-122"/>
-                <a:cs typeface="Calibri" pitchFamily="34" charset="-120"/>
-              </a:rPr>
               <a:t>Turns that place into a walk you can follow.</a:t>
             </a:r>
-            <a:endParaRPr lang="en-US" sz="1600" dirty="0"/>
+            <a:endParaRPr lang="en-US" sz="1800" dirty="0"/>
           </a:p>
         </p:txBody>
       </p:sp>
@@ -3362,8 +3708,8 @@
         </p:nvSpPr>
         <p:spPr>
           <a:xfrm>
-            <a:off x="502920" y="292608"/>
-            <a:ext cx="11155680" cy="640080"/>
+            <a:off x="502920" y="256032"/>
+            <a:ext cx="11155680" cy="566928"/>
           </a:xfrm>
           <a:prstGeom prst="rect">
             <a:avLst/>
@@ -3379,7 +3725,7 @@
               <a:buNone/>
             </a:pPr>
             <a:r>
-              <a:rPr lang="en-US" sz="3600" b="1" dirty="0">
+              <a:rPr lang="en-US" sz="3200" b="1" dirty="0">
                 <a:solidFill>
                   <a:srgbClr val="0B1F3A"/>
                 </a:solidFill>
@@ -3387,9 +3733,9 @@
                 <a:ea typeface="Calibri" pitchFamily="34" charset="-122"/>
                 <a:cs typeface="Calibri" pitchFamily="34" charset="-120"/>
               </a:rPr>
-              <a:t>Live demo  ·  leave this slide up</a:t>
-            </a:r>
-            <a:endParaRPr lang="en-US" sz="3600" dirty="0"/>
+              <a:t>Live demo  —  keep this slide up</a:t>
+            </a:r>
+            <a:endParaRPr lang="en-US" sz="3200" dirty="0"/>
           </a:p>
         </p:txBody>
       </p:sp>
@@ -3401,54 +3747,37 @@
         </p:nvSpPr>
         <p:spPr>
           <a:xfrm>
-            <a:off x="941832" y="1024128"/>
-            <a:ext cx="2505456" cy="4187952"/>
+            <a:off x="502920" y="932688"/>
+            <a:ext cx="11201400" cy="640080"/>
           </a:xfrm>
           <a:prstGeom prst="roundRect">
             <a:avLst>
-              <a:gd name="adj" fmla="val 8029"/>
+              <a:gd name="adj" fmla="val 17143"/>
             </a:avLst>
           </a:prstGeom>
           <a:solidFill>
             <a:srgbClr val="0B1F3A"/>
           </a:solidFill>
           <a:ln/>
-        </p:spPr>
-      </p:sp>
-      <p:pic>
-        <p:nvPicPr>
-          <p:cNvPr id="4" name="Image 0" descr="G:\broswer download\big-red-hacks2026\docs\presentation\assets\placeholder-map.png">    </p:cNvPr>
-          <p:cNvPicPr>
-            <a:picLocks noChangeAspect="1"/>
-          </p:cNvPicPr>
-          <p:nvPr/>
-        </p:nvPicPr>
-        <p:blipFill>
-          <a:blip r:embed="rId1"/>
-          <a:stretch>
-            <a:fillRect/>
-          </a:stretch>
-        </p:blipFill>
-        <p:spPr>
-          <a:xfrm>
-            <a:off x="1033272" y="1115568"/>
-            <a:ext cx="2322576" cy="4005072"/>
-          </a:xfrm>
-          <a:prstGeom prst="rect">
-            <a:avLst/>
-          </a:prstGeom>
-        </p:spPr>
-      </p:pic>
-      <p:sp>
-        <p:nvSpPr>
-          <p:cNvPr id="5" name="Text 2"/>
-          <p:cNvSpPr txBox="1"/>
-          <p:nvPr/>
-        </p:nvSpPr>
-        <p:spPr>
-          <a:xfrm>
-            <a:off x="502920" y="5257800"/>
-            <a:ext cx="3383280" cy="320040"/>
+          <a:effectLst>
+            <a:outerShdw sx="100000" sy="100000" kx="0" ky="0" algn="bl" rotWithShape="0" blurRad="101600" dist="25400" dir="5400000">
+              <a:srgbClr val="0B1F3A">
+                <a:alpha val="10000"/>
+              </a:srgbClr>
+            </a:outerShdw>
+          </a:effectLst>
+        </p:spPr>
+      </p:sp>
+      <p:sp>
+        <p:nvSpPr>
+          <p:cNvPr id="4" name="Text 2"/>
+          <p:cNvSpPr txBox="1"/>
+          <p:nvPr/>
+        </p:nvSpPr>
+        <p:spPr>
+          <a:xfrm>
+            <a:off x="685800" y="1024128"/>
+            <a:ext cx="10835640" cy="457200"/>
           </a:xfrm>
           <a:prstGeom prst="rect">
             <a:avLst/>
@@ -3464,76 +3793,79 @@
               <a:buNone/>
             </a:pPr>
             <a:r>
-              <a:rPr lang="en-US" sz="1400" b="1" dirty="0">
-                <a:solidFill>
-                  <a:srgbClr val="0B1F3A"/>
-                </a:solidFill>
-                <a:latin typeface="Calibri" pitchFamily="34" charset="0"/>
-                <a:ea typeface="Calibri" pitchFamily="34" charset="-122"/>
-                <a:cs typeface="Calibri" pitchFamily="34" charset="-120"/>
-              </a:rPr>
-              <a:t>Nearby landmark</a:t>
-            </a:r>
-            <a:endParaRPr lang="en-US" sz="1400" dirty="0"/>
-          </a:p>
-        </p:txBody>
-      </p:sp>
-      <p:sp>
-        <p:nvSpPr>
-          <p:cNvPr id="6" name="Shape 3"/>
+              <a:rPr lang="en-US" sz="2000" b="1" dirty="0">
+                <a:solidFill>
+                  <a:srgbClr val="E8A317"/>
+                </a:solidFill>
+                <a:latin typeface="Calibri" pitchFamily="34" charset="0"/>
+                <a:ea typeface="Calibri" pitchFamily="34" charset="-122"/>
+                <a:cs typeface="Calibri" pitchFamily="34" charset="-120"/>
+              </a:rPr>
+              <a:t>Demo Walk is ON   ·   steps are simulated at the judging table</a:t>
+            </a:r>
+            <a:endParaRPr lang="en-US" sz="2000" dirty="0"/>
+          </a:p>
+        </p:txBody>
+      </p:sp>
+      <p:sp>
+        <p:nvSpPr>
+          <p:cNvPr id="5" name="Shape 3"/>
           <p:cNvSpPr/>
           <p:nvPr/>
         </p:nvSpPr>
         <p:spPr>
           <a:xfrm>
-            <a:off x="4782312" y="1024128"/>
-            <a:ext cx="2505456" cy="4187952"/>
+            <a:off x="502920" y="1783080"/>
+            <a:ext cx="2788920" cy="4434840"/>
           </a:xfrm>
           <a:prstGeom prst="roundRect">
             <a:avLst>
-              <a:gd name="adj" fmla="val 8029"/>
+              <a:gd name="adj" fmla="val 3934"/>
             </a:avLst>
           </a:prstGeom>
           <a:solidFill>
-            <a:srgbClr val="0B1F3A"/>
+            <a:srgbClr val="FFFFFF"/>
           </a:solidFill>
           <a:ln/>
-        </p:spPr>
-      </p:sp>
-      <p:pic>
-        <p:nvPicPr>
-          <p:cNvPr id="7" name="Image 1" descr="G:\broswer download\big-red-hacks2026\docs\presentation\assets\placeholder-walk.png">    </p:cNvPr>
-          <p:cNvPicPr>
-            <a:picLocks noChangeAspect="1"/>
-          </p:cNvPicPr>
-          <p:nvPr/>
-        </p:nvPicPr>
-        <p:blipFill>
-          <a:blip r:embed="rId2"/>
-          <a:stretch>
-            <a:fillRect/>
-          </a:stretch>
-        </p:blipFill>
-        <p:spPr>
-          <a:xfrm>
-            <a:off x="4873752" y="1115568"/>
-            <a:ext cx="2322576" cy="4005072"/>
-          </a:xfrm>
-          <a:prstGeom prst="rect">
-            <a:avLst/>
-          </a:prstGeom>
-        </p:spPr>
-      </p:pic>
-      <p:sp>
-        <p:nvSpPr>
-          <p:cNvPr id="8" name="Text 4"/>
-          <p:cNvSpPr txBox="1"/>
-          <p:nvPr/>
-        </p:nvSpPr>
-        <p:spPr>
-          <a:xfrm>
-            <a:off x="4343400" y="5257800"/>
-            <a:ext cx="3383280" cy="320040"/>
+          <a:effectLst>
+            <a:outerShdw sx="100000" sy="100000" kx="0" ky="0" algn="bl" rotWithShape="0" blurRad="101600" dist="25400" dir="5400000">
+              <a:srgbClr val="0B1F3A">
+                <a:alpha val="10000"/>
+              </a:srgbClr>
+            </a:outerShdw>
+          </a:effectLst>
+        </p:spPr>
+      </p:sp>
+      <p:sp>
+        <p:nvSpPr>
+          <p:cNvPr id="6" name="Shape 4"/>
+          <p:cNvSpPr/>
+          <p:nvPr/>
+        </p:nvSpPr>
+        <p:spPr>
+          <a:xfrm>
+            <a:off x="1508760" y="2011680"/>
+            <a:ext cx="777240" cy="777240"/>
+          </a:xfrm>
+          <a:prstGeom prst="ellipse">
+            <a:avLst/>
+          </a:prstGeom>
+          <a:solidFill>
+            <a:srgbClr val="2E9D4F"/>
+          </a:solidFill>
+          <a:ln/>
+        </p:spPr>
+      </p:sp>
+      <p:sp>
+        <p:nvSpPr>
+          <p:cNvPr id="7" name="Text 5"/>
+          <p:cNvSpPr txBox="1"/>
+          <p:nvPr/>
+        </p:nvSpPr>
+        <p:spPr>
+          <a:xfrm>
+            <a:off x="1508760" y="2103120"/>
+            <a:ext cx="777240" cy="594360"/>
           </a:xfrm>
           <a:prstGeom prst="rect">
             <a:avLst/>
@@ -3549,7 +3881,46 @@
               <a:buNone/>
             </a:pPr>
             <a:r>
-              <a:rPr lang="en-US" sz="1400" b="1" dirty="0">
+              <a:rPr lang="en-US" sz="2800" b="1" dirty="0">
+                <a:solidFill>
+                  <a:srgbClr val="FFFFFF"/>
+                </a:solidFill>
+                <a:latin typeface="Calibri" pitchFamily="34" charset="0"/>
+                <a:ea typeface="Calibri" pitchFamily="34" charset="-122"/>
+                <a:cs typeface="Calibri" pitchFamily="34" charset="-120"/>
+              </a:rPr>
+              <a:t>1</a:t>
+            </a:r>
+            <a:endParaRPr lang="en-US" sz="2800" dirty="0"/>
+          </a:p>
+        </p:txBody>
+      </p:sp>
+      <p:sp>
+        <p:nvSpPr>
+          <p:cNvPr id="8" name="Text 6"/>
+          <p:cNvSpPr txBox="1"/>
+          <p:nvPr/>
+        </p:nvSpPr>
+        <p:spPr>
+          <a:xfrm>
+            <a:off x="667512" y="2926080"/>
+            <a:ext cx="2468880" cy="960120"/>
+          </a:xfrm>
+          <a:prstGeom prst="rect">
+            <a:avLst/>
+          </a:prstGeom>
+          <a:noFill/>
+          <a:ln/>
+        </p:spPr>
+        <p:txBody>
+          <a:bodyPr wrap="square" lIns="0" tIns="0" rIns="0" bIns="0" rtlCol="0" anchor="ctr"/>
+          <a:lstStyle/>
+          <a:p>
+            <a:pPr algn="ctr" indent="0" marL="0">
+              <a:buNone/>
+            </a:pPr>
+            <a:r>
+              <a:rPr lang="en-US" sz="2200" b="1" dirty="0">
                 <a:solidFill>
                   <a:srgbClr val="0B1F3A"/>
                 </a:solidFill>
@@ -3557,68 +3928,110 @@
                 <a:ea typeface="Calibri" pitchFamily="34" charset="-122"/>
                 <a:cs typeface="Calibri" pitchFamily="34" charset="-120"/>
               </a:rPr>
-              <a:t>Walk / trail  ·  Demo Walk</a:t>
-            </a:r>
-            <a:endParaRPr lang="en-US" sz="1400" dirty="0"/>
-          </a:p>
-        </p:txBody>
-      </p:sp>
-      <p:sp>
-        <p:nvSpPr>
-          <p:cNvPr id="9" name="Shape 5"/>
+              <a:t>Send Pip exploring</a:t>
+            </a:r>
+            <a:endParaRPr lang="en-US" sz="2200" dirty="0"/>
+          </a:p>
+        </p:txBody>
+      </p:sp>
+      <p:sp>
+        <p:nvSpPr>
+          <p:cNvPr id="9" name="Text 7"/>
+          <p:cNvSpPr txBox="1"/>
+          <p:nvPr/>
+        </p:nvSpPr>
+        <p:spPr>
+          <a:xfrm>
+            <a:off x="685800" y="3931920"/>
+            <a:ext cx="2423160" cy="1965960"/>
+          </a:xfrm>
+          <a:prstGeom prst="rect">
+            <a:avLst/>
+          </a:prstGeom>
+          <a:noFill/>
+          <a:ln/>
+        </p:spPr>
+        <p:txBody>
+          <a:bodyPr wrap="square" lIns="0" tIns="0" rIns="0" bIns="0" rtlCol="0" anchor="ctr"/>
+          <a:lstStyle/>
+          <a:p>
+            <a:pPr algn="ctr" indent="0" marL="0">
+              <a:buNone/>
+            </a:pPr>
+            <a:r>
+              <a:rPr lang="en-US" sz="1600" dirty="0">
+                <a:solidFill>
+                  <a:srgbClr val="4A6358"/>
+                </a:solidFill>
+                <a:latin typeface="Calibri" pitchFamily="34" charset="0"/>
+                <a:ea typeface="Calibri" pitchFamily="34" charset="-122"/>
+                <a:cs typeface="Calibri" pitchFamily="34" charset="-120"/>
+              </a:rPr>
+              <a:t>Squad → Pip → Explore. A nearby place and a fact come back.</a:t>
+            </a:r>
+            <a:endParaRPr lang="en-US" sz="1600" dirty="0"/>
+          </a:p>
+        </p:txBody>
+      </p:sp>
+      <p:sp>
+        <p:nvSpPr>
+          <p:cNvPr id="10" name="Shape 8"/>
           <p:cNvSpPr/>
           <p:nvPr/>
         </p:nvSpPr>
         <p:spPr>
           <a:xfrm>
-            <a:off x="8622792" y="1024128"/>
-            <a:ext cx="2505456" cy="4187952"/>
+            <a:off x="3429000" y="1783080"/>
+            <a:ext cx="2788920" cy="4434840"/>
           </a:xfrm>
           <a:prstGeom prst="roundRect">
             <a:avLst>
-              <a:gd name="adj" fmla="val 8029"/>
+              <a:gd name="adj" fmla="val 3934"/>
             </a:avLst>
           </a:prstGeom>
           <a:solidFill>
-            <a:srgbClr val="0B1F3A"/>
+            <a:srgbClr val="FFFFFF"/>
           </a:solidFill>
           <a:ln/>
-        </p:spPr>
-      </p:sp>
-      <p:pic>
-        <p:nvPicPr>
-          <p:cNvPr id="10" name="Image 2" descr="G:\broswer download\big-red-hacks2026\docs\presentation\assets\placeholder-capture.png">    </p:cNvPr>
-          <p:cNvPicPr>
-            <a:picLocks noChangeAspect="1"/>
-          </p:cNvPicPr>
-          <p:nvPr/>
-        </p:nvPicPr>
-        <p:blipFill>
-          <a:blip r:embed="rId3"/>
-          <a:stretch>
-            <a:fillRect/>
-          </a:stretch>
-        </p:blipFill>
-        <p:spPr>
-          <a:xfrm>
-            <a:off x="8714232" y="1115568"/>
-            <a:ext cx="2322576" cy="4005072"/>
-          </a:xfrm>
-          <a:prstGeom prst="rect">
-            <a:avLst/>
-          </a:prstGeom>
-        </p:spPr>
-      </p:pic>
-      <p:sp>
-        <p:nvSpPr>
-          <p:cNvPr id="11" name="Text 6"/>
-          <p:cNvSpPr txBox="1"/>
-          <p:nvPr/>
-        </p:nvSpPr>
-        <p:spPr>
-          <a:xfrm>
-            <a:off x="8183880" y="5257800"/>
-            <a:ext cx="3383280" cy="320040"/>
+          <a:effectLst>
+            <a:outerShdw sx="100000" sy="100000" kx="0" ky="0" algn="bl" rotWithShape="0" blurRad="101600" dist="25400" dir="5400000">
+              <a:srgbClr val="0B1F3A">
+                <a:alpha val="10000"/>
+              </a:srgbClr>
+            </a:outerShdw>
+          </a:effectLst>
+        </p:spPr>
+      </p:sp>
+      <p:sp>
+        <p:nvSpPr>
+          <p:cNvPr id="11" name="Shape 9"/>
+          <p:cNvSpPr/>
+          <p:nvPr/>
+        </p:nvSpPr>
+        <p:spPr>
+          <a:xfrm>
+            <a:off x="4434840" y="2011680"/>
+            <a:ext cx="777240" cy="777240"/>
+          </a:xfrm>
+          <a:prstGeom prst="ellipse">
+            <a:avLst/>
+          </a:prstGeom>
+          <a:solidFill>
+            <a:srgbClr val="2E9D4F"/>
+          </a:solidFill>
+          <a:ln/>
+        </p:spPr>
+      </p:sp>
+      <p:sp>
+        <p:nvSpPr>
+          <p:cNvPr id="12" name="Text 10"/>
+          <p:cNvSpPr txBox="1"/>
+          <p:nvPr/>
+        </p:nvSpPr>
+        <p:spPr>
+          <a:xfrm>
+            <a:off x="4434840" y="2103120"/>
+            <a:ext cx="777240" cy="594360"/>
           </a:xfrm>
           <a:prstGeom prst="rect">
             <a:avLst/>
@@ -3634,7 +4047,46 @@
               <a:buNone/>
             </a:pPr>
             <a:r>
-              <a:rPr lang="en-US" sz="1400" b="1" dirty="0">
+              <a:rPr lang="en-US" sz="2800" b="1" dirty="0">
+                <a:solidFill>
+                  <a:srgbClr val="FFFFFF"/>
+                </a:solidFill>
+                <a:latin typeface="Calibri" pitchFamily="34" charset="0"/>
+                <a:ea typeface="Calibri" pitchFamily="34" charset="-122"/>
+                <a:cs typeface="Calibri" pitchFamily="34" charset="-120"/>
+              </a:rPr>
+              <a:t>2</a:t>
+            </a:r>
+            <a:endParaRPr lang="en-US" sz="2800" dirty="0"/>
+          </a:p>
+        </p:txBody>
+      </p:sp>
+      <p:sp>
+        <p:nvSpPr>
+          <p:cNvPr id="13" name="Text 11"/>
+          <p:cNvSpPr txBox="1"/>
+          <p:nvPr/>
+        </p:nvSpPr>
+        <p:spPr>
+          <a:xfrm>
+            <a:off x="3593592" y="2926080"/>
+            <a:ext cx="2468880" cy="960120"/>
+          </a:xfrm>
+          <a:prstGeom prst="rect">
+            <a:avLst/>
+          </a:prstGeom>
+          <a:noFill/>
+          <a:ln/>
+        </p:spPr>
+        <p:txBody>
+          <a:bodyPr wrap="square" lIns="0" tIns="0" rIns="0" bIns="0" rtlCol="0" anchor="ctr"/>
+          <a:lstStyle/>
+          <a:p>
+            <a:pPr algn="ctr" indent="0" marL="0">
+              <a:buNone/>
+            </a:pPr>
+            <a:r>
+              <a:rPr lang="en-US" sz="2200" b="1" dirty="0">
                 <a:solidFill>
                   <a:srgbClr val="0B1F3A"/>
                 </a:solidFill>
@@ -3642,46 +4094,378 @@
                 <a:ea typeface="Calibri" pitchFamily="34" charset="-122"/>
                 <a:cs typeface="Calibri" pitchFamily="34" charset="-120"/>
               </a:rPr>
-              <a:t>Capture / pet reward</a:t>
-            </a:r>
-            <a:endParaRPr lang="en-US" sz="1400" dirty="0"/>
-          </a:p>
-        </p:txBody>
-      </p:sp>
-      <p:sp>
-        <p:nvSpPr>
-          <p:cNvPr id="12" name="Text 7"/>
-          <p:cNvSpPr txBox="1"/>
-          <p:nvPr/>
-        </p:nvSpPr>
-        <p:spPr>
-          <a:xfrm>
-            <a:off x="502920" y="5623560"/>
-            <a:ext cx="11155680" cy="640080"/>
-          </a:xfrm>
-          <a:prstGeom prst="rect">
-            <a:avLst/>
-          </a:prstGeom>
-          <a:noFill/>
-          <a:ln/>
-        </p:spPr>
-        <p:txBody>
-          <a:bodyPr wrap="square" lIns="0" tIns="0" rIns="0" bIns="0" rtlCol="0" anchor="ctr"/>
-          <a:lstStyle/>
-          <a:p>
-            <a:pPr indent="0" marL="0">
+              <a:t>Choose a place</a:t>
+            </a:r>
+            <a:endParaRPr lang="en-US" sz="2200" dirty="0"/>
+          </a:p>
+        </p:txBody>
+      </p:sp>
+      <p:sp>
+        <p:nvSpPr>
+          <p:cNvPr id="14" name="Text 12"/>
+          <p:cNvSpPr txBox="1"/>
+          <p:nvPr/>
+        </p:nvSpPr>
+        <p:spPr>
+          <a:xfrm>
+            <a:off x="3611880" y="3931920"/>
+            <a:ext cx="2423160" cy="1965960"/>
+          </a:xfrm>
+          <a:prstGeom prst="rect">
+            <a:avLst/>
+          </a:prstGeom>
+          <a:noFill/>
+          <a:ln/>
+        </p:spPr>
+        <p:txBody>
+          <a:bodyPr wrap="square" lIns="0" tIns="0" rIns="0" bIns="0" rtlCol="0" anchor="ctr"/>
+          <a:lstStyle/>
+          <a:p>
+            <a:pPr algn="ctr" indent="0" marL="0">
               <a:buNone/>
             </a:pPr>
             <a:r>
               <a:rPr lang="en-US" sz="1600" dirty="0">
                 <a:solidFill>
-                  <a:srgbClr val="163528"/>
-                </a:solidFill>
-                <a:latin typeface="Calibri" pitchFamily="34" charset="0"/>
-                <a:ea typeface="Calibri" pitchFamily="34" charset="-122"/>
-                <a:cs typeface="Calibri" pitchFamily="34" charset="-120"/>
-              </a:rPr>
-              <a:t>Sequence: Send Pip exploring  →  choose a place  →  start a walk  →  capture.  Demo Walk simulates steps at the table.</a:t>
+                  <a:srgbClr val="4A6358"/>
+                </a:solidFill>
+                <a:latin typeface="Calibri" pitchFamily="34" charset="0"/>
+                <a:ea typeface="Calibri" pitchFamily="34" charset="-122"/>
+                <a:cs typeface="Calibri" pitchFamily="34" charset="-120"/>
+              </a:rPr>
+              <a:t>Open the postcard. That is the landmark for this walk.</a:t>
+            </a:r>
+            <a:endParaRPr lang="en-US" sz="1600" dirty="0"/>
+          </a:p>
+        </p:txBody>
+      </p:sp>
+      <p:sp>
+        <p:nvSpPr>
+          <p:cNvPr id="15" name="Shape 13"/>
+          <p:cNvSpPr/>
+          <p:nvPr/>
+        </p:nvSpPr>
+        <p:spPr>
+          <a:xfrm>
+            <a:off x="6355080" y="1783080"/>
+            <a:ext cx="2788920" cy="4434840"/>
+          </a:xfrm>
+          <a:prstGeom prst="roundRect">
+            <a:avLst>
+              <a:gd name="adj" fmla="val 3934"/>
+            </a:avLst>
+          </a:prstGeom>
+          <a:solidFill>
+            <a:srgbClr val="FFFFFF"/>
+          </a:solidFill>
+          <a:ln/>
+          <a:effectLst>
+            <a:outerShdw sx="100000" sy="100000" kx="0" ky="0" algn="bl" rotWithShape="0" blurRad="101600" dist="25400" dir="5400000">
+              <a:srgbClr val="0B1F3A">
+                <a:alpha val="10000"/>
+              </a:srgbClr>
+            </a:outerShdw>
+          </a:effectLst>
+        </p:spPr>
+      </p:sp>
+      <p:sp>
+        <p:nvSpPr>
+          <p:cNvPr id="16" name="Shape 14"/>
+          <p:cNvSpPr/>
+          <p:nvPr/>
+        </p:nvSpPr>
+        <p:spPr>
+          <a:xfrm>
+            <a:off x="7360920" y="2011680"/>
+            <a:ext cx="777240" cy="777240"/>
+          </a:xfrm>
+          <a:prstGeom prst="ellipse">
+            <a:avLst/>
+          </a:prstGeom>
+          <a:solidFill>
+            <a:srgbClr val="2E9D4F"/>
+          </a:solidFill>
+          <a:ln/>
+        </p:spPr>
+      </p:sp>
+      <p:sp>
+        <p:nvSpPr>
+          <p:cNvPr id="17" name="Text 15"/>
+          <p:cNvSpPr txBox="1"/>
+          <p:nvPr/>
+        </p:nvSpPr>
+        <p:spPr>
+          <a:xfrm>
+            <a:off x="7360920" y="2103120"/>
+            <a:ext cx="777240" cy="594360"/>
+          </a:xfrm>
+          <a:prstGeom prst="rect">
+            <a:avLst/>
+          </a:prstGeom>
+          <a:noFill/>
+          <a:ln/>
+        </p:spPr>
+        <p:txBody>
+          <a:bodyPr wrap="square" lIns="0" tIns="0" rIns="0" bIns="0" rtlCol="0" anchor="ctr"/>
+          <a:lstStyle/>
+          <a:p>
+            <a:pPr algn="ctr" indent="0" marL="0">
+              <a:buNone/>
+            </a:pPr>
+            <a:r>
+              <a:rPr lang="en-US" sz="2800" b="1" dirty="0">
+                <a:solidFill>
+                  <a:srgbClr val="FFFFFF"/>
+                </a:solidFill>
+                <a:latin typeface="Calibri" pitchFamily="34" charset="0"/>
+                <a:ea typeface="Calibri" pitchFamily="34" charset="-122"/>
+                <a:cs typeface="Calibri" pitchFamily="34" charset="-120"/>
+              </a:rPr>
+              <a:t>3</a:t>
+            </a:r>
+            <a:endParaRPr lang="en-US" sz="2800" dirty="0"/>
+          </a:p>
+        </p:txBody>
+      </p:sp>
+      <p:sp>
+        <p:nvSpPr>
+          <p:cNvPr id="18" name="Text 16"/>
+          <p:cNvSpPr txBox="1"/>
+          <p:nvPr/>
+        </p:nvSpPr>
+        <p:spPr>
+          <a:xfrm>
+            <a:off x="6519672" y="2926080"/>
+            <a:ext cx="2468880" cy="960120"/>
+          </a:xfrm>
+          <a:prstGeom prst="rect">
+            <a:avLst/>
+          </a:prstGeom>
+          <a:noFill/>
+          <a:ln/>
+        </p:spPr>
+        <p:txBody>
+          <a:bodyPr wrap="square" lIns="0" tIns="0" rIns="0" bIns="0" rtlCol="0" anchor="ctr"/>
+          <a:lstStyle/>
+          <a:p>
+            <a:pPr algn="ctr" indent="0" marL="0">
+              <a:buNone/>
+            </a:pPr>
+            <a:r>
+              <a:rPr lang="en-US" sz="2200" b="1" dirty="0">
+                <a:solidFill>
+                  <a:srgbClr val="0B1F3A"/>
+                </a:solidFill>
+                <a:latin typeface="Calibri" pitchFamily="34" charset="0"/>
+                <a:ea typeface="Calibri" pitchFamily="34" charset="-122"/>
+                <a:cs typeface="Calibri" pitchFamily="34" charset="-120"/>
+              </a:rPr>
+              <a:t>Start a walk</a:t>
+            </a:r>
+            <a:endParaRPr lang="en-US" sz="2200" dirty="0"/>
+          </a:p>
+        </p:txBody>
+      </p:sp>
+      <p:sp>
+        <p:nvSpPr>
+          <p:cNvPr id="19" name="Text 17"/>
+          <p:cNvSpPr txBox="1"/>
+          <p:nvPr/>
+        </p:nvSpPr>
+        <p:spPr>
+          <a:xfrm>
+            <a:off x="6537960" y="3931920"/>
+            <a:ext cx="2423160" cy="1965960"/>
+          </a:xfrm>
+          <a:prstGeom prst="rect">
+            <a:avLst/>
+          </a:prstGeom>
+          <a:noFill/>
+          <a:ln/>
+        </p:spPr>
+        <p:txBody>
+          <a:bodyPr wrap="square" lIns="0" tIns="0" rIns="0" bIns="0" rtlCol="0" anchor="ctr"/>
+          <a:lstStyle/>
+          <a:p>
+            <a:pPr algn="ctr" indent="0" marL="0">
+              <a:buNone/>
+            </a:pPr>
+            <a:r>
+              <a:rPr lang="en-US" sz="1600" dirty="0">
+                <a:solidFill>
+                  <a:srgbClr val="4A6358"/>
+                </a:solidFill>
+                <a:latin typeface="Calibri" pitchFamily="34" charset="0"/>
+                <a:ea typeface="Calibri" pitchFamily="34" charset="-122"/>
+                <a:cs typeface="Calibri" pitchFamily="34" charset="-120"/>
+              </a:rPr>
+              <a:t>Fern leads. The trail blooms on the map as Demo Walk runs.</a:t>
+            </a:r>
+            <a:endParaRPr lang="en-US" sz="1600" dirty="0"/>
+          </a:p>
+        </p:txBody>
+      </p:sp>
+      <p:sp>
+        <p:nvSpPr>
+          <p:cNvPr id="20" name="Shape 18"/>
+          <p:cNvSpPr/>
+          <p:nvPr/>
+        </p:nvSpPr>
+        <p:spPr>
+          <a:xfrm>
+            <a:off x="9281160" y="1783080"/>
+            <a:ext cx="2788920" cy="4434840"/>
+          </a:xfrm>
+          <a:prstGeom prst="roundRect">
+            <a:avLst>
+              <a:gd name="adj" fmla="val 3934"/>
+            </a:avLst>
+          </a:prstGeom>
+          <a:solidFill>
+            <a:srgbClr val="FFFFFF"/>
+          </a:solidFill>
+          <a:ln/>
+          <a:effectLst>
+            <a:outerShdw sx="100000" sy="100000" kx="0" ky="0" algn="bl" rotWithShape="0" blurRad="101600" dist="25400" dir="5400000">
+              <a:srgbClr val="0B1F3A">
+                <a:alpha val="10000"/>
+              </a:srgbClr>
+            </a:outerShdw>
+          </a:effectLst>
+        </p:spPr>
+      </p:sp>
+      <p:sp>
+        <p:nvSpPr>
+          <p:cNvPr id="21" name="Shape 19"/>
+          <p:cNvSpPr/>
+          <p:nvPr/>
+        </p:nvSpPr>
+        <p:spPr>
+          <a:xfrm>
+            <a:off x="10287000" y="2011680"/>
+            <a:ext cx="777240" cy="777240"/>
+          </a:xfrm>
+          <a:prstGeom prst="ellipse">
+            <a:avLst/>
+          </a:prstGeom>
+          <a:solidFill>
+            <a:srgbClr val="2E9D4F"/>
+          </a:solidFill>
+          <a:ln/>
+        </p:spPr>
+      </p:sp>
+      <p:sp>
+        <p:nvSpPr>
+          <p:cNvPr id="22" name="Text 20"/>
+          <p:cNvSpPr txBox="1"/>
+          <p:nvPr/>
+        </p:nvSpPr>
+        <p:spPr>
+          <a:xfrm>
+            <a:off x="10287000" y="2103120"/>
+            <a:ext cx="777240" cy="594360"/>
+          </a:xfrm>
+          <a:prstGeom prst="rect">
+            <a:avLst/>
+          </a:prstGeom>
+          <a:noFill/>
+          <a:ln/>
+        </p:spPr>
+        <p:txBody>
+          <a:bodyPr wrap="square" lIns="0" tIns="0" rIns="0" bIns="0" rtlCol="0" anchor="ctr"/>
+          <a:lstStyle/>
+          <a:p>
+            <a:pPr algn="ctr" indent="0" marL="0">
+              <a:buNone/>
+            </a:pPr>
+            <a:r>
+              <a:rPr lang="en-US" sz="2800" b="1" dirty="0">
+                <a:solidFill>
+                  <a:srgbClr val="FFFFFF"/>
+                </a:solidFill>
+                <a:latin typeface="Calibri" pitchFamily="34" charset="0"/>
+                <a:ea typeface="Calibri" pitchFamily="34" charset="-122"/>
+                <a:cs typeface="Calibri" pitchFamily="34" charset="-120"/>
+              </a:rPr>
+              <a:t>4</a:t>
+            </a:r>
+            <a:endParaRPr lang="en-US" sz="2800" dirty="0"/>
+          </a:p>
+        </p:txBody>
+      </p:sp>
+      <p:sp>
+        <p:nvSpPr>
+          <p:cNvPr id="23" name="Text 21"/>
+          <p:cNvSpPr txBox="1"/>
+          <p:nvPr/>
+        </p:nvSpPr>
+        <p:spPr>
+          <a:xfrm>
+            <a:off x="9445752" y="2926080"/>
+            <a:ext cx="2468880" cy="960120"/>
+          </a:xfrm>
+          <a:prstGeom prst="rect">
+            <a:avLst/>
+          </a:prstGeom>
+          <a:noFill/>
+          <a:ln/>
+        </p:spPr>
+        <p:txBody>
+          <a:bodyPr wrap="square" lIns="0" tIns="0" rIns="0" bIns="0" rtlCol="0" anchor="ctr"/>
+          <a:lstStyle/>
+          <a:p>
+            <a:pPr algn="ctr" indent="0" marL="0">
+              <a:buNone/>
+            </a:pPr>
+            <a:r>
+              <a:rPr lang="en-US" sz="2200" b="1" dirty="0">
+                <a:solidFill>
+                  <a:srgbClr val="0B1F3A"/>
+                </a:solidFill>
+                <a:latin typeface="Calibri" pitchFamily="34" charset="0"/>
+                <a:ea typeface="Calibri" pitchFamily="34" charset="-122"/>
+                <a:cs typeface="Calibri" pitchFamily="34" charset="-120"/>
+              </a:rPr>
+              <a:t>Capture</a:t>
+            </a:r>
+            <a:endParaRPr lang="en-US" sz="2200" dirty="0"/>
+          </a:p>
+        </p:txBody>
+      </p:sp>
+      <p:sp>
+        <p:nvSpPr>
+          <p:cNvPr id="24" name="Text 22"/>
+          <p:cNvSpPr txBox="1"/>
+          <p:nvPr/>
+        </p:nvSpPr>
+        <p:spPr>
+          <a:xfrm>
+            <a:off x="9464040" y="3931920"/>
+            <a:ext cx="2423160" cy="1965960"/>
+          </a:xfrm>
+          <a:prstGeom prst="rect">
+            <a:avLst/>
+          </a:prstGeom>
+          <a:noFill/>
+          <a:ln/>
+        </p:spPr>
+        <p:txBody>
+          <a:bodyPr wrap="square" lIns="0" tIns="0" rIns="0" bIns="0" rtlCol="0" anchor="ctr"/>
+          <a:lstStyle/>
+          <a:p>
+            <a:pPr algn="ctr" indent="0" marL="0">
+              <a:buNone/>
+            </a:pPr>
+            <a:r>
+              <a:rPr lang="en-US" sz="1600" dirty="0">
+                <a:solidFill>
+                  <a:srgbClr val="4A6358"/>
+                </a:solidFill>
+                <a:latin typeface="Calibri" pitchFamily="34" charset="0"/>
+                <a:ea typeface="Calibri" pitchFamily="34" charset="-122"/>
+                <a:cs typeface="Calibri" pitchFamily="34" charset="-120"/>
+              </a:rPr>
+              <a:t>When you arrive, capture the landmark or hatch from the walk.</a:t>
             </a:r>
             <a:endParaRPr lang="en-US" sz="1600" dirty="0"/>
           </a:p>
@@ -3722,8 +4506,8 @@
         </p:nvSpPr>
         <p:spPr>
           <a:xfrm>
-            <a:off x="502920" y="292608"/>
-            <a:ext cx="11155680" cy="640080"/>
+            <a:off x="502920" y="256032"/>
+            <a:ext cx="11155680" cy="566928"/>
           </a:xfrm>
           <a:prstGeom prst="rect">
             <a:avLst/>
@@ -3739,7 +4523,7 @@
               <a:buNone/>
             </a:pPr>
             <a:r>
-              <a:rPr lang="en-US" sz="3600" b="1" dirty="0">
+              <a:rPr lang="en-US" sz="3200" b="1" dirty="0">
                 <a:solidFill>
                   <a:srgbClr val="0B1F3A"/>
                 </a:solidFill>
@@ -3749,7 +4533,7 @@
               </a:rPr>
               <a:t>How we built it</a:t>
             </a:r>
-            <a:endParaRPr lang="en-US" sz="3600" dirty="0"/>
+            <a:endParaRPr lang="en-US" sz="3200" dirty="0"/>
           </a:p>
         </p:txBody>
       </p:sp>
@@ -3761,12 +4545,12 @@
         </p:nvSpPr>
         <p:spPr>
           <a:xfrm>
-            <a:off x="502920" y="1097280"/>
-            <a:ext cx="3337560" cy="1965960"/>
+            <a:off x="502920" y="960120"/>
+            <a:ext cx="3383280" cy="1874520"/>
           </a:xfrm>
           <a:prstGeom prst="roundRect">
             <a:avLst>
-              <a:gd name="adj" fmla="val 6512"/>
+              <a:gd name="adj" fmla="val 5854"/>
             </a:avLst>
           </a:prstGeom>
           <a:solidFill>
@@ -3774,9 +4558,9 @@
           </a:solidFill>
           <a:ln/>
           <a:effectLst>
-            <a:outerShdw sx="100000" sy="100000" kx="0" ky="0" algn="bl" rotWithShape="0" blurRad="127000" dist="38100" dir="5400000">
+            <a:outerShdw sx="100000" sy="100000" kx="0" ky="0" algn="bl" rotWithShape="0" blurRad="101600" dist="25400" dir="5400000">
               <a:srgbClr val="0B1F3A">
-                <a:alpha val="8000"/>
+                <a:alpha val="10000"/>
               </a:srgbClr>
             </a:outerShdw>
           </a:effectLst>
@@ -3790,8 +4574,8 @@
         </p:nvSpPr>
         <p:spPr>
           <a:xfrm>
-            <a:off x="685800" y="1234440"/>
-            <a:ext cx="2971800" cy="365760"/>
+            <a:off x="731520" y="1097280"/>
+            <a:ext cx="2926080" cy="384048"/>
           </a:xfrm>
           <a:prstGeom prst="rect">
             <a:avLst/>
@@ -3829,8 +4613,8 @@
         </p:nvSpPr>
         <p:spPr>
           <a:xfrm>
-            <a:off x="685800" y="1645920"/>
-            <a:ext cx="2971800" cy="1234440"/>
+            <a:off x="731520" y="1536192"/>
+            <a:ext cx="2926080" cy="1097280"/>
           </a:xfrm>
           <a:prstGeom prst="rect">
             <a:avLst/>
@@ -3902,24 +4686,24 @@
         </p:nvSpPr>
         <p:spPr>
           <a:xfrm>
-            <a:off x="3703320" y="1737360"/>
-            <a:ext cx="457200" cy="457200"/>
-          </a:xfrm>
-          <a:prstGeom prst="rect">
-            <a:avLst/>
-          </a:prstGeom>
-          <a:noFill/>
-          <a:ln/>
-        </p:spPr>
-        <p:txBody>
-          <a:bodyPr wrap="square" lIns="0" tIns="0" rIns="0" bIns="0" rtlCol="0" anchor="ctr"/>
-          <a:lstStyle/>
-          <a:p>
-            <a:pPr indent="0" marL="0">
-              <a:buNone/>
-            </a:pPr>
-            <a:r>
-              <a:rPr lang="en-US" sz="2800" b="1" dirty="0">
+            <a:off x="3886200" y="1554480"/>
+            <a:ext cx="640080" cy="457200"/>
+          </a:xfrm>
+          <a:prstGeom prst="rect">
+            <a:avLst/>
+          </a:prstGeom>
+          <a:noFill/>
+          <a:ln/>
+        </p:spPr>
+        <p:txBody>
+          <a:bodyPr wrap="square" lIns="0" tIns="0" rIns="0" bIns="0" rtlCol="0" anchor="ctr"/>
+          <a:lstStyle/>
+          <a:p>
+            <a:pPr algn="ctr" indent="0" marL="0">
+              <a:buNone/>
+            </a:pPr>
+            <a:r>
+              <a:rPr lang="en-US" sz="2600" b="1" dirty="0">
                 <a:solidFill>
                   <a:srgbClr val="2E9D4F"/>
                 </a:solidFill>
@@ -3929,7 +4713,7 @@
               </a:rPr>
               <a:t>→</a:t>
             </a:r>
-            <a:endParaRPr lang="en-US" sz="2800" dirty="0"/>
+            <a:endParaRPr lang="en-US" sz="2600" dirty="0"/>
           </a:p>
         </p:txBody>
       </p:sp>
@@ -3941,12 +4725,12 @@
         </p:nvSpPr>
         <p:spPr>
           <a:xfrm>
-            <a:off x="4434840" y="1097280"/>
-            <a:ext cx="3337560" cy="1965960"/>
+            <a:off x="4526280" y="960120"/>
+            <a:ext cx="3383280" cy="1874520"/>
           </a:xfrm>
           <a:prstGeom prst="roundRect">
             <a:avLst>
-              <a:gd name="adj" fmla="val 6512"/>
+              <a:gd name="adj" fmla="val 5854"/>
             </a:avLst>
           </a:prstGeom>
           <a:solidFill>
@@ -3954,9 +4738,9 @@
           </a:solidFill>
           <a:ln/>
           <a:effectLst>
-            <a:outerShdw sx="100000" sy="100000" kx="0" ky="0" algn="bl" rotWithShape="0" blurRad="127000" dist="38100" dir="5400000">
+            <a:outerShdw sx="100000" sy="100000" kx="0" ky="0" algn="bl" rotWithShape="0" blurRad="101600" dist="25400" dir="5400000">
               <a:srgbClr val="0B1F3A">
-                <a:alpha val="8000"/>
+                <a:alpha val="10000"/>
               </a:srgbClr>
             </a:outerShdw>
           </a:effectLst>
@@ -3970,8 +4754,8 @@
         </p:nvSpPr>
         <p:spPr>
           <a:xfrm>
-            <a:off x="4617720" y="1234440"/>
-            <a:ext cx="2971800" cy="365760"/>
+            <a:off x="4754880" y="1097280"/>
+            <a:ext cx="2926080" cy="384048"/>
           </a:xfrm>
           <a:prstGeom prst="rect">
             <a:avLst/>
@@ -4009,8 +4793,8 @@
         </p:nvSpPr>
         <p:spPr>
           <a:xfrm>
-            <a:off x="4617720" y="1645920"/>
-            <a:ext cx="2971800" cy="1234440"/>
+            <a:off x="4754880" y="1536192"/>
+            <a:ext cx="2926080" cy="1097280"/>
           </a:xfrm>
           <a:prstGeom prst="rect">
             <a:avLst/>
@@ -4082,24 +4866,24 @@
         </p:nvSpPr>
         <p:spPr>
           <a:xfrm>
-            <a:off x="7635240" y="1737360"/>
-            <a:ext cx="457200" cy="457200"/>
-          </a:xfrm>
-          <a:prstGeom prst="rect">
-            <a:avLst/>
-          </a:prstGeom>
-          <a:noFill/>
-          <a:ln/>
-        </p:spPr>
-        <p:txBody>
-          <a:bodyPr wrap="square" lIns="0" tIns="0" rIns="0" bIns="0" rtlCol="0" anchor="ctr"/>
-          <a:lstStyle/>
-          <a:p>
-            <a:pPr indent="0" marL="0">
-              <a:buNone/>
-            </a:pPr>
-            <a:r>
-              <a:rPr lang="en-US" sz="2800" b="1" dirty="0">
+            <a:off x="7909560" y="1554480"/>
+            <a:ext cx="640080" cy="457200"/>
+          </a:xfrm>
+          <a:prstGeom prst="rect">
+            <a:avLst/>
+          </a:prstGeom>
+          <a:noFill/>
+          <a:ln/>
+        </p:spPr>
+        <p:txBody>
+          <a:bodyPr wrap="square" lIns="0" tIns="0" rIns="0" bIns="0" rtlCol="0" anchor="ctr"/>
+          <a:lstStyle/>
+          <a:p>
+            <a:pPr algn="ctr" indent="0" marL="0">
+              <a:buNone/>
+            </a:pPr>
+            <a:r>
+              <a:rPr lang="en-US" sz="2600" b="1" dirty="0">
                 <a:solidFill>
                   <a:srgbClr val="2E9D4F"/>
                 </a:solidFill>
@@ -4109,7 +4893,7 @@
               </a:rPr>
               <a:t>→</a:t>
             </a:r>
-            <a:endParaRPr lang="en-US" sz="2800" dirty="0"/>
+            <a:endParaRPr lang="en-US" sz="2600" dirty="0"/>
           </a:p>
         </p:txBody>
       </p:sp>
@@ -4121,12 +4905,12 @@
         </p:nvSpPr>
         <p:spPr>
           <a:xfrm>
-            <a:off x="8366760" y="1097280"/>
-            <a:ext cx="3337560" cy="1965960"/>
+            <a:off x="8549640" y="960120"/>
+            <a:ext cx="3383280" cy="1874520"/>
           </a:xfrm>
           <a:prstGeom prst="roundRect">
             <a:avLst>
-              <a:gd name="adj" fmla="val 6512"/>
+              <a:gd name="adj" fmla="val 5854"/>
             </a:avLst>
           </a:prstGeom>
           <a:solidFill>
@@ -4134,9 +4918,9 @@
           </a:solidFill>
           <a:ln/>
           <a:effectLst>
-            <a:outerShdw sx="100000" sy="100000" kx="0" ky="0" algn="bl" rotWithShape="0" blurRad="127000" dist="38100" dir="5400000">
+            <a:outerShdw sx="100000" sy="100000" kx="0" ky="0" algn="bl" rotWithShape="0" blurRad="101600" dist="25400" dir="5400000">
               <a:srgbClr val="0B1F3A">
-                <a:alpha val="8000"/>
+                <a:alpha val="10000"/>
               </a:srgbClr>
             </a:outerShdw>
           </a:effectLst>
@@ -4150,8 +4934,8 @@
         </p:nvSpPr>
         <p:spPr>
           <a:xfrm>
-            <a:off x="8549640" y="1234440"/>
-            <a:ext cx="2971800" cy="365760"/>
+            <a:off x="8778240" y="1097280"/>
+            <a:ext cx="2926080" cy="384048"/>
           </a:xfrm>
           <a:prstGeom prst="rect">
             <a:avLst/>
@@ -4189,8 +4973,8 @@
         </p:nvSpPr>
         <p:spPr>
           <a:xfrm>
-            <a:off x="8549640" y="1645920"/>
-            <a:ext cx="2971800" cy="1234440"/>
+            <a:off x="8778240" y="1536192"/>
+            <a:ext cx="2926080" cy="1097280"/>
           </a:xfrm>
           <a:prstGeom prst="rect">
             <a:avLst/>
@@ -4262,12 +5046,12 @@
         </p:nvSpPr>
         <p:spPr>
           <a:xfrm>
-            <a:off x="502920" y="3246120"/>
-            <a:ext cx="5623560" cy="1280160"/>
+            <a:off x="502920" y="3063240"/>
+            <a:ext cx="5623560" cy="1508760"/>
           </a:xfrm>
           <a:prstGeom prst="roundRect">
             <a:avLst>
-              <a:gd name="adj" fmla="val 10000"/>
+              <a:gd name="adj" fmla="val 7273"/>
             </a:avLst>
           </a:prstGeom>
           <a:solidFill>
@@ -4275,9 +5059,9 @@
           </a:solidFill>
           <a:ln/>
           <a:effectLst>
-            <a:outerShdw sx="100000" sy="100000" kx="0" ky="0" algn="bl" rotWithShape="0" blurRad="127000" dist="38100" dir="5400000">
+            <a:outerShdw sx="100000" sy="100000" kx="0" ky="0" algn="bl" rotWithShape="0" blurRad="101600" dist="25400" dir="5400000">
               <a:srgbClr val="0B1F3A">
-                <a:alpha val="8000"/>
+                <a:alpha val="10000"/>
               </a:srgbClr>
             </a:outerShdw>
           </a:effectLst>
@@ -4291,8 +5075,8 @@
         </p:nvSpPr>
         <p:spPr>
           <a:xfrm>
-            <a:off x="685800" y="3355848"/>
-            <a:ext cx="5257800" cy="320040"/>
+            <a:off x="731520" y="3227832"/>
+            <a:ext cx="5166360" cy="365760"/>
           </a:xfrm>
           <a:prstGeom prst="rect">
             <a:avLst/>
@@ -4308,7 +5092,7 @@
               <a:buNone/>
             </a:pPr>
             <a:r>
-              <a:rPr lang="en-US" sz="1600" b="1" dirty="0">
+              <a:rPr lang="en-US" sz="1800" b="1" dirty="0">
                 <a:solidFill>
                   <a:srgbClr val="2E9D4F"/>
                 </a:solidFill>
@@ -4318,7 +5102,7 @@
               </a:rPr>
               <a:t>Shared JavaScript game logic</a:t>
             </a:r>
-            <a:endParaRPr lang="en-US" sz="1600" dirty="0"/>
+            <a:endParaRPr lang="en-US" sz="1800" dirty="0"/>
           </a:p>
         </p:txBody>
       </p:sp>
@@ -4330,8 +5114,8 @@
         </p:nvSpPr>
         <p:spPr>
           <a:xfrm>
-            <a:off x="685800" y="3703320"/>
-            <a:ext cx="5257800" cy="685800"/>
+            <a:off x="731520" y="3630168"/>
+            <a:ext cx="5166360" cy="777240"/>
           </a:xfrm>
           <a:prstGeom prst="rect">
             <a:avLst/>
@@ -4347,7 +5131,7 @@
               <a:buNone/>
             </a:pPr>
             <a:r>
-              <a:rPr lang="en-US" sz="1400" dirty="0">
+              <a:rPr lang="en-US" sz="1500" dirty="0">
                 <a:solidFill>
                   <a:srgbClr val="163528"/>
                 </a:solidFill>
@@ -4357,7 +5141,7 @@
               </a:rPr>
               <a:t>core/ is the source of truth. Phone, server, and iMessage import the same rules.</a:t>
             </a:r>
-            <a:endParaRPr lang="en-US" sz="1400" dirty="0"/>
+            <a:endParaRPr lang="en-US" sz="1500" dirty="0"/>
           </a:p>
         </p:txBody>
       </p:sp>
@@ -4369,12 +5153,12 @@
         </p:nvSpPr>
         <p:spPr>
           <a:xfrm>
-            <a:off x="6355080" y="3246120"/>
-            <a:ext cx="5623560" cy="1280160"/>
+            <a:off x="6355080" y="3063240"/>
+            <a:ext cx="5623560" cy="1508760"/>
           </a:xfrm>
           <a:prstGeom prst="roundRect">
             <a:avLst>
-              <a:gd name="adj" fmla="val 10000"/>
+              <a:gd name="adj" fmla="val 7273"/>
             </a:avLst>
           </a:prstGeom>
           <a:solidFill>
@@ -4382,9 +5166,9 @@
           </a:solidFill>
           <a:ln/>
           <a:effectLst>
-            <a:outerShdw sx="100000" sy="100000" kx="0" ky="0" algn="bl" rotWithShape="0" blurRad="127000" dist="38100" dir="5400000">
+            <a:outerShdw sx="100000" sy="100000" kx="0" ky="0" algn="bl" rotWithShape="0" blurRad="101600" dist="25400" dir="5400000">
               <a:srgbClr val="0B1F3A">
-                <a:alpha val="8000"/>
+                <a:alpha val="10000"/>
               </a:srgbClr>
             </a:outerShdw>
           </a:effectLst>
@@ -4398,8 +5182,8 @@
         </p:nvSpPr>
         <p:spPr>
           <a:xfrm>
-            <a:off x="6537960" y="3355848"/>
-            <a:ext cx="5257800" cy="320040"/>
+            <a:off x="6583680" y="3227832"/>
+            <a:ext cx="5166360" cy="365760"/>
           </a:xfrm>
           <a:prstGeom prst="rect">
             <a:avLst/>
@@ -4415,7 +5199,7 @@
               <a:buNone/>
             </a:pPr>
             <a:r>
-              <a:rPr lang="en-US" sz="1600" b="1" dirty="0">
+              <a:rPr lang="en-US" sz="1800" b="1" dirty="0">
                 <a:solidFill>
                   <a:srgbClr val="2E9D4F"/>
                 </a:solidFill>
@@ -4425,7 +5209,7 @@
               </a:rPr>
               <a:t>Grounded facts and routes</a:t>
             </a:r>
-            <a:endParaRPr lang="en-US" sz="1600" dirty="0"/>
+            <a:endParaRPr lang="en-US" sz="1800" dirty="0"/>
           </a:p>
         </p:txBody>
       </p:sp>
@@ -4437,8 +5221,8 @@
         </p:nvSpPr>
         <p:spPr>
           <a:xfrm>
-            <a:off x="6537960" y="3703320"/>
-            <a:ext cx="5257800" cy="685800"/>
+            <a:off x="6583680" y="3630168"/>
+            <a:ext cx="5166360" cy="777240"/>
           </a:xfrm>
           <a:prstGeom prst="rect">
             <a:avLst/>
@@ -4454,7 +5238,7 @@
               <a:buNone/>
             </a:pPr>
             <a:r>
-              <a:rPr lang="en-US" sz="1400" dirty="0">
+              <a:rPr lang="en-US" sz="1500" dirty="0">
                 <a:solidFill>
                   <a:srgbClr val="163528"/>
                 </a:solidFill>
@@ -4462,9 +5246,9 @@
                 <a:ea typeface="Calibri" pitchFamily="34" charset="-122"/>
                 <a:cs typeface="Calibri" pitchFamily="34" charset="-120"/>
               </a:rPr>
-              <a:t>Place facts come from Wikipedia. Walking routes come from OpenStreetMap. Agents do not invent landmarks.</a:t>
-            </a:r>
-            <a:endParaRPr lang="en-US" sz="1400" dirty="0"/>
+              <a:t>Place facts from Wikipedia. Walking routes from OpenStreetMap. Agents do not invent landmarks.</a:t>
+            </a:r>
+            <a:endParaRPr lang="en-US" sz="1500" dirty="0"/>
           </a:p>
         </p:txBody>
       </p:sp>
@@ -4476,12 +5260,12 @@
         </p:nvSpPr>
         <p:spPr>
           <a:xfrm>
-            <a:off x="502920" y="4663440"/>
-            <a:ext cx="5623560" cy="1280160"/>
+            <a:off x="502920" y="4709160"/>
+            <a:ext cx="5623560" cy="1508760"/>
           </a:xfrm>
           <a:prstGeom prst="roundRect">
             <a:avLst>
-              <a:gd name="adj" fmla="val 10000"/>
+              <a:gd name="adj" fmla="val 7273"/>
             </a:avLst>
           </a:prstGeom>
           <a:solidFill>
@@ -4489,9 +5273,9 @@
           </a:solidFill>
           <a:ln/>
           <a:effectLst>
-            <a:outerShdw sx="100000" sy="100000" kx="0" ky="0" algn="bl" rotWithShape="0" blurRad="127000" dist="38100" dir="5400000">
+            <a:outerShdw sx="100000" sy="100000" kx="0" ky="0" algn="bl" rotWithShape="0" blurRad="101600" dist="25400" dir="5400000">
               <a:srgbClr val="0B1F3A">
-                <a:alpha val="8000"/>
+                <a:alpha val="10000"/>
               </a:srgbClr>
             </a:outerShdw>
           </a:effectLst>
@@ -4505,8 +5289,8 @@
         </p:nvSpPr>
         <p:spPr>
           <a:xfrm>
-            <a:off x="685800" y="4773168"/>
-            <a:ext cx="5257800" cy="320040"/>
+            <a:off x="731520" y="4873752"/>
+            <a:ext cx="5166360" cy="365760"/>
           </a:xfrm>
           <a:prstGeom prst="rect">
             <a:avLst/>
@@ -4522,7 +5306,7 @@
               <a:buNone/>
             </a:pPr>
             <a:r>
-              <a:rPr lang="en-US" sz="1600" b="1" dirty="0">
+              <a:rPr lang="en-US" sz="1800" b="1" dirty="0">
                 <a:solidFill>
                   <a:srgbClr val="2E9D4F"/>
                 </a:solidFill>
@@ -4532,7 +5316,7 @@
               </a:rPr>
               <a:t>Voice and art, with fallbacks</a:t>
             </a:r>
-            <a:endParaRPr lang="en-US" sz="1600" dirty="0"/>
+            <a:endParaRPr lang="en-US" sz="1800" dirty="0"/>
           </a:p>
         </p:txBody>
       </p:sp>
@@ -4544,8 +5328,8 @@
         </p:nvSpPr>
         <p:spPr>
           <a:xfrm>
-            <a:off x="685800" y="5120640"/>
-            <a:ext cx="5257800" cy="685800"/>
+            <a:off x="731520" y="5276088"/>
+            <a:ext cx="5166360" cy="777240"/>
           </a:xfrm>
           <a:prstGeom prst="rect">
             <a:avLst/>
@@ -4561,7 +5345,7 @@
               <a:buNone/>
             </a:pPr>
             <a:r>
-              <a:rPr lang="en-US" sz="1400" dirty="0">
+              <a:rPr lang="en-US" sz="1500" dirty="0">
                 <a:solidFill>
                   <a:srgbClr val="163528"/>
                 </a:solidFill>
@@ -4569,9 +5353,9 @@
                 <a:ea typeface="Calibri" pitchFamily="34" charset="-122"/>
                 <a:cs typeface="Calibri" pitchFamily="34" charset="-120"/>
               </a:rPr>
-              <a:t>Moss can use ElevenLabs. Pip and Fern can use Grok Voice and Imagine when keys are set. Otherwise on-device speech and original SVG art.</a:t>
-            </a:r>
-            <a:endParaRPr lang="en-US" sz="1400" dirty="0"/>
+              <a:t>Moss can use ElevenLabs. Pip and Fern can use Grok when keys are set. Else on-device speech and original art.</a:t>
+            </a:r>
+            <a:endParaRPr lang="en-US" sz="1500" dirty="0"/>
           </a:p>
         </p:txBody>
       </p:sp>
@@ -4583,12 +5367,12 @@
         </p:nvSpPr>
         <p:spPr>
           <a:xfrm>
-            <a:off x="6355080" y="4663440"/>
-            <a:ext cx="5623560" cy="1280160"/>
+            <a:off x="6355080" y="4709160"/>
+            <a:ext cx="5623560" cy="1508760"/>
           </a:xfrm>
           <a:prstGeom prst="roundRect">
             <a:avLst>
-              <a:gd name="adj" fmla="val 10000"/>
+              <a:gd name="adj" fmla="val 7273"/>
             </a:avLst>
           </a:prstGeom>
           <a:solidFill>
@@ -4596,9 +5380,9 @@
           </a:solidFill>
           <a:ln/>
           <a:effectLst>
-            <a:outerShdw sx="100000" sy="100000" kx="0" ky="0" algn="bl" rotWithShape="0" blurRad="127000" dist="38100" dir="5400000">
+            <a:outerShdw sx="100000" sy="100000" kx="0" ky="0" algn="bl" rotWithShape="0" blurRad="101600" dist="25400" dir="5400000">
               <a:srgbClr val="0B1F3A">
-                <a:alpha val="8000"/>
+                <a:alpha val="10000"/>
               </a:srgbClr>
             </a:outerShdw>
           </a:effectLst>
@@ -4612,8 +5396,8 @@
         </p:nvSpPr>
         <p:spPr>
           <a:xfrm>
-            <a:off x="6537960" y="4773168"/>
-            <a:ext cx="5257800" cy="320040"/>
+            <a:off x="6583680" y="4873752"/>
+            <a:ext cx="5166360" cy="365760"/>
           </a:xfrm>
           <a:prstGeom prst="rect">
             <a:avLst/>
@@ -4629,7 +5413,7 @@
               <a:buNone/>
             </a:pPr>
             <a:r>
-              <a:rPr lang="en-US" sz="1600" b="1" dirty="0">
+              <a:rPr lang="en-US" sz="1800" b="1" dirty="0">
                 <a:solidFill>
                   <a:srgbClr val="2E9D4F"/>
                 </a:solidFill>
@@ -4639,7 +5423,7 @@
               </a:rPr>
               <a:t>Cursor-assisted build</a:t>
             </a:r>
-            <a:endParaRPr lang="en-US" sz="1600" dirty="0"/>
+            <a:endParaRPr lang="en-US" sz="1800" dirty="0"/>
           </a:p>
         </p:txBody>
       </p:sp>
@@ -4651,8 +5435,8 @@
         </p:nvSpPr>
         <p:spPr>
           <a:xfrm>
-            <a:off x="6537960" y="5120640"/>
-            <a:ext cx="5257800" cy="685800"/>
+            <a:off x="6583680" y="5276088"/>
+            <a:ext cx="5166360" cy="777240"/>
           </a:xfrm>
           <a:prstGeom prst="rect">
             <a:avLst/>
@@ -4668,7 +5452,7 @@
               <a:buNone/>
             </a:pPr>
             <a:r>
-              <a:rPr lang="en-US" sz="1400" dirty="0">
+              <a:rPr lang="en-US" sz="1500" dirty="0">
                 <a:solidFill>
                   <a:srgbClr val="163528"/>
                 </a:solidFill>
@@ -4678,7 +5462,7 @@
               </a:rPr>
               <a:t>SpaceX track: designed and iterated in Cursor. iMessage agent uses Photon Spectrum.</a:t>
             </a:r>
-            <a:endParaRPr lang="en-US" sz="1400" dirty="0"/>
+            <a:endParaRPr lang="en-US" sz="1500" dirty="0"/>
           </a:p>
         </p:txBody>
       </p:sp>
@@ -4717,8 +5501,8 @@
         </p:nvSpPr>
         <p:spPr>
           <a:xfrm>
-            <a:off x="502920" y="292608"/>
-            <a:ext cx="11155680" cy="640080"/>
+            <a:off x="502920" y="256032"/>
+            <a:ext cx="11155680" cy="566928"/>
           </a:xfrm>
           <a:prstGeom prst="rect">
             <a:avLst/>
@@ -4734,7 +5518,7 @@
               <a:buNone/>
             </a:pPr>
             <a:r>
-              <a:rPr lang="en-US" sz="3600" b="1" dirty="0">
+              <a:rPr lang="en-US" sz="3200" b="1" dirty="0">
                 <a:solidFill>
                   <a:srgbClr val="0B1F3A"/>
                 </a:solidFill>
@@ -4744,7 +5528,7 @@
               </a:rPr>
               <a:t>What makes it special</a:t>
             </a:r>
-            <a:endParaRPr lang="en-US" sz="3600" dirty="0"/>
+            <a:endParaRPr lang="en-US" sz="3200" dirty="0"/>
           </a:p>
         </p:txBody>
       </p:sp>
@@ -4756,12 +5540,12 @@
         </p:nvSpPr>
         <p:spPr>
           <a:xfrm>
-            <a:off x="502920" y="1097280"/>
-            <a:ext cx="3611880" cy="3977640"/>
+            <a:off x="502920" y="960120"/>
+            <a:ext cx="3611880" cy="4160520"/>
           </a:xfrm>
           <a:prstGeom prst="roundRect">
             <a:avLst>
-              <a:gd name="adj" fmla="val 3544"/>
+              <a:gd name="adj" fmla="val 3038"/>
             </a:avLst>
           </a:prstGeom>
           <a:solidFill>
@@ -4769,9 +5553,9 @@
           </a:solidFill>
           <a:ln/>
           <a:effectLst>
-            <a:outerShdw sx="100000" sy="100000" kx="0" ky="0" algn="bl" rotWithShape="0" blurRad="127000" dist="38100" dir="5400000">
+            <a:outerShdw sx="100000" sy="100000" kx="0" ky="0" algn="bl" rotWithShape="0" blurRad="101600" dist="25400" dir="5400000">
               <a:srgbClr val="0B1F3A">
-                <a:alpha val="8000"/>
+                <a:alpha val="10000"/>
               </a:srgbClr>
             </a:outerShdw>
           </a:effectLst>
@@ -4793,8 +5577,8 @@
         </p:blipFill>
         <p:spPr>
           <a:xfrm>
-            <a:off x="1554480" y="1280160"/>
-            <a:ext cx="1508760" cy="1508760"/>
+            <a:off x="1527048" y="1170432"/>
+            <a:ext cx="1554480" cy="1554480"/>
           </a:xfrm>
           <a:prstGeom prst="rect">
             <a:avLst/>
@@ -4809,8 +5593,8 @@
         </p:nvSpPr>
         <p:spPr>
           <a:xfrm>
-            <a:off x="685800" y="2926080"/>
-            <a:ext cx="3246120" cy="777240"/>
+            <a:off x="704088" y="2880360"/>
+            <a:ext cx="3200400" cy="777240"/>
           </a:xfrm>
           <a:prstGeom prst="rect">
             <a:avLst/>
@@ -4848,8 +5632,8 @@
         </p:nvSpPr>
         <p:spPr>
           <a:xfrm>
-            <a:off x="685800" y="3749040"/>
-            <a:ext cx="3246120" cy="1097280"/>
+            <a:off x="704088" y="3703320"/>
+            <a:ext cx="3200400" cy="1188720"/>
           </a:xfrm>
           <a:prstGeom prst="rect">
             <a:avLst/>
@@ -4887,12 +5671,12 @@
         </p:nvSpPr>
         <p:spPr>
           <a:xfrm>
-            <a:off x="4343400" y="1097280"/>
-            <a:ext cx="3611880" cy="3977640"/>
+            <a:off x="4343400" y="960120"/>
+            <a:ext cx="3611880" cy="4160520"/>
           </a:xfrm>
           <a:prstGeom prst="roundRect">
             <a:avLst>
-              <a:gd name="adj" fmla="val 3544"/>
+              <a:gd name="adj" fmla="val 3038"/>
             </a:avLst>
           </a:prstGeom>
           <a:solidFill>
@@ -4900,9 +5684,9 @@
           </a:solidFill>
           <a:ln/>
           <a:effectLst>
-            <a:outerShdw sx="100000" sy="100000" kx="0" ky="0" algn="bl" rotWithShape="0" blurRad="127000" dist="38100" dir="5400000">
+            <a:outerShdw sx="100000" sy="100000" kx="0" ky="0" algn="bl" rotWithShape="0" blurRad="101600" dist="25400" dir="5400000">
               <a:srgbClr val="0B1F3A">
-                <a:alpha val="8000"/>
+                <a:alpha val="10000"/>
               </a:srgbClr>
             </a:outerShdw>
           </a:effectLst>
@@ -4924,8 +5708,8 @@
         </p:blipFill>
         <p:spPr>
           <a:xfrm>
-            <a:off x="5394960" y="1280160"/>
-            <a:ext cx="1508760" cy="1508760"/>
+            <a:off x="5367528" y="1170432"/>
+            <a:ext cx="1554480" cy="1554480"/>
           </a:xfrm>
           <a:prstGeom prst="rect">
             <a:avLst/>
@@ -4940,8 +5724,8 @@
         </p:nvSpPr>
         <p:spPr>
           <a:xfrm>
-            <a:off x="4526280" y="2926080"/>
-            <a:ext cx="3246120" cy="777240"/>
+            <a:off x="4544568" y="2880360"/>
+            <a:ext cx="3200400" cy="777240"/>
           </a:xfrm>
           <a:prstGeom prst="rect">
             <a:avLst/>
@@ -4965,7 +5749,7 @@
                 <a:ea typeface="Calibri" pitchFamily="34" charset="-122"/>
                 <a:cs typeface="Calibri" pitchFamily="34" charset="-120"/>
               </a:rPr>
-              <a:t>Walking earns creatures</a:t>
+              <a:t>Walking earns pets</a:t>
             </a:r>
             <a:endParaRPr lang="en-US" sz="2000" dirty="0"/>
           </a:p>
@@ -4979,8 +5763,8 @@
         </p:nvSpPr>
         <p:spPr>
           <a:xfrm>
-            <a:off x="4526280" y="3749040"/>
-            <a:ext cx="3246120" cy="1097280"/>
+            <a:off x="4544568" y="3703320"/>
+            <a:ext cx="3200400" cy="1188720"/>
           </a:xfrm>
           <a:prstGeom prst="rect">
             <a:avLst/>
@@ -5004,7 +5788,7 @@
                 <a:ea typeface="Calibri" pitchFamily="34" charset="-122"/>
                 <a:cs typeface="Calibri" pitchFamily="34" charset="-120"/>
               </a:rPr>
-              <a:t>Distance fills eggs, ranks, and landmark captures you can actually complete at the table in Demo Walk.</a:t>
+              <a:t>Distance fills eggs, ranks, and landmark captures — completable at the table in Demo Walk.</a:t>
             </a:r>
             <a:endParaRPr lang="en-US" sz="1500" dirty="0"/>
           </a:p>
@@ -5018,12 +5802,12 @@
         </p:nvSpPr>
         <p:spPr>
           <a:xfrm>
-            <a:off x="8183880" y="1097280"/>
-            <a:ext cx="3611880" cy="3977640"/>
+            <a:off x="8183880" y="960120"/>
+            <a:ext cx="3611880" cy="4160520"/>
           </a:xfrm>
           <a:prstGeom prst="roundRect">
             <a:avLst>
-              <a:gd name="adj" fmla="val 3544"/>
+              <a:gd name="adj" fmla="val 3038"/>
             </a:avLst>
           </a:prstGeom>
           <a:solidFill>
@@ -5031,9 +5815,9 @@
           </a:solidFill>
           <a:ln/>
           <a:effectLst>
-            <a:outerShdw sx="100000" sy="100000" kx="0" ky="0" algn="bl" rotWithShape="0" blurRad="127000" dist="38100" dir="5400000">
+            <a:outerShdw sx="100000" sy="100000" kx="0" ky="0" algn="bl" rotWithShape="0" blurRad="101600" dist="25400" dir="5400000">
               <a:srgbClr val="0B1F3A">
-                <a:alpha val="8000"/>
+                <a:alpha val="10000"/>
               </a:srgbClr>
             </a:outerShdw>
           </a:effectLst>
@@ -5055,8 +5839,8 @@
         </p:blipFill>
         <p:spPr>
           <a:xfrm>
-            <a:off x="9235440" y="1280160"/>
-            <a:ext cx="1508760" cy="1508760"/>
+            <a:off x="9208008" y="1170432"/>
+            <a:ext cx="1554480" cy="1554480"/>
           </a:xfrm>
           <a:prstGeom prst="rect">
             <a:avLst/>
@@ -5071,8 +5855,8 @@
         </p:nvSpPr>
         <p:spPr>
           <a:xfrm>
-            <a:off x="8366760" y="2926080"/>
-            <a:ext cx="3246120" cy="777240"/>
+            <a:off x="8385048" y="2880360"/>
+            <a:ext cx="3200400" cy="777240"/>
           </a:xfrm>
           <a:prstGeom prst="rect">
             <a:avLst/>
@@ -5096,7 +5880,7 @@
                 <a:ea typeface="Calibri" pitchFamily="34" charset="-122"/>
                 <a:cs typeface="Calibri" pitchFamily="34" charset="-120"/>
               </a:rPr>
-              <a:t>The walk continues in iMessage</a:t>
+              <a:t>Lives in iMessage</a:t>
             </a:r>
             <a:endParaRPr lang="en-US" sz="2000" dirty="0"/>
           </a:p>
@@ -5110,8 +5894,8 @@
         </p:nvSpPr>
         <p:spPr>
           <a:xfrm>
-            <a:off x="8366760" y="3749040"/>
-            <a:ext cx="3246120" cy="1097280"/>
+            <a:off x="8385048" y="3703320"/>
+            <a:ext cx="3200400" cy="1188720"/>
           </a:xfrm>
           <a:prstGeom prst="rect">
             <a:avLst/>
@@ -5135,7 +5919,7 @@
                 <a:ea typeface="Calibri" pitchFamily="34" charset="-122"/>
                 <a:cs typeface="Calibri" pitchFamily="34" charset="-120"/>
               </a:rPr>
-              <a:t>The same squad can explore, story, and route over Photon Spectrum — terminal today, iMessage with keys.</a:t>
+              <a:t>The same squad can explore, story, and route over Photon — terminal today, iMessage with keys.</a:t>
             </a:r>
             <a:endParaRPr lang="en-US" sz="1500" dirty="0"/>
           </a:p>
@@ -5143,14 +5927,43 @@
       </p:sp>
       <p:sp>
         <p:nvSpPr>
-          <p:cNvPr id="15" name="Text 10"/>
-          <p:cNvSpPr txBox="1"/>
-          <p:nvPr/>
-        </p:nvSpPr>
-        <p:spPr>
-          <a:xfrm>
-            <a:off x="502920" y="5212080"/>
-            <a:ext cx="11155680" cy="1005840"/>
+          <p:cNvPr id="15" name="Shape 10"/>
+          <p:cNvSpPr/>
+          <p:nvPr/>
+        </p:nvSpPr>
+        <p:spPr>
+          <a:xfrm>
+            <a:off x="502920" y="5303520"/>
+            <a:ext cx="5486400" cy="1005840"/>
+          </a:xfrm>
+          <a:prstGeom prst="roundRect">
+            <a:avLst>
+              <a:gd name="adj" fmla="val 10909"/>
+            </a:avLst>
+          </a:prstGeom>
+          <a:solidFill>
+            <a:srgbClr val="E7F3E4"/>
+          </a:solidFill>
+          <a:ln/>
+          <a:effectLst>
+            <a:outerShdw sx="100000" sy="100000" kx="0" ky="0" algn="bl" rotWithShape="0" blurRad="101600" dist="25400" dir="5400000">
+              <a:srgbClr val="0B1F3A">
+                <a:alpha val="10000"/>
+              </a:srgbClr>
+            </a:outerShdw>
+          </a:effectLst>
+        </p:spPr>
+      </p:sp>
+      <p:sp>
+        <p:nvSpPr>
+          <p:cNvPr id="16" name="Text 11"/>
+          <p:cNvSpPr txBox="1"/>
+          <p:nvPr/>
+        </p:nvSpPr>
+        <p:spPr>
+          <a:xfrm>
+            <a:off x="685800" y="5440680"/>
+            <a:ext cx="5120640" cy="731520"/>
           </a:xfrm>
           <a:prstGeom prst="rect">
             <a:avLst/>
@@ -5166,7 +5979,7 @@
               <a:buNone/>
             </a:pPr>
             <a:r>
-              <a:rPr lang="en-US" sz="1500" dirty="0">
+              <a:rPr lang="en-US" sz="1600" dirty="0">
                 <a:solidFill>
                   <a:srgbClr val="163528"/>
                 </a:solidFill>
@@ -5174,9 +5987,77 @@
                 <a:ea typeface="Calibri" pitchFamily="34" charset="-122"/>
                 <a:cs typeface="Calibri" pitchFamily="34" charset="-120"/>
               </a:rPr>
-              <a:t>Also in the app: ISS overhead can boost rare hatches.  Experiments, not claims: live Grok without a key, cloud deploy, background tracking.</a:t>
-            </a:r>
-            <a:endParaRPr lang="en-US" sz="1500" dirty="0"/>
+              <a:t>In the app: ISS overhead can boost rare hatches.</a:t>
+            </a:r>
+            <a:endParaRPr lang="en-US" sz="1600" dirty="0"/>
+          </a:p>
+        </p:txBody>
+      </p:sp>
+      <p:sp>
+        <p:nvSpPr>
+          <p:cNvPr id="17" name="Shape 12"/>
+          <p:cNvSpPr/>
+          <p:nvPr/>
+        </p:nvSpPr>
+        <p:spPr>
+          <a:xfrm>
+            <a:off x="6217920" y="5303520"/>
+            <a:ext cx="5486400" cy="1005840"/>
+          </a:xfrm>
+          <a:prstGeom prst="roundRect">
+            <a:avLst>
+              <a:gd name="adj" fmla="val 10909"/>
+            </a:avLst>
+          </a:prstGeom>
+          <a:solidFill>
+            <a:srgbClr val="FFFFFF"/>
+          </a:solidFill>
+          <a:ln/>
+          <a:effectLst>
+            <a:outerShdw sx="100000" sy="100000" kx="0" ky="0" algn="bl" rotWithShape="0" blurRad="101600" dist="25400" dir="5400000">
+              <a:srgbClr val="0B1F3A">
+                <a:alpha val="10000"/>
+              </a:srgbClr>
+            </a:outerShdw>
+          </a:effectLst>
+        </p:spPr>
+      </p:sp>
+      <p:sp>
+        <p:nvSpPr>
+          <p:cNvPr id="18" name="Text 13"/>
+          <p:cNvSpPr txBox="1"/>
+          <p:nvPr/>
+        </p:nvSpPr>
+        <p:spPr>
+          <a:xfrm>
+            <a:off x="6400800" y="5440680"/>
+            <a:ext cx="5120640" cy="731520"/>
+          </a:xfrm>
+          <a:prstGeom prst="rect">
+            <a:avLst/>
+          </a:prstGeom>
+          <a:noFill/>
+          <a:ln/>
+        </p:spPr>
+        <p:txBody>
+          <a:bodyPr wrap="square" lIns="0" tIns="0" rIns="0" bIns="0" rtlCol="0" anchor="ctr"/>
+          <a:lstStyle/>
+          <a:p>
+            <a:pPr indent="0" marL="0">
+              <a:buNone/>
+            </a:pPr>
+            <a:r>
+              <a:rPr lang="en-US" sz="1600" dirty="0">
+                <a:solidFill>
+                  <a:srgbClr val="4A6358"/>
+                </a:solidFill>
+                <a:latin typeface="Calibri" pitchFamily="34" charset="0"/>
+                <a:ea typeface="Calibri" pitchFamily="34" charset="-122"/>
+                <a:cs typeface="Calibri" pitchFamily="34" charset="-120"/>
+              </a:rPr>
+              <a:t>Not claimed today: live Grok without a key, cloud deploy, background tracking.</a:t>
+            </a:r>
+            <a:endParaRPr lang="en-US" sz="1600" dirty="0"/>
           </a:p>
         </p:txBody>
       </p:sp>
@@ -5213,8 +6094,8 @@
         </p:nvSpPr>
         <p:spPr>
           <a:xfrm>
-            <a:off x="640080" y="411480"/>
-            <a:ext cx="10972800" cy="640080"/>
+            <a:off x="640080" y="320040"/>
+            <a:ext cx="10972800" cy="548640"/>
           </a:xfrm>
           <a:prstGeom prst="rect">
             <a:avLst/>
@@ -5230,7 +6111,7 @@
               <a:buNone/>
             </a:pPr>
             <a:r>
-              <a:rPr lang="en-US" sz="3200" b="1" dirty="0">
+              <a:rPr lang="en-US" sz="3000" b="1" dirty="0">
                 <a:solidFill>
                   <a:srgbClr val="FFFFFF"/>
                 </a:solidFill>
@@ -5240,7 +6121,7 @@
               </a:rPr>
               <a:t>Walk more of the world you already live in</a:t>
             </a:r>
-            <a:endParaRPr lang="en-US" sz="3200" dirty="0"/>
+            <a:endParaRPr lang="en-US" sz="3000" dirty="0"/>
           </a:p>
         </p:txBody>
       </p:sp>
@@ -5252,8 +6133,8 @@
         </p:nvSpPr>
         <p:spPr>
           <a:xfrm>
-            <a:off x="640080" y="1051560"/>
-            <a:ext cx="10972800" cy="365760"/>
+            <a:off x="640080" y="868680"/>
+            <a:ext cx="10972800" cy="347472"/>
           </a:xfrm>
           <a:prstGeom prst="rect">
             <a:avLst/>
@@ -5285,18 +6166,57 @@
       </p:sp>
       <p:sp>
         <p:nvSpPr>
-          <p:cNvPr id="4" name="Shape 2"/>
+          <p:cNvPr id="4" name="Text 2"/>
+          <p:cNvSpPr txBox="1"/>
+          <p:nvPr/>
+        </p:nvSpPr>
+        <p:spPr>
+          <a:xfrm>
+            <a:off x="640080" y="1371600"/>
+            <a:ext cx="10972800" cy="320040"/>
+          </a:xfrm>
+          <a:prstGeom prst="rect">
+            <a:avLst/>
+          </a:prstGeom>
+          <a:noFill/>
+          <a:ln/>
+        </p:spPr>
+        <p:txBody>
+          <a:bodyPr wrap="square" lIns="0" tIns="0" rIns="0" bIns="0" rtlCol="0" anchor="ctr"/>
+          <a:lstStyle/>
+          <a:p>
+            <a:pPr indent="0" marL="0">
+              <a:buNone/>
+            </a:pPr>
+            <a:r>
+              <a:rPr lang="en-US" sz="1600" b="1" dirty="0">
+                <a:solidFill>
+                  <a:srgbClr val="E8A317"/>
+                </a:solidFill>
+                <a:latin typeface="Calibri" pitchFamily="34" charset="0"/>
+                <a:ea typeface="Calibri" pitchFamily="34" charset="-122"/>
+                <a:cs typeface="Calibri" pitchFamily="34" charset="-120"/>
+              </a:rPr>
+              <a:t>What’s next  ·  planned, not shipped</a:t>
+            </a:r>
+            <a:endParaRPr lang="en-US" sz="1600" dirty="0"/>
+          </a:p>
+        </p:txBody>
+      </p:sp>
+      <p:sp>
+        <p:nvSpPr>
+          <p:cNvPr id="5" name="Shape 3"/>
           <p:cNvSpPr/>
           <p:nvPr/>
         </p:nvSpPr>
         <p:spPr>
           <a:xfrm>
-            <a:off x="640080" y="1645920"/>
-            <a:ext cx="5349240" cy="1280160"/>
+            <a:off x="640080" y="1783080"/>
+            <a:ext cx="5349240" cy="1188720"/>
           </a:xfrm>
           <a:prstGeom prst="roundRect">
             <a:avLst>
-              <a:gd name="adj" fmla="val 8571"/>
+              <a:gd name="adj" fmla="val 9231"/>
             </a:avLst>
           </a:prstGeom>
           <a:solidFill>
@@ -5307,14 +6227,14 @@
       </p:sp>
       <p:sp>
         <p:nvSpPr>
-          <p:cNvPr id="5" name="Text 3"/>
-          <p:cNvSpPr txBox="1"/>
-          <p:nvPr/>
-        </p:nvSpPr>
-        <p:spPr>
-          <a:xfrm>
-            <a:off x="868680" y="1810512"/>
-            <a:ext cx="4892040" cy="365760"/>
+          <p:cNvPr id="6" name="Text 4"/>
+          <p:cNvSpPr txBox="1"/>
+          <p:nvPr/>
+        </p:nvSpPr>
+        <p:spPr>
+          <a:xfrm>
+            <a:off x="868680" y="1929384"/>
+            <a:ext cx="4892040" cy="347472"/>
           </a:xfrm>
           <a:prstGeom prst="rect">
             <a:avLst/>
@@ -5346,13 +6266,13 @@
       </p:sp>
       <p:sp>
         <p:nvSpPr>
-          <p:cNvPr id="6" name="Text 4"/>
-          <p:cNvSpPr txBox="1"/>
-          <p:nvPr/>
-        </p:nvSpPr>
-        <p:spPr>
-          <a:xfrm>
-            <a:off x="868680" y="2212848"/>
+          <p:cNvPr id="7" name="Text 5"/>
+          <p:cNvSpPr txBox="1"/>
+          <p:nvPr/>
+        </p:nvSpPr>
+        <p:spPr>
+          <a:xfrm>
+            <a:off x="868680" y="2313432"/>
             <a:ext cx="4892040" cy="502920"/>
           </a:xfrm>
           <a:prstGeom prst="rect">
@@ -5385,18 +6305,18 @@
       </p:sp>
       <p:sp>
         <p:nvSpPr>
-          <p:cNvPr id="7" name="Shape 5"/>
+          <p:cNvPr id="8" name="Shape 6"/>
           <p:cNvSpPr/>
           <p:nvPr/>
         </p:nvSpPr>
         <p:spPr>
           <a:xfrm>
-            <a:off x="6309360" y="1645920"/>
-            <a:ext cx="5349240" cy="1280160"/>
+            <a:off x="6309360" y="1783080"/>
+            <a:ext cx="5349240" cy="1188720"/>
           </a:xfrm>
           <a:prstGeom prst="roundRect">
             <a:avLst>
-              <a:gd name="adj" fmla="val 8571"/>
+              <a:gd name="adj" fmla="val 9231"/>
             </a:avLst>
           </a:prstGeom>
           <a:solidFill>
@@ -5407,14 +6327,14 @@
       </p:sp>
       <p:sp>
         <p:nvSpPr>
-          <p:cNvPr id="8" name="Text 6"/>
-          <p:cNvSpPr txBox="1"/>
-          <p:nvPr/>
-        </p:nvSpPr>
-        <p:spPr>
-          <a:xfrm>
-            <a:off x="6537960" y="1810512"/>
-            <a:ext cx="4892040" cy="365760"/>
+          <p:cNvPr id="9" name="Text 7"/>
+          <p:cNvSpPr txBox="1"/>
+          <p:nvPr/>
+        </p:nvSpPr>
+        <p:spPr>
+          <a:xfrm>
+            <a:off x="6537960" y="1929384"/>
+            <a:ext cx="4892040" cy="347472"/>
           </a:xfrm>
           <a:prstGeom prst="rect">
             <a:avLst/>
@@ -5446,13 +6366,13 @@
       </p:sp>
       <p:sp>
         <p:nvSpPr>
-          <p:cNvPr id="9" name="Text 7"/>
-          <p:cNvSpPr txBox="1"/>
-          <p:nvPr/>
-        </p:nvSpPr>
-        <p:spPr>
-          <a:xfrm>
-            <a:off x="6537960" y="2212848"/>
+          <p:cNvPr id="10" name="Text 8"/>
+          <p:cNvSpPr txBox="1"/>
+          <p:nvPr/>
+        </p:nvSpPr>
+        <p:spPr>
+          <a:xfrm>
+            <a:off x="6537960" y="2313432"/>
             <a:ext cx="4892040" cy="502920"/>
           </a:xfrm>
           <a:prstGeom prst="rect">
@@ -5485,18 +6405,18 @@
       </p:sp>
       <p:sp>
         <p:nvSpPr>
-          <p:cNvPr id="10" name="Shape 8"/>
+          <p:cNvPr id="11" name="Shape 9"/>
           <p:cNvSpPr/>
           <p:nvPr/>
         </p:nvSpPr>
         <p:spPr>
           <a:xfrm>
-            <a:off x="640080" y="3063240"/>
-            <a:ext cx="5349240" cy="1280160"/>
+            <a:off x="640080" y="3108960"/>
+            <a:ext cx="5349240" cy="1188720"/>
           </a:xfrm>
           <a:prstGeom prst="roundRect">
             <a:avLst>
-              <a:gd name="adj" fmla="val 8571"/>
+              <a:gd name="adj" fmla="val 9231"/>
             </a:avLst>
           </a:prstGeom>
           <a:solidFill>
@@ -5507,14 +6427,14 @@
       </p:sp>
       <p:sp>
         <p:nvSpPr>
-          <p:cNvPr id="11" name="Text 9"/>
-          <p:cNvSpPr txBox="1"/>
-          <p:nvPr/>
-        </p:nvSpPr>
-        <p:spPr>
-          <a:xfrm>
-            <a:off x="868680" y="3227832"/>
-            <a:ext cx="4892040" cy="365760"/>
+          <p:cNvPr id="12" name="Text 10"/>
+          <p:cNvSpPr txBox="1"/>
+          <p:nvPr/>
+        </p:nvSpPr>
+        <p:spPr>
+          <a:xfrm>
+            <a:off x="868680" y="3255264"/>
+            <a:ext cx="4892040" cy="347472"/>
           </a:xfrm>
           <a:prstGeom prst="rect">
             <a:avLst/>
@@ -5546,13 +6466,13 @@
       </p:sp>
       <p:sp>
         <p:nvSpPr>
-          <p:cNvPr id="12" name="Text 10"/>
-          <p:cNvSpPr txBox="1"/>
-          <p:nvPr/>
-        </p:nvSpPr>
-        <p:spPr>
-          <a:xfrm>
-            <a:off x="868680" y="3630168"/>
+          <p:cNvPr id="13" name="Text 11"/>
+          <p:cNvSpPr txBox="1"/>
+          <p:nvPr/>
+        </p:nvSpPr>
+        <p:spPr>
+          <a:xfrm>
+            <a:off x="868680" y="3639312"/>
             <a:ext cx="4892040" cy="502920"/>
           </a:xfrm>
           <a:prstGeom prst="rect">
@@ -5585,18 +6505,18 @@
       </p:sp>
       <p:sp>
         <p:nvSpPr>
-          <p:cNvPr id="13" name="Shape 11"/>
+          <p:cNvPr id="14" name="Shape 12"/>
           <p:cNvSpPr/>
           <p:nvPr/>
         </p:nvSpPr>
         <p:spPr>
           <a:xfrm>
-            <a:off x="6309360" y="3063240"/>
-            <a:ext cx="5349240" cy="1280160"/>
+            <a:off x="6309360" y="3108960"/>
+            <a:ext cx="5349240" cy="1188720"/>
           </a:xfrm>
           <a:prstGeom prst="roundRect">
             <a:avLst>
-              <a:gd name="adj" fmla="val 8571"/>
+              <a:gd name="adj" fmla="val 9231"/>
             </a:avLst>
           </a:prstGeom>
           <a:solidFill>
@@ -5607,14 +6527,14 @@
       </p:sp>
       <p:sp>
         <p:nvSpPr>
-          <p:cNvPr id="14" name="Text 12"/>
-          <p:cNvSpPr txBox="1"/>
-          <p:nvPr/>
-        </p:nvSpPr>
-        <p:spPr>
-          <a:xfrm>
-            <a:off x="6537960" y="3227832"/>
-            <a:ext cx="4892040" cy="365760"/>
+          <p:cNvPr id="15" name="Text 13"/>
+          <p:cNvSpPr txBox="1"/>
+          <p:nvPr/>
+        </p:nvSpPr>
+        <p:spPr>
+          <a:xfrm>
+            <a:off x="6537960" y="3255264"/>
+            <a:ext cx="4892040" cy="347472"/>
           </a:xfrm>
           <a:prstGeom prst="rect">
             <a:avLst/>
@@ -5646,13 +6566,13 @@
       </p:sp>
       <p:sp>
         <p:nvSpPr>
-          <p:cNvPr id="15" name="Text 13"/>
-          <p:cNvSpPr txBox="1"/>
-          <p:nvPr/>
-        </p:nvSpPr>
-        <p:spPr>
-          <a:xfrm>
-            <a:off x="6537960" y="3630168"/>
+          <p:cNvPr id="16" name="Text 14"/>
+          <p:cNvSpPr txBox="1"/>
+          <p:nvPr/>
+        </p:nvSpPr>
+        <p:spPr>
+          <a:xfrm>
+            <a:off x="6537960" y="3639312"/>
             <a:ext cx="4892040" cy="502920"/>
           </a:xfrm>
           <a:prstGeom prst="rect">
@@ -5685,13 +6605,13 @@
       </p:sp>
       <p:sp>
         <p:nvSpPr>
-          <p:cNvPr id="16" name="Text 14"/>
-          <p:cNvSpPr txBox="1"/>
-          <p:nvPr/>
-        </p:nvSpPr>
-        <p:spPr>
-          <a:xfrm>
-            <a:off x="640080" y="4709160"/>
+          <p:cNvPr id="17" name="Text 15"/>
+          <p:cNvSpPr txBox="1"/>
+          <p:nvPr/>
+        </p:nvSpPr>
+        <p:spPr>
+          <a:xfrm>
+            <a:off x="640080" y="4617720"/>
             <a:ext cx="10972800" cy="457200"/>
           </a:xfrm>
           <a:prstGeom prst="rect">
@@ -5724,14 +6644,14 @@
       </p:sp>
       <p:sp>
         <p:nvSpPr>
-          <p:cNvPr id="17" name="Text 15"/>
-          <p:cNvSpPr txBox="1"/>
-          <p:nvPr/>
-        </p:nvSpPr>
-        <p:spPr>
-          <a:xfrm>
-            <a:off x="640080" y="5257800"/>
-            <a:ext cx="10972800" cy="411480"/>
+          <p:cNvPr id="18" name="Text 16"/>
+          <p:cNvSpPr txBox="1"/>
+          <p:nvPr/>
+        </p:nvSpPr>
+        <p:spPr>
+          <a:xfrm>
+            <a:off x="640080" y="5120640"/>
+            <a:ext cx="10972800" cy="384048"/>
           </a:xfrm>
           <a:prstGeom prst="rect">
             <a:avLst/>
@@ -5763,13 +6683,13 @@
       </p:sp>
       <p:sp>
         <p:nvSpPr>
-          <p:cNvPr id="18" name="Text 16"/>
-          <p:cNvSpPr txBox="1"/>
-          <p:nvPr/>
-        </p:nvSpPr>
-        <p:spPr>
-          <a:xfrm>
-            <a:off x="640080" y="6126480"/>
+          <p:cNvPr id="19" name="Text 17"/>
+          <p:cNvSpPr txBox="1"/>
+          <p:nvPr/>
+        </p:nvSpPr>
+        <p:spPr>
+          <a:xfrm>
+            <a:off x="640080" y="6172200"/>
             <a:ext cx="10972800" cy="274320"/>
           </a:xfrm>
           <a:prstGeom prst="rect">

--- a/docs/presentation/HuskiesPaws-BigRedHacks-2026.pptx
+++ b/docs/presentation/HuskiesPaws-BigRedHacks-2026.pptx
@@ -110,6 +110,38 @@
       </a:defRPr>
     </a:lvl9pPr>
   </p:defaultTextStyle>
+  <p:extLst>
+    <p:ext uri="{521415D9-36F7-43E2-AB2F-B90AF26B5E84}">
+      <p14:sectionLst xmlns:p14="http://schemas.microsoft.com/office/powerpoint/2010/main">
+        <p14:section name="Pitch" id="{90a19555-80b2-8a80-d8b2-ec307d1d6db0}">
+          <p14:sldIdLst>
+            <p14:sldId id="256"/>
+            <p14:sldId id="257"/>
+            <p14:sldId id="258"/>
+          </p14:sldIdLst>
+        </p14:section>
+        <p14:section name="Demo" id="{ca88bde7-691e-7ec5-bce8-05ee2ad6c12a}">
+          <p14:sldIdLst>
+            <p14:sldId id="259"/>
+          </p14:sldIdLst>
+        </p14:section>
+        <p14:section name="Build" id="{ccca3474-e5e5-b56f-91fa-36c25b8a35f8}">
+          <p14:sldIdLst>
+            <p14:sldId id="260"/>
+            <p14:sldId id="261"/>
+          </p14:sldIdLst>
+        </p14:section>
+        <p14:section name="Close" id="{42d45996-dd05-7059-408c-92bcd9a0dc71}">
+          <p14:sldIdLst>
+            <p14:sldId id="262"/>
+          </p14:sldIdLst>
+        </p14:section>
+      </p14:sectionLst>
+    </p:ext>
+    <p:ext uri="{EFAFB233-063F-42B5-8137-9DF3F51BA10A}">
+      <p15:sldGuideLst xmlns:p15="http://schemas.microsoft.com/office/powerpoint/2012/main"/>
+    </p:ext>
+  </p:extLst>
 </p:presentation>
 </file>
 
@@ -1036,7 +1068,7 @@
           <a:p>
             <a:r>
               <a:rPr lang="en-US" dirty="0"/>
-              <a:t>About 25 seconds. Close on campus exploration — not inflated stats. Next is planned: background tracking, accessibility, a deploy that stays awake, richer social play. Line: Everyday walks. Extraordinary company. Hand them the phone.</a:t>
+              <a:t>About 25 seconds. Close on campus exploration — not inflated stats. Next is planned: background tracking, a deploy that stays awake, richer social play. Line: Everyday walks. Extraordinary company. Hand them the phone.</a:t>
             </a:r>
             <a:endParaRPr lang="en-US" dirty="0"/>
           </a:p>
@@ -1110,11 +1142,11 @@
 
 <file path=ppt/slideLayouts/slideLayout2.xml><?xml version="1.0" encoding="utf-8"?>
 <p:sldLayout xmlns:a="http://schemas.openxmlformats.org/drawingml/2006/main" xmlns:r="http://schemas.openxmlformats.org/officeDocument/2006/relationships" xmlns:p="http://schemas.openxmlformats.org/presentationml/2006/main" preserve="1">
-  <p:cSld name="TITLE_DARK">
+  <p:cSld name="CONTENT">
     <p:bg>
       <p:bgPr>
         <a:solidFill>
-          <a:srgbClr val="0B1F3A"/>
+          <a:schemeClr val="bg1"/>
         </a:solidFill>
       </p:bgPr>
     </p:bg>
@@ -1132,38 +1164,6 @@
           <a:chExt cx="0" cy="0"/>
         </a:xfrm>
       </p:grpSpPr>
-    </p:spTree>
-  </p:cSld>
-  <p:clrMapOvr>
-    <a:masterClrMapping/>
-  </p:clrMapOvr>
-</p:sldLayout>
-</file>
-
-<file path=ppt/slideLayouts/slideLayout3.xml><?xml version="1.0" encoding="utf-8"?>
-<p:sldLayout xmlns:a="http://schemas.openxmlformats.org/drawingml/2006/main" xmlns:r="http://schemas.openxmlformats.org/officeDocument/2006/relationships" xmlns:p="http://schemas.openxmlformats.org/presentationml/2006/main" preserve="1">
-  <p:cSld name="CONTENT">
-    <p:bg>
-      <p:bgPr>
-        <a:solidFill>
-          <a:srgbClr val="F6F1E4"/>
-        </a:solidFill>
-      </p:bgPr>
-    </p:bg>
-    <p:spTree>
-      <p:nvGrpSpPr>
-        <p:cNvPr id="1" name=""/>
-        <p:cNvGrpSpPr/>
-        <p:nvPr/>
-      </p:nvGrpSpPr>
-      <p:grpSpPr>
-        <a:xfrm>
-          <a:off x="0" y="0"/>
-          <a:ext cx="0" cy="0"/>
-          <a:chOff x="0" y="0"/>
-          <a:chExt cx="0" cy="0"/>
-        </a:xfrm>
-      </p:grpSpPr>
       <p:sp>
         <p:nvSpPr>
           <p:cNvPr id="2" name="Text 0"/>
@@ -1174,8 +1174,8 @@
         </p:nvSpPr>
         <p:spPr>
           <a:xfrm>
-            <a:off x="502920" y="256032"/>
-            <a:ext cx="11155680" cy="566928"/>
+            <a:off x="548640" y="256032"/>
+            <a:ext cx="11064240" cy="658368"/>
           </a:xfrm>
           <a:prstGeom prst="rect">
             <a:avLst/>
@@ -1188,13 +1188,10 @@
           <a:lstStyle>
             <a:lvl1pPr algn="l" indent="0" marL="0">
               <a:buNone/>
-              <a:defRPr lang="en-US" sz="3200" b="1" dirty="0">
-                <a:solidFill>
-                  <a:srgbClr val="0B1F3A"/>
-                </a:solidFill>
-                <a:latin typeface="Calibri" pitchFamily="34" charset="0"/>
-                <a:ea typeface="Calibri" pitchFamily="34" charset="-122"/>
-                <a:cs typeface="Calibri" pitchFamily="34" charset="-120"/>
+              <a:defRPr lang="en-US" sz="3600" b="1" dirty="0">
+                <a:solidFill>
+                  <a:schemeClr val="tx1"/>
+                </a:solidFill>
               </a:defRPr>
             </a:lvl1pPr>
           </a:lstStyle>
@@ -1202,7 +1199,7 @@
             <a:pPr algn="l" indent="0" marL="0">
               <a:buNone/>
             </a:pPr>
-            <a:endParaRPr lang="en-US" sz="3200" dirty="0"/>
+            <a:endParaRPr lang="en-US" sz="3600" dirty="0"/>
           </a:p>
         </p:txBody>
       </p:sp>
@@ -1214,8 +1211,8 @@
         </p:nvSpPr>
         <p:spPr>
           <a:xfrm>
-            <a:off x="502920" y="6528816"/>
-            <a:ext cx="11155680" cy="201168"/>
+            <a:off x="548640" y="6547104"/>
+            <a:ext cx="11064240" cy="182880"/>
           </a:xfrm>
           <a:prstGeom prst="rect">
             <a:avLst/>
@@ -1233,11 +1230,8 @@
             <a:r>
               <a:rPr lang="en-US" sz="1100" dirty="0">
                 <a:solidFill>
-                  <a:srgbClr val="4A6358"/>
-                </a:solidFill>
-                <a:latin typeface="Calibri" pitchFamily="34" charset="0"/>
-                <a:ea typeface="Calibri" pitchFamily="34" charset="-122"/>
-                <a:cs typeface="Calibri" pitchFamily="34" charset="-120"/>
+                  <a:schemeClr val="accent6"/>
+                </a:solidFill>
               </a:rPr>
               <a:t>HuskiesPaws  ·  BigRed//Hacks 2026</a:t>
             </a:r>
@@ -1245,38 +1239,6 @@
           </a:p>
         </p:txBody>
       </p:sp>
-    </p:spTree>
-  </p:cSld>
-  <p:clrMapOvr>
-    <a:masterClrMapping/>
-  </p:clrMapOvr>
-</p:sldLayout>
-</file>
-
-<file path=ppt/slideLayouts/slideLayout4.xml><?xml version="1.0" encoding="utf-8"?>
-<p:sldLayout xmlns:a="http://schemas.openxmlformats.org/drawingml/2006/main" xmlns:r="http://schemas.openxmlformats.org/officeDocument/2006/relationships" xmlns:p="http://schemas.openxmlformats.org/presentationml/2006/main" preserve="1">
-  <p:cSld name="CLOSE_DARK">
-    <p:bg>
-      <p:bgPr>
-        <a:solidFill>
-          <a:srgbClr val="0B1F3A"/>
-        </a:solidFill>
-      </p:bgPr>
-    </p:bg>
-    <p:spTree>
-      <p:nvGrpSpPr>
-        <p:cNvPr id="1" name=""/>
-        <p:cNvGrpSpPr/>
-        <p:nvPr/>
-      </p:nvGrpSpPr>
-      <p:grpSpPr>
-        <a:xfrm>
-          <a:off x="0" y="0"/>
-          <a:ext cx="0" cy="0"/>
-          <a:chOff x="0" y="0"/>
-          <a:chExt cx="0" cy="0"/>
-        </a:xfrm>
-      </p:grpSpPr>
     </p:spTree>
   </p:cSld>
   <p:clrMapOvr>
@@ -1308,8 +1270,6 @@
   <p:sldLayoutIdLst>
     <p:sldLayoutId id="2147483649" r:id="rId1"/>
     <p:sldLayoutId id="2147483650" r:id="rId2"/>
-    <p:sldLayoutId id="2147483651" r:id="rId3"/>
-    <p:sldLayoutId id="2147483652" r:id="rId4"/>
   </p:sldLayoutIdLst>
   <p:hf sldNum="0" hdr="0" ftr="0" dt="0"/>
   <p:txStyles>
@@ -1584,47 +1544,45 @@
       </p:grpSpPr>
       <p:sp>
         <p:nvSpPr>
-          <p:cNvPr id="2" name="Shape 0"/>
-          <p:cNvSpPr/>
-          <p:nvPr/>
-        </p:nvSpPr>
-        <p:spPr>
-          <a:xfrm>
-            <a:off x="9692640" y="-1463040"/>
-            <a:ext cx="4206240" cy="4206240"/>
-          </a:xfrm>
-          <a:prstGeom prst="ellipse">
-            <a:avLst/>
-          </a:prstGeom>
-          <a:solidFill>
-            <a:srgbClr val="123252"/>
-          </a:solidFill>
-          <a:ln/>
-        </p:spPr>
-      </p:sp>
-      <p:sp>
-        <p:nvSpPr>
-          <p:cNvPr id="3" name="Shape 1"/>
-          <p:cNvSpPr/>
-          <p:nvPr/>
-        </p:nvSpPr>
-        <p:spPr>
-          <a:xfrm>
-            <a:off x="-1463040" y="4937760"/>
-            <a:ext cx="3474720" cy="3474720"/>
-          </a:xfrm>
-          <a:prstGeom prst="ellipse">
-            <a:avLst/>
-          </a:prstGeom>
-          <a:solidFill>
-            <a:srgbClr val="123252"/>
-          </a:solidFill>
-          <a:ln/>
-        </p:spPr>
+          <p:cNvPr id="2" name="Text 0"/>
+          <p:cNvSpPr txBox="1"/>
+          <p:nvPr>
+            <p:ph idx="100" type="title" hasCustomPrompt="1"/>
+          </p:nvPr>
+        </p:nvSpPr>
+        <p:spPr>
+          <a:xfrm>
+            <a:off x="548640" y="256032"/>
+            <a:ext cx="11064240" cy="658368"/>
+          </a:xfrm>
+          <a:prstGeom prst="rect">
+            <a:avLst/>
+          </a:prstGeom>
+          <a:noFill/>
+          <a:ln/>
+        </p:spPr>
+        <p:txBody>
+          <a:bodyPr wrap="square" lIns="0" tIns="0" rIns="0" bIns="0" rtlCol="0" anchor="ctr"/>
+          <a:lstStyle/>
+          <a:p>
+            <a:pPr algn="l" indent="0" marL="0">
+              <a:buNone/>
+            </a:pPr>
+            <a:r>
+              <a:rPr lang="en-US" sz="3600" b="1" dirty="0">
+                <a:solidFill>
+                  <a:schemeClr val="tx1"/>
+                </a:solidFill>
+              </a:rPr>
+              <a:t>HuskiesPaws</a:t>
+            </a:r>
+            <a:endParaRPr lang="en-US" sz="3600" dirty="0"/>
+          </a:p>
+        </p:txBody>
       </p:sp>
       <p:pic>
         <p:nvPicPr>
-          <p:cNvPr id="4" name="Image 0" descr="G:\broswer download\big-red-hacks2026\mobile\assets\splash-icon.png">    </p:cNvPr>
+          <p:cNvPr id="3" name="mascot" descr="G:\broswer download\big-red-hacks2026\mobile\assets\splash-icon.png">    </p:cNvPr>
           <p:cNvPicPr>
             <a:picLocks noChangeAspect="1"/>
           </p:cNvPicPr>
@@ -1638,17 +1596,284 @@
         </p:blipFill>
         <p:spPr>
           <a:xfrm>
-            <a:off x="8549640" y="1874520"/>
-            <a:ext cx="2880360" cy="2880360"/>
+            <a:off x="640080" y="1097280"/>
+            <a:ext cx="2011680" cy="2011680"/>
           </a:xfrm>
           <a:prstGeom prst="rect">
             <a:avLst/>
           </a:prstGeom>
         </p:spPr>
       </p:pic>
+      <p:sp>
+        <p:nvSpPr>
+          <p:cNvPr id="4" name="tagline"/>
+          <p:cNvSpPr txBox="1"/>
+          <p:nvPr/>
+        </p:nvSpPr>
+        <p:spPr>
+          <a:xfrm>
+            <a:off x="2880360" y="1143000"/>
+            <a:ext cx="8595360" cy="777240"/>
+          </a:xfrm>
+          <a:prstGeom prst="rect">
+            <a:avLst/>
+          </a:prstGeom>
+          <a:noFill/>
+          <a:ln/>
+        </p:spPr>
+        <p:txBody>
+          <a:bodyPr wrap="square" lIns="0" tIns="0" rIns="0" bIns="0" rtlCol="0" anchor="ctr"/>
+          <a:lstStyle/>
+          <a:p>
+            <a:pPr indent="0" marL="0">
+              <a:buNone/>
+            </a:pPr>
+            <a:r>
+              <a:rPr lang="en-US" sz="2400" i="1" dirty="0">
+                <a:solidFill>
+                  <a:schemeClr val="accent5"/>
+                </a:solidFill>
+              </a:rPr>
+              <a:t>Turn everyday walks into a creature-collecting adventure.</a:t>
+            </a:r>
+            <a:endParaRPr lang="en-US" sz="2400" dirty="0"/>
+          </a:p>
+        </p:txBody>
+      </p:sp>
+      <p:sp>
+        <p:nvSpPr>
+          <p:cNvPr id="5" name="event"/>
+          <p:cNvSpPr txBox="1"/>
+          <p:nvPr/>
+        </p:nvSpPr>
+        <p:spPr>
+          <a:xfrm>
+            <a:off x="2880360" y="1965960"/>
+            <a:ext cx="8595360" cy="365760"/>
+          </a:xfrm>
+          <a:prstGeom prst="rect">
+            <a:avLst/>
+          </a:prstGeom>
+          <a:noFill/>
+          <a:ln/>
+        </p:spPr>
+        <p:txBody>
+          <a:bodyPr wrap="square" lIns="0" tIns="0" rIns="0" bIns="0" rtlCol="0" anchor="ctr"/>
+          <a:lstStyle/>
+          <a:p>
+            <a:pPr indent="0" marL="0">
+              <a:buNone/>
+            </a:pPr>
+            <a:r>
+              <a:rPr lang="en-US" sz="1800" dirty="0">
+                <a:solidFill>
+                  <a:schemeClr val="accent6"/>
+                </a:solidFill>
+              </a:rPr>
+              <a:t>BigRed//Hacks 2026  ·  Navigation  ·  the phone app</a:t>
+            </a:r>
+            <a:endParaRPr lang="en-US" sz="1800" dirty="0"/>
+          </a:p>
+        </p:txBody>
+      </p:sp>
+      <p:sp>
+        <p:nvSpPr>
+          <p:cNvPr id="6" name="chip-Luis Mendez"/>
+          <p:cNvSpPr/>
+          <p:nvPr/>
+        </p:nvSpPr>
+        <p:spPr>
+          <a:xfrm>
+            <a:off x="640080" y="3246120"/>
+            <a:ext cx="3611880" cy="1097280"/>
+          </a:xfrm>
+          <a:prstGeom prst="roundRect">
+            <a:avLst>
+              <a:gd name="adj" fmla="val 13333"/>
+            </a:avLst>
+          </a:prstGeom>
+          <a:solidFill>
+            <a:schemeClr val="bg2"/>
+          </a:solidFill>
+          <a:ln/>
+          <a:effectLst>
+            <a:outerShdw sx="100000" sy="100000" kx="0" ky="0" algn="bl" rotWithShape="0" blurRad="101600" dist="25400" dir="5400000">
+              <a:srgbClr val="0B1F3A">
+                <a:alpha val="8000"/>
+              </a:srgbClr>
+            </a:outerShdw>
+          </a:effectLst>
+        </p:spPr>
+      </p:sp>
+      <p:sp>
+        <p:nvSpPr>
+          <p:cNvPr id="7" name="Text 4"/>
+          <p:cNvSpPr txBox="1"/>
+          <p:nvPr/>
+        </p:nvSpPr>
+        <p:spPr>
+          <a:xfrm>
+            <a:off x="822960" y="3429000"/>
+            <a:ext cx="3246120" cy="731520"/>
+          </a:xfrm>
+          <a:prstGeom prst="rect">
+            <a:avLst/>
+          </a:prstGeom>
+          <a:noFill/>
+          <a:ln/>
+        </p:spPr>
+        <p:txBody>
+          <a:bodyPr wrap="square" lIns="0" tIns="0" rIns="0" bIns="0" rtlCol="0" anchor="ctr"/>
+          <a:lstStyle/>
+          <a:p>
+            <a:pPr algn="ctr" indent="0" marL="0">
+              <a:buNone/>
+            </a:pPr>
+            <a:r>
+              <a:rPr lang="en-US" sz="2000" b="1" dirty="0">
+                <a:solidFill>
+                  <a:schemeClr val="tx1"/>
+                </a:solidFill>
+              </a:rPr>
+              <a:t>Luis Mendez</a:t>
+            </a:r>
+            <a:endParaRPr lang="en-US" sz="2000" dirty="0"/>
+          </a:p>
+        </p:txBody>
+      </p:sp>
+      <p:sp>
+        <p:nvSpPr>
+          <p:cNvPr id="8" name="chip-Abdullah Rashid"/>
+          <p:cNvSpPr/>
+          <p:nvPr/>
+        </p:nvSpPr>
+        <p:spPr>
+          <a:xfrm>
+            <a:off x="4480560" y="3246120"/>
+            <a:ext cx="3611880" cy="1097280"/>
+          </a:xfrm>
+          <a:prstGeom prst="roundRect">
+            <a:avLst>
+              <a:gd name="adj" fmla="val 13333"/>
+            </a:avLst>
+          </a:prstGeom>
+          <a:solidFill>
+            <a:schemeClr val="bg2"/>
+          </a:solidFill>
+          <a:ln/>
+          <a:effectLst>
+            <a:outerShdw sx="100000" sy="100000" kx="0" ky="0" algn="bl" rotWithShape="0" blurRad="101600" dist="25400" dir="5400000">
+              <a:srgbClr val="0B1F3A">
+                <a:alpha val="8000"/>
+              </a:srgbClr>
+            </a:outerShdw>
+          </a:effectLst>
+        </p:spPr>
+      </p:sp>
+      <p:sp>
+        <p:nvSpPr>
+          <p:cNvPr id="9" name="Text 6"/>
+          <p:cNvSpPr txBox="1"/>
+          <p:nvPr/>
+        </p:nvSpPr>
+        <p:spPr>
+          <a:xfrm>
+            <a:off x="4663440" y="3429000"/>
+            <a:ext cx="3246120" cy="731520"/>
+          </a:xfrm>
+          <a:prstGeom prst="rect">
+            <a:avLst/>
+          </a:prstGeom>
+          <a:noFill/>
+          <a:ln/>
+        </p:spPr>
+        <p:txBody>
+          <a:bodyPr wrap="square" lIns="0" tIns="0" rIns="0" bIns="0" rtlCol="0" anchor="ctr"/>
+          <a:lstStyle/>
+          <a:p>
+            <a:pPr algn="ctr" indent="0" marL="0">
+              <a:buNone/>
+            </a:pPr>
+            <a:r>
+              <a:rPr lang="en-US" sz="2000" b="1" dirty="0">
+                <a:solidFill>
+                  <a:schemeClr val="tx1"/>
+                </a:solidFill>
+              </a:rPr>
+              <a:t>Abdullah Rashid</a:t>
+            </a:r>
+            <a:endParaRPr lang="en-US" sz="2000" dirty="0"/>
+          </a:p>
+        </p:txBody>
+      </p:sp>
+      <p:sp>
+        <p:nvSpPr>
+          <p:cNvPr id="10" name="chip-Built with Cursor"/>
+          <p:cNvSpPr/>
+          <p:nvPr/>
+        </p:nvSpPr>
+        <p:spPr>
+          <a:xfrm>
+            <a:off x="8321040" y="3246120"/>
+            <a:ext cx="3611880" cy="1097280"/>
+          </a:xfrm>
+          <a:prstGeom prst="roundRect">
+            <a:avLst>
+              <a:gd name="adj" fmla="val 13333"/>
+            </a:avLst>
+          </a:prstGeom>
+          <a:solidFill>
+            <a:schemeClr val="bg2"/>
+          </a:solidFill>
+          <a:ln/>
+          <a:effectLst>
+            <a:outerShdw sx="100000" sy="100000" kx="0" ky="0" algn="bl" rotWithShape="0" blurRad="101600" dist="25400" dir="5400000">
+              <a:srgbClr val="0B1F3A">
+                <a:alpha val="8000"/>
+              </a:srgbClr>
+            </a:outerShdw>
+          </a:effectLst>
+        </p:spPr>
+      </p:sp>
+      <p:sp>
+        <p:nvSpPr>
+          <p:cNvPr id="11" name="Text 8"/>
+          <p:cNvSpPr txBox="1"/>
+          <p:nvPr/>
+        </p:nvSpPr>
+        <p:spPr>
+          <a:xfrm>
+            <a:off x="8503920" y="3429000"/>
+            <a:ext cx="3246120" cy="731520"/>
+          </a:xfrm>
+          <a:prstGeom prst="rect">
+            <a:avLst/>
+          </a:prstGeom>
+          <a:noFill/>
+          <a:ln/>
+        </p:spPr>
+        <p:txBody>
+          <a:bodyPr wrap="square" lIns="0" tIns="0" rIns="0" bIns="0" rtlCol="0" anchor="ctr"/>
+          <a:lstStyle/>
+          <a:p>
+            <a:pPr algn="ctr" indent="0" marL="0">
+              <a:buNone/>
+            </a:pPr>
+            <a:r>
+              <a:rPr lang="en-US" sz="2000" b="1" dirty="0">
+                <a:solidFill>
+                  <a:schemeClr val="tx1"/>
+                </a:solidFill>
+              </a:rPr>
+              <a:t>Built with Cursor</a:t>
+            </a:r>
+            <a:endParaRPr lang="en-US" sz="2000" dirty="0"/>
+          </a:p>
+        </p:txBody>
+      </p:sp>
       <p:pic>
         <p:nvPicPr>
-          <p:cNvPr id="5" name="Image 1" descr="G:\broswer download\big-red-hacks2026\mobile\assets\icon.png">    </p:cNvPr>
+          <p:cNvPr id="12" name="pip" descr="G:\broswer download\big-red-hacks2026\docs\presentation\assets\scout.png">    </p:cNvPr>
           <p:cNvPicPr>
             <a:picLocks noChangeAspect="1"/>
           </p:cNvPicPr>
@@ -1662,238 +1887,62 @@
         </p:blipFill>
         <p:spPr>
           <a:xfrm>
-            <a:off x="640080" y="1691640"/>
-            <a:ext cx="1051560" cy="1051560"/>
+            <a:off x="3794760" y="4617720"/>
+            <a:ext cx="1325880" cy="1325880"/>
           </a:xfrm>
           <a:prstGeom prst="rect">
             <a:avLst/>
           </a:prstGeom>
         </p:spPr>
       </p:pic>
-      <p:sp>
-        <p:nvSpPr>
-          <p:cNvPr id="6" name="Text 2"/>
-          <p:cNvSpPr txBox="1"/>
-          <p:nvPr/>
-        </p:nvSpPr>
-        <p:spPr>
-          <a:xfrm>
-            <a:off x="1874520" y="1691640"/>
-            <a:ext cx="6400800" cy="640080"/>
-          </a:xfrm>
-          <a:prstGeom prst="rect">
-            <a:avLst/>
-          </a:prstGeom>
-          <a:noFill/>
-          <a:ln/>
-        </p:spPr>
-        <p:txBody>
-          <a:bodyPr wrap="square" lIns="0" tIns="0" rIns="0" bIns="0" rtlCol="0" anchor="ctr"/>
-          <a:lstStyle/>
-          <a:p>
-            <a:pPr indent="0" marL="0">
-              <a:buNone/>
-            </a:pPr>
-            <a:r>
-              <a:rPr lang="en-US" sz="4400" b="1" dirty="0">
-                <a:solidFill>
-                  <a:srgbClr val="FFFFFF"/>
-                </a:solidFill>
-                <a:latin typeface="Calibri" pitchFamily="34" charset="0"/>
-                <a:ea typeface="Calibri" pitchFamily="34" charset="-122"/>
-                <a:cs typeface="Calibri" pitchFamily="34" charset="-120"/>
-              </a:rPr>
-              <a:t>HuskiesPaws</a:t>
-            </a:r>
-            <a:endParaRPr lang="en-US" sz="4400" dirty="0"/>
-          </a:p>
-        </p:txBody>
-      </p:sp>
-      <p:sp>
-        <p:nvSpPr>
-          <p:cNvPr id="7" name="Text 3"/>
-          <p:cNvSpPr txBox="1"/>
-          <p:nvPr/>
-        </p:nvSpPr>
-        <p:spPr>
-          <a:xfrm>
-            <a:off x="1874520" y="2331720"/>
-            <a:ext cx="6492240" cy="457200"/>
-          </a:xfrm>
-          <a:prstGeom prst="rect">
-            <a:avLst/>
-          </a:prstGeom>
-          <a:noFill/>
-          <a:ln/>
-        </p:spPr>
-        <p:txBody>
-          <a:bodyPr wrap="square" lIns="0" tIns="0" rIns="0" bIns="0" rtlCol="0" anchor="ctr"/>
-          <a:lstStyle/>
-          <a:p>
-            <a:pPr indent="0" marL="0">
-              <a:buNone/>
-            </a:pPr>
-            <a:r>
-              <a:rPr lang="en-US" sz="1800" i="1" dirty="0">
-                <a:solidFill>
-                  <a:srgbClr val="6EC6FF"/>
-                </a:solidFill>
-                <a:latin typeface="Calibri" pitchFamily="34" charset="0"/>
-                <a:ea typeface="Calibri" pitchFamily="34" charset="-122"/>
-                <a:cs typeface="Calibri" pitchFamily="34" charset="-120"/>
-              </a:rPr>
-              <a:t>Turn everyday walks into a creature-collecting adventure.</a:t>
-            </a:r>
-            <a:endParaRPr lang="en-US" sz="1800" dirty="0"/>
-          </a:p>
-        </p:txBody>
-      </p:sp>
-      <p:sp>
-        <p:nvSpPr>
-          <p:cNvPr id="8" name="Shape 4"/>
-          <p:cNvSpPr/>
-          <p:nvPr/>
-        </p:nvSpPr>
-        <p:spPr>
-          <a:xfrm>
-            <a:off x="640080" y="3520440"/>
-            <a:ext cx="7040880" cy="1965960"/>
-          </a:xfrm>
-          <a:prstGeom prst="roundRect">
-            <a:avLst>
-              <a:gd name="adj" fmla="val 5581"/>
-            </a:avLst>
-          </a:prstGeom>
-          <a:solidFill>
-            <a:srgbClr val="123252"/>
-          </a:solidFill>
-          <a:ln/>
-          <a:effectLst>
-            <a:outerShdw sx="100000" sy="100000" kx="0" ky="0" algn="bl" rotWithShape="0" blurRad="101600" dist="25400" dir="5400000">
-              <a:srgbClr val="0B1F3A">
-                <a:alpha val="10000"/>
-              </a:srgbClr>
-            </a:outerShdw>
-          </a:effectLst>
-        </p:spPr>
-      </p:sp>
-      <p:sp>
-        <p:nvSpPr>
-          <p:cNvPr id="9" name="Text 5"/>
-          <p:cNvSpPr txBox="1"/>
-          <p:nvPr/>
-        </p:nvSpPr>
-        <p:spPr>
-          <a:xfrm>
-            <a:off x="868680" y="3703320"/>
-            <a:ext cx="6583680" cy="365760"/>
-          </a:xfrm>
-          <a:prstGeom prst="rect">
-            <a:avLst/>
-          </a:prstGeom>
-          <a:noFill/>
-          <a:ln/>
-        </p:spPr>
-        <p:txBody>
-          <a:bodyPr wrap="square" lIns="0" tIns="0" rIns="0" bIns="0" rtlCol="0" anchor="ctr"/>
-          <a:lstStyle/>
-          <a:p>
-            <a:pPr indent="0" marL="0">
-              <a:buNone/>
-            </a:pPr>
-            <a:r>
-              <a:rPr lang="en-US" sz="1800" dirty="0">
-                <a:solidFill>
-                  <a:srgbClr val="E8A317"/>
-                </a:solidFill>
-                <a:latin typeface="Calibri" pitchFamily="34" charset="0"/>
-                <a:ea typeface="Calibri" pitchFamily="34" charset="-122"/>
-                <a:cs typeface="Calibri" pitchFamily="34" charset="-120"/>
-              </a:rPr>
-              <a:t>BigRed//Hacks 2026  ·  Theme: Navigation</a:t>
-            </a:r>
-            <a:endParaRPr lang="en-US" sz="1800" dirty="0"/>
-          </a:p>
-        </p:txBody>
-      </p:sp>
-      <p:sp>
-        <p:nvSpPr>
-          <p:cNvPr id="10" name="Text 6"/>
-          <p:cNvSpPr txBox="1"/>
-          <p:nvPr/>
-        </p:nvSpPr>
-        <p:spPr>
-          <a:xfrm>
-            <a:off x="868680" y="4114800"/>
-            <a:ext cx="6583680" cy="411480"/>
-          </a:xfrm>
-          <a:prstGeom prst="rect">
-            <a:avLst/>
-          </a:prstGeom>
-          <a:noFill/>
-          <a:ln/>
-        </p:spPr>
-        <p:txBody>
-          <a:bodyPr wrap="square" lIns="0" tIns="0" rIns="0" bIns="0" rtlCol="0" anchor="ctr"/>
-          <a:lstStyle/>
-          <a:p>
-            <a:pPr indent="0" marL="0">
-              <a:buNone/>
-            </a:pPr>
-            <a:r>
-              <a:rPr lang="en-US" sz="2200" b="1" dirty="0">
-                <a:solidFill>
-                  <a:srgbClr val="FFFFFF"/>
-                </a:solidFill>
-                <a:latin typeface="Calibri" pitchFamily="34" charset="0"/>
-                <a:ea typeface="Calibri" pitchFamily="34" charset="-122"/>
-                <a:cs typeface="Calibri" pitchFamily="34" charset="-120"/>
-              </a:rPr>
-              <a:t>Luis Mendez  ·  Abdullah Rashid</a:t>
-            </a:r>
-            <a:endParaRPr lang="en-US" sz="2200" dirty="0"/>
-          </a:p>
-        </p:txBody>
-      </p:sp>
-      <p:sp>
-        <p:nvSpPr>
-          <p:cNvPr id="11" name="Text 7"/>
-          <p:cNvSpPr txBox="1"/>
-          <p:nvPr/>
-        </p:nvSpPr>
-        <p:spPr>
-          <a:xfrm>
-            <a:off x="868680" y="4617720"/>
-            <a:ext cx="6583680" cy="320040"/>
-          </a:xfrm>
-          <a:prstGeom prst="rect">
-            <a:avLst/>
-          </a:prstGeom>
-          <a:noFill/>
-          <a:ln/>
-        </p:spPr>
-        <p:txBody>
-          <a:bodyPr wrap="square" lIns="0" tIns="0" rIns="0" bIns="0" rtlCol="0" anchor="ctr"/>
-          <a:lstStyle/>
-          <a:p>
-            <a:pPr indent="0" marL="0">
-              <a:buNone/>
-            </a:pPr>
-            <a:r>
-              <a:rPr lang="en-US" sz="1600" dirty="0">
-                <a:solidFill>
-                  <a:srgbClr val="6EC6FF"/>
-                </a:solidFill>
-                <a:latin typeface="Calibri" pitchFamily="34" charset="0"/>
-                <a:ea typeface="Calibri" pitchFamily="34" charset="-122"/>
-                <a:cs typeface="Calibri" pitchFamily="34" charset="-120"/>
-              </a:rPr>
-              <a:t>Phone app  ·  Expo Go  ·  Built with Cursor</a:t>
-            </a:r>
-            <a:endParaRPr lang="en-US" sz="1600" dirty="0"/>
-          </a:p>
-        </p:txBody>
-      </p:sp>
+      <p:pic>
+        <p:nvPicPr>
+          <p:cNvPr id="13" name="fern" descr="G:\broswer download\big-red-hacks2026\docs\presentation\assets\pathfinder.png">    </p:cNvPr>
+          <p:cNvPicPr>
+            <a:picLocks noChangeAspect="1"/>
+          </p:cNvPicPr>
+          <p:nvPr/>
+        </p:nvPicPr>
+        <p:blipFill>
+          <a:blip r:embed="rId3"/>
+          <a:stretch>
+            <a:fillRect/>
+          </a:stretch>
+        </p:blipFill>
+        <p:spPr>
+          <a:xfrm>
+            <a:off x="5440680" y="4617720"/>
+            <a:ext cx="1325880" cy="1325880"/>
+          </a:xfrm>
+          <a:prstGeom prst="rect">
+            <a:avLst/>
+          </a:prstGeom>
+        </p:spPr>
+      </p:pic>
+      <p:pic>
+        <p:nvPicPr>
+          <p:cNvPr id="14" name="moss" descr="G:\broswer download\big-red-hacks2026\docs\presentation\assets\storyteller.png">    </p:cNvPr>
+          <p:cNvPicPr>
+            <a:picLocks noChangeAspect="1"/>
+          </p:cNvPicPr>
+          <p:nvPr/>
+        </p:nvPicPr>
+        <p:blipFill>
+          <a:blip r:embed="rId4"/>
+          <a:stretch>
+            <a:fillRect/>
+          </a:stretch>
+        </p:blipFill>
+        <p:spPr>
+          <a:xfrm>
+            <a:off x="7086600" y="4617720"/>
+            <a:ext cx="1325880" cy="1325880"/>
+          </a:xfrm>
+          <a:prstGeom prst="rect">
+            <a:avLst/>
+          </a:prstGeom>
+        </p:spPr>
+      </p:pic>
     </p:spTree>
   </p:cSld>
   <p:clrMapOvr>
@@ -1929,8 +1978,8 @@
         </p:nvSpPr>
         <p:spPr>
           <a:xfrm>
-            <a:off x="502920" y="256032"/>
-            <a:ext cx="11155680" cy="566928"/>
+            <a:off x="548640" y="256032"/>
+            <a:ext cx="11064240" cy="658368"/>
           </a:xfrm>
           <a:prstGeom prst="rect">
             <a:avLst/>
@@ -1946,112 +1995,31 @@
               <a:buNone/>
             </a:pPr>
             <a:r>
-              <a:rPr lang="en-US" sz="3200" b="1" dirty="0">
-                <a:solidFill>
-                  <a:srgbClr val="0B1F3A"/>
-                </a:solidFill>
-                <a:latin typeface="Calibri" pitchFamily="34" charset="0"/>
-                <a:ea typeface="Calibri" pitchFamily="34" charset="-122"/>
-                <a:cs typeface="Calibri" pitchFamily="34" charset="-120"/>
-              </a:rPr>
-              <a:t>People walk past the interesting places</a:t>
-            </a:r>
-            <a:endParaRPr lang="en-US" sz="3200" dirty="0"/>
-          </a:p>
-        </p:txBody>
-      </p:sp>
-      <p:sp>
-        <p:nvSpPr>
-          <p:cNvPr id="3" name="Text 1"/>
-          <p:cNvSpPr txBox="1"/>
-          <p:nvPr/>
-        </p:nvSpPr>
-        <p:spPr>
-          <a:xfrm>
-            <a:off x="502920" y="932688"/>
-            <a:ext cx="5349240" cy="292608"/>
-          </a:xfrm>
-          <a:prstGeom prst="rect">
-            <a:avLst/>
-          </a:prstGeom>
-          <a:noFill/>
-          <a:ln/>
-        </p:spPr>
-        <p:txBody>
-          <a:bodyPr wrap="square" lIns="0" tIns="0" rIns="0" bIns="0" rtlCol="0" anchor="ctr"/>
-          <a:lstStyle/>
-          <a:p>
-            <a:pPr indent="0" marL="0">
-              <a:buNone/>
-            </a:pPr>
-            <a:r>
-              <a:rPr lang="en-US" sz="1600" b="1" dirty="0">
-                <a:solidFill>
-                  <a:srgbClr val="FF7A59"/>
-                </a:solidFill>
-                <a:latin typeface="Calibri" pitchFamily="34" charset="0"/>
-                <a:ea typeface="Calibri" pitchFamily="34" charset="-122"/>
-                <a:cs typeface="Calibri" pitchFamily="34" charset="-120"/>
-              </a:rPr>
-              <a:t>Typical navigation</a:t>
-            </a:r>
-            <a:endParaRPr lang="en-US" sz="1600" dirty="0"/>
-          </a:p>
-        </p:txBody>
-      </p:sp>
-      <p:sp>
-        <p:nvSpPr>
-          <p:cNvPr id="4" name="Text 2"/>
-          <p:cNvSpPr txBox="1"/>
-          <p:nvPr/>
-        </p:nvSpPr>
-        <p:spPr>
-          <a:xfrm>
-            <a:off x="6355080" y="932688"/>
-            <a:ext cx="5349240" cy="292608"/>
-          </a:xfrm>
-          <a:prstGeom prst="rect">
-            <a:avLst/>
-          </a:prstGeom>
-          <a:noFill/>
-          <a:ln/>
-        </p:spPr>
-        <p:txBody>
-          <a:bodyPr wrap="square" lIns="0" tIns="0" rIns="0" bIns="0" rtlCol="0" anchor="ctr"/>
-          <a:lstStyle/>
-          <a:p>
-            <a:pPr indent="0" marL="0">
-              <a:buNone/>
-            </a:pPr>
-            <a:r>
-              <a:rPr lang="en-US" sz="1600" b="1" dirty="0">
-                <a:solidFill>
-                  <a:srgbClr val="1F6B45"/>
-                </a:solidFill>
-                <a:latin typeface="Calibri" pitchFamily="34" charset="0"/>
-                <a:ea typeface="Calibri" pitchFamily="34" charset="-122"/>
-                <a:cs typeface="Calibri" pitchFamily="34" charset="-120"/>
-              </a:rPr>
-              <a:t>What walking could be</a:t>
-            </a:r>
-            <a:endParaRPr lang="en-US" sz="1600" dirty="0"/>
-          </a:p>
-        </p:txBody>
-      </p:sp>
-      <p:sp>
-        <p:nvSpPr>
-          <p:cNvPr id="5" name="Shape 3"/>
+              <a:rPr lang="en-US" sz="3600" b="1" dirty="0">
+                <a:solidFill>
+                  <a:schemeClr val="tx1"/>
+                </a:solidFill>
+              </a:rPr>
+              <a:t>Maps get you there. They do not make you look.</a:t>
+            </a:r>
+            <a:endParaRPr lang="en-US" sz="3600" dirty="0"/>
+          </a:p>
+        </p:txBody>
+      </p:sp>
+      <p:sp>
+        <p:nvSpPr>
+          <p:cNvPr id="3" name="problem-0"/>
           <p:cNvSpPr/>
           <p:nvPr/>
         </p:nvSpPr>
         <p:spPr>
           <a:xfrm>
-            <a:off x="502920" y="1280160"/>
-            <a:ext cx="5349240" cy="1508760"/>
+            <a:off x="548640" y="1143000"/>
+            <a:ext cx="3611880" cy="3246120"/>
           </a:xfrm>
           <a:prstGeom prst="roundRect">
             <a:avLst>
-              <a:gd name="adj" fmla="val 7273"/>
+              <a:gd name="adj" fmla="val 4507"/>
             </a:avLst>
           </a:prstGeom>
           <a:solidFill>
@@ -2061,7 +2029,7 @@
           <a:effectLst>
             <a:outerShdw sx="100000" sy="100000" kx="0" ky="0" algn="bl" rotWithShape="0" blurRad="101600" dist="25400" dir="5400000">
               <a:srgbClr val="0B1F3A">
-                <a:alpha val="10000"/>
+                <a:alpha val="8000"/>
               </a:srgbClr>
             </a:outerShdw>
           </a:effectLst>
@@ -2069,38 +2037,91 @@
       </p:sp>
       <p:sp>
         <p:nvSpPr>
+          <p:cNvPr id="4" name="dot-0"/>
+          <p:cNvSpPr/>
+          <p:nvPr/>
+        </p:nvSpPr>
+        <p:spPr>
+          <a:xfrm>
+            <a:off x="1920240" y="1371600"/>
+            <a:ext cx="822960" cy="822960"/>
+          </a:xfrm>
+          <a:prstGeom prst="ellipse">
+            <a:avLst/>
+          </a:prstGeom>
+          <a:solidFill>
+            <a:schemeClr val="accent2"/>
+          </a:solidFill>
+          <a:ln/>
+        </p:spPr>
+      </p:sp>
+      <p:sp>
+        <p:nvSpPr>
+          <p:cNvPr id="5" name="Text 3"/>
+          <p:cNvSpPr txBox="1"/>
+          <p:nvPr/>
+        </p:nvSpPr>
+        <p:spPr>
+          <a:xfrm>
+            <a:off x="1920240" y="1481328"/>
+            <a:ext cx="822960" cy="594360"/>
+          </a:xfrm>
+          <a:prstGeom prst="rect">
+            <a:avLst/>
+          </a:prstGeom>
+          <a:noFill/>
+          <a:ln/>
+        </p:spPr>
+        <p:txBody>
+          <a:bodyPr wrap="square" lIns="0" tIns="0" rIns="0" bIns="0" rtlCol="0" anchor="ctr"/>
+          <a:lstStyle/>
+          <a:p>
+            <a:pPr algn="ctr" indent="0" marL="0">
+              <a:buNone/>
+            </a:pPr>
+            <a:r>
+              <a:rPr lang="en-US" sz="2200" b="1" dirty="0">
+                <a:solidFill>
+                  <a:schemeClr val="tx1"/>
+                </a:solidFill>
+              </a:rPr>
+              <a:t>1</a:t>
+            </a:r>
+            <a:endParaRPr lang="en-US" sz="2200" dirty="0"/>
+          </a:p>
+        </p:txBody>
+      </p:sp>
+      <p:sp>
+        <p:nvSpPr>
           <p:cNvPr id="6" name="Text 4"/>
           <p:cNvSpPr txBox="1"/>
           <p:nvPr/>
         </p:nvSpPr>
         <p:spPr>
           <a:xfrm>
-            <a:off x="731520" y="1600200"/>
-            <a:ext cx="4892040" cy="868680"/>
-          </a:xfrm>
-          <a:prstGeom prst="rect">
-            <a:avLst/>
-          </a:prstGeom>
-          <a:noFill/>
-          <a:ln/>
-        </p:spPr>
-        <p:txBody>
-          <a:bodyPr wrap="square" lIns="0" tIns="0" rIns="0" bIns="0" rtlCol="0" anchor="ctr"/>
-          <a:lstStyle/>
-          <a:p>
-            <a:pPr indent="0" marL="0">
+            <a:off x="777240" y="2377440"/>
+            <a:ext cx="3154680" cy="640080"/>
+          </a:xfrm>
+          <a:prstGeom prst="rect">
+            <a:avLst/>
+          </a:prstGeom>
+          <a:noFill/>
+          <a:ln/>
+        </p:spPr>
+        <p:txBody>
+          <a:bodyPr wrap="square" lIns="0" tIns="0" rIns="0" bIns="0" rtlCol="0" anchor="ctr"/>
+          <a:lstStyle/>
+          <a:p>
+            <a:pPr algn="ctr" indent="0" marL="0">
               <a:buNone/>
             </a:pPr>
             <a:r>
               <a:rPr lang="en-US" sz="2200" b="1" dirty="0">
                 <a:solidFill>
-                  <a:srgbClr val="0B1F3A"/>
-                </a:solidFill>
-                <a:latin typeface="Calibri" pitchFamily="34" charset="0"/>
-                <a:ea typeface="Calibri" pitchFamily="34" charset="-122"/>
-                <a:cs typeface="Calibri" pitchFamily="34" charset="-120"/>
-              </a:rPr>
-              <a:t>Get there as fast as possible</a:t>
+                  <a:schemeClr val="tx1"/>
+                </a:solidFill>
+              </a:rPr>
+              <a:t>Shortest path</a:t>
             </a:r>
             <a:endParaRPr lang="en-US" sz="2200" dirty="0"/>
           </a:p>
@@ -2114,8 +2135,8 @@
         </p:nvSpPr>
         <p:spPr>
           <a:xfrm>
-            <a:off x="5852160" y="1737360"/>
-            <a:ext cx="457200" cy="502920"/>
+            <a:off x="822960" y="3063240"/>
+            <a:ext cx="3063240" cy="1005840"/>
           </a:xfrm>
           <a:prstGeom prst="rect">
             <a:avLst/>
@@ -2131,44 +2152,41 @@
               <a:buNone/>
             </a:pPr>
             <a:r>
-              <a:rPr lang="en-US" sz="2400" b="1" dirty="0">
-                <a:solidFill>
-                  <a:srgbClr val="2E9D4F"/>
-                </a:solidFill>
-                <a:latin typeface="Calibri" pitchFamily="34" charset="0"/>
-                <a:ea typeface="Calibri" pitchFamily="34" charset="-122"/>
-                <a:cs typeface="Calibri" pitchFamily="34" charset="-120"/>
-              </a:rPr>
-              <a:t>→</a:t>
-            </a:r>
-            <a:endParaRPr lang="en-US" sz="2400" dirty="0"/>
-          </a:p>
-        </p:txBody>
-      </p:sp>
-      <p:sp>
-        <p:nvSpPr>
-          <p:cNvPr id="8" name="Shape 6"/>
+              <a:rPr lang="en-US" sz="1600" dirty="0">
+                <a:solidFill>
+                  <a:schemeClr val="accent6"/>
+                </a:solidFill>
+              </a:rPr>
+              <a:t>Navigation ends at the pin.</a:t>
+            </a:r>
+            <a:endParaRPr lang="en-US" sz="1600" dirty="0"/>
+          </a:p>
+        </p:txBody>
+      </p:sp>
+      <p:sp>
+        <p:nvSpPr>
+          <p:cNvPr id="8" name="problem-1"/>
           <p:cNvSpPr/>
           <p:nvPr/>
         </p:nvSpPr>
         <p:spPr>
           <a:xfrm>
-            <a:off x="6355080" y="1280160"/>
-            <a:ext cx="5349240" cy="1508760"/>
+            <a:off x="4343400" y="1143000"/>
+            <a:ext cx="3611880" cy="3246120"/>
           </a:xfrm>
           <a:prstGeom prst="roundRect">
             <a:avLst>
-              <a:gd name="adj" fmla="val 7273"/>
+              <a:gd name="adj" fmla="val 4507"/>
             </a:avLst>
           </a:prstGeom>
           <a:solidFill>
-            <a:srgbClr val="E7F3E4"/>
+            <a:srgbClr val="FFFFFF"/>
           </a:solidFill>
           <a:ln/>
           <a:effectLst>
             <a:outerShdw sx="100000" sy="100000" kx="0" ky="0" algn="bl" rotWithShape="0" blurRad="101600" dist="25400" dir="5400000">
               <a:srgbClr val="0B1F3A">
-                <a:alpha val="10000"/>
+                <a:alpha val="8000"/>
               </a:srgbClr>
             </a:outerShdw>
           </a:effectLst>
@@ -2176,38 +2194,55 @@
       </p:sp>
       <p:sp>
         <p:nvSpPr>
-          <p:cNvPr id="9" name="Text 7"/>
-          <p:cNvSpPr txBox="1"/>
-          <p:nvPr/>
-        </p:nvSpPr>
-        <p:spPr>
-          <a:xfrm>
-            <a:off x="6583680" y="1600200"/>
-            <a:ext cx="4892040" cy="868680"/>
-          </a:xfrm>
-          <a:prstGeom prst="rect">
-            <a:avLst/>
-          </a:prstGeom>
-          <a:noFill/>
-          <a:ln/>
-        </p:spPr>
-        <p:txBody>
-          <a:bodyPr wrap="square" lIns="0" tIns="0" rIns="0" bIns="0" rtlCol="0" anchor="ctr"/>
-          <a:lstStyle/>
-          <a:p>
-            <a:pPr indent="0" marL="0">
+          <p:cNvPr id="9" name="dot-1"/>
+          <p:cNvSpPr/>
+          <p:nvPr/>
+        </p:nvSpPr>
+        <p:spPr>
+          <a:xfrm>
+            <a:off x="5715000" y="1371600"/>
+            <a:ext cx="822960" cy="822960"/>
+          </a:xfrm>
+          <a:prstGeom prst="ellipse">
+            <a:avLst/>
+          </a:prstGeom>
+          <a:solidFill>
+            <a:schemeClr val="accent2"/>
+          </a:solidFill>
+          <a:ln/>
+        </p:spPr>
+      </p:sp>
+      <p:sp>
+        <p:nvSpPr>
+          <p:cNvPr id="10" name="Text 8"/>
+          <p:cNvSpPr txBox="1"/>
+          <p:nvPr/>
+        </p:nvSpPr>
+        <p:spPr>
+          <a:xfrm>
+            <a:off x="5715000" y="1481328"/>
+            <a:ext cx="822960" cy="594360"/>
+          </a:xfrm>
+          <a:prstGeom prst="rect">
+            <a:avLst/>
+          </a:prstGeom>
+          <a:noFill/>
+          <a:ln/>
+        </p:spPr>
+        <p:txBody>
+          <a:bodyPr wrap="square" lIns="0" tIns="0" rIns="0" bIns="0" rtlCol="0" anchor="ctr"/>
+          <a:lstStyle/>
+          <a:p>
+            <a:pPr algn="ctr" indent="0" marL="0">
               <a:buNone/>
             </a:pPr>
             <a:r>
               <a:rPr lang="en-US" sz="2200" b="1" dirty="0">
                 <a:solidFill>
-                  <a:srgbClr val="163528"/>
-                </a:solidFill>
-                <a:latin typeface="Calibri" pitchFamily="34" charset="0"/>
-                <a:ea typeface="Calibri" pitchFamily="34" charset="-122"/>
-                <a:cs typeface="Calibri" pitchFamily="34" charset="-120"/>
-              </a:rPr>
-              <a:t>Notice the route, not only the pin</a:t>
+                  <a:schemeClr val="tx1"/>
+                </a:solidFill>
+              </a:rPr>
+              <a:t>2</a:t>
             </a:r>
             <a:endParaRPr lang="en-US" sz="2200" dirty="0"/>
           </a:p>
@@ -2215,18 +2250,90 @@
       </p:sp>
       <p:sp>
         <p:nvSpPr>
-          <p:cNvPr id="10" name="Shape 8"/>
+          <p:cNvPr id="11" name="Text 9"/>
+          <p:cNvSpPr txBox="1"/>
+          <p:nvPr/>
+        </p:nvSpPr>
+        <p:spPr>
+          <a:xfrm>
+            <a:off x="4572000" y="2377440"/>
+            <a:ext cx="3154680" cy="640080"/>
+          </a:xfrm>
+          <a:prstGeom prst="rect">
+            <a:avLst/>
+          </a:prstGeom>
+          <a:noFill/>
+          <a:ln/>
+        </p:spPr>
+        <p:txBody>
+          <a:bodyPr wrap="square" lIns="0" tIns="0" rIns="0" bIns="0" rtlCol="0" anchor="ctr"/>
+          <a:lstStyle/>
+          <a:p>
+            <a:pPr algn="ctr" indent="0" marL="0">
+              <a:buNone/>
+            </a:pPr>
+            <a:r>
+              <a:rPr lang="en-US" sz="2200" b="1" dirty="0">
+                <a:solidFill>
+                  <a:schemeClr val="tx1"/>
+                </a:solidFill>
+              </a:rPr>
+              <a:t>Phone away</a:t>
+            </a:r>
+            <a:endParaRPr lang="en-US" sz="2200" dirty="0"/>
+          </a:p>
+        </p:txBody>
+      </p:sp>
+      <p:sp>
+        <p:nvSpPr>
+          <p:cNvPr id="12" name="Text 10"/>
+          <p:cNvSpPr txBox="1"/>
+          <p:nvPr/>
+        </p:nvSpPr>
+        <p:spPr>
+          <a:xfrm>
+            <a:off x="4617720" y="3063240"/>
+            <a:ext cx="3063240" cy="1005840"/>
+          </a:xfrm>
+          <a:prstGeom prst="rect">
+            <a:avLst/>
+          </a:prstGeom>
+          <a:noFill/>
+          <a:ln/>
+        </p:spPr>
+        <p:txBody>
+          <a:bodyPr wrap="square" lIns="0" tIns="0" rIns="0" bIns="0" rtlCol="0" anchor="ctr"/>
+          <a:lstStyle/>
+          <a:p>
+            <a:pPr algn="ctr" indent="0" marL="0">
+              <a:buNone/>
+            </a:pPr>
+            <a:r>
+              <a:rPr lang="en-US" sz="1600" dirty="0">
+                <a:solidFill>
+                  <a:schemeClr val="accent6"/>
+                </a:solidFill>
+              </a:rPr>
+              <a:t>The walk itself is leftover time.</a:t>
+            </a:r>
+            <a:endParaRPr lang="en-US" sz="1600" dirty="0"/>
+          </a:p>
+        </p:txBody>
+      </p:sp>
+      <p:sp>
+        <p:nvSpPr>
+          <p:cNvPr id="13" name="problem-2"/>
           <p:cNvSpPr/>
           <p:nvPr/>
         </p:nvSpPr>
         <p:spPr>
           <a:xfrm>
-            <a:off x="502920" y="2971800"/>
-            <a:ext cx="5349240" cy="1508760"/>
+            <a:off x="8138160" y="1143000"/>
+            <a:ext cx="3611880" cy="3246120"/>
           </a:xfrm>
           <a:prstGeom prst="roundRect">
             <a:avLst>
-              <a:gd name="adj" fmla="val 7273"/>
+              <a:gd name="adj" fmla="val 4507"/>
             </a:avLst>
           </a:prstGeom>
           <a:solidFill>
@@ -2236,7 +2343,7 @@
           <a:effectLst>
             <a:outerShdw sx="100000" sy="100000" kx="0" ky="0" algn="bl" rotWithShape="0" blurRad="101600" dist="25400" dir="5400000">
               <a:srgbClr val="0B1F3A">
-                <a:alpha val="10000"/>
+                <a:alpha val="8000"/>
               </a:srgbClr>
             </a:outerShdw>
           </a:effectLst>
@@ -2244,14 +2351,142 @@
       </p:sp>
       <p:sp>
         <p:nvSpPr>
-          <p:cNvPr id="11" name="Text 9"/>
-          <p:cNvSpPr txBox="1"/>
-          <p:nvPr/>
-        </p:nvSpPr>
-        <p:spPr>
-          <a:xfrm>
-            <a:off x="731520" y="3291840"/>
-            <a:ext cx="4892040" cy="868680"/>
+          <p:cNvPr id="14" name="dot-2"/>
+          <p:cNvSpPr/>
+          <p:nvPr/>
+        </p:nvSpPr>
+        <p:spPr>
+          <a:xfrm>
+            <a:off x="9509760" y="1371600"/>
+            <a:ext cx="822960" cy="822960"/>
+          </a:xfrm>
+          <a:prstGeom prst="ellipse">
+            <a:avLst/>
+          </a:prstGeom>
+          <a:solidFill>
+            <a:schemeClr val="accent2"/>
+          </a:solidFill>
+          <a:ln/>
+        </p:spPr>
+      </p:sp>
+      <p:sp>
+        <p:nvSpPr>
+          <p:cNvPr id="15" name="Text 13"/>
+          <p:cNvSpPr txBox="1"/>
+          <p:nvPr/>
+        </p:nvSpPr>
+        <p:spPr>
+          <a:xfrm>
+            <a:off x="9509760" y="1481328"/>
+            <a:ext cx="822960" cy="594360"/>
+          </a:xfrm>
+          <a:prstGeom prst="rect">
+            <a:avLst/>
+          </a:prstGeom>
+          <a:noFill/>
+          <a:ln/>
+        </p:spPr>
+        <p:txBody>
+          <a:bodyPr wrap="square" lIns="0" tIns="0" rIns="0" bIns="0" rtlCol="0" anchor="ctr"/>
+          <a:lstStyle/>
+          <a:p>
+            <a:pPr algn="ctr" indent="0" marL="0">
+              <a:buNone/>
+            </a:pPr>
+            <a:r>
+              <a:rPr lang="en-US" sz="2200" b="1" dirty="0">
+                <a:solidFill>
+                  <a:schemeClr val="tx1"/>
+                </a:solidFill>
+              </a:rPr>
+              <a:t>3</a:t>
+            </a:r>
+            <a:endParaRPr lang="en-US" sz="2200" dirty="0"/>
+          </a:p>
+        </p:txBody>
+      </p:sp>
+      <p:sp>
+        <p:nvSpPr>
+          <p:cNvPr id="16" name="Text 14"/>
+          <p:cNvSpPr txBox="1"/>
+          <p:nvPr/>
+        </p:nvSpPr>
+        <p:spPr>
+          <a:xfrm>
+            <a:off x="8366760" y="2377440"/>
+            <a:ext cx="3154680" cy="640080"/>
+          </a:xfrm>
+          <a:prstGeom prst="rect">
+            <a:avLst/>
+          </a:prstGeom>
+          <a:noFill/>
+          <a:ln/>
+        </p:spPr>
+        <p:txBody>
+          <a:bodyPr wrap="square" lIns="0" tIns="0" rIns="0" bIns="0" rtlCol="0" anchor="ctr"/>
+          <a:lstStyle/>
+          <a:p>
+            <a:pPr algn="ctr" indent="0" marL="0">
+              <a:buNone/>
+            </a:pPr>
+            <a:r>
+              <a:rPr lang="en-US" sz="2200" b="1" dirty="0">
+                <a:solidFill>
+                  <a:schemeClr val="tx1"/>
+                </a:solidFill>
+              </a:rPr>
+              <a:t>Missed places</a:t>
+            </a:r>
+            <a:endParaRPr lang="en-US" sz="2200" dirty="0"/>
+          </a:p>
+        </p:txBody>
+      </p:sp>
+      <p:sp>
+        <p:nvSpPr>
+          <p:cNvPr id="17" name="Text 15"/>
+          <p:cNvSpPr txBox="1"/>
+          <p:nvPr/>
+        </p:nvSpPr>
+        <p:spPr>
+          <a:xfrm>
+            <a:off x="8412480" y="3063240"/>
+            <a:ext cx="3063240" cy="1005840"/>
+          </a:xfrm>
+          <a:prstGeom prst="rect">
+            <a:avLst/>
+          </a:prstGeom>
+          <a:noFill/>
+          <a:ln/>
+        </p:spPr>
+        <p:txBody>
+          <a:bodyPr wrap="square" lIns="0" tIns="0" rIns="0" bIns="0" rtlCol="0" anchor="ctr"/>
+          <a:lstStyle/>
+          <a:p>
+            <a:pPr algn="ctr" indent="0" marL="0">
+              <a:buNone/>
+            </a:pPr>
+            <a:r>
+              <a:rPr lang="en-US" sz="1600" dirty="0">
+                <a:solidFill>
+                  <a:schemeClr val="accent6"/>
+                </a:solidFill>
+              </a:rPr>
+              <a:t>Campus already has stories. Nothing asks you to notice.</a:t>
+            </a:r>
+            <a:endParaRPr lang="en-US" sz="1600" dirty="0"/>
+          </a:p>
+        </p:txBody>
+      </p:sp>
+      <p:sp>
+        <p:nvSpPr>
+          <p:cNvPr id="18" name="Text 16"/>
+          <p:cNvSpPr txBox="1"/>
+          <p:nvPr/>
+        </p:nvSpPr>
+        <p:spPr>
+          <a:xfrm>
+            <a:off x="548640" y="4617720"/>
+            <a:ext cx="11064240" cy="640080"/>
           </a:xfrm>
           <a:prstGeom prst="rect">
             <a:avLst/>
@@ -2267,299 +2502,14 @@
               <a:buNone/>
             </a:pPr>
             <a:r>
-              <a:rPr lang="en-US" sz="2200" b="1" dirty="0">
-                <a:solidFill>
-                  <a:srgbClr val="0B1F3A"/>
-                </a:solidFill>
-                <a:latin typeface="Calibri" pitchFamily="34" charset="0"/>
-                <a:ea typeface="Calibri" pitchFamily="34" charset="-122"/>
-                <a:cs typeface="Calibri" pitchFamily="34" charset="-120"/>
-              </a:rPr>
-              <a:t>Stay on the shortest path</a:t>
-            </a:r>
-            <a:endParaRPr lang="en-US" sz="2200" dirty="0"/>
-          </a:p>
-        </p:txBody>
-      </p:sp>
-      <p:sp>
-        <p:nvSpPr>
-          <p:cNvPr id="12" name="Text 10"/>
-          <p:cNvSpPr txBox="1"/>
-          <p:nvPr/>
-        </p:nvSpPr>
-        <p:spPr>
-          <a:xfrm>
-            <a:off x="5852160" y="3429000"/>
-            <a:ext cx="457200" cy="502920"/>
-          </a:xfrm>
-          <a:prstGeom prst="rect">
-            <a:avLst/>
-          </a:prstGeom>
-          <a:noFill/>
-          <a:ln/>
-        </p:spPr>
-        <p:txBody>
-          <a:bodyPr wrap="square" lIns="0" tIns="0" rIns="0" bIns="0" rtlCol="0" anchor="ctr"/>
-          <a:lstStyle/>
-          <a:p>
-            <a:pPr algn="ctr" indent="0" marL="0">
-              <a:buNone/>
-            </a:pPr>
-            <a:r>
-              <a:rPr lang="en-US" sz="2400" b="1" dirty="0">
-                <a:solidFill>
-                  <a:srgbClr val="2E9D4F"/>
-                </a:solidFill>
-                <a:latin typeface="Calibri" pitchFamily="34" charset="0"/>
-                <a:ea typeface="Calibri" pitchFamily="34" charset="-122"/>
-                <a:cs typeface="Calibri" pitchFamily="34" charset="-120"/>
-              </a:rPr>
-              <a:t>→</a:t>
-            </a:r>
-            <a:endParaRPr lang="en-US" sz="2400" dirty="0"/>
-          </a:p>
-        </p:txBody>
-      </p:sp>
-      <p:sp>
-        <p:nvSpPr>
-          <p:cNvPr id="13" name="Shape 11"/>
-          <p:cNvSpPr/>
-          <p:nvPr/>
-        </p:nvSpPr>
-        <p:spPr>
-          <a:xfrm>
-            <a:off x="6355080" y="2971800"/>
-            <a:ext cx="5349240" cy="1508760"/>
-          </a:xfrm>
-          <a:prstGeom prst="roundRect">
-            <a:avLst>
-              <a:gd name="adj" fmla="val 7273"/>
-            </a:avLst>
-          </a:prstGeom>
-          <a:solidFill>
-            <a:srgbClr val="E7F3E4"/>
-          </a:solidFill>
-          <a:ln/>
-          <a:effectLst>
-            <a:outerShdw sx="100000" sy="100000" kx="0" ky="0" algn="bl" rotWithShape="0" blurRad="101600" dist="25400" dir="5400000">
-              <a:srgbClr val="0B1F3A">
-                <a:alpha val="10000"/>
-              </a:srgbClr>
-            </a:outerShdw>
-          </a:effectLst>
-        </p:spPr>
-      </p:sp>
-      <p:sp>
-        <p:nvSpPr>
-          <p:cNvPr id="14" name="Text 12"/>
-          <p:cNvSpPr txBox="1"/>
-          <p:nvPr/>
-        </p:nvSpPr>
-        <p:spPr>
-          <a:xfrm>
-            <a:off x="6583680" y="3291840"/>
-            <a:ext cx="4892040" cy="868680"/>
-          </a:xfrm>
-          <a:prstGeom prst="rect">
-            <a:avLst/>
-          </a:prstGeom>
-          <a:noFill/>
-          <a:ln/>
-        </p:spPr>
-        <p:txBody>
-          <a:bodyPr wrap="square" lIns="0" tIns="0" rIns="0" bIns="0" rtlCol="0" anchor="ctr"/>
-          <a:lstStyle/>
-          <a:p>
-            <a:pPr indent="0" marL="0">
-              <a:buNone/>
-            </a:pPr>
-            <a:r>
-              <a:rPr lang="en-US" sz="2200" b="1" dirty="0">
-                <a:solidFill>
-                  <a:srgbClr val="163528"/>
-                </a:solidFill>
-                <a:latin typeface="Calibri" pitchFamily="34" charset="0"/>
-                <a:ea typeface="Calibri" pitchFamily="34" charset="-122"/>
-                <a:cs typeface="Calibri" pitchFamily="34" charset="-120"/>
-              </a:rPr>
-              <a:t>Named places with real stories</a:t>
-            </a:r>
-            <a:endParaRPr lang="en-US" sz="2200" dirty="0"/>
-          </a:p>
-        </p:txBody>
-      </p:sp>
-      <p:sp>
-        <p:nvSpPr>
-          <p:cNvPr id="15" name="Shape 13"/>
-          <p:cNvSpPr/>
-          <p:nvPr/>
-        </p:nvSpPr>
-        <p:spPr>
-          <a:xfrm>
-            <a:off x="502920" y="4663440"/>
-            <a:ext cx="5349240" cy="1508760"/>
-          </a:xfrm>
-          <a:prstGeom prst="roundRect">
-            <a:avLst>
-              <a:gd name="adj" fmla="val 7273"/>
-            </a:avLst>
-          </a:prstGeom>
-          <a:solidFill>
-            <a:srgbClr val="FFFFFF"/>
-          </a:solidFill>
-          <a:ln/>
-          <a:effectLst>
-            <a:outerShdw sx="100000" sy="100000" kx="0" ky="0" algn="bl" rotWithShape="0" blurRad="101600" dist="25400" dir="5400000">
-              <a:srgbClr val="0B1F3A">
-                <a:alpha val="10000"/>
-              </a:srgbClr>
-            </a:outerShdw>
-          </a:effectLst>
-        </p:spPr>
-      </p:sp>
-      <p:sp>
-        <p:nvSpPr>
-          <p:cNvPr id="16" name="Text 14"/>
-          <p:cNvSpPr txBox="1"/>
-          <p:nvPr/>
-        </p:nvSpPr>
-        <p:spPr>
-          <a:xfrm>
-            <a:off x="731520" y="4983480"/>
-            <a:ext cx="4892040" cy="868680"/>
-          </a:xfrm>
-          <a:prstGeom prst="rect">
-            <a:avLst/>
-          </a:prstGeom>
-          <a:noFill/>
-          <a:ln/>
-        </p:spPr>
-        <p:txBody>
-          <a:bodyPr wrap="square" lIns="0" tIns="0" rIns="0" bIns="0" rtlCol="0" anchor="ctr"/>
-          <a:lstStyle/>
-          <a:p>
-            <a:pPr indent="0" marL="0">
-              <a:buNone/>
-            </a:pPr>
-            <a:r>
-              <a:rPr lang="en-US" sz="2200" b="1" dirty="0">
-                <a:solidFill>
-                  <a:srgbClr val="0B1F3A"/>
-                </a:solidFill>
-                <a:latin typeface="Calibri" pitchFamily="34" charset="0"/>
-                <a:ea typeface="Calibri" pitchFamily="34" charset="-122"/>
-                <a:cs typeface="Calibri" pitchFamily="34" charset="-120"/>
-              </a:rPr>
-              <a:t>Put the phone away at the door</a:t>
-            </a:r>
-            <a:endParaRPr lang="en-US" sz="2200" dirty="0"/>
-          </a:p>
-        </p:txBody>
-      </p:sp>
-      <p:sp>
-        <p:nvSpPr>
-          <p:cNvPr id="17" name="Text 15"/>
-          <p:cNvSpPr txBox="1"/>
-          <p:nvPr/>
-        </p:nvSpPr>
-        <p:spPr>
-          <a:xfrm>
-            <a:off x="5852160" y="5120640"/>
-            <a:ext cx="457200" cy="502920"/>
-          </a:xfrm>
-          <a:prstGeom prst="rect">
-            <a:avLst/>
-          </a:prstGeom>
-          <a:noFill/>
-          <a:ln/>
-        </p:spPr>
-        <p:txBody>
-          <a:bodyPr wrap="square" lIns="0" tIns="0" rIns="0" bIns="0" rtlCol="0" anchor="ctr"/>
-          <a:lstStyle/>
-          <a:p>
-            <a:pPr algn="ctr" indent="0" marL="0">
-              <a:buNone/>
-            </a:pPr>
-            <a:r>
-              <a:rPr lang="en-US" sz="2400" b="1" dirty="0">
-                <a:solidFill>
-                  <a:srgbClr val="2E9D4F"/>
-                </a:solidFill>
-                <a:latin typeface="Calibri" pitchFamily="34" charset="0"/>
-                <a:ea typeface="Calibri" pitchFamily="34" charset="-122"/>
-                <a:cs typeface="Calibri" pitchFamily="34" charset="-120"/>
-              </a:rPr>
-              <a:t>→</a:t>
-            </a:r>
-            <a:endParaRPr lang="en-US" sz="2400" dirty="0"/>
-          </a:p>
-        </p:txBody>
-      </p:sp>
-      <p:sp>
-        <p:nvSpPr>
-          <p:cNvPr id="18" name="Shape 16"/>
-          <p:cNvSpPr/>
-          <p:nvPr/>
-        </p:nvSpPr>
-        <p:spPr>
-          <a:xfrm>
-            <a:off x="6355080" y="4663440"/>
-            <a:ext cx="5349240" cy="1508760"/>
-          </a:xfrm>
-          <a:prstGeom prst="roundRect">
-            <a:avLst>
-              <a:gd name="adj" fmla="val 7273"/>
-            </a:avLst>
-          </a:prstGeom>
-          <a:solidFill>
-            <a:srgbClr val="E7F3E4"/>
-          </a:solidFill>
-          <a:ln/>
-          <a:effectLst>
-            <a:outerShdw sx="100000" sy="100000" kx="0" ky="0" algn="bl" rotWithShape="0" blurRad="101600" dist="25400" dir="5400000">
-              <a:srgbClr val="0B1F3A">
-                <a:alpha val="10000"/>
-              </a:srgbClr>
-            </a:outerShdw>
-          </a:effectLst>
-        </p:spPr>
-      </p:sp>
-      <p:sp>
-        <p:nvSpPr>
-          <p:cNvPr id="19" name="Text 17"/>
-          <p:cNvSpPr txBox="1"/>
-          <p:nvPr/>
-        </p:nvSpPr>
-        <p:spPr>
-          <a:xfrm>
-            <a:off x="6583680" y="4983480"/>
-            <a:ext cx="4892040" cy="868680"/>
-          </a:xfrm>
-          <a:prstGeom prst="rect">
-            <a:avLst/>
-          </a:prstGeom>
-          <a:noFill/>
-          <a:ln/>
-        </p:spPr>
-        <p:txBody>
-          <a:bodyPr wrap="square" lIns="0" tIns="0" rIns="0" bIns="0" rtlCol="0" anchor="ctr"/>
-          <a:lstStyle/>
-          <a:p>
-            <a:pPr indent="0" marL="0">
-              <a:buNone/>
-            </a:pPr>
-            <a:r>
-              <a:rPr lang="en-US" sz="2200" b="1" dirty="0">
-                <a:solidFill>
-                  <a:srgbClr val="163528"/>
-                </a:solidFill>
-                <a:latin typeface="Calibri" pitchFamily="34" charset="0"/>
-                <a:ea typeface="Calibri" pitchFamily="34" charset="-122"/>
-                <a:cs typeface="Calibri" pitchFamily="34" charset="-120"/>
-              </a:rPr>
-              <a:t>Walking earns progress and company</a:t>
-            </a:r>
-            <a:endParaRPr lang="en-US" sz="2200" dirty="0"/>
+              <a:rPr lang="en-US" sz="2000" i="1" dirty="0">
+                <a:solidFill>
+                  <a:schemeClr val="accent5"/>
+                </a:solidFill>
+              </a:rPr>
+              <a:t>No fake statistics. Walking already happens. Discovery does not.</a:t>
+            </a:r>
+            <a:endParaRPr lang="en-US" sz="2000" dirty="0"/>
           </a:p>
         </p:txBody>
       </p:sp>
@@ -2598,8 +2548,8 @@
         </p:nvSpPr>
         <p:spPr>
           <a:xfrm>
-            <a:off x="502920" y="256032"/>
-            <a:ext cx="11155680" cy="566928"/>
+            <a:off x="548640" y="256032"/>
+            <a:ext cx="11064240" cy="658368"/>
           </a:xfrm>
           <a:prstGeom prst="rect">
             <a:avLst/>
@@ -2615,34 +2565,31 @@
               <a:buNone/>
             </a:pPr>
             <a:r>
-              <a:rPr lang="en-US" sz="3200" b="1" dirty="0">
-                <a:solidFill>
-                  <a:srgbClr val="0B1F3A"/>
-                </a:solidFill>
-                <a:latin typeface="Calibri" pitchFamily="34" charset="0"/>
-                <a:ea typeface="Calibri" pitchFamily="34" charset="-122"/>
-                <a:cs typeface="Calibri" pitchFamily="34" charset="-120"/>
+              <a:rPr lang="en-US" sz="3600" b="1" dirty="0">
+                <a:solidFill>
+                  <a:schemeClr val="tx1"/>
+                </a:solidFill>
               </a:rPr>
               <a:t>Explore  →  Walk  →  Discover  →  Collect</a:t>
             </a:r>
-            <a:endParaRPr lang="en-US" sz="3200" dirty="0"/>
-          </a:p>
-        </p:txBody>
-      </p:sp>
-      <p:sp>
-        <p:nvSpPr>
-          <p:cNvPr id="3" name="Shape 1"/>
+            <a:endParaRPr lang="en-US" sz="3600" dirty="0"/>
+          </a:p>
+        </p:txBody>
+      </p:sp>
+      <p:sp>
+        <p:nvSpPr>
+          <p:cNvPr id="3" name="loop-Explore"/>
           <p:cNvSpPr/>
           <p:nvPr/>
         </p:nvSpPr>
         <p:spPr>
           <a:xfrm>
-            <a:off x="502920" y="960120"/>
-            <a:ext cx="2743200" cy="2468880"/>
+            <a:off x="502920" y="1051560"/>
+            <a:ext cx="2788920" cy="3977640"/>
           </a:xfrm>
           <a:prstGeom prst="roundRect">
             <a:avLst>
-              <a:gd name="adj" fmla="val 4444"/>
+              <a:gd name="adj" fmla="val 5246"/>
             </a:avLst>
           </a:prstGeom>
           <a:solidFill>
@@ -2652,163 +2599,158 @@
           <a:effectLst>
             <a:outerShdw sx="100000" sy="100000" kx="0" ky="0" algn="bl" rotWithShape="0" blurRad="101600" dist="25400" dir="5400000">
               <a:srgbClr val="0B1F3A">
-                <a:alpha val="10000"/>
+                <a:alpha val="8000"/>
               </a:srgbClr>
             </a:outerShdw>
           </a:effectLst>
         </p:spPr>
       </p:sp>
-      <p:sp>
-        <p:nvSpPr>
-          <p:cNvPr id="4" name="Shape 2"/>
+      <p:pic>
+        <p:nvPicPr>
+          <p:cNvPr id="4" name="art-Explore" descr="G:\broswer download\big-red-hacks2026\docs\presentation\assets\scout.png">    </p:cNvPr>
+          <p:cNvPicPr>
+            <a:picLocks noChangeAspect="1"/>
+          </p:cNvPicPr>
+          <p:nvPr/>
+        </p:nvPicPr>
+        <p:blipFill>
+          <a:blip r:embed="rId1"/>
+          <a:stretch>
+            <a:fillRect/>
+          </a:stretch>
+        </p:blipFill>
+        <p:spPr>
+          <a:xfrm>
+            <a:off x="1005840" y="1234440"/>
+            <a:ext cx="1783080" cy="1783080"/>
+          </a:xfrm>
+          <a:prstGeom prst="rect">
+            <a:avLst/>
+          </a:prstGeom>
+        </p:spPr>
+      </p:pic>
+      <p:sp>
+        <p:nvSpPr>
+          <p:cNvPr id="5" name="Text 2"/>
+          <p:cNvSpPr txBox="1"/>
+          <p:nvPr/>
+        </p:nvSpPr>
+        <p:spPr>
+          <a:xfrm>
+            <a:off x="640080" y="3108960"/>
+            <a:ext cx="2514600" cy="411480"/>
+          </a:xfrm>
+          <a:prstGeom prst="rect">
+            <a:avLst/>
+          </a:prstGeom>
+          <a:noFill/>
+          <a:ln/>
+        </p:spPr>
+        <p:txBody>
+          <a:bodyPr wrap="square" lIns="0" tIns="0" rIns="0" bIns="0" rtlCol="0" anchor="ctr"/>
+          <a:lstStyle/>
+          <a:p>
+            <a:pPr algn="ctr" indent="0" marL="0">
+              <a:buNone/>
+            </a:pPr>
+            <a:r>
+              <a:rPr lang="en-US" sz="2200" b="1" dirty="0">
+                <a:solidFill>
+                  <a:schemeClr val="tx1"/>
+                </a:solidFill>
+              </a:rPr>
+              <a:t>Explore</a:t>
+            </a:r>
+            <a:endParaRPr lang="en-US" sz="2200" dirty="0"/>
+          </a:p>
+        </p:txBody>
+      </p:sp>
+      <p:sp>
+        <p:nvSpPr>
+          <p:cNvPr id="6" name="Text 3"/>
+          <p:cNvSpPr txBox="1"/>
+          <p:nvPr/>
+        </p:nvSpPr>
+        <p:spPr>
+          <a:xfrm>
+            <a:off x="640080" y="3520440"/>
+            <a:ext cx="2514600" cy="292608"/>
+          </a:xfrm>
+          <a:prstGeom prst="rect">
+            <a:avLst/>
+          </a:prstGeom>
+          <a:noFill/>
+          <a:ln/>
+        </p:spPr>
+        <p:txBody>
+          <a:bodyPr wrap="square" lIns="0" tIns="0" rIns="0" bIns="0" rtlCol="0" anchor="ctr"/>
+          <a:lstStyle/>
+          <a:p>
+            <a:pPr algn="ctr" indent="0" marL="0">
+              <a:buNone/>
+            </a:pPr>
+            <a:r>
+              <a:rPr lang="en-US" sz="1400" dirty="0">
+                <a:solidFill>
+                  <a:schemeClr val="accent1"/>
+                </a:solidFill>
+              </a:rPr>
+              <a:t>Pip</a:t>
+            </a:r>
+            <a:endParaRPr lang="en-US" sz="1400" dirty="0"/>
+          </a:p>
+        </p:txBody>
+      </p:sp>
+      <p:sp>
+        <p:nvSpPr>
+          <p:cNvPr id="7" name="Text 4"/>
+          <p:cNvSpPr txBox="1"/>
+          <p:nvPr/>
+        </p:nvSpPr>
+        <p:spPr>
+          <a:xfrm>
+            <a:off x="667512" y="3858768"/>
+            <a:ext cx="2468880" cy="1005840"/>
+          </a:xfrm>
+          <a:prstGeom prst="rect">
+            <a:avLst/>
+          </a:prstGeom>
+          <a:noFill/>
+          <a:ln/>
+        </p:spPr>
+        <p:txBody>
+          <a:bodyPr wrap="square" lIns="0" tIns="0" rIns="0" bIns="0" rtlCol="0" anchor="ctr"/>
+          <a:lstStyle/>
+          <a:p>
+            <a:pPr algn="ctr" indent="0" marL="0">
+              <a:buNone/>
+            </a:pPr>
+            <a:r>
+              <a:rPr lang="en-US" sz="1400" dirty="0">
+                <a:solidFill>
+                  <a:schemeClr val="accent6"/>
+                </a:solidFill>
+              </a:rPr>
+              <a:t>Scouts a nearby place with Wikipedia and OSM.</a:t>
+            </a:r>
+            <a:endParaRPr lang="en-US" sz="1400" dirty="0"/>
+          </a:p>
+        </p:txBody>
+      </p:sp>
+      <p:sp>
+        <p:nvSpPr>
+          <p:cNvPr id="8" name="loop-Walk"/>
           <p:cNvSpPr/>
           <p:nvPr/>
         </p:nvSpPr>
         <p:spPr>
           <a:xfrm>
-            <a:off x="1527048" y="1115568"/>
-            <a:ext cx="658368" cy="658368"/>
-          </a:xfrm>
-          <a:prstGeom prst="ellipse">
-            <a:avLst/>
-          </a:prstGeom>
-          <a:solidFill>
-            <a:srgbClr val="2E9D4F"/>
-          </a:solidFill>
-          <a:ln/>
-        </p:spPr>
-      </p:sp>
-      <p:sp>
-        <p:nvSpPr>
-          <p:cNvPr id="5" name="Text 3"/>
-          <p:cNvSpPr txBox="1"/>
-          <p:nvPr/>
-        </p:nvSpPr>
-        <p:spPr>
-          <a:xfrm>
-            <a:off x="1527048" y="1188720"/>
-            <a:ext cx="658368" cy="512064"/>
-          </a:xfrm>
-          <a:prstGeom prst="rect">
-            <a:avLst/>
-          </a:prstGeom>
-          <a:noFill/>
-          <a:ln/>
-        </p:spPr>
-        <p:txBody>
-          <a:bodyPr wrap="square" lIns="0" tIns="0" rIns="0" bIns="0" rtlCol="0" anchor="ctr"/>
-          <a:lstStyle/>
-          <a:p>
-            <a:pPr algn="ctr" indent="0" marL="0">
-              <a:buNone/>
-            </a:pPr>
-            <a:r>
-              <a:rPr lang="en-US" sz="2200" b="1" dirty="0">
-                <a:solidFill>
-                  <a:srgbClr val="FFFFFF"/>
-                </a:solidFill>
-                <a:latin typeface="Calibri" pitchFamily="34" charset="0"/>
-                <a:ea typeface="Calibri" pitchFamily="34" charset="-122"/>
-                <a:cs typeface="Calibri" pitchFamily="34" charset="-120"/>
-              </a:rPr>
-              <a:t>1</a:t>
-            </a:r>
-            <a:endParaRPr lang="en-US" sz="2200" dirty="0"/>
-          </a:p>
-        </p:txBody>
-      </p:sp>
-      <p:sp>
-        <p:nvSpPr>
-          <p:cNvPr id="6" name="Text 4"/>
-          <p:cNvSpPr txBox="1"/>
-          <p:nvPr/>
-        </p:nvSpPr>
-        <p:spPr>
-          <a:xfrm>
-            <a:off x="640080" y="1874520"/>
-            <a:ext cx="2468880" cy="365760"/>
-          </a:xfrm>
-          <a:prstGeom prst="rect">
-            <a:avLst/>
-          </a:prstGeom>
-          <a:noFill/>
-          <a:ln/>
-        </p:spPr>
-        <p:txBody>
-          <a:bodyPr wrap="square" lIns="0" tIns="0" rIns="0" bIns="0" rtlCol="0" anchor="ctr"/>
-          <a:lstStyle/>
-          <a:p>
-            <a:pPr algn="ctr" indent="0" marL="0">
-              <a:buNone/>
-            </a:pPr>
-            <a:r>
-              <a:rPr lang="en-US" sz="2200" b="1" dirty="0">
-                <a:solidFill>
-                  <a:srgbClr val="0B1F3A"/>
-                </a:solidFill>
-                <a:latin typeface="Calibri" pitchFamily="34" charset="0"/>
-                <a:ea typeface="Calibri" pitchFamily="34" charset="-122"/>
-                <a:cs typeface="Calibri" pitchFamily="34" charset="-120"/>
-              </a:rPr>
-              <a:t>Explore</a:t>
-            </a:r>
-            <a:endParaRPr lang="en-US" sz="2200" dirty="0"/>
-          </a:p>
-        </p:txBody>
-      </p:sp>
-      <p:sp>
-        <p:nvSpPr>
-          <p:cNvPr id="7" name="Text 5"/>
-          <p:cNvSpPr txBox="1"/>
-          <p:nvPr/>
-        </p:nvSpPr>
-        <p:spPr>
-          <a:xfrm>
-            <a:off x="667512" y="2286000"/>
-            <a:ext cx="2414016" cy="960120"/>
-          </a:xfrm>
-          <a:prstGeom prst="rect">
-            <a:avLst/>
-          </a:prstGeom>
-          <a:noFill/>
-          <a:ln/>
-        </p:spPr>
-        <p:txBody>
-          <a:bodyPr wrap="square" lIns="0" tIns="0" rIns="0" bIns="0" rtlCol="0" anchor="ctr"/>
-          <a:lstStyle/>
-          <a:p>
-            <a:pPr algn="ctr" indent="0" marL="0">
-              <a:buNone/>
-            </a:pPr>
-            <a:r>
-              <a:rPr lang="en-US" sz="1400" dirty="0">
-                <a:solidFill>
-                  <a:srgbClr val="4A6358"/>
-                </a:solidFill>
-                <a:latin typeface="Calibri" pitchFamily="34" charset="0"/>
-                <a:ea typeface="Calibri" pitchFamily="34" charset="-122"/>
-                <a:cs typeface="Calibri" pitchFamily="34" charset="-120"/>
-              </a:rPr>
-              <a:t>Pip scouts nearby places from Wikipedia and OpenStreetMap.</a:t>
-            </a:r>
-            <a:endParaRPr lang="en-US" sz="1400" dirty="0"/>
-          </a:p>
-        </p:txBody>
-      </p:sp>
-      <p:sp>
-        <p:nvSpPr>
-          <p:cNvPr id="8" name="Shape 6"/>
-          <p:cNvSpPr/>
-          <p:nvPr/>
-        </p:nvSpPr>
-        <p:spPr>
-          <a:xfrm>
-            <a:off x="3429000" y="960120"/>
-            <a:ext cx="2743200" cy="2468880"/>
+            <a:off x="3429000" y="1051560"/>
+            <a:ext cx="2788920" cy="3977640"/>
           </a:xfrm>
           <a:prstGeom prst="roundRect">
             <a:avLst>
-              <a:gd name="adj" fmla="val 4444"/>
+              <a:gd name="adj" fmla="val 5246"/>
             </a:avLst>
           </a:prstGeom>
           <a:solidFill>
@@ -2818,163 +2760,158 @@
           <a:effectLst>
             <a:outerShdw sx="100000" sy="100000" kx="0" ky="0" algn="bl" rotWithShape="0" blurRad="101600" dist="25400" dir="5400000">
               <a:srgbClr val="0B1F3A">
-                <a:alpha val="10000"/>
+                <a:alpha val="8000"/>
               </a:srgbClr>
             </a:outerShdw>
           </a:effectLst>
         </p:spPr>
       </p:sp>
-      <p:sp>
-        <p:nvSpPr>
-          <p:cNvPr id="9" name="Shape 7"/>
+      <p:pic>
+        <p:nvPicPr>
+          <p:cNvPr id="9" name="art-Walk" descr="G:\broswer download\big-red-hacks2026\docs\presentation\assets\pathfinder.png">    </p:cNvPr>
+          <p:cNvPicPr>
+            <a:picLocks noChangeAspect="1"/>
+          </p:cNvPicPr>
+          <p:nvPr/>
+        </p:nvPicPr>
+        <p:blipFill>
+          <a:blip r:embed="rId2"/>
+          <a:stretch>
+            <a:fillRect/>
+          </a:stretch>
+        </p:blipFill>
+        <p:spPr>
+          <a:xfrm>
+            <a:off x="3931920" y="1234440"/>
+            <a:ext cx="1783080" cy="1783080"/>
+          </a:xfrm>
+          <a:prstGeom prst="rect">
+            <a:avLst/>
+          </a:prstGeom>
+        </p:spPr>
+      </p:pic>
+      <p:sp>
+        <p:nvSpPr>
+          <p:cNvPr id="10" name="Text 6"/>
+          <p:cNvSpPr txBox="1"/>
+          <p:nvPr/>
+        </p:nvSpPr>
+        <p:spPr>
+          <a:xfrm>
+            <a:off x="3566160" y="3108960"/>
+            <a:ext cx="2514600" cy="411480"/>
+          </a:xfrm>
+          <a:prstGeom prst="rect">
+            <a:avLst/>
+          </a:prstGeom>
+          <a:noFill/>
+          <a:ln/>
+        </p:spPr>
+        <p:txBody>
+          <a:bodyPr wrap="square" lIns="0" tIns="0" rIns="0" bIns="0" rtlCol="0" anchor="ctr"/>
+          <a:lstStyle/>
+          <a:p>
+            <a:pPr algn="ctr" indent="0" marL="0">
+              <a:buNone/>
+            </a:pPr>
+            <a:r>
+              <a:rPr lang="en-US" sz="2200" b="1" dirty="0">
+                <a:solidFill>
+                  <a:schemeClr val="tx1"/>
+                </a:solidFill>
+              </a:rPr>
+              <a:t>Walk</a:t>
+            </a:r>
+            <a:endParaRPr lang="en-US" sz="2200" dirty="0"/>
+          </a:p>
+        </p:txBody>
+      </p:sp>
+      <p:sp>
+        <p:nvSpPr>
+          <p:cNvPr id="11" name="Text 7"/>
+          <p:cNvSpPr txBox="1"/>
+          <p:nvPr/>
+        </p:nvSpPr>
+        <p:spPr>
+          <a:xfrm>
+            <a:off x="3566160" y="3520440"/>
+            <a:ext cx="2514600" cy="292608"/>
+          </a:xfrm>
+          <a:prstGeom prst="rect">
+            <a:avLst/>
+          </a:prstGeom>
+          <a:noFill/>
+          <a:ln/>
+        </p:spPr>
+        <p:txBody>
+          <a:bodyPr wrap="square" lIns="0" tIns="0" rIns="0" bIns="0" rtlCol="0" anchor="ctr"/>
+          <a:lstStyle/>
+          <a:p>
+            <a:pPr algn="ctr" indent="0" marL="0">
+              <a:buNone/>
+            </a:pPr>
+            <a:r>
+              <a:rPr lang="en-US" sz="1400" dirty="0">
+                <a:solidFill>
+                  <a:schemeClr val="accent1"/>
+                </a:solidFill>
+              </a:rPr>
+              <a:t>Fern</a:t>
+            </a:r>
+            <a:endParaRPr lang="en-US" sz="1400" dirty="0"/>
+          </a:p>
+        </p:txBody>
+      </p:sp>
+      <p:sp>
+        <p:nvSpPr>
+          <p:cNvPr id="12" name="Text 8"/>
+          <p:cNvSpPr txBox="1"/>
+          <p:nvPr/>
+        </p:nvSpPr>
+        <p:spPr>
+          <a:xfrm>
+            <a:off x="3593592" y="3858768"/>
+            <a:ext cx="2468880" cy="1005840"/>
+          </a:xfrm>
+          <a:prstGeom prst="rect">
+            <a:avLst/>
+          </a:prstGeom>
+          <a:noFill/>
+          <a:ln/>
+        </p:spPr>
+        <p:txBody>
+          <a:bodyPr wrap="square" lIns="0" tIns="0" rIns="0" bIns="0" rtlCol="0" anchor="ctr"/>
+          <a:lstStyle/>
+          <a:p>
+            <a:pPr algn="ctr" indent="0" marL="0">
+              <a:buNone/>
+            </a:pPr>
+            <a:r>
+              <a:rPr lang="en-US" sz="1400" dirty="0">
+                <a:solidFill>
+                  <a:schemeClr val="accent6"/>
+                </a:solidFill>
+              </a:rPr>
+              <a:t>Guides the route. The trail blooms.</a:t>
+            </a:r>
+            <a:endParaRPr lang="en-US" sz="1400" dirty="0"/>
+          </a:p>
+        </p:txBody>
+      </p:sp>
+      <p:sp>
+        <p:nvSpPr>
+          <p:cNvPr id="13" name="loop-Discover"/>
           <p:cNvSpPr/>
           <p:nvPr/>
         </p:nvSpPr>
         <p:spPr>
           <a:xfrm>
-            <a:off x="4453128" y="1115568"/>
-            <a:ext cx="658368" cy="658368"/>
-          </a:xfrm>
-          <a:prstGeom prst="ellipse">
-            <a:avLst/>
-          </a:prstGeom>
-          <a:solidFill>
-            <a:srgbClr val="2E9D4F"/>
-          </a:solidFill>
-          <a:ln/>
-        </p:spPr>
-      </p:sp>
-      <p:sp>
-        <p:nvSpPr>
-          <p:cNvPr id="10" name="Text 8"/>
-          <p:cNvSpPr txBox="1"/>
-          <p:nvPr/>
-        </p:nvSpPr>
-        <p:spPr>
-          <a:xfrm>
-            <a:off x="4453128" y="1188720"/>
-            <a:ext cx="658368" cy="512064"/>
-          </a:xfrm>
-          <a:prstGeom prst="rect">
-            <a:avLst/>
-          </a:prstGeom>
-          <a:noFill/>
-          <a:ln/>
-        </p:spPr>
-        <p:txBody>
-          <a:bodyPr wrap="square" lIns="0" tIns="0" rIns="0" bIns="0" rtlCol="0" anchor="ctr"/>
-          <a:lstStyle/>
-          <a:p>
-            <a:pPr algn="ctr" indent="0" marL="0">
-              <a:buNone/>
-            </a:pPr>
-            <a:r>
-              <a:rPr lang="en-US" sz="2200" b="1" dirty="0">
-                <a:solidFill>
-                  <a:srgbClr val="FFFFFF"/>
-                </a:solidFill>
-                <a:latin typeface="Calibri" pitchFamily="34" charset="0"/>
-                <a:ea typeface="Calibri" pitchFamily="34" charset="-122"/>
-                <a:cs typeface="Calibri" pitchFamily="34" charset="-120"/>
-              </a:rPr>
-              <a:t>2</a:t>
-            </a:r>
-            <a:endParaRPr lang="en-US" sz="2200" dirty="0"/>
-          </a:p>
-        </p:txBody>
-      </p:sp>
-      <p:sp>
-        <p:nvSpPr>
-          <p:cNvPr id="11" name="Text 9"/>
-          <p:cNvSpPr txBox="1"/>
-          <p:nvPr/>
-        </p:nvSpPr>
-        <p:spPr>
-          <a:xfrm>
-            <a:off x="3566160" y="1874520"/>
-            <a:ext cx="2468880" cy="365760"/>
-          </a:xfrm>
-          <a:prstGeom prst="rect">
-            <a:avLst/>
-          </a:prstGeom>
-          <a:noFill/>
-          <a:ln/>
-        </p:spPr>
-        <p:txBody>
-          <a:bodyPr wrap="square" lIns="0" tIns="0" rIns="0" bIns="0" rtlCol="0" anchor="ctr"/>
-          <a:lstStyle/>
-          <a:p>
-            <a:pPr algn="ctr" indent="0" marL="0">
-              <a:buNone/>
-            </a:pPr>
-            <a:r>
-              <a:rPr lang="en-US" sz="2200" b="1" dirty="0">
-                <a:solidFill>
-                  <a:srgbClr val="0B1F3A"/>
-                </a:solidFill>
-                <a:latin typeface="Calibri" pitchFamily="34" charset="0"/>
-                <a:ea typeface="Calibri" pitchFamily="34" charset="-122"/>
-                <a:cs typeface="Calibri" pitchFamily="34" charset="-120"/>
-              </a:rPr>
-              <a:t>Walk</a:t>
-            </a:r>
-            <a:endParaRPr lang="en-US" sz="2200" dirty="0"/>
-          </a:p>
-        </p:txBody>
-      </p:sp>
-      <p:sp>
-        <p:nvSpPr>
-          <p:cNvPr id="12" name="Text 10"/>
-          <p:cNvSpPr txBox="1"/>
-          <p:nvPr/>
-        </p:nvSpPr>
-        <p:spPr>
-          <a:xfrm>
-            <a:off x="3593592" y="2286000"/>
-            <a:ext cx="2414016" cy="960120"/>
-          </a:xfrm>
-          <a:prstGeom prst="rect">
-            <a:avLst/>
-          </a:prstGeom>
-          <a:noFill/>
-          <a:ln/>
-        </p:spPr>
-        <p:txBody>
-          <a:bodyPr wrap="square" lIns="0" tIns="0" rIns="0" bIns="0" rtlCol="0" anchor="ctr"/>
-          <a:lstStyle/>
-          <a:p>
-            <a:pPr algn="ctr" indent="0" marL="0">
-              <a:buNone/>
-            </a:pPr>
-            <a:r>
-              <a:rPr lang="en-US" sz="1400" dirty="0">
-                <a:solidFill>
-                  <a:srgbClr val="4A6358"/>
-                </a:solidFill>
-                <a:latin typeface="Calibri" pitchFamily="34" charset="0"/>
-                <a:ea typeface="Calibri" pitchFamily="34" charset="-122"/>
-                <a:cs typeface="Calibri" pitchFamily="34" charset="-120"/>
-              </a:rPr>
-              <a:t>Fern guides the route. The trail blooms as you move.</a:t>
-            </a:r>
-            <a:endParaRPr lang="en-US" sz="1400" dirty="0"/>
-          </a:p>
-        </p:txBody>
-      </p:sp>
-      <p:sp>
-        <p:nvSpPr>
-          <p:cNvPr id="13" name="Shape 11"/>
-          <p:cNvSpPr/>
-          <p:nvPr/>
-        </p:nvSpPr>
-        <p:spPr>
-          <a:xfrm>
-            <a:off x="6355080" y="960120"/>
-            <a:ext cx="2743200" cy="2468880"/>
+            <a:off x="6355080" y="1051560"/>
+            <a:ext cx="2788920" cy="3977640"/>
           </a:xfrm>
           <a:prstGeom prst="roundRect">
             <a:avLst>
-              <a:gd name="adj" fmla="val 4444"/>
+              <a:gd name="adj" fmla="val 5246"/>
             </a:avLst>
           </a:prstGeom>
           <a:solidFill>
@@ -2984,163 +2921,158 @@
           <a:effectLst>
             <a:outerShdw sx="100000" sy="100000" kx="0" ky="0" algn="bl" rotWithShape="0" blurRad="101600" dist="25400" dir="5400000">
               <a:srgbClr val="0B1F3A">
-                <a:alpha val="10000"/>
+                <a:alpha val="8000"/>
               </a:srgbClr>
             </a:outerShdw>
           </a:effectLst>
         </p:spPr>
       </p:sp>
-      <p:sp>
-        <p:nvSpPr>
-          <p:cNvPr id="14" name="Shape 12"/>
+      <p:pic>
+        <p:nvPicPr>
+          <p:cNvPr id="14" name="art-Discover" descr="G:\broswer download\big-red-hacks2026\docs\presentation\assets\storyteller.png">    </p:cNvPr>
+          <p:cNvPicPr>
+            <a:picLocks noChangeAspect="1"/>
+          </p:cNvPicPr>
+          <p:nvPr/>
+        </p:nvPicPr>
+        <p:blipFill>
+          <a:blip r:embed="rId3"/>
+          <a:stretch>
+            <a:fillRect/>
+          </a:stretch>
+        </p:blipFill>
+        <p:spPr>
+          <a:xfrm>
+            <a:off x="6858000" y="1234440"/>
+            <a:ext cx="1783080" cy="1783080"/>
+          </a:xfrm>
+          <a:prstGeom prst="rect">
+            <a:avLst/>
+          </a:prstGeom>
+        </p:spPr>
+      </p:pic>
+      <p:sp>
+        <p:nvSpPr>
+          <p:cNvPr id="15" name="Text 10"/>
+          <p:cNvSpPr txBox="1"/>
+          <p:nvPr/>
+        </p:nvSpPr>
+        <p:spPr>
+          <a:xfrm>
+            <a:off x="6492240" y="3108960"/>
+            <a:ext cx="2514600" cy="411480"/>
+          </a:xfrm>
+          <a:prstGeom prst="rect">
+            <a:avLst/>
+          </a:prstGeom>
+          <a:noFill/>
+          <a:ln/>
+        </p:spPr>
+        <p:txBody>
+          <a:bodyPr wrap="square" lIns="0" tIns="0" rIns="0" bIns="0" rtlCol="0" anchor="ctr"/>
+          <a:lstStyle/>
+          <a:p>
+            <a:pPr algn="ctr" indent="0" marL="0">
+              <a:buNone/>
+            </a:pPr>
+            <a:r>
+              <a:rPr lang="en-US" sz="2200" b="1" dirty="0">
+                <a:solidFill>
+                  <a:schemeClr val="tx1"/>
+                </a:solidFill>
+              </a:rPr>
+              <a:t>Discover</a:t>
+            </a:r>
+            <a:endParaRPr lang="en-US" sz="2200" dirty="0"/>
+          </a:p>
+        </p:txBody>
+      </p:sp>
+      <p:sp>
+        <p:nvSpPr>
+          <p:cNvPr id="16" name="Text 11"/>
+          <p:cNvSpPr txBox="1"/>
+          <p:nvPr/>
+        </p:nvSpPr>
+        <p:spPr>
+          <a:xfrm>
+            <a:off x="6492240" y="3520440"/>
+            <a:ext cx="2514600" cy="292608"/>
+          </a:xfrm>
+          <a:prstGeom prst="rect">
+            <a:avLst/>
+          </a:prstGeom>
+          <a:noFill/>
+          <a:ln/>
+        </p:spPr>
+        <p:txBody>
+          <a:bodyPr wrap="square" lIns="0" tIns="0" rIns="0" bIns="0" rtlCol="0" anchor="ctr"/>
+          <a:lstStyle/>
+          <a:p>
+            <a:pPr algn="ctr" indent="0" marL="0">
+              <a:buNone/>
+            </a:pPr>
+            <a:r>
+              <a:rPr lang="en-US" sz="1400" dirty="0">
+                <a:solidFill>
+                  <a:schemeClr val="accent1"/>
+                </a:solidFill>
+              </a:rPr>
+              <a:t>Moss</a:t>
+            </a:r>
+            <a:endParaRPr lang="en-US" sz="1400" dirty="0"/>
+          </a:p>
+        </p:txBody>
+      </p:sp>
+      <p:sp>
+        <p:nvSpPr>
+          <p:cNvPr id="17" name="Text 12"/>
+          <p:cNvSpPr txBox="1"/>
+          <p:nvPr/>
+        </p:nvSpPr>
+        <p:spPr>
+          <a:xfrm>
+            <a:off x="6519672" y="3858768"/>
+            <a:ext cx="2468880" cy="1005840"/>
+          </a:xfrm>
+          <a:prstGeom prst="rect">
+            <a:avLst/>
+          </a:prstGeom>
+          <a:noFill/>
+          <a:ln/>
+        </p:spPr>
+        <p:txBody>
+          <a:bodyPr wrap="square" lIns="0" tIns="0" rIns="0" bIns="0" rtlCol="0" anchor="ctr"/>
+          <a:lstStyle/>
+          <a:p>
+            <a:pPr algn="ctr" indent="0" marL="0">
+              <a:buNone/>
+            </a:pPr>
+            <a:r>
+              <a:rPr lang="en-US" sz="1400" dirty="0">
+                <a:solidFill>
+                  <a:schemeClr val="accent6"/>
+                </a:solidFill>
+              </a:rPr>
+              <a:t>Tells the grounded story.</a:t>
+            </a:r>
+            <a:endParaRPr lang="en-US" sz="1400" dirty="0"/>
+          </a:p>
+        </p:txBody>
+      </p:sp>
+      <p:sp>
+        <p:nvSpPr>
+          <p:cNvPr id="18" name="loop-Collect"/>
           <p:cNvSpPr/>
           <p:nvPr/>
         </p:nvSpPr>
         <p:spPr>
           <a:xfrm>
-            <a:off x="7379208" y="1115568"/>
-            <a:ext cx="658368" cy="658368"/>
-          </a:xfrm>
-          <a:prstGeom prst="ellipse">
-            <a:avLst/>
-          </a:prstGeom>
-          <a:solidFill>
-            <a:srgbClr val="2E9D4F"/>
-          </a:solidFill>
-          <a:ln/>
-        </p:spPr>
-      </p:sp>
-      <p:sp>
-        <p:nvSpPr>
-          <p:cNvPr id="15" name="Text 13"/>
-          <p:cNvSpPr txBox="1"/>
-          <p:nvPr/>
-        </p:nvSpPr>
-        <p:spPr>
-          <a:xfrm>
-            <a:off x="7379208" y="1188720"/>
-            <a:ext cx="658368" cy="512064"/>
-          </a:xfrm>
-          <a:prstGeom prst="rect">
-            <a:avLst/>
-          </a:prstGeom>
-          <a:noFill/>
-          <a:ln/>
-        </p:spPr>
-        <p:txBody>
-          <a:bodyPr wrap="square" lIns="0" tIns="0" rIns="0" bIns="0" rtlCol="0" anchor="ctr"/>
-          <a:lstStyle/>
-          <a:p>
-            <a:pPr algn="ctr" indent="0" marL="0">
-              <a:buNone/>
-            </a:pPr>
-            <a:r>
-              <a:rPr lang="en-US" sz="2200" b="1" dirty="0">
-                <a:solidFill>
-                  <a:srgbClr val="FFFFFF"/>
-                </a:solidFill>
-                <a:latin typeface="Calibri" pitchFamily="34" charset="0"/>
-                <a:ea typeface="Calibri" pitchFamily="34" charset="-122"/>
-                <a:cs typeface="Calibri" pitchFamily="34" charset="-120"/>
-              </a:rPr>
-              <a:t>3</a:t>
-            </a:r>
-            <a:endParaRPr lang="en-US" sz="2200" dirty="0"/>
-          </a:p>
-        </p:txBody>
-      </p:sp>
-      <p:sp>
-        <p:nvSpPr>
-          <p:cNvPr id="16" name="Text 14"/>
-          <p:cNvSpPr txBox="1"/>
-          <p:nvPr/>
-        </p:nvSpPr>
-        <p:spPr>
-          <a:xfrm>
-            <a:off x="6492240" y="1874520"/>
-            <a:ext cx="2468880" cy="365760"/>
-          </a:xfrm>
-          <a:prstGeom prst="rect">
-            <a:avLst/>
-          </a:prstGeom>
-          <a:noFill/>
-          <a:ln/>
-        </p:spPr>
-        <p:txBody>
-          <a:bodyPr wrap="square" lIns="0" tIns="0" rIns="0" bIns="0" rtlCol="0" anchor="ctr"/>
-          <a:lstStyle/>
-          <a:p>
-            <a:pPr algn="ctr" indent="0" marL="0">
-              <a:buNone/>
-            </a:pPr>
-            <a:r>
-              <a:rPr lang="en-US" sz="2200" b="1" dirty="0">
-                <a:solidFill>
-                  <a:srgbClr val="0B1F3A"/>
-                </a:solidFill>
-                <a:latin typeface="Calibri" pitchFamily="34" charset="0"/>
-                <a:ea typeface="Calibri" pitchFamily="34" charset="-122"/>
-                <a:cs typeface="Calibri" pitchFamily="34" charset="-120"/>
-              </a:rPr>
-              <a:t>Discover</a:t>
-            </a:r>
-            <a:endParaRPr lang="en-US" sz="2200" dirty="0"/>
-          </a:p>
-        </p:txBody>
-      </p:sp>
-      <p:sp>
-        <p:nvSpPr>
-          <p:cNvPr id="17" name="Text 15"/>
-          <p:cNvSpPr txBox="1"/>
-          <p:nvPr/>
-        </p:nvSpPr>
-        <p:spPr>
-          <a:xfrm>
-            <a:off x="6519672" y="2286000"/>
-            <a:ext cx="2414016" cy="960120"/>
-          </a:xfrm>
-          <a:prstGeom prst="rect">
-            <a:avLst/>
-          </a:prstGeom>
-          <a:noFill/>
-          <a:ln/>
-        </p:spPr>
-        <p:txBody>
-          <a:bodyPr wrap="square" lIns="0" tIns="0" rIns="0" bIns="0" rtlCol="0" anchor="ctr"/>
-          <a:lstStyle/>
-          <a:p>
-            <a:pPr algn="ctr" indent="0" marL="0">
-              <a:buNone/>
-            </a:pPr>
-            <a:r>
-              <a:rPr lang="en-US" sz="1400" dirty="0">
-                <a:solidFill>
-                  <a:srgbClr val="4A6358"/>
-                </a:solidFill>
-                <a:latin typeface="Calibri" pitchFamily="34" charset="0"/>
-                <a:ea typeface="Calibri" pitchFamily="34" charset="-122"/>
-                <a:cs typeface="Calibri" pitchFamily="34" charset="-120"/>
-              </a:rPr>
-              <a:t>Moss tells the grounded story at a real landmark.</a:t>
-            </a:r>
-            <a:endParaRPr lang="en-US" sz="1400" dirty="0"/>
-          </a:p>
-        </p:txBody>
-      </p:sp>
-      <p:sp>
-        <p:nvSpPr>
-          <p:cNvPr id="18" name="Shape 16"/>
-          <p:cNvSpPr/>
-          <p:nvPr/>
-        </p:nvSpPr>
-        <p:spPr>
-          <a:xfrm>
-            <a:off x="9281160" y="960120"/>
-            <a:ext cx="2743200" cy="2468880"/>
+            <a:off x="9281160" y="1051560"/>
+            <a:ext cx="2788920" cy="3977640"/>
           </a:xfrm>
           <a:prstGeom prst="roundRect">
             <a:avLst>
-              <a:gd name="adj" fmla="val 4444"/>
+              <a:gd name="adj" fmla="val 5246"/>
             </a:avLst>
           </a:prstGeom>
           <a:solidFill>
@@ -3150,42 +3082,46 @@
           <a:effectLst>
             <a:outerShdw sx="100000" sy="100000" kx="0" ky="0" algn="bl" rotWithShape="0" blurRad="101600" dist="25400" dir="5400000">
               <a:srgbClr val="0B1F3A">
-                <a:alpha val="10000"/>
+                <a:alpha val="8000"/>
               </a:srgbClr>
             </a:outerShdw>
           </a:effectLst>
         </p:spPr>
       </p:sp>
-      <p:sp>
-        <p:nvSpPr>
-          <p:cNvPr id="19" name="Shape 17"/>
-          <p:cNvSpPr/>
-          <p:nvPr/>
-        </p:nvSpPr>
-        <p:spPr>
-          <a:xfrm>
-            <a:off x="10305288" y="1115568"/>
-            <a:ext cx="658368" cy="658368"/>
-          </a:xfrm>
-          <a:prstGeom prst="ellipse">
-            <a:avLst/>
-          </a:prstGeom>
-          <a:solidFill>
-            <a:srgbClr val="2E9D4F"/>
-          </a:solidFill>
-          <a:ln/>
-        </p:spPr>
-      </p:sp>
-      <p:sp>
-        <p:nvSpPr>
-          <p:cNvPr id="20" name="Text 18"/>
-          <p:cNvSpPr txBox="1"/>
-          <p:nvPr/>
-        </p:nvSpPr>
-        <p:spPr>
-          <a:xfrm>
-            <a:off x="10305288" y="1188720"/>
-            <a:ext cx="658368" cy="512064"/>
+      <p:pic>
+        <p:nvPicPr>
+          <p:cNvPr id="19" name="art-Collect" descr="G:\broswer download\big-red-hacks2026\mobile\assets\badges\gold.png">    </p:cNvPr>
+          <p:cNvPicPr>
+            <a:picLocks noChangeAspect="1"/>
+          </p:cNvPicPr>
+          <p:nvPr/>
+        </p:nvPicPr>
+        <p:blipFill>
+          <a:blip r:embed="rId4"/>
+          <a:stretch>
+            <a:fillRect/>
+          </a:stretch>
+        </p:blipFill>
+        <p:spPr>
+          <a:xfrm>
+            <a:off x="9784080" y="1234440"/>
+            <a:ext cx="1783080" cy="1783080"/>
+          </a:xfrm>
+          <a:prstGeom prst="rect">
+            <a:avLst/>
+          </a:prstGeom>
+        </p:spPr>
+      </p:pic>
+      <p:sp>
+        <p:nvSpPr>
+          <p:cNvPr id="20" name="Text 14"/>
+          <p:cNvSpPr txBox="1"/>
+          <p:nvPr/>
+        </p:nvSpPr>
+        <p:spPr>
+          <a:xfrm>
+            <a:off x="9418320" y="3108960"/>
+            <a:ext cx="2514600" cy="411480"/>
           </a:xfrm>
           <a:prstGeom prst="rect">
             <a:avLst/>
@@ -3203,13 +3139,10 @@
             <a:r>
               <a:rPr lang="en-US" sz="2200" b="1" dirty="0">
                 <a:solidFill>
-                  <a:srgbClr val="FFFFFF"/>
-                </a:solidFill>
-                <a:latin typeface="Calibri" pitchFamily="34" charset="0"/>
-                <a:ea typeface="Calibri" pitchFamily="34" charset="-122"/>
-                <a:cs typeface="Calibri" pitchFamily="34" charset="-120"/>
-              </a:rPr>
-              <a:t>4</a:t>
+                  <a:schemeClr val="tx1"/>
+                </a:solidFill>
+              </a:rPr>
+              <a:t>Collect</a:t>
             </a:r>
             <a:endParaRPr lang="en-US" sz="2200" dirty="0"/>
           </a:p>
@@ -3217,14 +3150,14 @@
       </p:sp>
       <p:sp>
         <p:nvSpPr>
-          <p:cNvPr id="21" name="Text 19"/>
-          <p:cNvSpPr txBox="1"/>
-          <p:nvPr/>
-        </p:nvSpPr>
-        <p:spPr>
-          <a:xfrm>
-            <a:off x="9418320" y="1874520"/>
-            <a:ext cx="2468880" cy="365760"/>
+          <p:cNvPr id="21" name="Text 15"/>
+          <p:cNvSpPr txBox="1"/>
+          <p:nvPr/>
+        </p:nvSpPr>
+        <p:spPr>
+          <a:xfrm>
+            <a:off x="9418320" y="3520440"/>
+            <a:ext cx="2514600" cy="292608"/>
           </a:xfrm>
           <a:prstGeom prst="rect">
             <a:avLst/>
@@ -3240,30 +3173,27 @@
               <a:buNone/>
             </a:pPr>
             <a:r>
-              <a:rPr lang="en-US" sz="2200" b="1" dirty="0">
-                <a:solidFill>
-                  <a:srgbClr val="0B1F3A"/>
-                </a:solidFill>
-                <a:latin typeface="Calibri" pitchFamily="34" charset="0"/>
-                <a:ea typeface="Calibri" pitchFamily="34" charset="-122"/>
-                <a:cs typeface="Calibri" pitchFamily="34" charset="-120"/>
-              </a:rPr>
-              <a:t>Collect</a:t>
-            </a:r>
-            <a:endParaRPr lang="en-US" sz="2200" dirty="0"/>
-          </a:p>
-        </p:txBody>
-      </p:sp>
-      <p:sp>
-        <p:nvSpPr>
-          <p:cNvPr id="22" name="Text 20"/>
-          <p:cNvSpPr txBox="1"/>
-          <p:nvPr/>
-        </p:nvSpPr>
-        <p:spPr>
-          <a:xfrm>
-            <a:off x="9445752" y="2286000"/>
-            <a:ext cx="2414016" cy="960120"/>
+              <a:rPr lang="en-US" sz="1400" dirty="0">
+                <a:solidFill>
+                  <a:schemeClr val="accent1"/>
+                </a:solidFill>
+              </a:rPr>
+              <a:t>You</a:t>
+            </a:r>
+            <a:endParaRPr lang="en-US" sz="1400" dirty="0"/>
+          </a:p>
+        </p:txBody>
+      </p:sp>
+      <p:sp>
+        <p:nvSpPr>
+          <p:cNvPr id="22" name="Text 16"/>
+          <p:cNvSpPr txBox="1"/>
+          <p:nvPr/>
+        </p:nvSpPr>
+        <p:spPr>
+          <a:xfrm>
+            <a:off x="9445752" y="3858768"/>
+            <a:ext cx="2468880" cy="1005840"/>
           </a:xfrm>
           <a:prstGeom prst="rect">
             <a:avLst/>
@@ -3281,13 +3211,10 @@
             <a:r>
               <a:rPr lang="en-US" sz="1400" dirty="0">
                 <a:solidFill>
-                  <a:srgbClr val="4A6358"/>
-                </a:solidFill>
-                <a:latin typeface="Calibri" pitchFamily="34" charset="0"/>
-                <a:ea typeface="Calibri" pitchFamily="34" charset="-122"/>
-                <a:cs typeface="Calibri" pitchFamily="34" charset="-120"/>
-              </a:rPr>
-              <a:t>Capture the place. Walking fills eggs and grows the squad.</a:t>
+                  <a:schemeClr val="accent6"/>
+                </a:solidFill>
+              </a:rPr>
+              <a:t>Capture the landmark. Eggs fill as you walk.</a:t>
             </a:r>
             <a:endParaRPr lang="en-US" sz="1400" dirty="0"/>
           </a:p>
@@ -3295,43 +3222,14 @@
       </p:sp>
       <p:sp>
         <p:nvSpPr>
-          <p:cNvPr id="23" name="Shape 21"/>
-          <p:cNvSpPr/>
-          <p:nvPr/>
-        </p:nvSpPr>
-        <p:spPr>
-          <a:xfrm>
-            <a:off x="502920" y="3611880"/>
-            <a:ext cx="11201400" cy="2651760"/>
-          </a:xfrm>
-          <a:prstGeom prst="roundRect">
-            <a:avLst>
-              <a:gd name="adj" fmla="val 4138"/>
-            </a:avLst>
-          </a:prstGeom>
-          <a:solidFill>
-            <a:srgbClr val="0B1F3A"/>
-          </a:solidFill>
-          <a:ln/>
-          <a:effectLst>
-            <a:outerShdw sx="100000" sy="100000" kx="0" ky="0" algn="bl" rotWithShape="0" blurRad="101600" dist="25400" dir="5400000">
-              <a:srgbClr val="0B1F3A">
-                <a:alpha val="10000"/>
-              </a:srgbClr>
-            </a:outerShdw>
-          </a:effectLst>
-        </p:spPr>
-      </p:sp>
-      <p:sp>
-        <p:nvSpPr>
-          <p:cNvPr id="24" name="Text 22"/>
-          <p:cNvSpPr txBox="1"/>
-          <p:nvPr/>
-        </p:nvSpPr>
-        <p:spPr>
-          <a:xfrm>
-            <a:off x="777240" y="3840480"/>
-            <a:ext cx="3383280" cy="384048"/>
+          <p:cNvPr id="23" name="Text 17"/>
+          <p:cNvSpPr txBox="1"/>
+          <p:nvPr/>
+        </p:nvSpPr>
+        <p:spPr>
+          <a:xfrm>
+            <a:off x="548640" y="5166360"/>
+            <a:ext cx="11064240" cy="1097280"/>
           </a:xfrm>
           <a:prstGeom prst="rect">
             <a:avLst/>
@@ -3347,329 +3245,14 @@
               <a:buNone/>
             </a:pPr>
             <a:r>
-              <a:rPr lang="en-US" sz="2400" b="1" dirty="0">
-                <a:solidFill>
-                  <a:srgbClr val="E8A317"/>
-                </a:solidFill>
-                <a:latin typeface="Calibri" pitchFamily="34" charset="0"/>
-                <a:ea typeface="Calibri" pitchFamily="34" charset="-122"/>
-                <a:cs typeface="Calibri" pitchFamily="34" charset="-120"/>
-              </a:rPr>
-              <a:t>Pip</a:t>
-            </a:r>
-            <a:endParaRPr lang="en-US" sz="2400" dirty="0"/>
-          </a:p>
-        </p:txBody>
-      </p:sp>
-      <p:sp>
-        <p:nvSpPr>
-          <p:cNvPr id="25" name="Text 23"/>
-          <p:cNvSpPr txBox="1"/>
-          <p:nvPr/>
-        </p:nvSpPr>
-        <p:spPr>
-          <a:xfrm>
-            <a:off x="777240" y="4251960"/>
-            <a:ext cx="3383280" cy="292608"/>
-          </a:xfrm>
-          <a:prstGeom prst="rect">
-            <a:avLst/>
-          </a:prstGeom>
-          <a:noFill/>
-          <a:ln/>
-        </p:spPr>
-        <p:txBody>
-          <a:bodyPr wrap="square" lIns="0" tIns="0" rIns="0" bIns="0" rtlCol="0" anchor="ctr"/>
-          <a:lstStyle/>
-          <a:p>
-            <a:pPr indent="0" marL="0">
-              <a:buNone/>
-            </a:pPr>
-            <a:r>
               <a:rPr lang="en-US" sz="1600" dirty="0">
                 <a:solidFill>
-                  <a:srgbClr val="6EC6FF"/>
-                </a:solidFill>
-                <a:latin typeface="Calibri" pitchFamily="34" charset="0"/>
-                <a:ea typeface="Calibri" pitchFamily="34" charset="-122"/>
-                <a:cs typeface="Calibri" pitchFamily="34" charset="-120"/>
-              </a:rPr>
-              <a:t>Scout</a:t>
+                  <a:schemeClr val="accent6"/>
+                </a:solidFill>
+              </a:rPr>
+              <a:t>Pip, Fern, and Moss — original art from the app.</a:t>
             </a:r>
             <a:endParaRPr lang="en-US" sz="1600" dirty="0"/>
-          </a:p>
-        </p:txBody>
-      </p:sp>
-      <p:sp>
-        <p:nvSpPr>
-          <p:cNvPr id="26" name="Text 24"/>
-          <p:cNvSpPr txBox="1"/>
-          <p:nvPr/>
-        </p:nvSpPr>
-        <p:spPr>
-          <a:xfrm>
-            <a:off x="777240" y="4663440"/>
-            <a:ext cx="3383280" cy="1234440"/>
-          </a:xfrm>
-          <a:prstGeom prst="rect">
-            <a:avLst/>
-          </a:prstGeom>
-          <a:noFill/>
-          <a:ln/>
-        </p:spPr>
-        <p:txBody>
-          <a:bodyPr wrap="square" lIns="0" tIns="0" rIns="0" bIns="0" rtlCol="0" anchor="ctr"/>
-          <a:lstStyle/>
-          <a:p>
-            <a:pPr indent="0" marL="0">
-              <a:buNone/>
-            </a:pPr>
-            <a:r>
-              <a:rPr lang="en-US" sz="1800" dirty="0">
-                <a:solidFill>
-                  <a:srgbClr val="FFFFFF"/>
-                </a:solidFill>
-                <a:latin typeface="Calibri" pitchFamily="34" charset="0"/>
-                <a:ea typeface="Calibri" pitchFamily="34" charset="-122"/>
-                <a:cs typeface="Calibri" pitchFamily="34" charset="-120"/>
-              </a:rPr>
-              <a:t>Finds a nearby place and a fact from tools, not guesswork.</a:t>
-            </a:r>
-            <a:endParaRPr lang="en-US" sz="1800" dirty="0"/>
-          </a:p>
-        </p:txBody>
-      </p:sp>
-      <p:sp>
-        <p:nvSpPr>
-          <p:cNvPr id="27" name="Text 25"/>
-          <p:cNvSpPr txBox="1"/>
-          <p:nvPr/>
-        </p:nvSpPr>
-        <p:spPr>
-          <a:xfrm>
-            <a:off x="4434840" y="3840480"/>
-            <a:ext cx="3383280" cy="384048"/>
-          </a:xfrm>
-          <a:prstGeom prst="rect">
-            <a:avLst/>
-          </a:prstGeom>
-          <a:noFill/>
-          <a:ln/>
-        </p:spPr>
-        <p:txBody>
-          <a:bodyPr wrap="square" lIns="0" tIns="0" rIns="0" bIns="0" rtlCol="0" anchor="ctr"/>
-          <a:lstStyle/>
-          <a:p>
-            <a:pPr indent="0" marL="0">
-              <a:buNone/>
-            </a:pPr>
-            <a:r>
-              <a:rPr lang="en-US" sz="2400" b="1" dirty="0">
-                <a:solidFill>
-                  <a:srgbClr val="E8A317"/>
-                </a:solidFill>
-                <a:latin typeface="Calibri" pitchFamily="34" charset="0"/>
-                <a:ea typeface="Calibri" pitchFamily="34" charset="-122"/>
-                <a:cs typeface="Calibri" pitchFamily="34" charset="-120"/>
-              </a:rPr>
-              <a:t>Moss</a:t>
-            </a:r>
-            <a:endParaRPr lang="en-US" sz="2400" dirty="0"/>
-          </a:p>
-        </p:txBody>
-      </p:sp>
-      <p:sp>
-        <p:nvSpPr>
-          <p:cNvPr id="28" name="Text 26"/>
-          <p:cNvSpPr txBox="1"/>
-          <p:nvPr/>
-        </p:nvSpPr>
-        <p:spPr>
-          <a:xfrm>
-            <a:off x="4434840" y="4251960"/>
-            <a:ext cx="3383280" cy="292608"/>
-          </a:xfrm>
-          <a:prstGeom prst="rect">
-            <a:avLst/>
-          </a:prstGeom>
-          <a:noFill/>
-          <a:ln/>
-        </p:spPr>
-        <p:txBody>
-          <a:bodyPr wrap="square" lIns="0" tIns="0" rIns="0" bIns="0" rtlCol="0" anchor="ctr"/>
-          <a:lstStyle/>
-          <a:p>
-            <a:pPr indent="0" marL="0">
-              <a:buNone/>
-            </a:pPr>
-            <a:r>
-              <a:rPr lang="en-US" sz="1600" dirty="0">
-                <a:solidFill>
-                  <a:srgbClr val="6EC6FF"/>
-                </a:solidFill>
-                <a:latin typeface="Calibri" pitchFamily="34" charset="0"/>
-                <a:ea typeface="Calibri" pitchFamily="34" charset="-122"/>
-                <a:cs typeface="Calibri" pitchFamily="34" charset="-120"/>
-              </a:rPr>
-              <a:t>Storyteller</a:t>
-            </a:r>
-            <a:endParaRPr lang="en-US" sz="1600" dirty="0"/>
-          </a:p>
-        </p:txBody>
-      </p:sp>
-      <p:sp>
-        <p:nvSpPr>
-          <p:cNvPr id="29" name="Text 27"/>
-          <p:cNvSpPr txBox="1"/>
-          <p:nvPr/>
-        </p:nvSpPr>
-        <p:spPr>
-          <a:xfrm>
-            <a:off x="4434840" y="4663440"/>
-            <a:ext cx="3383280" cy="1234440"/>
-          </a:xfrm>
-          <a:prstGeom prst="rect">
-            <a:avLst/>
-          </a:prstGeom>
-          <a:noFill/>
-          <a:ln/>
-        </p:spPr>
-        <p:txBody>
-          <a:bodyPr wrap="square" lIns="0" tIns="0" rIns="0" bIns="0" rtlCol="0" anchor="ctr"/>
-          <a:lstStyle/>
-          <a:p>
-            <a:pPr indent="0" marL="0">
-              <a:buNone/>
-            </a:pPr>
-            <a:r>
-              <a:rPr lang="en-US" sz="1800" dirty="0">
-                <a:solidFill>
-                  <a:srgbClr val="FFFFFF"/>
-                </a:solidFill>
-                <a:latin typeface="Calibri" pitchFamily="34" charset="0"/>
-                <a:ea typeface="Calibri" pitchFamily="34" charset="-122"/>
-                <a:cs typeface="Calibri" pitchFamily="34" charset="-120"/>
-              </a:rPr>
-              <a:t>Reads the landmark’s history in a short voice memo.</a:t>
-            </a:r>
-            <a:endParaRPr lang="en-US" sz="1800" dirty="0"/>
-          </a:p>
-        </p:txBody>
-      </p:sp>
-      <p:sp>
-        <p:nvSpPr>
-          <p:cNvPr id="30" name="Text 28"/>
-          <p:cNvSpPr txBox="1"/>
-          <p:nvPr/>
-        </p:nvSpPr>
-        <p:spPr>
-          <a:xfrm>
-            <a:off x="8092440" y="3840480"/>
-            <a:ext cx="3383280" cy="384048"/>
-          </a:xfrm>
-          <a:prstGeom prst="rect">
-            <a:avLst/>
-          </a:prstGeom>
-          <a:noFill/>
-          <a:ln/>
-        </p:spPr>
-        <p:txBody>
-          <a:bodyPr wrap="square" lIns="0" tIns="0" rIns="0" bIns="0" rtlCol="0" anchor="ctr"/>
-          <a:lstStyle/>
-          <a:p>
-            <a:pPr indent="0" marL="0">
-              <a:buNone/>
-            </a:pPr>
-            <a:r>
-              <a:rPr lang="en-US" sz="2400" b="1" dirty="0">
-                <a:solidFill>
-                  <a:srgbClr val="E8A317"/>
-                </a:solidFill>
-                <a:latin typeface="Calibri" pitchFamily="34" charset="0"/>
-                <a:ea typeface="Calibri" pitchFamily="34" charset="-122"/>
-                <a:cs typeface="Calibri" pitchFamily="34" charset="-120"/>
-              </a:rPr>
-              <a:t>Fern</a:t>
-            </a:r>
-            <a:endParaRPr lang="en-US" sz="2400" dirty="0"/>
-          </a:p>
-        </p:txBody>
-      </p:sp>
-      <p:sp>
-        <p:nvSpPr>
-          <p:cNvPr id="31" name="Text 29"/>
-          <p:cNvSpPr txBox="1"/>
-          <p:nvPr/>
-        </p:nvSpPr>
-        <p:spPr>
-          <a:xfrm>
-            <a:off x="8092440" y="4251960"/>
-            <a:ext cx="3383280" cy="292608"/>
-          </a:xfrm>
-          <a:prstGeom prst="rect">
-            <a:avLst/>
-          </a:prstGeom>
-          <a:noFill/>
-          <a:ln/>
-        </p:spPr>
-        <p:txBody>
-          <a:bodyPr wrap="square" lIns="0" tIns="0" rIns="0" bIns="0" rtlCol="0" anchor="ctr"/>
-          <a:lstStyle/>
-          <a:p>
-            <a:pPr indent="0" marL="0">
-              <a:buNone/>
-            </a:pPr>
-            <a:r>
-              <a:rPr lang="en-US" sz="1600" dirty="0">
-                <a:solidFill>
-                  <a:srgbClr val="6EC6FF"/>
-                </a:solidFill>
-                <a:latin typeface="Calibri" pitchFamily="34" charset="0"/>
-                <a:ea typeface="Calibri" pitchFamily="34" charset="-122"/>
-                <a:cs typeface="Calibri" pitchFamily="34" charset="-120"/>
-              </a:rPr>
-              <a:t>Pathfinder</a:t>
-            </a:r>
-            <a:endParaRPr lang="en-US" sz="1600" dirty="0"/>
-          </a:p>
-        </p:txBody>
-      </p:sp>
-      <p:sp>
-        <p:nvSpPr>
-          <p:cNvPr id="32" name="Text 30"/>
-          <p:cNvSpPr txBox="1"/>
-          <p:nvPr/>
-        </p:nvSpPr>
-        <p:spPr>
-          <a:xfrm>
-            <a:off x="8092440" y="4663440"/>
-            <a:ext cx="3383280" cy="1234440"/>
-          </a:xfrm>
-          <a:prstGeom prst="rect">
-            <a:avLst/>
-          </a:prstGeom>
-          <a:noFill/>
-          <a:ln/>
-        </p:spPr>
-        <p:txBody>
-          <a:bodyPr wrap="square" lIns="0" tIns="0" rIns="0" bIns="0" rtlCol="0" anchor="ctr"/>
-          <a:lstStyle/>
-          <a:p>
-            <a:pPr indent="0" marL="0">
-              <a:buNone/>
-            </a:pPr>
-            <a:r>
-              <a:rPr lang="en-US" sz="1800" dirty="0">
-                <a:solidFill>
-                  <a:srgbClr val="FFFFFF"/>
-                </a:solidFill>
-                <a:latin typeface="Calibri" pitchFamily="34" charset="0"/>
-                <a:ea typeface="Calibri" pitchFamily="34" charset="-122"/>
-                <a:cs typeface="Calibri" pitchFamily="34" charset="-120"/>
-              </a:rPr>
-              <a:t>Turns that place into a walk you can follow.</a:t>
-            </a:r>
-            <a:endParaRPr lang="en-US" sz="1800" dirty="0"/>
           </a:p>
         </p:txBody>
       </p:sp>
@@ -3708,8 +3291,8 @@
         </p:nvSpPr>
         <p:spPr>
           <a:xfrm>
-            <a:off x="502920" y="256032"/>
-            <a:ext cx="11155680" cy="566928"/>
+            <a:off x="548640" y="256032"/>
+            <a:ext cx="11064240" cy="658368"/>
           </a:xfrm>
           <a:prstGeom prst="rect">
             <a:avLst/>
@@ -3725,44 +3308,41 @@
               <a:buNone/>
             </a:pPr>
             <a:r>
-              <a:rPr lang="en-US" sz="3200" b="1" dirty="0">
-                <a:solidFill>
-                  <a:srgbClr val="0B1F3A"/>
-                </a:solidFill>
-                <a:latin typeface="Calibri" pitchFamily="34" charset="0"/>
-                <a:ea typeface="Calibri" pitchFamily="34" charset="-122"/>
-                <a:cs typeface="Calibri" pitchFamily="34" charset="-120"/>
-              </a:rPr>
-              <a:t>Live demo  —  keep this slide up</a:t>
-            </a:r>
-            <a:endParaRPr lang="en-US" sz="3200" dirty="0"/>
-          </a:p>
-        </p:txBody>
-      </p:sp>
-      <p:sp>
-        <p:nvSpPr>
-          <p:cNvPr id="3" name="Shape 1"/>
+              <a:rPr lang="en-US" sz="3600" b="1" dirty="0">
+                <a:solidFill>
+                  <a:schemeClr val="tx1"/>
+                </a:solidFill>
+              </a:rPr>
+              <a:t>Keep this slide up. Hand them the phone.</a:t>
+            </a:r>
+            <a:endParaRPr lang="en-US" sz="3600" dirty="0"/>
+          </a:p>
+        </p:txBody>
+      </p:sp>
+      <p:sp>
+        <p:nvSpPr>
+          <p:cNvPr id="3" name="demo-banner"/>
           <p:cNvSpPr/>
           <p:nvPr/>
         </p:nvSpPr>
         <p:spPr>
           <a:xfrm>
-            <a:off x="502920" y="932688"/>
-            <a:ext cx="11201400" cy="640080"/>
+            <a:off x="548640" y="1051560"/>
+            <a:ext cx="11109960" cy="685800"/>
           </a:xfrm>
           <a:prstGeom prst="roundRect">
             <a:avLst>
-              <a:gd name="adj" fmla="val 17143"/>
+              <a:gd name="adj" fmla="val 21333"/>
             </a:avLst>
           </a:prstGeom>
           <a:solidFill>
-            <a:srgbClr val="0B1F3A"/>
+            <a:schemeClr val="tx2"/>
           </a:solidFill>
           <a:ln/>
           <a:effectLst>
             <a:outerShdw sx="100000" sy="100000" kx="0" ky="0" algn="bl" rotWithShape="0" blurRad="101600" dist="25400" dir="5400000">
               <a:srgbClr val="0B1F3A">
-                <a:alpha val="10000"/>
+                <a:alpha val="8000"/>
               </a:srgbClr>
             </a:outerShdw>
           </a:effectLst>
@@ -3776,8 +3356,8 @@
         </p:nvSpPr>
         <p:spPr>
           <a:xfrm>
-            <a:off x="685800" y="1024128"/>
-            <a:ext cx="10835640" cy="457200"/>
+            <a:off x="731520" y="1143000"/>
+            <a:ext cx="10744200" cy="502920"/>
           </a:xfrm>
           <a:prstGeom prst="rect">
             <a:avLst/>
@@ -3795,13 +3375,10 @@
             <a:r>
               <a:rPr lang="en-US" sz="2000" b="1" dirty="0">
                 <a:solidFill>
-                  <a:srgbClr val="E8A317"/>
-                </a:solidFill>
-                <a:latin typeface="Calibri" pitchFamily="34" charset="0"/>
-                <a:ea typeface="Calibri" pitchFamily="34" charset="-122"/>
-                <a:cs typeface="Calibri" pitchFamily="34" charset="-120"/>
-              </a:rPr>
-              <a:t>Demo Walk is ON   ·   steps are simulated at the judging table</a:t>
+                  <a:schemeClr val="accent3"/>
+                </a:solidFill>
+              </a:rPr>
+              <a:t>Demo Walk is ON  ·  steps are simulated at the table</a:t>
             </a:r>
             <a:endParaRPr lang="en-US" sz="2000" dirty="0"/>
           </a:p>
@@ -3809,18 +3386,18 @@
       </p:sp>
       <p:sp>
         <p:nvSpPr>
-          <p:cNvPr id="5" name="Shape 3"/>
+          <p:cNvPr id="5" name="demo-1"/>
           <p:cNvSpPr/>
           <p:nvPr/>
         </p:nvSpPr>
         <p:spPr>
           <a:xfrm>
-            <a:off x="502920" y="1783080"/>
-            <a:ext cx="2788920" cy="4434840"/>
+            <a:off x="548640" y="1965960"/>
+            <a:ext cx="2788920" cy="2331720"/>
           </a:xfrm>
           <a:prstGeom prst="roundRect">
             <a:avLst>
-              <a:gd name="adj" fmla="val 3934"/>
+              <a:gd name="adj" fmla="val 6275"/>
             </a:avLst>
           </a:prstGeom>
           <a:solidFill>
@@ -3830,7 +3407,7 @@
           <a:effectLst>
             <a:outerShdw sx="100000" sy="100000" kx="0" ky="0" algn="bl" rotWithShape="0" blurRad="101600" dist="25400" dir="5400000">
               <a:srgbClr val="0B1F3A">
-                <a:alpha val="10000"/>
+                <a:alpha val="8000"/>
               </a:srgbClr>
             </a:outerShdw>
           </a:effectLst>
@@ -3838,20 +3415,20 @@
       </p:sp>
       <p:sp>
         <p:nvSpPr>
-          <p:cNvPr id="6" name="Shape 4"/>
+          <p:cNvPr id="6" name="n-1"/>
           <p:cNvSpPr/>
           <p:nvPr/>
         </p:nvSpPr>
         <p:spPr>
           <a:xfrm>
-            <a:off x="1508760" y="2011680"/>
-            <a:ext cx="777240" cy="777240"/>
+            <a:off x="1554480" y="2194560"/>
+            <a:ext cx="731520" cy="731520"/>
           </a:xfrm>
           <a:prstGeom prst="ellipse">
             <a:avLst/>
           </a:prstGeom>
           <a:solidFill>
-            <a:srgbClr val="2E9D4F"/>
+            <a:schemeClr val="accent1"/>
           </a:solidFill>
           <a:ln/>
         </p:spPr>
@@ -3864,8 +3441,8 @@
         </p:nvSpPr>
         <p:spPr>
           <a:xfrm>
-            <a:off x="1508760" y="2103120"/>
-            <a:ext cx="777240" cy="594360"/>
+            <a:off x="1554480" y="2286000"/>
+            <a:ext cx="731520" cy="548640"/>
           </a:xfrm>
           <a:prstGeom prst="rect">
             <a:avLst/>
@@ -3881,17 +3458,14 @@
               <a:buNone/>
             </a:pPr>
             <a:r>
-              <a:rPr lang="en-US" sz="2800" b="1" dirty="0">
+              <a:rPr lang="en-US" sz="2400" b="1" dirty="0">
                 <a:solidFill>
                   <a:srgbClr val="FFFFFF"/>
                 </a:solidFill>
-                <a:latin typeface="Calibri" pitchFamily="34" charset="0"/>
-                <a:ea typeface="Calibri" pitchFamily="34" charset="-122"/>
-                <a:cs typeface="Calibri" pitchFamily="34" charset="-120"/>
               </a:rPr>
               <a:t>1</a:t>
             </a:r>
-            <a:endParaRPr lang="en-US" sz="2800" dirty="0"/>
+            <a:endParaRPr lang="en-US" sz="2400" dirty="0"/>
           </a:p>
         </p:txBody>
       </p:sp>
@@ -3903,8 +3477,8 @@
         </p:nvSpPr>
         <p:spPr>
           <a:xfrm>
-            <a:off x="667512" y="2926080"/>
-            <a:ext cx="2468880" cy="960120"/>
+            <a:off x="685800" y="3108960"/>
+            <a:ext cx="2514600" cy="868680"/>
           </a:xfrm>
           <a:prstGeom prst="rect">
             <a:avLst/>
@@ -3922,13 +3496,10 @@
             <a:r>
               <a:rPr lang="en-US" sz="2200" b="1" dirty="0">
                 <a:solidFill>
-                  <a:srgbClr val="0B1F3A"/>
-                </a:solidFill>
-                <a:latin typeface="Calibri" pitchFamily="34" charset="0"/>
-                <a:ea typeface="Calibri" pitchFamily="34" charset="-122"/>
-                <a:cs typeface="Calibri" pitchFamily="34" charset="-120"/>
-              </a:rPr>
-              <a:t>Send Pip exploring</a:t>
+                  <a:schemeClr val="tx1"/>
+                </a:solidFill>
+              </a:rPr>
+              <a:t>Pip explores</a:t>
             </a:r>
             <a:endParaRPr lang="en-US" sz="2200" dirty="0"/>
           </a:p>
@@ -3936,57 +3507,18 @@
       </p:sp>
       <p:sp>
         <p:nvSpPr>
-          <p:cNvPr id="9" name="Text 7"/>
-          <p:cNvSpPr txBox="1"/>
-          <p:nvPr/>
-        </p:nvSpPr>
-        <p:spPr>
-          <a:xfrm>
-            <a:off x="685800" y="3931920"/>
-            <a:ext cx="2423160" cy="1965960"/>
-          </a:xfrm>
-          <a:prstGeom prst="rect">
-            <a:avLst/>
-          </a:prstGeom>
-          <a:noFill/>
-          <a:ln/>
-        </p:spPr>
-        <p:txBody>
-          <a:bodyPr wrap="square" lIns="0" tIns="0" rIns="0" bIns="0" rtlCol="0" anchor="ctr"/>
-          <a:lstStyle/>
-          <a:p>
-            <a:pPr algn="ctr" indent="0" marL="0">
-              <a:buNone/>
-            </a:pPr>
-            <a:r>
-              <a:rPr lang="en-US" sz="1600" dirty="0">
-                <a:solidFill>
-                  <a:srgbClr val="4A6358"/>
-                </a:solidFill>
-                <a:latin typeface="Calibri" pitchFamily="34" charset="0"/>
-                <a:ea typeface="Calibri" pitchFamily="34" charset="-122"/>
-                <a:cs typeface="Calibri" pitchFamily="34" charset="-120"/>
-              </a:rPr>
-              <a:t>Squad → Pip → Explore. A nearby place and a fact come back.</a:t>
-            </a:r>
-            <a:endParaRPr lang="en-US" sz="1600" dirty="0"/>
-          </a:p>
-        </p:txBody>
-      </p:sp>
-      <p:sp>
-        <p:nvSpPr>
-          <p:cNvPr id="10" name="Shape 8"/>
+          <p:cNvPr id="9" name="demo-2"/>
           <p:cNvSpPr/>
           <p:nvPr/>
         </p:nvSpPr>
         <p:spPr>
           <a:xfrm>
-            <a:off x="3429000" y="1783080"/>
-            <a:ext cx="2788920" cy="4434840"/>
+            <a:off x="3474720" y="1965960"/>
+            <a:ext cx="2788920" cy="2331720"/>
           </a:xfrm>
           <a:prstGeom prst="roundRect">
             <a:avLst>
-              <a:gd name="adj" fmla="val 3934"/>
+              <a:gd name="adj" fmla="val 6275"/>
             </a:avLst>
           </a:prstGeom>
           <a:solidFill>
@@ -3996,7 +3528,7 @@
           <a:effectLst>
             <a:outerShdw sx="100000" sy="100000" kx="0" ky="0" algn="bl" rotWithShape="0" blurRad="101600" dist="25400" dir="5400000">
               <a:srgbClr val="0B1F3A">
-                <a:alpha val="10000"/>
+                <a:alpha val="8000"/>
               </a:srgbClr>
             </a:outerShdw>
           </a:effectLst>
@@ -4004,34 +3536,70 @@
       </p:sp>
       <p:sp>
         <p:nvSpPr>
-          <p:cNvPr id="11" name="Shape 9"/>
+          <p:cNvPr id="10" name="n-2"/>
           <p:cNvSpPr/>
           <p:nvPr/>
         </p:nvSpPr>
         <p:spPr>
           <a:xfrm>
-            <a:off x="4434840" y="2011680"/>
-            <a:ext cx="777240" cy="777240"/>
+            <a:off x="4480560" y="2194560"/>
+            <a:ext cx="731520" cy="731520"/>
           </a:xfrm>
           <a:prstGeom prst="ellipse">
             <a:avLst/>
           </a:prstGeom>
           <a:solidFill>
-            <a:srgbClr val="2E9D4F"/>
+            <a:schemeClr val="accent1"/>
           </a:solidFill>
           <a:ln/>
         </p:spPr>
       </p:sp>
       <p:sp>
         <p:nvSpPr>
+          <p:cNvPr id="11" name="Text 9"/>
+          <p:cNvSpPr txBox="1"/>
+          <p:nvPr/>
+        </p:nvSpPr>
+        <p:spPr>
+          <a:xfrm>
+            <a:off x="4480560" y="2286000"/>
+            <a:ext cx="731520" cy="548640"/>
+          </a:xfrm>
+          <a:prstGeom prst="rect">
+            <a:avLst/>
+          </a:prstGeom>
+          <a:noFill/>
+          <a:ln/>
+        </p:spPr>
+        <p:txBody>
+          <a:bodyPr wrap="square" lIns="0" tIns="0" rIns="0" bIns="0" rtlCol="0" anchor="ctr"/>
+          <a:lstStyle/>
+          <a:p>
+            <a:pPr algn="ctr" indent="0" marL="0">
+              <a:buNone/>
+            </a:pPr>
+            <a:r>
+              <a:rPr lang="en-US" sz="2400" b="1" dirty="0">
+                <a:solidFill>
+                  <a:srgbClr val="FFFFFF"/>
+                </a:solidFill>
+              </a:rPr>
+              <a:t>2</a:t>
+            </a:r>
+            <a:endParaRPr lang="en-US" sz="2400" dirty="0"/>
+          </a:p>
+        </p:txBody>
+      </p:sp>
+      <p:sp>
+        <p:nvSpPr>
           <p:cNvPr id="12" name="Text 10"/>
           <p:cNvSpPr txBox="1"/>
           <p:nvPr/>
         </p:nvSpPr>
         <p:spPr>
           <a:xfrm>
-            <a:off x="4434840" y="2103120"/>
-            <a:ext cx="777240" cy="594360"/>
+            <a:off x="3611880" y="3108960"/>
+            <a:ext cx="2514600" cy="868680"/>
           </a:xfrm>
           <a:prstGeom prst="rect">
             <a:avLst/>
@@ -4047,52 +3615,10 @@
               <a:buNone/>
             </a:pPr>
             <a:r>
-              <a:rPr lang="en-US" sz="2800" b="1" dirty="0">
-                <a:solidFill>
-                  <a:srgbClr val="FFFFFF"/>
-                </a:solidFill>
-                <a:latin typeface="Calibri" pitchFamily="34" charset="0"/>
-                <a:ea typeface="Calibri" pitchFamily="34" charset="-122"/>
-                <a:cs typeface="Calibri" pitchFamily="34" charset="-120"/>
-              </a:rPr>
-              <a:t>2</a:t>
-            </a:r>
-            <a:endParaRPr lang="en-US" sz="2800" dirty="0"/>
-          </a:p>
-        </p:txBody>
-      </p:sp>
-      <p:sp>
-        <p:nvSpPr>
-          <p:cNvPr id="13" name="Text 11"/>
-          <p:cNvSpPr txBox="1"/>
-          <p:nvPr/>
-        </p:nvSpPr>
-        <p:spPr>
-          <a:xfrm>
-            <a:off x="3593592" y="2926080"/>
-            <a:ext cx="2468880" cy="960120"/>
-          </a:xfrm>
-          <a:prstGeom prst="rect">
-            <a:avLst/>
-          </a:prstGeom>
-          <a:noFill/>
-          <a:ln/>
-        </p:spPr>
-        <p:txBody>
-          <a:bodyPr wrap="square" lIns="0" tIns="0" rIns="0" bIns="0" rtlCol="0" anchor="ctr"/>
-          <a:lstStyle/>
-          <a:p>
-            <a:pPr algn="ctr" indent="0" marL="0">
-              <a:buNone/>
-            </a:pPr>
-            <a:r>
               <a:rPr lang="en-US" sz="2200" b="1" dirty="0">
                 <a:solidFill>
-                  <a:srgbClr val="0B1F3A"/>
-                </a:solidFill>
-                <a:latin typeface="Calibri" pitchFamily="34" charset="0"/>
-                <a:ea typeface="Calibri" pitchFamily="34" charset="-122"/>
-                <a:cs typeface="Calibri" pitchFamily="34" charset="-120"/>
+                  <a:schemeClr val="tx1"/>
+                </a:solidFill>
               </a:rPr>
               <a:t>Choose a place</a:t>
             </a:r>
@@ -4102,57 +3628,18 @@
       </p:sp>
       <p:sp>
         <p:nvSpPr>
-          <p:cNvPr id="14" name="Text 12"/>
-          <p:cNvSpPr txBox="1"/>
-          <p:nvPr/>
-        </p:nvSpPr>
-        <p:spPr>
-          <a:xfrm>
-            <a:off x="3611880" y="3931920"/>
-            <a:ext cx="2423160" cy="1965960"/>
-          </a:xfrm>
-          <a:prstGeom prst="rect">
-            <a:avLst/>
-          </a:prstGeom>
-          <a:noFill/>
-          <a:ln/>
-        </p:spPr>
-        <p:txBody>
-          <a:bodyPr wrap="square" lIns="0" tIns="0" rIns="0" bIns="0" rtlCol="0" anchor="ctr"/>
-          <a:lstStyle/>
-          <a:p>
-            <a:pPr algn="ctr" indent="0" marL="0">
-              <a:buNone/>
-            </a:pPr>
-            <a:r>
-              <a:rPr lang="en-US" sz="1600" dirty="0">
-                <a:solidFill>
-                  <a:srgbClr val="4A6358"/>
-                </a:solidFill>
-                <a:latin typeface="Calibri" pitchFamily="34" charset="0"/>
-                <a:ea typeface="Calibri" pitchFamily="34" charset="-122"/>
-                <a:cs typeface="Calibri" pitchFamily="34" charset="-120"/>
-              </a:rPr>
-              <a:t>Open the postcard. That is the landmark for this walk.</a:t>
-            </a:r>
-            <a:endParaRPr lang="en-US" sz="1600" dirty="0"/>
-          </a:p>
-        </p:txBody>
-      </p:sp>
-      <p:sp>
-        <p:nvSpPr>
-          <p:cNvPr id="15" name="Shape 13"/>
+          <p:cNvPr id="13" name="demo-3"/>
           <p:cNvSpPr/>
           <p:nvPr/>
         </p:nvSpPr>
         <p:spPr>
           <a:xfrm>
-            <a:off x="6355080" y="1783080"/>
-            <a:ext cx="2788920" cy="4434840"/>
+            <a:off x="6400800" y="1965960"/>
+            <a:ext cx="2788920" cy="2331720"/>
           </a:xfrm>
           <a:prstGeom prst="roundRect">
             <a:avLst>
-              <a:gd name="adj" fmla="val 3934"/>
+              <a:gd name="adj" fmla="val 6275"/>
             </a:avLst>
           </a:prstGeom>
           <a:solidFill>
@@ -4162,7 +3649,7 @@
           <a:effectLst>
             <a:outerShdw sx="100000" sy="100000" kx="0" ky="0" algn="bl" rotWithShape="0" blurRad="101600" dist="25400" dir="5400000">
               <a:srgbClr val="0B1F3A">
-                <a:alpha val="10000"/>
+                <a:alpha val="8000"/>
               </a:srgbClr>
             </a:outerShdw>
           </a:effectLst>
@@ -4170,34 +3657,34 @@
       </p:sp>
       <p:sp>
         <p:nvSpPr>
-          <p:cNvPr id="16" name="Shape 14"/>
+          <p:cNvPr id="14" name="n-3"/>
           <p:cNvSpPr/>
           <p:nvPr/>
         </p:nvSpPr>
         <p:spPr>
           <a:xfrm>
-            <a:off x="7360920" y="2011680"/>
-            <a:ext cx="777240" cy="777240"/>
+            <a:off x="7406640" y="2194560"/>
+            <a:ext cx="731520" cy="731520"/>
           </a:xfrm>
           <a:prstGeom prst="ellipse">
             <a:avLst/>
           </a:prstGeom>
           <a:solidFill>
-            <a:srgbClr val="2E9D4F"/>
+            <a:schemeClr val="accent1"/>
           </a:solidFill>
           <a:ln/>
         </p:spPr>
       </p:sp>
       <p:sp>
         <p:nvSpPr>
-          <p:cNvPr id="17" name="Text 15"/>
-          <p:cNvSpPr txBox="1"/>
-          <p:nvPr/>
-        </p:nvSpPr>
-        <p:spPr>
-          <a:xfrm>
-            <a:off x="7360920" y="2103120"/>
-            <a:ext cx="777240" cy="594360"/>
+          <p:cNvPr id="15" name="Text 13"/>
+          <p:cNvSpPr txBox="1"/>
+          <p:nvPr/>
+        </p:nvSpPr>
+        <p:spPr>
+          <a:xfrm>
+            <a:off x="7406640" y="2286000"/>
+            <a:ext cx="731520" cy="548640"/>
           </a:xfrm>
           <a:prstGeom prst="rect">
             <a:avLst/>
@@ -4213,30 +3700,27 @@
               <a:buNone/>
             </a:pPr>
             <a:r>
-              <a:rPr lang="en-US" sz="2800" b="1" dirty="0">
+              <a:rPr lang="en-US" sz="2400" b="1" dirty="0">
                 <a:solidFill>
                   <a:srgbClr val="FFFFFF"/>
                 </a:solidFill>
-                <a:latin typeface="Calibri" pitchFamily="34" charset="0"/>
-                <a:ea typeface="Calibri" pitchFamily="34" charset="-122"/>
-                <a:cs typeface="Calibri" pitchFamily="34" charset="-120"/>
               </a:rPr>
               <a:t>3</a:t>
             </a:r>
-            <a:endParaRPr lang="en-US" sz="2800" dirty="0"/>
-          </a:p>
-        </p:txBody>
-      </p:sp>
-      <p:sp>
-        <p:nvSpPr>
-          <p:cNvPr id="18" name="Text 16"/>
-          <p:cNvSpPr txBox="1"/>
-          <p:nvPr/>
-        </p:nvSpPr>
-        <p:spPr>
-          <a:xfrm>
-            <a:off x="6519672" y="2926080"/>
-            <a:ext cx="2468880" cy="960120"/>
+            <a:endParaRPr lang="en-US" sz="2400" dirty="0"/>
+          </a:p>
+        </p:txBody>
+      </p:sp>
+      <p:sp>
+        <p:nvSpPr>
+          <p:cNvPr id="16" name="Text 14"/>
+          <p:cNvSpPr txBox="1"/>
+          <p:nvPr/>
+        </p:nvSpPr>
+        <p:spPr>
+          <a:xfrm>
+            <a:off x="6537960" y="3108960"/>
+            <a:ext cx="2514600" cy="868680"/>
           </a:xfrm>
           <a:prstGeom prst="rect">
             <a:avLst/>
@@ -4254,11 +3738,8 @@
             <a:r>
               <a:rPr lang="en-US" sz="2200" b="1" dirty="0">
                 <a:solidFill>
-                  <a:srgbClr val="0B1F3A"/>
-                </a:solidFill>
-                <a:latin typeface="Calibri" pitchFamily="34" charset="0"/>
-                <a:ea typeface="Calibri" pitchFamily="34" charset="-122"/>
-                <a:cs typeface="Calibri" pitchFamily="34" charset="-120"/>
+                  <a:schemeClr val="tx1"/>
+                </a:solidFill>
               </a:rPr>
               <a:t>Start a walk</a:t>
             </a:r>
@@ -4268,57 +3749,18 @@
       </p:sp>
       <p:sp>
         <p:nvSpPr>
-          <p:cNvPr id="19" name="Text 17"/>
-          <p:cNvSpPr txBox="1"/>
-          <p:nvPr/>
-        </p:nvSpPr>
-        <p:spPr>
-          <a:xfrm>
-            <a:off x="6537960" y="3931920"/>
-            <a:ext cx="2423160" cy="1965960"/>
-          </a:xfrm>
-          <a:prstGeom prst="rect">
-            <a:avLst/>
-          </a:prstGeom>
-          <a:noFill/>
-          <a:ln/>
-        </p:spPr>
-        <p:txBody>
-          <a:bodyPr wrap="square" lIns="0" tIns="0" rIns="0" bIns="0" rtlCol="0" anchor="ctr"/>
-          <a:lstStyle/>
-          <a:p>
-            <a:pPr algn="ctr" indent="0" marL="0">
-              <a:buNone/>
-            </a:pPr>
-            <a:r>
-              <a:rPr lang="en-US" sz="1600" dirty="0">
-                <a:solidFill>
-                  <a:srgbClr val="4A6358"/>
-                </a:solidFill>
-                <a:latin typeface="Calibri" pitchFamily="34" charset="0"/>
-                <a:ea typeface="Calibri" pitchFamily="34" charset="-122"/>
-                <a:cs typeface="Calibri" pitchFamily="34" charset="-120"/>
-              </a:rPr>
-              <a:t>Fern leads. The trail blooms on the map as Demo Walk runs.</a:t>
-            </a:r>
-            <a:endParaRPr lang="en-US" sz="1600" dirty="0"/>
-          </a:p>
-        </p:txBody>
-      </p:sp>
-      <p:sp>
-        <p:nvSpPr>
-          <p:cNvPr id="20" name="Shape 18"/>
+          <p:cNvPr id="17" name="demo-4"/>
           <p:cNvSpPr/>
           <p:nvPr/>
         </p:nvSpPr>
         <p:spPr>
           <a:xfrm>
-            <a:off x="9281160" y="1783080"/>
-            <a:ext cx="2788920" cy="4434840"/>
+            <a:off x="9326880" y="1965960"/>
+            <a:ext cx="2788920" cy="2331720"/>
           </a:xfrm>
           <a:prstGeom prst="roundRect">
             <a:avLst>
-              <a:gd name="adj" fmla="val 3934"/>
+              <a:gd name="adj" fmla="val 6275"/>
             </a:avLst>
           </a:prstGeom>
           <a:solidFill>
@@ -4328,7 +3770,7 @@
           <a:effectLst>
             <a:outerShdw sx="100000" sy="100000" kx="0" ky="0" algn="bl" rotWithShape="0" blurRad="101600" dist="25400" dir="5400000">
               <a:srgbClr val="0B1F3A">
-                <a:alpha val="10000"/>
+                <a:alpha val="8000"/>
               </a:srgbClr>
             </a:outerShdw>
           </a:effectLst>
@@ -4336,60 +3778,158 @@
       </p:sp>
       <p:sp>
         <p:nvSpPr>
-          <p:cNvPr id="21" name="Shape 19"/>
+          <p:cNvPr id="18" name="n-4"/>
           <p:cNvSpPr/>
           <p:nvPr/>
         </p:nvSpPr>
         <p:spPr>
           <a:xfrm>
-            <a:off x="10287000" y="2011680"/>
-            <a:ext cx="777240" cy="777240"/>
+            <a:off x="10332720" y="2194560"/>
+            <a:ext cx="731520" cy="731520"/>
           </a:xfrm>
           <a:prstGeom prst="ellipse">
             <a:avLst/>
           </a:prstGeom>
           <a:solidFill>
-            <a:srgbClr val="2E9D4F"/>
+            <a:schemeClr val="accent1"/>
           </a:solidFill>
           <a:ln/>
         </p:spPr>
       </p:sp>
       <p:sp>
         <p:nvSpPr>
+          <p:cNvPr id="19" name="Text 17"/>
+          <p:cNvSpPr txBox="1"/>
+          <p:nvPr/>
+        </p:nvSpPr>
+        <p:spPr>
+          <a:xfrm>
+            <a:off x="10332720" y="2286000"/>
+            <a:ext cx="731520" cy="548640"/>
+          </a:xfrm>
+          <a:prstGeom prst="rect">
+            <a:avLst/>
+          </a:prstGeom>
+          <a:noFill/>
+          <a:ln/>
+        </p:spPr>
+        <p:txBody>
+          <a:bodyPr wrap="square" lIns="0" tIns="0" rIns="0" bIns="0" rtlCol="0" anchor="ctr"/>
+          <a:lstStyle/>
+          <a:p>
+            <a:pPr algn="ctr" indent="0" marL="0">
+              <a:buNone/>
+            </a:pPr>
+            <a:r>
+              <a:rPr lang="en-US" sz="2400" b="1" dirty="0">
+                <a:solidFill>
+                  <a:srgbClr val="FFFFFF"/>
+                </a:solidFill>
+              </a:rPr>
+              <a:t>4</a:t>
+            </a:r>
+            <a:endParaRPr lang="en-US" sz="2400" dirty="0"/>
+          </a:p>
+        </p:txBody>
+      </p:sp>
+      <p:sp>
+        <p:nvSpPr>
+          <p:cNvPr id="20" name="Text 18"/>
+          <p:cNvSpPr txBox="1"/>
+          <p:nvPr/>
+        </p:nvSpPr>
+        <p:spPr>
+          <a:xfrm>
+            <a:off x="9464040" y="3108960"/>
+            <a:ext cx="2514600" cy="868680"/>
+          </a:xfrm>
+          <a:prstGeom prst="rect">
+            <a:avLst/>
+          </a:prstGeom>
+          <a:noFill/>
+          <a:ln/>
+        </p:spPr>
+        <p:txBody>
+          <a:bodyPr wrap="square" lIns="0" tIns="0" rIns="0" bIns="0" rtlCol="0" anchor="ctr"/>
+          <a:lstStyle/>
+          <a:p>
+            <a:pPr algn="ctr" indent="0" marL="0">
+              <a:buNone/>
+            </a:pPr>
+            <a:r>
+              <a:rPr lang="en-US" sz="2200" b="1" dirty="0">
+                <a:solidFill>
+                  <a:schemeClr val="tx1"/>
+                </a:solidFill>
+              </a:rPr>
+              <a:t>Capture</a:t>
+            </a:r>
+            <a:endParaRPr lang="en-US" sz="2200" dirty="0"/>
+          </a:p>
+        </p:txBody>
+      </p:sp>
+      <p:sp>
+        <p:nvSpPr>
+          <p:cNvPr id="21" name="missing-shots"/>
+          <p:cNvSpPr/>
+          <p:nvPr/>
+        </p:nvSpPr>
+        <p:spPr>
+          <a:xfrm>
+            <a:off x="548640" y="4526280"/>
+            <a:ext cx="11109960" cy="1691640"/>
+          </a:xfrm>
+          <a:prstGeom prst="roundRect">
+            <a:avLst>
+              <a:gd name="adj" fmla="val 8649"/>
+            </a:avLst>
+          </a:prstGeom>
+          <a:solidFill>
+            <a:srgbClr val="E8F5FF"/>
+          </a:solidFill>
+          <a:ln/>
+          <a:effectLst>
+            <a:outerShdw sx="100000" sy="100000" kx="0" ky="0" algn="bl" rotWithShape="0" blurRad="101600" dist="25400" dir="5400000">
+              <a:srgbClr val="0B1F3A">
+                <a:alpha val="8000"/>
+              </a:srgbClr>
+            </a:outerShdw>
+          </a:effectLst>
+        </p:spPr>
+      </p:sp>
+      <p:sp>
+        <p:nvSpPr>
           <p:cNvPr id="22" name="Text 20"/>
           <p:cNvSpPr txBox="1"/>
           <p:nvPr/>
         </p:nvSpPr>
         <p:spPr>
           <a:xfrm>
-            <a:off x="10287000" y="2103120"/>
-            <a:ext cx="777240" cy="594360"/>
-          </a:xfrm>
-          <a:prstGeom prst="rect">
-            <a:avLst/>
-          </a:prstGeom>
-          <a:noFill/>
-          <a:ln/>
-        </p:spPr>
-        <p:txBody>
-          <a:bodyPr wrap="square" lIns="0" tIns="0" rIns="0" bIns="0" rtlCol="0" anchor="ctr"/>
-          <a:lstStyle/>
-          <a:p>
-            <a:pPr algn="ctr" indent="0" marL="0">
-              <a:buNone/>
-            </a:pPr>
-            <a:r>
-              <a:rPr lang="en-US" sz="2800" b="1" dirty="0">
-                <a:solidFill>
-                  <a:srgbClr val="FFFFFF"/>
-                </a:solidFill>
-                <a:latin typeface="Calibri" pitchFamily="34" charset="0"/>
-                <a:ea typeface="Calibri" pitchFamily="34" charset="-122"/>
-                <a:cs typeface="Calibri" pitchFamily="34" charset="-120"/>
-              </a:rPr>
-              <a:t>4</a:t>
-            </a:r>
-            <a:endParaRPr lang="en-US" sz="2800" dirty="0"/>
+            <a:off x="777240" y="4709160"/>
+            <a:ext cx="10652760" cy="457200"/>
+          </a:xfrm>
+          <a:prstGeom prst="rect">
+            <a:avLst/>
+          </a:prstGeom>
+          <a:noFill/>
+          <a:ln/>
+        </p:spPr>
+        <p:txBody>
+          <a:bodyPr wrap="square" lIns="0" tIns="0" rIns="0" bIns="0" rtlCol="0" anchor="ctr"/>
+          <a:lstStyle/>
+          <a:p>
+            <a:pPr indent="0" marL="0">
+              <a:buNone/>
+            </a:pPr>
+            <a:r>
+              <a:rPr lang="en-US" sz="2200" b="1" dirty="0">
+                <a:solidFill>
+                  <a:schemeClr val="tx1"/>
+                </a:solidFill>
+              </a:rPr>
+              <a:t>Follow these four taps on the phone.</a:t>
+            </a:r>
+            <a:endParaRPr lang="en-US" sz="2200" dirty="0"/>
           </a:p>
         </p:txBody>
       </p:sp>
@@ -4401,71 +3941,29 @@
         </p:nvSpPr>
         <p:spPr>
           <a:xfrm>
-            <a:off x="9445752" y="2926080"/>
-            <a:ext cx="2468880" cy="960120"/>
-          </a:xfrm>
-          <a:prstGeom prst="rect">
-            <a:avLst/>
-          </a:prstGeom>
-          <a:noFill/>
-          <a:ln/>
-        </p:spPr>
-        <p:txBody>
-          <a:bodyPr wrap="square" lIns="0" tIns="0" rIns="0" bIns="0" rtlCol="0" anchor="ctr"/>
-          <a:lstStyle/>
-          <a:p>
-            <a:pPr algn="ctr" indent="0" marL="0">
-              <a:buNone/>
-            </a:pPr>
-            <a:r>
-              <a:rPr lang="en-US" sz="2200" b="1" dirty="0">
-                <a:solidFill>
-                  <a:srgbClr val="0B1F3A"/>
-                </a:solidFill>
-                <a:latin typeface="Calibri" pitchFamily="34" charset="0"/>
-                <a:ea typeface="Calibri" pitchFamily="34" charset="-122"/>
-                <a:cs typeface="Calibri" pitchFamily="34" charset="-120"/>
-              </a:rPr>
-              <a:t>Capture</a:t>
-            </a:r>
-            <a:endParaRPr lang="en-US" sz="2200" dirty="0"/>
-          </a:p>
-        </p:txBody>
-      </p:sp>
-      <p:sp>
-        <p:nvSpPr>
-          <p:cNvPr id="24" name="Text 22"/>
-          <p:cNvSpPr txBox="1"/>
-          <p:nvPr/>
-        </p:nvSpPr>
-        <p:spPr>
-          <a:xfrm>
-            <a:off x="9464040" y="3931920"/>
-            <a:ext cx="2423160" cy="1965960"/>
-          </a:xfrm>
-          <a:prstGeom prst="rect">
-            <a:avLst/>
-          </a:prstGeom>
-          <a:noFill/>
-          <a:ln/>
-        </p:spPr>
-        <p:txBody>
-          <a:bodyPr wrap="square" lIns="0" tIns="0" rIns="0" bIns="0" rtlCol="0" anchor="ctr"/>
-          <a:lstStyle/>
-          <a:p>
-            <a:pPr algn="ctr" indent="0" marL="0">
+            <a:off x="777240" y="5212080"/>
+            <a:ext cx="10652760" cy="731520"/>
+          </a:xfrm>
+          <a:prstGeom prst="rect">
+            <a:avLst/>
+          </a:prstGeom>
+          <a:noFill/>
+          <a:ln/>
+        </p:spPr>
+        <p:txBody>
+          <a:bodyPr wrap="square" lIns="0" tIns="0" rIns="0" bIns="0" rtlCol="0" anchor="ctr"/>
+          <a:lstStyle/>
+          <a:p>
+            <a:pPr indent="0" marL="0">
               <a:buNone/>
             </a:pPr>
             <a:r>
               <a:rPr lang="en-US" sz="1600" dirty="0">
                 <a:solidFill>
-                  <a:srgbClr val="4A6358"/>
-                </a:solidFill>
-                <a:latin typeface="Calibri" pitchFamily="34" charset="0"/>
-                <a:ea typeface="Calibri" pitchFamily="34" charset="-122"/>
-                <a:cs typeface="Calibri" pitchFamily="34" charset="-120"/>
-              </a:rPr>
-              <a:t>When you arrive, capture the landmark or hatch from the walk.</a:t>
+                  <a:schemeClr val="accent6"/>
+                </a:solidFill>
+              </a:rPr>
+              <a:t>Hide the Expo tools button. If voice is slow, keep going.</a:t>
             </a:r>
             <a:endParaRPr lang="en-US" sz="1600" dirty="0"/>
           </a:p>
@@ -4506,8 +4004,8 @@
         </p:nvSpPr>
         <p:spPr>
           <a:xfrm>
-            <a:off x="502920" y="256032"/>
-            <a:ext cx="11155680" cy="566928"/>
+            <a:off x="548640" y="256032"/>
+            <a:ext cx="11064240" cy="658368"/>
           </a:xfrm>
           <a:prstGeom prst="rect">
             <a:avLst/>
@@ -4523,34 +4021,31 @@
               <a:buNone/>
             </a:pPr>
             <a:r>
-              <a:rPr lang="en-US" sz="3200" b="1" dirty="0">
-                <a:solidFill>
-                  <a:srgbClr val="0B1F3A"/>
-                </a:solidFill>
-                <a:latin typeface="Calibri" pitchFamily="34" charset="0"/>
-                <a:ea typeface="Calibri" pitchFamily="34" charset="-122"/>
-                <a:cs typeface="Calibri" pitchFamily="34" charset="-120"/>
-              </a:rPr>
-              <a:t>How we built it</a:t>
-            </a:r>
-            <a:endParaRPr lang="en-US" sz="3200" dirty="0"/>
-          </a:p>
-        </p:txBody>
-      </p:sp>
-      <p:sp>
-        <p:nvSpPr>
-          <p:cNvPr id="3" name="Shape 1"/>
+              <a:rPr lang="en-US" sz="3600" b="1" dirty="0">
+                <a:solidFill>
+                  <a:schemeClr val="tx1"/>
+                </a:solidFill>
+              </a:rPr>
+              <a:t>A phone, a small API, the real world</a:t>
+            </a:r>
+            <a:endParaRPr lang="en-US" sz="3600" dirty="0"/>
+          </a:p>
+        </p:txBody>
+      </p:sp>
+      <p:sp>
+        <p:nvSpPr>
+          <p:cNvPr id="3" name="arch-Phone"/>
           <p:cNvSpPr/>
           <p:nvPr/>
         </p:nvSpPr>
         <p:spPr>
           <a:xfrm>
-            <a:off x="502920" y="960120"/>
-            <a:ext cx="3383280" cy="1874520"/>
+            <a:off x="640080" y="1371600"/>
+            <a:ext cx="3246120" cy="2468880"/>
           </a:xfrm>
           <a:prstGeom prst="roundRect">
             <a:avLst>
-              <a:gd name="adj" fmla="val 5854"/>
+              <a:gd name="adj" fmla="val 5926"/>
             </a:avLst>
           </a:prstGeom>
           <a:solidFill>
@@ -4560,7 +4055,7 @@
           <a:effectLst>
             <a:outerShdw sx="100000" sy="100000" kx="0" ky="0" algn="bl" rotWithShape="0" blurRad="101600" dist="25400" dir="5400000">
               <a:srgbClr val="0B1F3A">
-                <a:alpha val="10000"/>
+                <a:alpha val="8000"/>
               </a:srgbClr>
             </a:outerShdw>
           </a:effectLst>
@@ -4574,8 +4069,8 @@
         </p:nvSpPr>
         <p:spPr>
           <a:xfrm>
-            <a:off x="731520" y="1097280"/>
-            <a:ext cx="2926080" cy="384048"/>
+            <a:off x="822960" y="1600200"/>
+            <a:ext cx="2880360" cy="548640"/>
           </a:xfrm>
           <a:prstGeom prst="rect">
             <a:avLst/>
@@ -4591,17 +4086,14 @@
               <a:buNone/>
             </a:pPr>
             <a:r>
-              <a:rPr lang="en-US" sz="2200" b="1" dirty="0">
-                <a:solidFill>
-                  <a:srgbClr val="0B1F3A"/>
-                </a:solidFill>
-                <a:latin typeface="Calibri" pitchFamily="34" charset="0"/>
-                <a:ea typeface="Calibri" pitchFamily="34" charset="-122"/>
-                <a:cs typeface="Calibri" pitchFamily="34" charset="-120"/>
+              <a:rPr lang="en-US" sz="2600" b="1" dirty="0">
+                <a:solidFill>
+                  <a:schemeClr val="tx1"/>
+                </a:solidFill>
               </a:rPr>
               <a:t>Phone</a:t>
             </a:r>
-            <a:endParaRPr lang="en-US" sz="2200" dirty="0"/>
+            <a:endParaRPr lang="en-US" sz="2600" dirty="0"/>
           </a:p>
         </p:txBody>
       </p:sp>
@@ -4613,8 +4105,8 @@
         </p:nvSpPr>
         <p:spPr>
           <a:xfrm>
-            <a:off x="731520" y="1536192"/>
-            <a:ext cx="2926080" cy="1097280"/>
+            <a:off x="822960" y="2286000"/>
+            <a:ext cx="2880360" cy="1234440"/>
           </a:xfrm>
           <a:prstGeom prst="rect">
             <a:avLst/>
@@ -4630,64 +4122,41 @@
               <a:buNone/>
             </a:pPr>
             <a:r>
-              <a:rPr lang="en-US" sz="1600" dirty="0">
-                <a:solidFill>
-                  <a:srgbClr val="4A6358"/>
-                </a:solidFill>
-                <a:latin typeface="Calibri" pitchFamily="34" charset="0"/>
-                <a:ea typeface="Calibri" pitchFamily="34" charset="-122"/>
-                <a:cs typeface="Calibri" pitchFamily="34" charset="-120"/>
-              </a:rPr>
-              <a:t>Expo SDK 57</a:t>
-            </a:r>
-            <a:endParaRPr lang="en-US" sz="1600" dirty="0"/>
+              <a:rPr lang="en-US" sz="1800" dirty="0">
+                <a:solidFill>
+                  <a:schemeClr val="accent6"/>
+                </a:solidFill>
+              </a:rPr>
+              <a:t>Expo app</a:t>
+            </a:r>
+            <a:endParaRPr lang="en-US" sz="1800" dirty="0"/>
           </a:p>
           <a:p>
             <a:pPr indent="0" marL="0">
               <a:buNone/>
             </a:pPr>
             <a:r>
-              <a:rPr lang="en-US" sz="1600" dirty="0">
-                <a:solidFill>
-                  <a:srgbClr val="4A6358"/>
-                </a:solidFill>
-                <a:latin typeface="Calibri" pitchFamily="34" charset="0"/>
-                <a:ea typeface="Calibri" pitchFamily="34" charset="-122"/>
-                <a:cs typeface="Calibri" pitchFamily="34" charset="-120"/>
-              </a:rPr>
-              <a:t>React Native</a:t>
-            </a:r>
-            <a:endParaRPr lang="en-US" sz="1600" dirty="0"/>
-          </a:p>
-          <a:p>
-            <a:pPr indent="0" marL="0">
-              <a:buNone/>
-            </a:pPr>
-            <a:r>
-              <a:rPr lang="en-US" sz="1600" dirty="0">
-                <a:solidFill>
-                  <a:srgbClr val="4A6358"/>
-                </a:solidFill>
-                <a:latin typeface="Calibri" pitchFamily="34" charset="0"/>
-                <a:ea typeface="Calibri" pitchFamily="34" charset="-122"/>
-                <a:cs typeface="Calibri" pitchFamily="34" charset="-120"/>
-              </a:rPr>
-              <a:t>Expo Router</a:t>
-            </a:r>
-            <a:endParaRPr lang="en-US" sz="1600" dirty="0"/>
-          </a:p>
-        </p:txBody>
-      </p:sp>
-      <p:sp>
-        <p:nvSpPr>
-          <p:cNvPr id="6" name="Text 4"/>
-          <p:cNvSpPr txBox="1"/>
-          <p:nvPr/>
-        </p:nvSpPr>
-        <p:spPr>
-          <a:xfrm>
-            <a:off x="3886200" y="1554480"/>
-            <a:ext cx="640080" cy="457200"/>
+              <a:rPr lang="en-US" sz="1800" dirty="0">
+                <a:solidFill>
+                  <a:schemeClr val="accent6"/>
+                </a:solidFill>
+              </a:rPr>
+              <a:t>Shared game logic</a:t>
+            </a:r>
+            <a:endParaRPr lang="en-US" sz="1800" dirty="0"/>
+          </a:p>
+        </p:txBody>
+      </p:sp>
+      <p:sp>
+        <p:nvSpPr>
+          <p:cNvPr id="6" name="arrow-0"/>
+          <p:cNvSpPr txBox="1"/>
+          <p:nvPr/>
+        </p:nvSpPr>
+        <p:spPr>
+          <a:xfrm>
+            <a:off x="3840480" y="2194560"/>
+            <a:ext cx="685800" cy="640080"/>
           </a:xfrm>
           <a:prstGeom prst="rect">
             <a:avLst/>
@@ -4703,44 +4172,41 @@
               <a:buNone/>
             </a:pPr>
             <a:r>
-              <a:rPr lang="en-US" sz="2600" b="1" dirty="0">
-                <a:solidFill>
-                  <a:srgbClr val="2E9D4F"/>
-                </a:solidFill>
-                <a:latin typeface="Calibri" pitchFamily="34" charset="0"/>
-                <a:ea typeface="Calibri" pitchFamily="34" charset="-122"/>
-                <a:cs typeface="Calibri" pitchFamily="34" charset="-120"/>
+              <a:rPr lang="en-US" sz="3200" b="1" dirty="0">
+                <a:solidFill>
+                  <a:schemeClr val="accent1"/>
+                </a:solidFill>
               </a:rPr>
               <a:t>→</a:t>
             </a:r>
-            <a:endParaRPr lang="en-US" sz="2600" dirty="0"/>
-          </a:p>
-        </p:txBody>
-      </p:sp>
-      <p:sp>
-        <p:nvSpPr>
-          <p:cNvPr id="7" name="Shape 5"/>
+            <a:endParaRPr lang="en-US" sz="3200" dirty="0"/>
+          </a:p>
+        </p:txBody>
+      </p:sp>
+      <p:sp>
+        <p:nvSpPr>
+          <p:cNvPr id="7" name="arch-API"/>
           <p:cNvSpPr/>
           <p:nvPr/>
         </p:nvSpPr>
         <p:spPr>
           <a:xfrm>
-            <a:off x="4526280" y="960120"/>
-            <a:ext cx="3383280" cy="1874520"/>
+            <a:off x="4480560" y="1371600"/>
+            <a:ext cx="3246120" cy="2468880"/>
           </a:xfrm>
           <a:prstGeom prst="roundRect">
             <a:avLst>
-              <a:gd name="adj" fmla="val 5854"/>
+              <a:gd name="adj" fmla="val 5926"/>
             </a:avLst>
           </a:prstGeom>
           <a:solidFill>
-            <a:srgbClr val="0B1F3A"/>
+            <a:schemeClr val="tx2"/>
           </a:solidFill>
           <a:ln/>
           <a:effectLst>
             <a:outerShdw sx="100000" sy="100000" kx="0" ky="0" algn="bl" rotWithShape="0" blurRad="101600" dist="25400" dir="5400000">
               <a:srgbClr val="0B1F3A">
-                <a:alpha val="10000"/>
+                <a:alpha val="8000"/>
               </a:srgbClr>
             </a:outerShdw>
           </a:effectLst>
@@ -4754,8 +4220,8 @@
         </p:nvSpPr>
         <p:spPr>
           <a:xfrm>
-            <a:off x="4754880" y="1097280"/>
-            <a:ext cx="2926080" cy="384048"/>
+            <a:off x="4663440" y="1600200"/>
+            <a:ext cx="2880360" cy="548640"/>
           </a:xfrm>
           <a:prstGeom prst="rect">
             <a:avLst/>
@@ -4771,17 +4237,14 @@
               <a:buNone/>
             </a:pPr>
             <a:r>
-              <a:rPr lang="en-US" sz="2200" b="1" dirty="0">
-                <a:solidFill>
-                  <a:srgbClr val="E8A317"/>
-                </a:solidFill>
-                <a:latin typeface="Calibri" pitchFamily="34" charset="0"/>
-                <a:ea typeface="Calibri" pitchFamily="34" charset="-122"/>
-                <a:cs typeface="Calibri" pitchFamily="34" charset="-120"/>
+              <a:rPr lang="en-US" sz="2600" b="1" dirty="0">
+                <a:solidFill>
+                  <a:schemeClr val="accent3"/>
+                </a:solidFill>
               </a:rPr>
               <a:t>API</a:t>
             </a:r>
-            <a:endParaRPr lang="en-US" sz="2200" dirty="0"/>
+            <a:endParaRPr lang="en-US" sz="2600" dirty="0"/>
           </a:p>
         </p:txBody>
       </p:sp>
@@ -4793,8 +4256,8 @@
         </p:nvSpPr>
         <p:spPr>
           <a:xfrm>
-            <a:off x="4754880" y="1536192"/>
-            <a:ext cx="2926080" cy="1097280"/>
+            <a:off x="4663440" y="2286000"/>
+            <a:ext cx="2880360" cy="1234440"/>
           </a:xfrm>
           <a:prstGeom prst="rect">
             <a:avLst/>
@@ -4810,64 +4273,41 @@
               <a:buNone/>
             </a:pPr>
             <a:r>
-              <a:rPr lang="en-US" sz="1600" dirty="0">
+              <a:rPr lang="en-US" sz="1800" dirty="0">
                 <a:solidFill>
                   <a:srgbClr val="FFFFFF"/>
                 </a:solidFill>
-                <a:latin typeface="Calibri" pitchFamily="34" charset="0"/>
-                <a:ea typeface="Calibri" pitchFamily="34" charset="-122"/>
-                <a:cs typeface="Calibri" pitchFamily="34" charset="-120"/>
-              </a:rPr>
-              <a:t>Node.js /api</a:t>
-            </a:r>
-            <a:endParaRPr lang="en-US" sz="1600" dirty="0"/>
+              </a:rPr>
+              <a:t>Node /api</a:t>
+            </a:r>
+            <a:endParaRPr lang="en-US" sz="1800" dirty="0"/>
           </a:p>
           <a:p>
             <a:pPr indent="0" marL="0">
               <a:buNone/>
             </a:pPr>
             <a:r>
-              <a:rPr lang="en-US" sz="1600" dirty="0">
+              <a:rPr lang="en-US" sz="1800" dirty="0">
                 <a:solidFill>
                   <a:srgbClr val="FFFFFF"/>
                 </a:solidFill>
-                <a:latin typeface="Calibri" pitchFamily="34" charset="0"/>
-                <a:ea typeface="Calibri" pitchFamily="34" charset="-122"/>
-                <a:cs typeface="Calibri" pitchFamily="34" charset="-120"/>
               </a:rPr>
               <a:t>Secrets stay here</a:t>
             </a:r>
-            <a:endParaRPr lang="en-US" sz="1600" dirty="0"/>
-          </a:p>
-          <a:p>
-            <a:pPr indent="0" marL="0">
-              <a:buNone/>
-            </a:pPr>
-            <a:r>
-              <a:rPr lang="en-US" sz="1600" dirty="0">
-                <a:solidFill>
-                  <a:srgbClr val="FFFFFF"/>
-                </a:solidFill>
-                <a:latin typeface="Calibri" pitchFamily="34" charset="0"/>
-                <a:ea typeface="Calibri" pitchFamily="34" charset="-122"/>
-                <a:cs typeface="Calibri" pitchFamily="34" charset="-120"/>
-              </a:rPr>
-              <a:t>Turf + voice + art</a:t>
-            </a:r>
-            <a:endParaRPr lang="en-US" sz="1600" dirty="0"/>
-          </a:p>
-        </p:txBody>
-      </p:sp>
-      <p:sp>
-        <p:nvSpPr>
-          <p:cNvPr id="10" name="Text 8"/>
-          <p:cNvSpPr txBox="1"/>
-          <p:nvPr/>
-        </p:nvSpPr>
-        <p:spPr>
-          <a:xfrm>
-            <a:off x="7909560" y="1554480"/>
-            <a:ext cx="640080" cy="457200"/>
+            <a:endParaRPr lang="en-US" sz="1800" dirty="0"/>
+          </a:p>
+        </p:txBody>
+      </p:sp>
+      <p:sp>
+        <p:nvSpPr>
+          <p:cNvPr id="10" name="arrow-1"/>
+          <p:cNvSpPr txBox="1"/>
+          <p:nvPr/>
+        </p:nvSpPr>
+        <p:spPr>
+          <a:xfrm>
+            <a:off x="7680960" y="2194560"/>
+            <a:ext cx="685800" cy="640080"/>
           </a:xfrm>
           <a:prstGeom prst="rect">
             <a:avLst/>
@@ -4883,34 +4323,31 @@
               <a:buNone/>
             </a:pPr>
             <a:r>
-              <a:rPr lang="en-US" sz="2600" b="1" dirty="0">
-                <a:solidFill>
-                  <a:srgbClr val="2E9D4F"/>
-                </a:solidFill>
-                <a:latin typeface="Calibri" pitchFamily="34" charset="0"/>
-                <a:ea typeface="Calibri" pitchFamily="34" charset="-122"/>
-                <a:cs typeface="Calibri" pitchFamily="34" charset="-120"/>
+              <a:rPr lang="en-US" sz="3200" b="1" dirty="0">
+                <a:solidFill>
+                  <a:schemeClr val="accent1"/>
+                </a:solidFill>
               </a:rPr>
               <a:t>→</a:t>
             </a:r>
-            <a:endParaRPr lang="en-US" sz="2600" dirty="0"/>
-          </a:p>
-        </p:txBody>
-      </p:sp>
-      <p:sp>
-        <p:nvSpPr>
-          <p:cNvPr id="11" name="Shape 9"/>
+            <a:endParaRPr lang="en-US" sz="3200" dirty="0"/>
+          </a:p>
+        </p:txBody>
+      </p:sp>
+      <p:sp>
+        <p:nvSpPr>
+          <p:cNvPr id="11" name="arch-World"/>
           <p:cNvSpPr/>
           <p:nvPr/>
         </p:nvSpPr>
         <p:spPr>
           <a:xfrm>
-            <a:off x="8549640" y="960120"/>
-            <a:ext cx="3383280" cy="1874520"/>
+            <a:off x="8321040" y="1371600"/>
+            <a:ext cx="3246120" cy="2468880"/>
           </a:xfrm>
           <a:prstGeom prst="roundRect">
             <a:avLst>
-              <a:gd name="adj" fmla="val 5854"/>
+              <a:gd name="adj" fmla="val 5926"/>
             </a:avLst>
           </a:prstGeom>
           <a:solidFill>
@@ -4920,7 +4357,7 @@
           <a:effectLst>
             <a:outerShdw sx="100000" sy="100000" kx="0" ky="0" algn="bl" rotWithShape="0" blurRad="101600" dist="25400" dir="5400000">
               <a:srgbClr val="0B1F3A">
-                <a:alpha val="10000"/>
+                <a:alpha val="8000"/>
               </a:srgbClr>
             </a:outerShdw>
           </a:effectLst>
@@ -4934,8 +4371,8 @@
         </p:nvSpPr>
         <p:spPr>
           <a:xfrm>
-            <a:off x="8778240" y="1097280"/>
-            <a:ext cx="2926080" cy="384048"/>
+            <a:off x="8503920" y="1600200"/>
+            <a:ext cx="2880360" cy="548640"/>
           </a:xfrm>
           <a:prstGeom prst="rect">
             <a:avLst/>
@@ -4951,17 +4388,14 @@
               <a:buNone/>
             </a:pPr>
             <a:r>
-              <a:rPr lang="en-US" sz="2200" b="1" dirty="0">
-                <a:solidFill>
-                  <a:srgbClr val="0B1F3A"/>
-                </a:solidFill>
-                <a:latin typeface="Calibri" pitchFamily="34" charset="0"/>
-                <a:ea typeface="Calibri" pitchFamily="34" charset="-122"/>
-                <a:cs typeface="Calibri" pitchFamily="34" charset="-120"/>
+              <a:rPr lang="en-US" sz="2600" b="1" dirty="0">
+                <a:solidFill>
+                  <a:schemeClr val="tx1"/>
+                </a:solidFill>
               </a:rPr>
               <a:t>World</a:t>
             </a:r>
-            <a:endParaRPr lang="en-US" sz="2200" dirty="0"/>
+            <a:endParaRPr lang="en-US" sz="2600" dirty="0"/>
           </a:p>
         </p:txBody>
       </p:sp>
@@ -4973,8 +4407,8 @@
         </p:nvSpPr>
         <p:spPr>
           <a:xfrm>
-            <a:off x="8778240" y="1536192"/>
-            <a:ext cx="2926080" cy="1097280"/>
+            <a:off x="8503920" y="2286000"/>
+            <a:ext cx="2880360" cy="1234440"/>
           </a:xfrm>
           <a:prstGeom prst="rect">
             <a:avLst/>
@@ -4990,93 +4424,117 @@
               <a:buNone/>
             </a:pPr>
             <a:r>
-              <a:rPr lang="en-US" sz="1600" dirty="0">
-                <a:solidFill>
-                  <a:srgbClr val="4A6358"/>
-                </a:solidFill>
-                <a:latin typeface="Calibri" pitchFamily="34" charset="0"/>
-                <a:ea typeface="Calibri" pitchFamily="34" charset="-122"/>
-                <a:cs typeface="Calibri" pitchFamily="34" charset="-120"/>
+              <a:rPr lang="en-US" sz="1800" dirty="0">
+                <a:solidFill>
+                  <a:schemeClr val="accent6"/>
+                </a:solidFill>
               </a:rPr>
               <a:t>Wikipedia · OSM</a:t>
             </a:r>
-            <a:endParaRPr lang="en-US" sz="1600" dirty="0"/>
+            <a:endParaRPr lang="en-US" sz="1800" dirty="0"/>
           </a:p>
           <a:p>
             <a:pPr indent="0" marL="0">
               <a:buNone/>
             </a:pPr>
             <a:r>
-              <a:rPr lang="en-US" sz="1600" dirty="0">
-                <a:solidFill>
-                  <a:srgbClr val="4A6358"/>
-                </a:solidFill>
-                <a:latin typeface="Calibri" pitchFamily="34" charset="0"/>
-                <a:ea typeface="Calibri" pitchFamily="34" charset="-122"/>
-                <a:cs typeface="Calibri" pitchFamily="34" charset="-120"/>
-              </a:rPr>
-              <a:t>Grok / ElevenLabs</a:t>
-            </a:r>
-            <a:endParaRPr lang="en-US" sz="1600" dirty="0"/>
-          </a:p>
+              <a:rPr lang="en-US" sz="1800" dirty="0">
+                <a:solidFill>
+                  <a:schemeClr val="accent6"/>
+                </a:solidFill>
+              </a:rPr>
+              <a:t>Voice and art optional</a:t>
+            </a:r>
+            <a:endParaRPr lang="en-US" sz="1800" dirty="0"/>
+          </a:p>
+        </p:txBody>
+      </p:sp>
+      <p:sp>
+        <p:nvSpPr>
+          <p:cNvPr id="14" name="fact-dot-0"/>
+          <p:cNvSpPr/>
+          <p:nvPr/>
+        </p:nvSpPr>
+        <p:spPr>
+          <a:xfrm>
+            <a:off x="685800" y="4270248"/>
+            <a:ext cx="256032" cy="256032"/>
+          </a:xfrm>
+          <a:prstGeom prst="ellipse">
+            <a:avLst/>
+          </a:prstGeom>
+          <a:solidFill>
+            <a:schemeClr val="accent2"/>
+          </a:solidFill>
+          <a:ln/>
+        </p:spPr>
+      </p:sp>
+      <p:sp>
+        <p:nvSpPr>
+          <p:cNvPr id="15" name="Text 13"/>
+          <p:cNvSpPr txBox="1"/>
+          <p:nvPr/>
+        </p:nvSpPr>
+        <p:spPr>
+          <a:xfrm>
+            <a:off x="1097280" y="4160520"/>
+            <a:ext cx="10424160" cy="502920"/>
+          </a:xfrm>
+          <a:prstGeom prst="rect">
+            <a:avLst/>
+          </a:prstGeom>
+          <a:noFill/>
+          <a:ln/>
+        </p:spPr>
+        <p:txBody>
+          <a:bodyPr wrap="square" lIns="0" tIns="0" rIns="0" bIns="0" rtlCol="0" anchor="ctr"/>
+          <a:lstStyle/>
           <a:p>
             <a:pPr indent="0" marL="0">
               <a:buNone/>
             </a:pPr>
             <a:r>
-              <a:rPr lang="en-US" sz="1600" dirty="0">
-                <a:solidFill>
-                  <a:srgbClr val="4A6358"/>
-                </a:solidFill>
-                <a:latin typeface="Calibri" pitchFamily="34" charset="0"/>
-                <a:ea typeface="Calibri" pitchFamily="34" charset="-122"/>
-                <a:cs typeface="Calibri" pitchFamily="34" charset="-120"/>
-              </a:rPr>
-              <a:t>Photon iMessage</a:t>
-            </a:r>
-            <a:endParaRPr lang="en-US" sz="1600" dirty="0"/>
-          </a:p>
-        </p:txBody>
-      </p:sp>
-      <p:sp>
-        <p:nvSpPr>
-          <p:cNvPr id="14" name="Shape 12"/>
+              <a:rPr lang="en-US" sz="2000" dirty="0">
+                <a:solidFill>
+                  <a:schemeClr val="tx1"/>
+                </a:solidFill>
+              </a:rPr>
+              <a:t>Facts and routes come from tools, not the model.</a:t>
+            </a:r>
+            <a:endParaRPr lang="en-US" sz="2000" dirty="0"/>
+          </a:p>
+        </p:txBody>
+      </p:sp>
+      <p:sp>
+        <p:nvSpPr>
+          <p:cNvPr id="16" name="fact-dot-1"/>
           <p:cNvSpPr/>
           <p:nvPr/>
         </p:nvSpPr>
         <p:spPr>
           <a:xfrm>
-            <a:off x="502920" y="3063240"/>
-            <a:ext cx="5623560" cy="1508760"/>
-          </a:xfrm>
-          <a:prstGeom prst="roundRect">
-            <a:avLst>
-              <a:gd name="adj" fmla="val 7273"/>
-            </a:avLst>
+            <a:off x="685800" y="4910328"/>
+            <a:ext cx="256032" cy="256032"/>
+          </a:xfrm>
+          <a:prstGeom prst="ellipse">
+            <a:avLst/>
           </a:prstGeom>
           <a:solidFill>
-            <a:srgbClr val="FFFFFF"/>
+            <a:schemeClr val="accent2"/>
           </a:solidFill>
           <a:ln/>
-          <a:effectLst>
-            <a:outerShdw sx="100000" sy="100000" kx="0" ky="0" algn="bl" rotWithShape="0" blurRad="101600" dist="25400" dir="5400000">
-              <a:srgbClr val="0B1F3A">
-                <a:alpha val="10000"/>
-              </a:srgbClr>
-            </a:outerShdw>
-          </a:effectLst>
-        </p:spPr>
-      </p:sp>
-      <p:sp>
-        <p:nvSpPr>
-          <p:cNvPr id="15" name="Text 13"/>
-          <p:cNvSpPr txBox="1"/>
-          <p:nvPr/>
-        </p:nvSpPr>
-        <p:spPr>
-          <a:xfrm>
-            <a:off x="731520" y="3227832"/>
-            <a:ext cx="5166360" cy="365760"/>
+        </p:spPr>
+      </p:sp>
+      <p:sp>
+        <p:nvSpPr>
+          <p:cNvPr id="17" name="Text 15"/>
+          <p:cNvSpPr txBox="1"/>
+          <p:nvPr/>
+        </p:nvSpPr>
+        <p:spPr>
+          <a:xfrm>
+            <a:off x="1097280" y="4800600"/>
+            <a:ext cx="10424160" cy="502920"/>
           </a:xfrm>
           <a:prstGeom prst="rect">
             <a:avLst/>
@@ -5092,30 +4550,47 @@
               <a:buNone/>
             </a:pPr>
             <a:r>
-              <a:rPr lang="en-US" sz="1800" b="1" dirty="0">
-                <a:solidFill>
-                  <a:srgbClr val="2E9D4F"/>
-                </a:solidFill>
-                <a:latin typeface="Calibri" pitchFamily="34" charset="0"/>
-                <a:ea typeface="Calibri" pitchFamily="34" charset="-122"/>
-                <a:cs typeface="Calibri" pitchFamily="34" charset="-120"/>
-              </a:rPr>
-              <a:t>Shared JavaScript game logic</a:t>
-            </a:r>
-            <a:endParaRPr lang="en-US" sz="1800" dirty="0"/>
-          </a:p>
-        </p:txBody>
-      </p:sp>
-      <p:sp>
-        <p:nvSpPr>
-          <p:cNvPr id="16" name="Text 14"/>
-          <p:cNvSpPr txBox="1"/>
-          <p:nvPr/>
-        </p:nvSpPr>
-        <p:spPr>
-          <a:xfrm>
-            <a:off x="731520" y="3630168"/>
-            <a:ext cx="5166360" cy="777240"/>
+              <a:rPr lang="en-US" sz="2000" dirty="0">
+                <a:solidFill>
+                  <a:schemeClr val="tx1"/>
+                </a:solidFill>
+              </a:rPr>
+              <a:t>Photon carries the same squad into iMessage.</a:t>
+            </a:r>
+            <a:endParaRPr lang="en-US" sz="2000" dirty="0"/>
+          </a:p>
+        </p:txBody>
+      </p:sp>
+      <p:sp>
+        <p:nvSpPr>
+          <p:cNvPr id="18" name="fact-dot-2"/>
+          <p:cNvSpPr/>
+          <p:nvPr/>
+        </p:nvSpPr>
+        <p:spPr>
+          <a:xfrm>
+            <a:off x="685800" y="5550408"/>
+            <a:ext cx="256032" cy="256032"/>
+          </a:xfrm>
+          <a:prstGeom prst="ellipse">
+            <a:avLst/>
+          </a:prstGeom>
+          <a:solidFill>
+            <a:schemeClr val="accent2"/>
+          </a:solidFill>
+          <a:ln/>
+        </p:spPr>
+      </p:sp>
+      <p:sp>
+        <p:nvSpPr>
+          <p:cNvPr id="19" name="Text 17"/>
+          <p:cNvSpPr txBox="1"/>
+          <p:nvPr/>
+        </p:nvSpPr>
+        <p:spPr>
+          <a:xfrm>
+            <a:off x="1097280" y="5440680"/>
+            <a:ext cx="10424160" cy="502920"/>
           </a:xfrm>
           <a:prstGeom prst="rect">
             <a:avLst/>
@@ -5131,338 +4606,14 @@
               <a:buNone/>
             </a:pPr>
             <a:r>
-              <a:rPr lang="en-US" sz="1500" dirty="0">
-                <a:solidFill>
-                  <a:srgbClr val="163528"/>
-                </a:solidFill>
-                <a:latin typeface="Calibri" pitchFamily="34" charset="0"/>
-                <a:ea typeface="Calibri" pitchFamily="34" charset="-122"/>
-                <a:cs typeface="Calibri" pitchFamily="34" charset="-120"/>
-              </a:rPr>
-              <a:t>core/ is the source of truth. Phone, server, and iMessage import the same rules.</a:t>
-            </a:r>
-            <a:endParaRPr lang="en-US" sz="1500" dirty="0"/>
-          </a:p>
-        </p:txBody>
-      </p:sp>
-      <p:sp>
-        <p:nvSpPr>
-          <p:cNvPr id="17" name="Shape 15"/>
-          <p:cNvSpPr/>
-          <p:nvPr/>
-        </p:nvSpPr>
-        <p:spPr>
-          <a:xfrm>
-            <a:off x="6355080" y="3063240"/>
-            <a:ext cx="5623560" cy="1508760"/>
-          </a:xfrm>
-          <a:prstGeom prst="roundRect">
-            <a:avLst>
-              <a:gd name="adj" fmla="val 7273"/>
-            </a:avLst>
-          </a:prstGeom>
-          <a:solidFill>
-            <a:srgbClr val="FFFFFF"/>
-          </a:solidFill>
-          <a:ln/>
-          <a:effectLst>
-            <a:outerShdw sx="100000" sy="100000" kx="0" ky="0" algn="bl" rotWithShape="0" blurRad="101600" dist="25400" dir="5400000">
-              <a:srgbClr val="0B1F3A">
-                <a:alpha val="10000"/>
-              </a:srgbClr>
-            </a:outerShdw>
-          </a:effectLst>
-        </p:spPr>
-      </p:sp>
-      <p:sp>
-        <p:nvSpPr>
-          <p:cNvPr id="18" name="Text 16"/>
-          <p:cNvSpPr txBox="1"/>
-          <p:nvPr/>
-        </p:nvSpPr>
-        <p:spPr>
-          <a:xfrm>
-            <a:off x="6583680" y="3227832"/>
-            <a:ext cx="5166360" cy="365760"/>
-          </a:xfrm>
-          <a:prstGeom prst="rect">
-            <a:avLst/>
-          </a:prstGeom>
-          <a:noFill/>
-          <a:ln/>
-        </p:spPr>
-        <p:txBody>
-          <a:bodyPr wrap="square" lIns="0" tIns="0" rIns="0" bIns="0" rtlCol="0" anchor="ctr"/>
-          <a:lstStyle/>
-          <a:p>
-            <a:pPr indent="0" marL="0">
-              <a:buNone/>
-            </a:pPr>
-            <a:r>
-              <a:rPr lang="en-US" sz="1800" b="1" dirty="0">
-                <a:solidFill>
-                  <a:srgbClr val="2E9D4F"/>
-                </a:solidFill>
-                <a:latin typeface="Calibri" pitchFamily="34" charset="0"/>
-                <a:ea typeface="Calibri" pitchFamily="34" charset="-122"/>
-                <a:cs typeface="Calibri" pitchFamily="34" charset="-120"/>
-              </a:rPr>
-              <a:t>Grounded facts and routes</a:t>
-            </a:r>
-            <a:endParaRPr lang="en-US" sz="1800" dirty="0"/>
-          </a:p>
-        </p:txBody>
-      </p:sp>
-      <p:sp>
-        <p:nvSpPr>
-          <p:cNvPr id="19" name="Text 17"/>
-          <p:cNvSpPr txBox="1"/>
-          <p:nvPr/>
-        </p:nvSpPr>
-        <p:spPr>
-          <a:xfrm>
-            <a:off x="6583680" y="3630168"/>
-            <a:ext cx="5166360" cy="777240"/>
-          </a:xfrm>
-          <a:prstGeom prst="rect">
-            <a:avLst/>
-          </a:prstGeom>
-          <a:noFill/>
-          <a:ln/>
-        </p:spPr>
-        <p:txBody>
-          <a:bodyPr wrap="square" lIns="0" tIns="0" rIns="0" bIns="0" rtlCol="0" anchor="ctr"/>
-          <a:lstStyle/>
-          <a:p>
-            <a:pPr indent="0" marL="0">
-              <a:buNone/>
-            </a:pPr>
-            <a:r>
-              <a:rPr lang="en-US" sz="1500" dirty="0">
-                <a:solidFill>
-                  <a:srgbClr val="163528"/>
-                </a:solidFill>
-                <a:latin typeface="Calibri" pitchFamily="34" charset="0"/>
-                <a:ea typeface="Calibri" pitchFamily="34" charset="-122"/>
-                <a:cs typeface="Calibri" pitchFamily="34" charset="-120"/>
-              </a:rPr>
-              <a:t>Place facts from Wikipedia. Walking routes from OpenStreetMap. Agents do not invent landmarks.</a:t>
-            </a:r>
-            <a:endParaRPr lang="en-US" sz="1500" dirty="0"/>
-          </a:p>
-        </p:txBody>
-      </p:sp>
-      <p:sp>
-        <p:nvSpPr>
-          <p:cNvPr id="20" name="Shape 18"/>
-          <p:cNvSpPr/>
-          <p:nvPr/>
-        </p:nvSpPr>
-        <p:spPr>
-          <a:xfrm>
-            <a:off x="502920" y="4709160"/>
-            <a:ext cx="5623560" cy="1508760"/>
-          </a:xfrm>
-          <a:prstGeom prst="roundRect">
-            <a:avLst>
-              <a:gd name="adj" fmla="val 7273"/>
-            </a:avLst>
-          </a:prstGeom>
-          <a:solidFill>
-            <a:srgbClr val="FFFFFF"/>
-          </a:solidFill>
-          <a:ln/>
-          <a:effectLst>
-            <a:outerShdw sx="100000" sy="100000" kx="0" ky="0" algn="bl" rotWithShape="0" blurRad="101600" dist="25400" dir="5400000">
-              <a:srgbClr val="0B1F3A">
-                <a:alpha val="10000"/>
-              </a:srgbClr>
-            </a:outerShdw>
-          </a:effectLst>
-        </p:spPr>
-      </p:sp>
-      <p:sp>
-        <p:nvSpPr>
-          <p:cNvPr id="21" name="Text 19"/>
-          <p:cNvSpPr txBox="1"/>
-          <p:nvPr/>
-        </p:nvSpPr>
-        <p:spPr>
-          <a:xfrm>
-            <a:off x="731520" y="4873752"/>
-            <a:ext cx="5166360" cy="365760"/>
-          </a:xfrm>
-          <a:prstGeom prst="rect">
-            <a:avLst/>
-          </a:prstGeom>
-          <a:noFill/>
-          <a:ln/>
-        </p:spPr>
-        <p:txBody>
-          <a:bodyPr wrap="square" lIns="0" tIns="0" rIns="0" bIns="0" rtlCol="0" anchor="ctr"/>
-          <a:lstStyle/>
-          <a:p>
-            <a:pPr indent="0" marL="0">
-              <a:buNone/>
-            </a:pPr>
-            <a:r>
-              <a:rPr lang="en-US" sz="1800" b="1" dirty="0">
-                <a:solidFill>
-                  <a:srgbClr val="2E9D4F"/>
-                </a:solidFill>
-                <a:latin typeface="Calibri" pitchFamily="34" charset="0"/>
-                <a:ea typeface="Calibri" pitchFamily="34" charset="-122"/>
-                <a:cs typeface="Calibri" pitchFamily="34" charset="-120"/>
-              </a:rPr>
-              <a:t>Voice and art, with fallbacks</a:t>
-            </a:r>
-            <a:endParaRPr lang="en-US" sz="1800" dirty="0"/>
-          </a:p>
-        </p:txBody>
-      </p:sp>
-      <p:sp>
-        <p:nvSpPr>
-          <p:cNvPr id="22" name="Text 20"/>
-          <p:cNvSpPr txBox="1"/>
-          <p:nvPr/>
-        </p:nvSpPr>
-        <p:spPr>
-          <a:xfrm>
-            <a:off x="731520" y="5276088"/>
-            <a:ext cx="5166360" cy="777240"/>
-          </a:xfrm>
-          <a:prstGeom prst="rect">
-            <a:avLst/>
-          </a:prstGeom>
-          <a:noFill/>
-          <a:ln/>
-        </p:spPr>
-        <p:txBody>
-          <a:bodyPr wrap="square" lIns="0" tIns="0" rIns="0" bIns="0" rtlCol="0" anchor="ctr"/>
-          <a:lstStyle/>
-          <a:p>
-            <a:pPr indent="0" marL="0">
-              <a:buNone/>
-            </a:pPr>
-            <a:r>
-              <a:rPr lang="en-US" sz="1500" dirty="0">
-                <a:solidFill>
-                  <a:srgbClr val="163528"/>
-                </a:solidFill>
-                <a:latin typeface="Calibri" pitchFamily="34" charset="0"/>
-                <a:ea typeface="Calibri" pitchFamily="34" charset="-122"/>
-                <a:cs typeface="Calibri" pitchFamily="34" charset="-120"/>
-              </a:rPr>
-              <a:t>Moss can use ElevenLabs. Pip and Fern can use Grok when keys are set. Else on-device speech and original art.</a:t>
-            </a:r>
-            <a:endParaRPr lang="en-US" sz="1500" dirty="0"/>
-          </a:p>
-        </p:txBody>
-      </p:sp>
-      <p:sp>
-        <p:nvSpPr>
-          <p:cNvPr id="23" name="Shape 21"/>
-          <p:cNvSpPr/>
-          <p:nvPr/>
-        </p:nvSpPr>
-        <p:spPr>
-          <a:xfrm>
-            <a:off x="6355080" y="4709160"/>
-            <a:ext cx="5623560" cy="1508760"/>
-          </a:xfrm>
-          <a:prstGeom prst="roundRect">
-            <a:avLst>
-              <a:gd name="adj" fmla="val 7273"/>
-            </a:avLst>
-          </a:prstGeom>
-          <a:solidFill>
-            <a:srgbClr val="FFFFFF"/>
-          </a:solidFill>
-          <a:ln/>
-          <a:effectLst>
-            <a:outerShdw sx="100000" sy="100000" kx="0" ky="0" algn="bl" rotWithShape="0" blurRad="101600" dist="25400" dir="5400000">
-              <a:srgbClr val="0B1F3A">
-                <a:alpha val="10000"/>
-              </a:srgbClr>
-            </a:outerShdw>
-          </a:effectLst>
-        </p:spPr>
-      </p:sp>
-      <p:sp>
-        <p:nvSpPr>
-          <p:cNvPr id="24" name="Text 22"/>
-          <p:cNvSpPr txBox="1"/>
-          <p:nvPr/>
-        </p:nvSpPr>
-        <p:spPr>
-          <a:xfrm>
-            <a:off x="6583680" y="4873752"/>
-            <a:ext cx="5166360" cy="365760"/>
-          </a:xfrm>
-          <a:prstGeom prst="rect">
-            <a:avLst/>
-          </a:prstGeom>
-          <a:noFill/>
-          <a:ln/>
-        </p:spPr>
-        <p:txBody>
-          <a:bodyPr wrap="square" lIns="0" tIns="0" rIns="0" bIns="0" rtlCol="0" anchor="ctr"/>
-          <a:lstStyle/>
-          <a:p>
-            <a:pPr indent="0" marL="0">
-              <a:buNone/>
-            </a:pPr>
-            <a:r>
-              <a:rPr lang="en-US" sz="1800" b="1" dirty="0">
-                <a:solidFill>
-                  <a:srgbClr val="2E9D4F"/>
-                </a:solidFill>
-                <a:latin typeface="Calibri" pitchFamily="34" charset="0"/>
-                <a:ea typeface="Calibri" pitchFamily="34" charset="-122"/>
-                <a:cs typeface="Calibri" pitchFamily="34" charset="-120"/>
-              </a:rPr>
-              <a:t>Cursor-assisted build</a:t>
-            </a:r>
-            <a:endParaRPr lang="en-US" sz="1800" dirty="0"/>
-          </a:p>
-        </p:txBody>
-      </p:sp>
-      <p:sp>
-        <p:nvSpPr>
-          <p:cNvPr id="25" name="Text 23"/>
-          <p:cNvSpPr txBox="1"/>
-          <p:nvPr/>
-        </p:nvSpPr>
-        <p:spPr>
-          <a:xfrm>
-            <a:off x="6583680" y="5276088"/>
-            <a:ext cx="5166360" cy="777240"/>
-          </a:xfrm>
-          <a:prstGeom prst="rect">
-            <a:avLst/>
-          </a:prstGeom>
-          <a:noFill/>
-          <a:ln/>
-        </p:spPr>
-        <p:txBody>
-          <a:bodyPr wrap="square" lIns="0" tIns="0" rIns="0" bIns="0" rtlCol="0" anchor="ctr"/>
-          <a:lstStyle/>
-          <a:p>
-            <a:pPr indent="0" marL="0">
-              <a:buNone/>
-            </a:pPr>
-            <a:r>
-              <a:rPr lang="en-US" sz="1500" dirty="0">
-                <a:solidFill>
-                  <a:srgbClr val="163528"/>
-                </a:solidFill>
-                <a:latin typeface="Calibri" pitchFamily="34" charset="0"/>
-                <a:ea typeface="Calibri" pitchFamily="34" charset="-122"/>
-                <a:cs typeface="Calibri" pitchFamily="34" charset="-120"/>
-              </a:rPr>
-              <a:t>SpaceX track: designed and iterated in Cursor. iMessage agent uses Photon Spectrum.</a:t>
-            </a:r>
-            <a:endParaRPr lang="en-US" sz="1500" dirty="0"/>
+              <a:rPr lang="en-US" sz="2000" dirty="0">
+                <a:solidFill>
+                  <a:schemeClr val="tx1"/>
+                </a:solidFill>
+              </a:rPr>
+              <a:t>Designed and iterated in Cursor.</a:t>
+            </a:r>
+            <a:endParaRPr lang="en-US" sz="2000" dirty="0"/>
           </a:p>
         </p:txBody>
       </p:sp>
@@ -5501,8 +4652,8 @@
         </p:nvSpPr>
         <p:spPr>
           <a:xfrm>
-            <a:off x="502920" y="256032"/>
-            <a:ext cx="11155680" cy="566928"/>
+            <a:off x="548640" y="256032"/>
+            <a:ext cx="11064240" cy="658368"/>
           </a:xfrm>
           <a:prstGeom prst="rect">
             <a:avLst/>
@@ -5518,34 +4669,31 @@
               <a:buNone/>
             </a:pPr>
             <a:r>
-              <a:rPr lang="en-US" sz="3200" b="1" dirty="0">
-                <a:solidFill>
-                  <a:srgbClr val="0B1F3A"/>
-                </a:solidFill>
-                <a:latin typeface="Calibri" pitchFamily="34" charset="0"/>
-                <a:ea typeface="Calibri" pitchFamily="34" charset="-122"/>
-                <a:cs typeface="Calibri" pitchFamily="34" charset="-120"/>
-              </a:rPr>
-              <a:t>What makes it special</a:t>
-            </a:r>
-            <a:endParaRPr lang="en-US" sz="3200" dirty="0"/>
-          </a:p>
-        </p:txBody>
-      </p:sp>
-      <p:sp>
-        <p:nvSpPr>
-          <p:cNvPr id="3" name="Shape 1"/>
+              <a:rPr lang="en-US" sz="3600" b="1" dirty="0">
+                <a:solidFill>
+                  <a:schemeClr val="tx1"/>
+                </a:solidFill>
+              </a:rPr>
+              <a:t>Walking becomes play</a:t>
+            </a:r>
+            <a:endParaRPr lang="en-US" sz="3600" dirty="0"/>
+          </a:p>
+        </p:txBody>
+      </p:sp>
+      <p:sp>
+        <p:nvSpPr>
+          <p:cNvPr id="3" name="special-0"/>
           <p:cNvSpPr/>
           <p:nvPr/>
         </p:nvSpPr>
         <p:spPr>
           <a:xfrm>
-            <a:off x="502920" y="960120"/>
-            <a:ext cx="3611880" cy="4160520"/>
+            <a:off x="502920" y="1097280"/>
+            <a:ext cx="3657600" cy="3794760"/>
           </a:xfrm>
           <a:prstGeom prst="roundRect">
             <a:avLst>
-              <a:gd name="adj" fmla="val 3038"/>
+              <a:gd name="adj" fmla="val 4000"/>
             </a:avLst>
           </a:prstGeom>
           <a:solidFill>
@@ -5555,7 +4703,7 @@
           <a:effectLst>
             <a:outerShdw sx="100000" sy="100000" kx="0" ky="0" algn="bl" rotWithShape="0" blurRad="101600" dist="25400" dir="5400000">
               <a:srgbClr val="0B1F3A">
-                <a:alpha val="10000"/>
+                <a:alpha val="8000"/>
               </a:srgbClr>
             </a:outerShdw>
           </a:effectLst>
@@ -5563,7 +4711,7 @@
       </p:sp>
       <p:pic>
         <p:nvPicPr>
-          <p:cNvPr id="4" name="Image 0" descr="G:\broswer download\big-red-hacks2026\mobile\assets\splash-icon.png">    </p:cNvPr>
+          <p:cNvPr id="4" name="special-art-0" descr="G:\broswer download\big-red-hacks2026\mobile\assets\splash-icon.png">    </p:cNvPr>
           <p:cNvPicPr>
             <a:picLocks noChangeAspect="1"/>
           </p:cNvPicPr>
@@ -5577,8 +4725,8 @@
         </p:blipFill>
         <p:spPr>
           <a:xfrm>
-            <a:off x="1527048" y="1170432"/>
-            <a:ext cx="1554480" cy="1554480"/>
+            <a:off x="1600200" y="1280160"/>
+            <a:ext cx="1417320" cy="1417320"/>
           </a:xfrm>
           <a:prstGeom prst="rect">
             <a:avLst/>
@@ -5593,8 +4741,8 @@
         </p:nvSpPr>
         <p:spPr>
           <a:xfrm>
-            <a:off x="704088" y="2880360"/>
-            <a:ext cx="3200400" cy="777240"/>
+            <a:off x="704088" y="2834640"/>
+            <a:ext cx="3246120" cy="640080"/>
           </a:xfrm>
           <a:prstGeom prst="rect">
             <a:avLst/>
@@ -5612,13 +4760,10 @@
             <a:r>
               <a:rPr lang="en-US" sz="2000" b="1" dirty="0">
                 <a:solidFill>
-                  <a:srgbClr val="0B1F3A"/>
-                </a:solidFill>
-                <a:latin typeface="Calibri" pitchFamily="34" charset="0"/>
-                <a:ea typeface="Calibri" pitchFamily="34" charset="-122"/>
-                <a:cs typeface="Calibri" pitchFamily="34" charset="-120"/>
-              </a:rPr>
-              <a:t>Navigation becomes play</a:t>
+                  <a:schemeClr val="tx1"/>
+                </a:solidFill>
+              </a:rPr>
+              <a:t>The map is a trail</a:t>
             </a:r>
             <a:endParaRPr lang="en-US" sz="2000" dirty="0"/>
           </a:p>
@@ -5632,8 +4777,8 @@
         </p:nvSpPr>
         <p:spPr>
           <a:xfrm>
-            <a:off x="704088" y="3703320"/>
-            <a:ext cx="3200400" cy="1188720"/>
+            <a:off x="704088" y="3520440"/>
+            <a:ext cx="3246120" cy="1097280"/>
           </a:xfrm>
           <a:prstGeom prst="rect">
             <a:avLst/>
@@ -5649,34 +4794,31 @@
               <a:buNone/>
             </a:pPr>
             <a:r>
-              <a:rPr lang="en-US" sz="1500" dirty="0">
-                <a:solidFill>
-                  <a:srgbClr val="4A6358"/>
-                </a:solidFill>
-                <a:latin typeface="Calibri" pitchFamily="34" charset="0"/>
-                <a:ea typeface="Calibri" pitchFamily="34" charset="-122"/>
-                <a:cs typeface="Calibri" pitchFamily="34" charset="-120"/>
-              </a:rPr>
-              <a:t>The map is a blooming trail and a squad, not only a blue line to a pin.</a:t>
-            </a:r>
-            <a:endParaRPr lang="en-US" sz="1500" dirty="0"/>
-          </a:p>
-        </p:txBody>
-      </p:sp>
-      <p:sp>
-        <p:nvSpPr>
-          <p:cNvPr id="7" name="Shape 4"/>
+              <a:rPr lang="en-US" sz="1600" dirty="0">
+                <a:solidFill>
+                  <a:schemeClr val="accent6"/>
+                </a:solidFill>
+              </a:rPr>
+              <a:t>A blooming path and a squad, not only a blue line.</a:t>
+            </a:r>
+            <a:endParaRPr lang="en-US" sz="1600" dirty="0"/>
+          </a:p>
+        </p:txBody>
+      </p:sp>
+      <p:sp>
+        <p:nvSpPr>
+          <p:cNvPr id="7" name="special-1"/>
           <p:cNvSpPr/>
           <p:nvPr/>
         </p:nvSpPr>
         <p:spPr>
           <a:xfrm>
-            <a:off x="4343400" y="960120"/>
-            <a:ext cx="3611880" cy="4160520"/>
+            <a:off x="4343400" y="1097280"/>
+            <a:ext cx="3657600" cy="3794760"/>
           </a:xfrm>
           <a:prstGeom prst="roundRect">
             <a:avLst>
-              <a:gd name="adj" fmla="val 3038"/>
+              <a:gd name="adj" fmla="val 4000"/>
             </a:avLst>
           </a:prstGeom>
           <a:solidFill>
@@ -5686,7 +4828,7 @@
           <a:effectLst>
             <a:outerShdw sx="100000" sy="100000" kx="0" ky="0" algn="bl" rotWithShape="0" blurRad="101600" dist="25400" dir="5400000">
               <a:srgbClr val="0B1F3A">
-                <a:alpha val="10000"/>
+                <a:alpha val="8000"/>
               </a:srgbClr>
             </a:outerShdw>
           </a:effectLst>
@@ -5694,7 +4836,7 @@
       </p:sp>
       <p:pic>
         <p:nvPicPr>
-          <p:cNvPr id="8" name="Image 1" descr="G:\broswer download\big-red-hacks2026\mobile\assets\badges\gold.png">    </p:cNvPr>
+          <p:cNvPr id="8" name="special-art-1" descr="G:\broswer download\big-red-hacks2026\mobile\assets\badges\gold.png">    </p:cNvPr>
           <p:cNvPicPr>
             <a:picLocks noChangeAspect="1"/>
           </p:cNvPicPr>
@@ -5708,8 +4850,8 @@
         </p:blipFill>
         <p:spPr>
           <a:xfrm>
-            <a:off x="5367528" y="1170432"/>
-            <a:ext cx="1554480" cy="1554480"/>
+            <a:off x="5440680" y="1280160"/>
+            <a:ext cx="1417320" cy="1417320"/>
           </a:xfrm>
           <a:prstGeom prst="rect">
             <a:avLst/>
@@ -5724,8 +4866,8 @@
         </p:nvSpPr>
         <p:spPr>
           <a:xfrm>
-            <a:off x="4544568" y="2880360"/>
-            <a:ext cx="3200400" cy="777240"/>
+            <a:off x="4544568" y="2834640"/>
+            <a:ext cx="3246120" cy="640080"/>
           </a:xfrm>
           <a:prstGeom prst="rect">
             <a:avLst/>
@@ -5743,13 +4885,10 @@
             <a:r>
               <a:rPr lang="en-US" sz="2000" b="1" dirty="0">
                 <a:solidFill>
-                  <a:srgbClr val="0B1F3A"/>
-                </a:solidFill>
-                <a:latin typeface="Calibri" pitchFamily="34" charset="0"/>
-                <a:ea typeface="Calibri" pitchFamily="34" charset="-122"/>
-                <a:cs typeface="Calibri" pitchFamily="34" charset="-120"/>
-              </a:rPr>
-              <a:t>Walking earns pets</a:t>
+                  <a:schemeClr val="tx1"/>
+                </a:solidFill>
+              </a:rPr>
+              <a:t>Steps earn creatures</a:t>
             </a:r>
             <a:endParaRPr lang="en-US" sz="2000" dirty="0"/>
           </a:p>
@@ -5763,8 +4902,8 @@
         </p:nvSpPr>
         <p:spPr>
           <a:xfrm>
-            <a:off x="4544568" y="3703320"/>
-            <a:ext cx="3200400" cy="1188720"/>
+            <a:off x="4544568" y="3520440"/>
+            <a:ext cx="3246120" cy="1097280"/>
           </a:xfrm>
           <a:prstGeom prst="rect">
             <a:avLst/>
@@ -5780,34 +4919,31 @@
               <a:buNone/>
             </a:pPr>
             <a:r>
-              <a:rPr lang="en-US" sz="1500" dirty="0">
-                <a:solidFill>
-                  <a:srgbClr val="4A6358"/>
-                </a:solidFill>
-                <a:latin typeface="Calibri" pitchFamily="34" charset="0"/>
-                <a:ea typeface="Calibri" pitchFamily="34" charset="-122"/>
-                <a:cs typeface="Calibri" pitchFamily="34" charset="-120"/>
-              </a:rPr>
-              <a:t>Distance fills eggs, ranks, and landmark captures — completable at the table in Demo Walk.</a:t>
-            </a:r>
-            <a:endParaRPr lang="en-US" sz="1500" dirty="0"/>
-          </a:p>
-        </p:txBody>
-      </p:sp>
-      <p:sp>
-        <p:nvSpPr>
-          <p:cNvPr id="11" name="Shape 7"/>
+              <a:rPr lang="en-US" sz="1600" dirty="0">
+                <a:solidFill>
+                  <a:schemeClr val="accent6"/>
+                </a:solidFill>
+              </a:rPr>
+              <a:t>Eggs, ranks, and captures — completable in Demo Walk.</a:t>
+            </a:r>
+            <a:endParaRPr lang="en-US" sz="1600" dirty="0"/>
+          </a:p>
+        </p:txBody>
+      </p:sp>
+      <p:sp>
+        <p:nvSpPr>
+          <p:cNvPr id="11" name="special-2"/>
           <p:cNvSpPr/>
           <p:nvPr/>
         </p:nvSpPr>
         <p:spPr>
           <a:xfrm>
-            <a:off x="8183880" y="960120"/>
-            <a:ext cx="3611880" cy="4160520"/>
+            <a:off x="8183880" y="1097280"/>
+            <a:ext cx="3657600" cy="3794760"/>
           </a:xfrm>
           <a:prstGeom prst="roundRect">
             <a:avLst>
-              <a:gd name="adj" fmla="val 3038"/>
+              <a:gd name="adj" fmla="val 4000"/>
             </a:avLst>
           </a:prstGeom>
           <a:solidFill>
@@ -5817,7 +4953,7 @@
           <a:effectLst>
             <a:outerShdw sx="100000" sy="100000" kx="0" ky="0" algn="bl" rotWithShape="0" blurRad="101600" dist="25400" dir="5400000">
               <a:srgbClr val="0B1F3A">
-                <a:alpha val="10000"/>
+                <a:alpha val="8000"/>
               </a:srgbClr>
             </a:outerShdw>
           </a:effectLst>
@@ -5825,7 +4961,7 @@
       </p:sp>
       <p:pic>
         <p:nvPicPr>
-          <p:cNvPr id="12" name="Image 2" descr="G:\broswer download\big-red-hacks2026\mobile\assets\logo-badge.png">    </p:cNvPr>
+          <p:cNvPr id="12" name="special-art-2" descr="G:\broswer download\big-red-hacks2026\docs\presentation\assets\scout.png">    </p:cNvPr>
           <p:cNvPicPr>
             <a:picLocks noChangeAspect="1"/>
           </p:cNvPicPr>
@@ -5839,8 +4975,8 @@
         </p:blipFill>
         <p:spPr>
           <a:xfrm>
-            <a:off x="9208008" y="1170432"/>
-            <a:ext cx="1554480" cy="1554480"/>
+            <a:off x="9281160" y="1280160"/>
+            <a:ext cx="1417320" cy="1417320"/>
           </a:xfrm>
           <a:prstGeom prst="rect">
             <a:avLst/>
@@ -5855,8 +4991,8 @@
         </p:nvSpPr>
         <p:spPr>
           <a:xfrm>
-            <a:off x="8385048" y="2880360"/>
-            <a:ext cx="3200400" cy="777240"/>
+            <a:off x="8385048" y="2834640"/>
+            <a:ext cx="3246120" cy="640080"/>
           </a:xfrm>
           <a:prstGeom prst="rect">
             <a:avLst/>
@@ -5874,13 +5010,10 @@
             <a:r>
               <a:rPr lang="en-US" sz="2000" b="1" dirty="0">
                 <a:solidFill>
-                  <a:srgbClr val="0B1F3A"/>
-                </a:solidFill>
-                <a:latin typeface="Calibri" pitchFamily="34" charset="0"/>
-                <a:ea typeface="Calibri" pitchFamily="34" charset="-122"/>
-                <a:cs typeface="Calibri" pitchFamily="34" charset="-120"/>
-              </a:rPr>
-              <a:t>Lives in iMessage</a:t>
+                  <a:schemeClr val="tx1"/>
+                </a:solidFill>
+              </a:rPr>
+              <a:t>It continues in iMessage</a:t>
             </a:r>
             <a:endParaRPr lang="en-US" sz="2000" dirty="0"/>
           </a:p>
@@ -5894,8 +5027,8 @@
         </p:nvSpPr>
         <p:spPr>
           <a:xfrm>
-            <a:off x="8385048" y="3703320"/>
-            <a:ext cx="3200400" cy="1188720"/>
+            <a:off x="8385048" y="3520440"/>
+            <a:ext cx="3246120" cy="1097280"/>
           </a:xfrm>
           <a:prstGeom prst="rect">
             <a:avLst/>
@@ -5911,44 +5044,41 @@
               <a:buNone/>
             </a:pPr>
             <a:r>
-              <a:rPr lang="en-US" sz="1500" dirty="0">
-                <a:solidFill>
-                  <a:srgbClr val="4A6358"/>
-                </a:solidFill>
-                <a:latin typeface="Calibri" pitchFamily="34" charset="0"/>
-                <a:ea typeface="Calibri" pitchFamily="34" charset="-122"/>
-                <a:cs typeface="Calibri" pitchFamily="34" charset="-120"/>
-              </a:rPr>
-              <a:t>The same squad can explore, story, and route over Photon — terminal today, iMessage with keys.</a:t>
-            </a:r>
-            <a:endParaRPr lang="en-US" sz="1500" dirty="0"/>
-          </a:p>
-        </p:txBody>
-      </p:sp>
-      <p:sp>
-        <p:nvSpPr>
-          <p:cNvPr id="15" name="Shape 10"/>
+              <a:rPr lang="en-US" sz="1600" dirty="0">
+                <a:solidFill>
+                  <a:schemeClr val="accent6"/>
+                </a:solidFill>
+              </a:rPr>
+              <a:t>Same squad over Photon. Terminal today; iMessage with keys.</a:t>
+            </a:r>
+            <a:endParaRPr lang="en-US" sz="1600" dirty="0"/>
+          </a:p>
+        </p:txBody>
+      </p:sp>
+      <p:sp>
+        <p:nvSpPr>
+          <p:cNvPr id="15" name="working"/>
           <p:cNvSpPr/>
           <p:nvPr/>
         </p:nvSpPr>
         <p:spPr>
           <a:xfrm>
-            <a:off x="502920" y="5303520"/>
-            <a:ext cx="5486400" cy="1005840"/>
+            <a:off x="502920" y="5074920"/>
+            <a:ext cx="5532120" cy="1188720"/>
           </a:xfrm>
           <a:prstGeom prst="roundRect">
             <a:avLst>
-              <a:gd name="adj" fmla="val 10909"/>
+              <a:gd name="adj" fmla="val 12308"/>
             </a:avLst>
           </a:prstGeom>
           <a:solidFill>
-            <a:srgbClr val="E7F3E4"/>
+            <a:schemeClr val="bg2"/>
           </a:solidFill>
           <a:ln/>
           <a:effectLst>
             <a:outerShdw sx="100000" sy="100000" kx="0" ky="0" algn="bl" rotWithShape="0" blurRad="101600" dist="25400" dir="5400000">
               <a:srgbClr val="0B1F3A">
-                <a:alpha val="10000"/>
+                <a:alpha val="8000"/>
               </a:srgbClr>
             </a:outerShdw>
           </a:effectLst>
@@ -5962,8 +5092,8 @@
         </p:nvSpPr>
         <p:spPr>
           <a:xfrm>
-            <a:off x="685800" y="5440680"/>
-            <a:ext cx="5120640" cy="731520"/>
+            <a:off x="685800" y="5257800"/>
+            <a:ext cx="5166360" cy="822960"/>
           </a:xfrm>
           <a:prstGeom prst="rect">
             <a:avLst/>
@@ -5981,13 +5111,10 @@
             <a:r>
               <a:rPr lang="en-US" sz="1600" dirty="0">
                 <a:solidFill>
-                  <a:srgbClr val="163528"/>
-                </a:solidFill>
-                <a:latin typeface="Calibri" pitchFamily="34" charset="0"/>
-                <a:ea typeface="Calibri" pitchFamily="34" charset="-122"/>
-                <a:cs typeface="Calibri" pitchFamily="34" charset="-120"/>
-              </a:rPr>
-              <a:t>In the app: ISS overhead can boost rare hatches.</a:t>
+                  <a:schemeClr val="tx1"/>
+                </a:solidFill>
+              </a:rPr>
+              <a:t>Working  ·  ISS overhead can boost rare hatches.</a:t>
             </a:r>
             <a:endParaRPr lang="en-US" sz="1600" dirty="0"/>
           </a:p>
@@ -5995,28 +5122,28 @@
       </p:sp>
       <p:sp>
         <p:nvSpPr>
-          <p:cNvPr id="17" name="Shape 12"/>
+          <p:cNvPr id="17" name="later"/>
           <p:cNvSpPr/>
           <p:nvPr/>
         </p:nvSpPr>
         <p:spPr>
           <a:xfrm>
-            <a:off x="6217920" y="5303520"/>
-            <a:ext cx="5486400" cy="1005840"/>
+            <a:off x="6217920" y="5074920"/>
+            <a:ext cx="5440680" cy="1188720"/>
           </a:xfrm>
           <a:prstGeom prst="roundRect">
             <a:avLst>
-              <a:gd name="adj" fmla="val 10909"/>
+              <a:gd name="adj" fmla="val 12308"/>
             </a:avLst>
           </a:prstGeom>
           <a:solidFill>
-            <a:srgbClr val="FFFFFF"/>
+            <a:srgbClr val="E8F5FF"/>
           </a:solidFill>
           <a:ln/>
           <a:effectLst>
             <a:outerShdw sx="100000" sy="100000" kx="0" ky="0" algn="bl" rotWithShape="0" blurRad="101600" dist="25400" dir="5400000">
               <a:srgbClr val="0B1F3A">
-                <a:alpha val="10000"/>
+                <a:alpha val="8000"/>
               </a:srgbClr>
             </a:outerShdw>
           </a:effectLst>
@@ -6030,8 +5157,8 @@
         </p:nvSpPr>
         <p:spPr>
           <a:xfrm>
-            <a:off x="6400800" y="5440680"/>
-            <a:ext cx="5120640" cy="731520"/>
+            <a:off x="6400800" y="5257800"/>
+            <a:ext cx="5074920" cy="822960"/>
           </a:xfrm>
           <a:prstGeom prst="rect">
             <a:avLst/>
@@ -6049,13 +5176,10 @@
             <a:r>
               <a:rPr lang="en-US" sz="1600" dirty="0">
                 <a:solidFill>
-                  <a:srgbClr val="4A6358"/>
-                </a:solidFill>
-                <a:latin typeface="Calibri" pitchFamily="34" charset="0"/>
-                <a:ea typeface="Calibri" pitchFamily="34" charset="-122"/>
-                <a:cs typeface="Calibri" pitchFamily="34" charset="-120"/>
-              </a:rPr>
-              <a:t>Not claimed today: live Grok without a key, cloud deploy, background tracking.</a:t>
+                  <a:schemeClr val="accent6"/>
+                </a:solidFill>
+              </a:rPr>
+              <a:t>Later  ·  live Grok without a key, cloud deploy, background tracking.</a:t>
             </a:r>
             <a:endParaRPr lang="en-US" sz="1600" dirty="0"/>
           </a:p>
@@ -6090,12 +5214,50 @@
         <p:nvSpPr>
           <p:cNvPr id="2" name="Text 0"/>
           <p:cNvSpPr txBox="1"/>
-          <p:nvPr/>
-        </p:nvSpPr>
-        <p:spPr>
-          <a:xfrm>
-            <a:off x="640080" y="320040"/>
-            <a:ext cx="10972800" cy="548640"/>
+          <p:nvPr>
+            <p:ph idx="100" type="title" hasCustomPrompt="1"/>
+          </p:nvPr>
+        </p:nvSpPr>
+        <p:spPr>
+          <a:xfrm>
+            <a:off x="548640" y="256032"/>
+            <a:ext cx="11064240" cy="658368"/>
+          </a:xfrm>
+          <a:prstGeom prst="rect">
+            <a:avLst/>
+          </a:prstGeom>
+          <a:noFill/>
+          <a:ln/>
+        </p:spPr>
+        <p:txBody>
+          <a:bodyPr wrap="square" lIns="0" tIns="0" rIns="0" bIns="0" rtlCol="0" anchor="ctr"/>
+          <a:lstStyle/>
+          <a:p>
+            <a:pPr algn="l" indent="0" marL="0">
+              <a:buNone/>
+            </a:pPr>
+            <a:r>
+              <a:rPr lang="en-US" sz="3600" b="1" dirty="0">
+                <a:solidFill>
+                  <a:schemeClr val="tx1"/>
+                </a:solidFill>
+              </a:rPr>
+              <a:t>Everyday walks. Extraordinary company.</a:t>
+            </a:r>
+            <a:endParaRPr lang="en-US" sz="3600" dirty="0"/>
+          </a:p>
+        </p:txBody>
+      </p:sp>
+      <p:sp>
+        <p:nvSpPr>
+          <p:cNvPr id="3" name="Text 1"/>
+          <p:cNvSpPr txBox="1"/>
+          <p:nvPr/>
+        </p:nvSpPr>
+        <p:spPr>
+          <a:xfrm>
+            <a:off x="548640" y="1005840"/>
+            <a:ext cx="11064240" cy="411480"/>
           </a:xfrm>
           <a:prstGeom prst="rect">
             <a:avLst/>
@@ -6111,30 +5273,27 @@
               <a:buNone/>
             </a:pPr>
             <a:r>
-              <a:rPr lang="en-US" sz="3000" b="1" dirty="0">
-                <a:solidFill>
-                  <a:srgbClr val="FFFFFF"/>
-                </a:solidFill>
-                <a:latin typeface="Calibri" pitchFamily="34" charset="0"/>
-                <a:ea typeface="Calibri" pitchFamily="34" charset="-122"/>
-                <a:cs typeface="Calibri" pitchFamily="34" charset="-120"/>
-              </a:rPr>
-              <a:t>Walk more of the world you already live in</a:t>
-            </a:r>
-            <a:endParaRPr lang="en-US" sz="3000" dirty="0"/>
-          </a:p>
-        </p:txBody>
-      </p:sp>
-      <p:sp>
-        <p:nvSpPr>
-          <p:cNvPr id="3" name="Text 1"/>
-          <p:cNvSpPr txBox="1"/>
-          <p:nvPr/>
-        </p:nvSpPr>
-        <p:spPr>
-          <a:xfrm>
-            <a:off x="640080" y="868680"/>
-            <a:ext cx="10972800" cy="347472"/>
+              <a:rPr lang="en-US" sz="1800" dirty="0">
+                <a:solidFill>
+                  <a:schemeClr val="accent5"/>
+                </a:solidFill>
+              </a:rPr>
+              <a:t>Campus, hometown blocks, the path between classes — same loop.</a:t>
+            </a:r>
+            <a:endParaRPr lang="en-US" sz="1800" dirty="0"/>
+          </a:p>
+        </p:txBody>
+      </p:sp>
+      <p:sp>
+        <p:nvSpPr>
+          <p:cNvPr id="4" name="Text 2"/>
+          <p:cNvSpPr txBox="1"/>
+          <p:nvPr/>
+        </p:nvSpPr>
+        <p:spPr>
+          <a:xfrm>
+            <a:off x="548640" y="1554480"/>
+            <a:ext cx="11064240" cy="365760"/>
           </a:xfrm>
           <a:prstGeom prst="rect">
             <a:avLst/>
@@ -6150,54 +5309,12 @@
               <a:buNone/>
             </a:pPr>
             <a:r>
-              <a:rPr lang="en-US" sz="1800" dirty="0">
-                <a:solidFill>
-                  <a:srgbClr val="6EC6FF"/>
-                </a:solidFill>
-                <a:latin typeface="Calibri" pitchFamily="34" charset="0"/>
-                <a:ea typeface="Calibri" pitchFamily="34" charset="-122"/>
-                <a:cs typeface="Calibri" pitchFamily="34" charset="-120"/>
-              </a:rPr>
-              <a:t>Campus, hometown blocks, and the path between classes — same loop.</a:t>
-            </a:r>
-            <a:endParaRPr lang="en-US" sz="1800" dirty="0"/>
-          </a:p>
-        </p:txBody>
-      </p:sp>
-      <p:sp>
-        <p:nvSpPr>
-          <p:cNvPr id="4" name="Text 2"/>
-          <p:cNvSpPr txBox="1"/>
-          <p:nvPr/>
-        </p:nvSpPr>
-        <p:spPr>
-          <a:xfrm>
-            <a:off x="640080" y="1371600"/>
-            <a:ext cx="10972800" cy="320040"/>
-          </a:xfrm>
-          <a:prstGeom prst="rect">
-            <a:avLst/>
-          </a:prstGeom>
-          <a:noFill/>
-          <a:ln/>
-        </p:spPr>
-        <p:txBody>
-          <a:bodyPr wrap="square" lIns="0" tIns="0" rIns="0" bIns="0" rtlCol="0" anchor="ctr"/>
-          <a:lstStyle/>
-          <a:p>
-            <a:pPr indent="0" marL="0">
-              <a:buNone/>
-            </a:pPr>
-            <a:r>
               <a:rPr lang="en-US" sz="1600" b="1" dirty="0">
                 <a:solidFill>
-                  <a:srgbClr val="E8A317"/>
-                </a:solidFill>
-                <a:latin typeface="Calibri" pitchFamily="34" charset="0"/>
-                <a:ea typeface="Calibri" pitchFamily="34" charset="-122"/>
-                <a:cs typeface="Calibri" pitchFamily="34" charset="-120"/>
-              </a:rPr>
-              <a:t>What’s next  ·  planned, not shipped</a:t>
+                  <a:schemeClr val="accent1"/>
+                </a:solidFill>
+              </a:rPr>
+              <a:t>Planned next — not shipped</a:t>
             </a:r>
             <a:endParaRPr lang="en-US" sz="1600" dirty="0"/>
           </a:p>
@@ -6205,24 +5322,31 @@
       </p:sp>
       <p:sp>
         <p:nvSpPr>
-          <p:cNvPr id="5" name="Shape 3"/>
+          <p:cNvPr id="5" name="next-0"/>
           <p:cNvSpPr/>
           <p:nvPr/>
         </p:nvSpPr>
         <p:spPr>
           <a:xfrm>
-            <a:off x="640080" y="1783080"/>
-            <a:ext cx="5349240" cy="1188720"/>
+            <a:off x="548640" y="2057400"/>
+            <a:ext cx="3611880" cy="2148840"/>
           </a:xfrm>
           <a:prstGeom prst="roundRect">
             <a:avLst>
-              <a:gd name="adj" fmla="val 9231"/>
+              <a:gd name="adj" fmla="val 6809"/>
             </a:avLst>
           </a:prstGeom>
           <a:solidFill>
-            <a:srgbClr val="123252"/>
+            <a:srgbClr val="FFFFFF"/>
           </a:solidFill>
           <a:ln/>
+          <a:effectLst>
+            <a:outerShdw sx="100000" sy="100000" kx="0" ky="0" algn="bl" rotWithShape="0" blurRad="101600" dist="25400" dir="5400000">
+              <a:srgbClr val="0B1F3A">
+                <a:alpha val="8000"/>
+              </a:srgbClr>
+            </a:outerShdw>
+          </a:effectLst>
         </p:spPr>
       </p:sp>
       <p:sp>
@@ -6233,8 +5357,8 @@
         </p:nvSpPr>
         <p:spPr>
           <a:xfrm>
-            <a:off x="868680" y="1929384"/>
-            <a:ext cx="4892040" cy="347472"/>
+            <a:off x="749808" y="2286000"/>
+            <a:ext cx="3200400" cy="777240"/>
           </a:xfrm>
           <a:prstGeom prst="rect">
             <a:avLst/>
@@ -6250,17 +5374,14 @@
               <a:buNone/>
             </a:pPr>
             <a:r>
-              <a:rPr lang="en-US" sz="1800" b="1" dirty="0">
-                <a:solidFill>
-                  <a:srgbClr val="E8A317"/>
-                </a:solidFill>
-                <a:latin typeface="Calibri" pitchFamily="34" charset="0"/>
-                <a:ea typeface="Calibri" pitchFamily="34" charset="-122"/>
-                <a:cs typeface="Calibri" pitchFamily="34" charset="-120"/>
+              <a:rPr lang="en-US" sz="2000" b="1" dirty="0">
+                <a:solidFill>
+                  <a:schemeClr val="tx1"/>
+                </a:solidFill>
               </a:rPr>
               <a:t>Background tracking</a:t>
             </a:r>
-            <a:endParaRPr lang="en-US" sz="1800" dirty="0"/>
+            <a:endParaRPr lang="en-US" sz="2000" dirty="0"/>
           </a:p>
         </p:txBody>
       </p:sp>
@@ -6272,8 +5393,8 @@
         </p:nvSpPr>
         <p:spPr>
           <a:xfrm>
-            <a:off x="868680" y="2313432"/>
-            <a:ext cx="4892040" cy="502920"/>
+            <a:off x="749808" y="3108960"/>
+            <a:ext cx="3200400" cy="822960"/>
           </a:xfrm>
           <a:prstGeom prst="rect">
             <a:avLst/>
@@ -6291,13 +5412,10 @@
             <a:r>
               <a:rPr lang="en-US" sz="1600" dirty="0">
                 <a:solidFill>
-                  <a:srgbClr val="FFFFFF"/>
-                </a:solidFill>
-                <a:latin typeface="Calibri" pitchFamily="34" charset="0"/>
-                <a:ea typeface="Calibri" pitchFamily="34" charset="-122"/>
-                <a:cs typeface="Calibri" pitchFamily="34" charset="-120"/>
-              </a:rPr>
-              <a:t>Keep the walk honest when the phone is in a pocket.</a:t>
+                  <a:schemeClr val="accent6"/>
+                </a:solidFill>
+              </a:rPr>
+              <a:t>Honest walks with the phone in a pocket.</a:t>
             </a:r>
             <a:endParaRPr lang="en-US" sz="1600" dirty="0"/>
           </a:p>
@@ -6305,24 +5423,31 @@
       </p:sp>
       <p:sp>
         <p:nvSpPr>
-          <p:cNvPr id="8" name="Shape 6"/>
+          <p:cNvPr id="8" name="next-1"/>
           <p:cNvSpPr/>
           <p:nvPr/>
         </p:nvSpPr>
         <p:spPr>
           <a:xfrm>
-            <a:off x="6309360" y="1783080"/>
-            <a:ext cx="5349240" cy="1188720"/>
+            <a:off x="4343400" y="2057400"/>
+            <a:ext cx="3611880" cy="2148840"/>
           </a:xfrm>
           <a:prstGeom prst="roundRect">
             <a:avLst>
-              <a:gd name="adj" fmla="val 9231"/>
+              <a:gd name="adj" fmla="val 6809"/>
             </a:avLst>
           </a:prstGeom>
           <a:solidFill>
-            <a:srgbClr val="123252"/>
+            <a:srgbClr val="FFFFFF"/>
           </a:solidFill>
           <a:ln/>
+          <a:effectLst>
+            <a:outerShdw sx="100000" sy="100000" kx="0" ky="0" algn="bl" rotWithShape="0" blurRad="101600" dist="25400" dir="5400000">
+              <a:srgbClr val="0B1F3A">
+                <a:alpha val="8000"/>
+              </a:srgbClr>
+            </a:outerShdw>
+          </a:effectLst>
         </p:spPr>
       </p:sp>
       <p:sp>
@@ -6333,8 +5458,8 @@
         </p:nvSpPr>
         <p:spPr>
           <a:xfrm>
-            <a:off x="6537960" y="1929384"/>
-            <a:ext cx="4892040" cy="347472"/>
+            <a:off x="4544568" y="2286000"/>
+            <a:ext cx="3200400" cy="777240"/>
           </a:xfrm>
           <a:prstGeom prst="rect">
             <a:avLst/>
@@ -6350,17 +5475,14 @@
               <a:buNone/>
             </a:pPr>
             <a:r>
-              <a:rPr lang="en-US" sz="1800" b="1" dirty="0">
-                <a:solidFill>
-                  <a:srgbClr val="E8A317"/>
-                </a:solidFill>
-                <a:latin typeface="Calibri" pitchFamily="34" charset="0"/>
-                <a:ea typeface="Calibri" pitchFamily="34" charset="-122"/>
-                <a:cs typeface="Calibri" pitchFamily="34" charset="-120"/>
-              </a:rPr>
-              <a:t>Accessibility</a:t>
-            </a:r>
-            <a:endParaRPr lang="en-US" sz="1800" dirty="0"/>
+              <a:rPr lang="en-US" sz="2000" b="1" dirty="0">
+                <a:solidFill>
+                  <a:schemeClr val="tx1"/>
+                </a:solidFill>
+              </a:rPr>
+              <a:t>A deploy that stays awake</a:t>
+            </a:r>
+            <a:endParaRPr lang="en-US" sz="2000" dirty="0"/>
           </a:p>
         </p:txBody>
       </p:sp>
@@ -6372,8 +5494,8 @@
         </p:nvSpPr>
         <p:spPr>
           <a:xfrm>
-            <a:off x="6537960" y="2313432"/>
-            <a:ext cx="4892040" cy="502920"/>
+            <a:off x="4544568" y="3108960"/>
+            <a:ext cx="3200400" cy="822960"/>
           </a:xfrm>
           <a:prstGeom prst="rect">
             <a:avLst/>
@@ -6391,13 +5513,10 @@
             <a:r>
               <a:rPr lang="en-US" sz="1600" dirty="0">
                 <a:solidFill>
-                  <a:srgbClr val="FFFFFF"/>
-                </a:solidFill>
-                <a:latin typeface="Calibri" pitchFamily="34" charset="0"/>
-                <a:ea typeface="Calibri" pitchFamily="34" charset="-122"/>
-                <a:cs typeface="Calibri" pitchFamily="34" charset="-120"/>
-              </a:rPr>
-              <a:t>Clearer motion, voice, and contrast for more walkers.</a:t>
+                  <a:schemeClr val="accent6"/>
+                </a:solidFill>
+              </a:rPr>
+              <a:t>Grok and turf up for a whole event.</a:t>
             </a:r>
             <a:endParaRPr lang="en-US" sz="1600" dirty="0"/>
           </a:p>
@@ -6405,24 +5524,31 @@
       </p:sp>
       <p:sp>
         <p:nvSpPr>
-          <p:cNvPr id="11" name="Shape 9"/>
+          <p:cNvPr id="11" name="next-2"/>
           <p:cNvSpPr/>
           <p:nvPr/>
         </p:nvSpPr>
         <p:spPr>
           <a:xfrm>
-            <a:off x="640080" y="3108960"/>
-            <a:ext cx="5349240" cy="1188720"/>
+            <a:off x="8138160" y="2057400"/>
+            <a:ext cx="3611880" cy="2148840"/>
           </a:xfrm>
           <a:prstGeom prst="roundRect">
             <a:avLst>
-              <a:gd name="adj" fmla="val 9231"/>
+              <a:gd name="adj" fmla="val 6809"/>
             </a:avLst>
           </a:prstGeom>
           <a:solidFill>
-            <a:srgbClr val="123252"/>
+            <a:srgbClr val="FFFFFF"/>
           </a:solidFill>
           <a:ln/>
+          <a:effectLst>
+            <a:outerShdw sx="100000" sy="100000" kx="0" ky="0" algn="bl" rotWithShape="0" blurRad="101600" dist="25400" dir="5400000">
+              <a:srgbClr val="0B1F3A">
+                <a:alpha val="8000"/>
+              </a:srgbClr>
+            </a:outerShdw>
+          </a:effectLst>
         </p:spPr>
       </p:sp>
       <p:sp>
@@ -6433,8 +5559,8 @@
         </p:nvSpPr>
         <p:spPr>
           <a:xfrm>
-            <a:off x="868680" y="3255264"/>
-            <a:ext cx="4892040" cy="347472"/>
+            <a:off x="8339328" y="2286000"/>
+            <a:ext cx="3200400" cy="777240"/>
           </a:xfrm>
           <a:prstGeom prst="rect">
             <a:avLst/>
@@ -6450,17 +5576,14 @@
               <a:buNone/>
             </a:pPr>
             <a:r>
-              <a:rPr lang="en-US" sz="1800" b="1" dirty="0">
-                <a:solidFill>
-                  <a:srgbClr val="E8A317"/>
-                </a:solidFill>
-                <a:latin typeface="Calibri" pitchFamily="34" charset="0"/>
-                <a:ea typeface="Calibri" pitchFamily="34" charset="-122"/>
-                <a:cs typeface="Calibri" pitchFamily="34" charset="-120"/>
-              </a:rPr>
-              <a:t>Reliable deploy</a:t>
-            </a:r>
-            <a:endParaRPr lang="en-US" sz="1800" dirty="0"/>
+              <a:rPr lang="en-US" sz="2000" b="1" dirty="0">
+                <a:solidFill>
+                  <a:schemeClr val="tx1"/>
+                </a:solidFill>
+              </a:rPr>
+              <a:t>Richer social exploration</a:t>
+            </a:r>
+            <a:endParaRPr lang="en-US" sz="2000" dirty="0"/>
           </a:p>
         </p:txBody>
       </p:sp>
@@ -6472,8 +5595,8 @@
         </p:nvSpPr>
         <p:spPr>
           <a:xfrm>
-            <a:off x="868680" y="3639312"/>
-            <a:ext cx="4892040" cy="502920"/>
+            <a:off x="8339328" y="3108960"/>
+            <a:ext cx="3200400" cy="822960"/>
           </a:xfrm>
           <a:prstGeom prst="rect">
             <a:avLst/>
@@ -6491,50 +5614,49 @@
             <a:r>
               <a:rPr lang="en-US" sz="1600" dirty="0">
                 <a:solidFill>
-                  <a:srgbClr val="FFFFFF"/>
-                </a:solidFill>
-                <a:latin typeface="Calibri" pitchFamily="34" charset="0"/>
-                <a:ea typeface="Calibri" pitchFamily="34" charset="-122"/>
-                <a:cs typeface="Calibri" pitchFamily="34" charset="-120"/>
-              </a:rPr>
-              <a:t>Wake the API so Grok and turf stay up for a whole event.</a:t>
+                  <a:schemeClr val="accent6"/>
+                </a:solidFill>
+              </a:rPr>
+              <a:t>Shared landmarks without a grind.</a:t>
             </a:r>
             <a:endParaRPr lang="en-US" sz="1600" dirty="0"/>
           </a:p>
         </p:txBody>
       </p:sp>
-      <p:sp>
-        <p:nvSpPr>
-          <p:cNvPr id="14" name="Shape 12"/>
-          <p:cNvSpPr/>
-          <p:nvPr/>
-        </p:nvSpPr>
-        <p:spPr>
-          <a:xfrm>
-            <a:off x="6309360" y="3108960"/>
-            <a:ext cx="5349240" cy="1188720"/>
-          </a:xfrm>
-          <a:prstGeom prst="roundRect">
-            <a:avLst>
-              <a:gd name="adj" fmla="val 9231"/>
-            </a:avLst>
-          </a:prstGeom>
-          <a:solidFill>
-            <a:srgbClr val="123252"/>
-          </a:solidFill>
-          <a:ln/>
-        </p:spPr>
-      </p:sp>
-      <p:sp>
-        <p:nvSpPr>
-          <p:cNvPr id="15" name="Text 13"/>
-          <p:cNvSpPr txBox="1"/>
-          <p:nvPr/>
-        </p:nvSpPr>
-        <p:spPr>
-          <a:xfrm>
-            <a:off x="6537960" y="3255264"/>
-            <a:ext cx="4892040" cy="347472"/>
+      <p:pic>
+        <p:nvPicPr>
+          <p:cNvPr id="14" name="close-mascot" descr="G:\broswer download\big-red-hacks2026\mobile\assets\splash-icon.png">    </p:cNvPr>
+          <p:cNvPicPr>
+            <a:picLocks noChangeAspect="1"/>
+          </p:cNvPicPr>
+          <p:nvPr/>
+        </p:nvPicPr>
+        <p:blipFill>
+          <a:blip r:embed="rId1"/>
+          <a:stretch>
+            <a:fillRect/>
+          </a:stretch>
+        </p:blipFill>
+        <p:spPr>
+          <a:xfrm>
+            <a:off x="640080" y="4480560"/>
+            <a:ext cx="1234440" cy="1234440"/>
+          </a:xfrm>
+          <a:prstGeom prst="rect">
+            <a:avLst/>
+          </a:prstGeom>
+        </p:spPr>
+      </p:pic>
+      <p:sp>
+        <p:nvSpPr>
+          <p:cNvPr id="15" name="Text 12"/>
+          <p:cNvSpPr txBox="1"/>
+          <p:nvPr/>
+        </p:nvSpPr>
+        <p:spPr>
+          <a:xfrm>
+            <a:off x="2011680" y="4709160"/>
+            <a:ext cx="9509760" cy="502920"/>
           </a:xfrm>
           <a:prstGeom prst="rect">
             <a:avLst/>
@@ -6550,30 +5672,27 @@
               <a:buNone/>
             </a:pPr>
             <a:r>
-              <a:rPr lang="en-US" sz="1800" b="1" dirty="0">
-                <a:solidFill>
-                  <a:srgbClr val="E8A317"/>
-                </a:solidFill>
-                <a:latin typeface="Calibri" pitchFamily="34" charset="0"/>
-                <a:ea typeface="Calibri" pitchFamily="34" charset="-122"/>
-                <a:cs typeface="Calibri" pitchFamily="34" charset="-120"/>
-              </a:rPr>
-              <a:t>Social exploration</a:t>
-            </a:r>
-            <a:endParaRPr lang="en-US" sz="1800" dirty="0"/>
-          </a:p>
-        </p:txBody>
-      </p:sp>
-      <p:sp>
-        <p:nvSpPr>
-          <p:cNvPr id="16" name="Text 14"/>
-          <p:cNvSpPr txBox="1"/>
-          <p:nvPr/>
-        </p:nvSpPr>
-        <p:spPr>
-          <a:xfrm>
-            <a:off x="6537960" y="3639312"/>
-            <a:ext cx="4892040" cy="502920"/>
+              <a:rPr lang="en-US" sz="2400" b="1" dirty="0">
+                <a:solidFill>
+                  <a:schemeClr val="tx1"/>
+                </a:solidFill>
+              </a:rPr>
+              <a:t>Try it on the phone. Ask us anything.</a:t>
+            </a:r>
+            <a:endParaRPr lang="en-US" sz="2400" dirty="0"/>
+          </a:p>
+        </p:txBody>
+      </p:sp>
+      <p:sp>
+        <p:nvSpPr>
+          <p:cNvPr id="16" name="Text 13"/>
+          <p:cNvSpPr txBox="1"/>
+          <p:nvPr/>
+        </p:nvSpPr>
+        <p:spPr>
+          <a:xfrm>
+            <a:off x="2011680" y="5257800"/>
+            <a:ext cx="9509760" cy="365760"/>
           </a:xfrm>
           <a:prstGeom prst="rect">
             <a:avLst/>
@@ -6591,132 +5710,12 @@
             <a:r>
               <a:rPr lang="en-US" sz="1600" dirty="0">
                 <a:solidFill>
-                  <a:srgbClr val="FFFFFF"/>
-                </a:solidFill>
-                <a:latin typeface="Calibri" pitchFamily="34" charset="0"/>
-                <a:ea typeface="Calibri" pitchFamily="34" charset="-122"/>
-                <a:cs typeface="Calibri" pitchFamily="34" charset="-120"/>
-              </a:rPr>
-              <a:t>Richer shared landmarks without turning it into a grind.</a:t>
+                  <a:schemeClr val="accent6"/>
+                </a:solidFill>
+              </a:rPr>
+              <a:t>Luis Mendez  ·  Abdullah Rashid</a:t>
             </a:r>
             <a:endParaRPr lang="en-US" sz="1600" dirty="0"/>
-          </a:p>
-        </p:txBody>
-      </p:sp>
-      <p:sp>
-        <p:nvSpPr>
-          <p:cNvPr id="17" name="Text 15"/>
-          <p:cNvSpPr txBox="1"/>
-          <p:nvPr/>
-        </p:nvSpPr>
-        <p:spPr>
-          <a:xfrm>
-            <a:off x="640080" y="4617720"/>
-            <a:ext cx="10972800" cy="457200"/>
-          </a:xfrm>
-          <a:prstGeom prst="rect">
-            <a:avLst/>
-          </a:prstGeom>
-          <a:noFill/>
-          <a:ln/>
-        </p:spPr>
-        <p:txBody>
-          <a:bodyPr wrap="square" lIns="0" tIns="0" rIns="0" bIns="0" rtlCol="0" anchor="ctr"/>
-          <a:lstStyle/>
-          <a:p>
-            <a:pPr indent="0" marL="0">
-              <a:buNone/>
-            </a:pPr>
-            <a:r>
-              <a:rPr lang="en-US" sz="2400" i="1" dirty="0">
-                <a:solidFill>
-                  <a:srgbClr val="6EC6FF"/>
-                </a:solidFill>
-                <a:latin typeface="Calibri" pitchFamily="34" charset="0"/>
-                <a:ea typeface="Calibri" pitchFamily="34" charset="-122"/>
-                <a:cs typeface="Calibri" pitchFamily="34" charset="-120"/>
-              </a:rPr>
-              <a:t>Everyday walks. Extraordinary company.</a:t>
-            </a:r>
-            <a:endParaRPr lang="en-US" sz="2400" dirty="0"/>
-          </a:p>
-        </p:txBody>
-      </p:sp>
-      <p:sp>
-        <p:nvSpPr>
-          <p:cNvPr id="18" name="Text 16"/>
-          <p:cNvSpPr txBox="1"/>
-          <p:nvPr/>
-        </p:nvSpPr>
-        <p:spPr>
-          <a:xfrm>
-            <a:off x="640080" y="5120640"/>
-            <a:ext cx="10972800" cy="384048"/>
-          </a:xfrm>
-          <a:prstGeom prst="rect">
-            <a:avLst/>
-          </a:prstGeom>
-          <a:noFill/>
-          <a:ln/>
-        </p:spPr>
-        <p:txBody>
-          <a:bodyPr wrap="square" lIns="0" tIns="0" rIns="0" bIns="0" rtlCol="0" anchor="ctr"/>
-          <a:lstStyle/>
-          <a:p>
-            <a:pPr indent="0" marL="0">
-              <a:buNone/>
-            </a:pPr>
-            <a:r>
-              <a:rPr lang="en-US" sz="2000" dirty="0">
-                <a:solidFill>
-                  <a:srgbClr val="FFFFFF"/>
-                </a:solidFill>
-                <a:latin typeface="Calibri" pitchFamily="34" charset="0"/>
-                <a:ea typeface="Calibri" pitchFamily="34" charset="-122"/>
-                <a:cs typeface="Calibri" pitchFamily="34" charset="-120"/>
-              </a:rPr>
-              <a:t>Try it on the phone. Ask us anything.</a:t>
-            </a:r>
-            <a:endParaRPr lang="en-US" sz="2000" dirty="0"/>
-          </a:p>
-        </p:txBody>
-      </p:sp>
-      <p:sp>
-        <p:nvSpPr>
-          <p:cNvPr id="19" name="Text 17"/>
-          <p:cNvSpPr txBox="1"/>
-          <p:nvPr/>
-        </p:nvSpPr>
-        <p:spPr>
-          <a:xfrm>
-            <a:off x="640080" y="6172200"/>
-            <a:ext cx="10972800" cy="274320"/>
-          </a:xfrm>
-          <a:prstGeom prst="rect">
-            <a:avLst/>
-          </a:prstGeom>
-          <a:noFill/>
-          <a:ln/>
-        </p:spPr>
-        <p:txBody>
-          <a:bodyPr wrap="square" lIns="0" tIns="0" rIns="0" bIns="0" rtlCol="0" anchor="ctr"/>
-          <a:lstStyle/>
-          <a:p>
-            <a:pPr indent="0" marL="0">
-              <a:buNone/>
-            </a:pPr>
-            <a:r>
-              <a:rPr lang="en-US" sz="1400" dirty="0">
-                <a:solidFill>
-                  <a:srgbClr val="9BB0C4"/>
-                </a:solidFill>
-                <a:latin typeface="Calibri" pitchFamily="34" charset="0"/>
-                <a:ea typeface="Calibri" pitchFamily="34" charset="-122"/>
-                <a:cs typeface="Calibri" pitchFamily="34" charset="-120"/>
-              </a:rPr>
-              <a:t>Luis Mendez  ·  Abdullah Rashid  ·  HuskiesPaws</a:t>
-            </a:r>
-            <a:endParaRPr lang="en-US" sz="1400" dirty="0"/>
           </a:p>
         </p:txBody>
       </p:sp>
@@ -6733,16 +5732,16 @@
   <a:themeElements>
     <a:clrScheme name="HuskiesPaws">
       <a:dk1>
-        <a:srgbClr val="0B1F3A"/>
+        <a:srgbClr val="163528"/>
       </a:dk1>
       <a:lt1>
         <a:srgbClr val="F6F1E4"/>
       </a:lt1>
       <a:dk2>
-        <a:srgbClr val="163528"/>
+        <a:srgbClr val="0B1F3A"/>
       </a:dk2>
       <a:lt2>
-        <a:srgbClr val="E7F3E4"/>
+        <a:srgbClr val="E6F4EA"/>
       </a:lt2>
       <a:accent1>
         <a:srgbClr val="2E9D4F"/>
@@ -6757,10 +5756,10 @@
         <a:srgbClr val="FF7A59"/>
       </a:accent4>
       <a:accent5>
-        <a:srgbClr val="1F6B45"/>
+        <a:srgbClr val="237A3D"/>
       </a:accent5>
       <a:accent6>
-        <a:srgbClr val="7D8CA3"/>
+        <a:srgbClr val="5B6B82"/>
       </a:accent6>
       <a:hlink>
         <a:srgbClr val="6EC6FF"/>

--- a/docs/presentation/HuskiesPaws-BigRedHacks-2026.pptx
+++ b/docs/presentation/HuskiesPaws-BigRedHacks-2026.pptx
@@ -113,25 +113,25 @@
   <p:extLst>
     <p:ext uri="{521415D9-36F7-43E2-AB2F-B90AF26B5E84}">
       <p14:sectionLst xmlns:p14="http://schemas.microsoft.com/office/powerpoint/2010/main">
-        <p14:section name="Pitch" id="{90a19555-80b2-8a80-d8b2-ec307d1d6db0}">
+        <p14:section name="Pitch" id="{75c60f64-f831-6c14-78a7-61d93ef339ec}">
           <p14:sldIdLst>
             <p14:sldId id="256"/>
             <p14:sldId id="257"/>
             <p14:sldId id="258"/>
           </p14:sldIdLst>
         </p14:section>
-        <p14:section name="Demo" id="{ca88bde7-691e-7ec5-bce8-05ee2ad6c12a}">
+        <p14:section name="Demo" id="{e85ba79f-efed-ae6f-698c-c17e38775cb1}">
           <p14:sldIdLst>
             <p14:sldId id="259"/>
           </p14:sldIdLst>
         </p14:section>
-        <p14:section name="Build" id="{ccca3474-e5e5-b56f-91fa-36c25b8a35f8}">
+        <p14:section name="Build" id="{a9fd02b3-0671-ec03-9fc5-fd48b3121434}">
           <p14:sldIdLst>
             <p14:sldId id="260"/>
             <p14:sldId id="261"/>
           </p14:sldIdLst>
         </p14:section>
-        <p14:section name="Close" id="{42d45996-dd05-7059-408c-92bcd9a0dc71}">
+        <p14:section name="Close" id="{781d7c0b-19e4-d151-c0d1-62d4b7a8e03b}">
           <p14:sldIdLst>
             <p14:sldId id="262"/>
           </p14:sldIdLst>
@@ -716,7 +716,7 @@
           <a:p>
             <a:r>
               <a:rPr lang="en-US" dirty="0"/>
-              <a:t>About 30 seconds. Loop: Explore, Walk, Discover, Collect. Pip scouts with Wikipedia and OpenStreetMap. Fern starts the walk. Moss tells the story from those facts. Capture and eggs reward the walk. Then go to the live phone.</a:t>
+              <a:t>About 30 seconds. Loop: Explore, Walk, Discover, Collect. Pip scouts with Wikipedia and OpenStreetMap. Fern starts the walk. Moss tells the story from those facts. Capture and eggs reward the walk. Point at the screenshot: a real landmark, a squad pet, and Walk there. Then go to the live phone.</a:t>
             </a:r>
             <a:endParaRPr lang="en-US" dirty="0"/>
           </a:p>
@@ -980,7 +980,7 @@
           <a:p>
             <a:r>
               <a:rPr lang="en-US" dirty="0"/>
-              <a:t>About 25 seconds. Three things they saw: navigation is play; walking earns creatures; the squad can live in iMessage. ISS rare-hatch boost is in shared logic. Be honest about Grok keys, deploy, and background GPS.</a:t>
+              <a:t>About 25 seconds. Three things they saw: navigation is play; walking earns creatures; you can hold a real landmark. ISS rare-hatch boost is in shared logic. Be honest about Grok keys, deploy, and background GPS. The squad can also live in iMessage.</a:t>
             </a:r>
             <a:endParaRPr lang="en-US" dirty="0"/>
           </a:p>
@@ -1174,8 +1174,8 @@
         </p:nvSpPr>
         <p:spPr>
           <a:xfrm>
-            <a:off x="548640" y="256032"/>
-            <a:ext cx="11064240" cy="658368"/>
+            <a:off x="457200" y="201168"/>
+            <a:ext cx="11247120" cy="566928"/>
           </a:xfrm>
           <a:prstGeom prst="rect">
             <a:avLst/>
@@ -1188,7 +1188,7 @@
           <a:lstStyle>
             <a:lvl1pPr algn="l" indent="0" marL="0">
               <a:buNone/>
-              <a:defRPr lang="en-US" sz="3600" b="1" dirty="0">
+              <a:defRPr lang="en-US" sz="3000" b="1" dirty="0">
                 <a:solidFill>
                   <a:schemeClr val="tx1"/>
                 </a:solidFill>
@@ -1199,7 +1199,7 @@
             <a:pPr algn="l" indent="0" marL="0">
               <a:buNone/>
             </a:pPr>
-            <a:endParaRPr lang="en-US" sz="3600" dirty="0"/>
+            <a:endParaRPr lang="en-US" sz="3000" dirty="0"/>
           </a:p>
         </p:txBody>
       </p:sp>
@@ -1211,8 +1211,8 @@
         </p:nvSpPr>
         <p:spPr>
           <a:xfrm>
-            <a:off x="548640" y="6547104"/>
-            <a:ext cx="11064240" cy="182880"/>
+            <a:off x="457200" y="6547104"/>
+            <a:ext cx="11247120" cy="182880"/>
           </a:xfrm>
           <a:prstGeom prst="rect">
             <a:avLst/>
@@ -1552,8 +1552,8 @@
         </p:nvSpPr>
         <p:spPr>
           <a:xfrm>
-            <a:off x="548640" y="256032"/>
-            <a:ext cx="11064240" cy="658368"/>
+            <a:off x="457200" y="201168"/>
+            <a:ext cx="11247120" cy="566928"/>
           </a:xfrm>
           <a:prstGeom prst="rect">
             <a:avLst/>
@@ -1569,14 +1569,14 @@
               <a:buNone/>
             </a:pPr>
             <a:r>
-              <a:rPr lang="en-US" sz="3600" b="1" dirty="0">
+              <a:rPr lang="en-US" sz="3000" b="1" dirty="0">
                 <a:solidFill>
                   <a:schemeClr val="tx1"/>
                 </a:solidFill>
               </a:rPr>
               <a:t>HuskiesPaws</a:t>
             </a:r>
-            <a:endParaRPr lang="en-US" sz="3600" dirty="0"/>
+            <a:endParaRPr lang="en-US" sz="3000" dirty="0"/>
           </a:p>
         </p:txBody>
       </p:sp>
@@ -1596,8 +1596,8 @@
         </p:blipFill>
         <p:spPr>
           <a:xfrm>
-            <a:off x="640080" y="1097280"/>
-            <a:ext cx="2011680" cy="2011680"/>
+            <a:off x="502920" y="1051560"/>
+            <a:ext cx="1920240" cy="1920240"/>
           </a:xfrm>
           <a:prstGeom prst="rect">
             <a:avLst/>
@@ -1606,14 +1606,14 @@
       </p:pic>
       <p:sp>
         <p:nvSpPr>
-          <p:cNvPr id="4" name="tagline"/>
-          <p:cNvSpPr txBox="1"/>
-          <p:nvPr/>
-        </p:nvSpPr>
-        <p:spPr>
-          <a:xfrm>
-            <a:off x="2880360" y="1143000"/>
-            <a:ext cx="8595360" cy="777240"/>
+          <p:cNvPr id="4" name="Text 1"/>
+          <p:cNvSpPr txBox="1"/>
+          <p:nvPr/>
+        </p:nvSpPr>
+        <p:spPr>
+          <a:xfrm>
+            <a:off x="2651760" y="1097280"/>
+            <a:ext cx="8961120" cy="731520"/>
           </a:xfrm>
           <a:prstGeom prst="rect">
             <a:avLst/>
@@ -1629,27 +1629,27 @@
               <a:buNone/>
             </a:pPr>
             <a:r>
-              <a:rPr lang="en-US" sz="2400" i="1" dirty="0">
+              <a:rPr lang="en-US" sz="2200" i="1" dirty="0">
                 <a:solidFill>
                   <a:schemeClr val="accent5"/>
                 </a:solidFill>
               </a:rPr>
               <a:t>Turn everyday walks into a creature-collecting adventure.</a:t>
             </a:r>
-            <a:endParaRPr lang="en-US" sz="2400" dirty="0"/>
-          </a:p>
-        </p:txBody>
-      </p:sp>
-      <p:sp>
-        <p:nvSpPr>
-          <p:cNvPr id="5" name="event"/>
-          <p:cNvSpPr txBox="1"/>
-          <p:nvPr/>
-        </p:nvSpPr>
-        <p:spPr>
-          <a:xfrm>
-            <a:off x="2880360" y="1965960"/>
-            <a:ext cx="8595360" cy="365760"/>
+            <a:endParaRPr lang="en-US" sz="2200" dirty="0"/>
+          </a:p>
+        </p:txBody>
+      </p:sp>
+      <p:sp>
+        <p:nvSpPr>
+          <p:cNvPr id="5" name="Text 2"/>
+          <p:cNvSpPr txBox="1"/>
+          <p:nvPr/>
+        </p:nvSpPr>
+        <p:spPr>
+          <a:xfrm>
+            <a:off x="2651760" y="1874520"/>
+            <a:ext cx="8961120" cy="365760"/>
           </a:xfrm>
           <a:prstGeom prst="rect">
             <a:avLst/>
@@ -1665,27 +1665,27 @@
               <a:buNone/>
             </a:pPr>
             <a:r>
-              <a:rPr lang="en-US" sz="1800" dirty="0">
+              <a:rPr lang="en-US" sz="1600" dirty="0">
                 <a:solidFill>
                   <a:schemeClr val="accent6"/>
                 </a:solidFill>
               </a:rPr>
               <a:t>BigRed//Hacks 2026  ·  Navigation  ·  the phone app</a:t>
             </a:r>
-            <a:endParaRPr lang="en-US" sz="1800" dirty="0"/>
-          </a:p>
-        </p:txBody>
-      </p:sp>
-      <p:sp>
-        <p:nvSpPr>
-          <p:cNvPr id="6" name="chip-Luis Mendez"/>
+            <a:endParaRPr lang="en-US" sz="1600" dirty="0"/>
+          </a:p>
+        </p:txBody>
+      </p:sp>
+      <p:sp>
+        <p:nvSpPr>
+          <p:cNvPr id="6" name="chip-0"/>
           <p:cNvSpPr/>
           <p:nvPr/>
         </p:nvSpPr>
         <p:spPr>
           <a:xfrm>
-            <a:off x="640080" y="3246120"/>
-            <a:ext cx="3611880" cy="1097280"/>
+            <a:off x="502920" y="3246120"/>
+            <a:ext cx="3657600" cy="960120"/>
           </a:xfrm>
           <a:prstGeom prst="roundRect">
             <a:avLst>
@@ -1699,7 +1699,7 @@
           <a:effectLst>
             <a:outerShdw sx="100000" sy="100000" kx="0" ky="0" algn="bl" rotWithShape="0" blurRad="101600" dist="25400" dir="5400000">
               <a:srgbClr val="0B1F3A">
-                <a:alpha val="8000"/>
+                <a:alpha val="10000"/>
               </a:srgbClr>
             </a:outerShdw>
           </a:effectLst>
@@ -1713,8 +1713,8 @@
         </p:nvSpPr>
         <p:spPr>
           <a:xfrm>
-            <a:off x="822960" y="3429000"/>
-            <a:ext cx="3246120" cy="731520"/>
+            <a:off x="640080" y="3383280"/>
+            <a:ext cx="3383280" cy="685800"/>
           </a:xfrm>
           <a:prstGeom prst="rect">
             <a:avLst/>
@@ -1730,27 +1730,27 @@
               <a:buNone/>
             </a:pPr>
             <a:r>
-              <a:rPr lang="en-US" sz="2000" b="1" dirty="0">
+              <a:rPr lang="en-US" sz="1800" b="1" dirty="0">
                 <a:solidFill>
                   <a:schemeClr val="tx1"/>
                 </a:solidFill>
               </a:rPr>
               <a:t>Luis Mendez</a:t>
             </a:r>
-            <a:endParaRPr lang="en-US" sz="2000" dirty="0"/>
-          </a:p>
-        </p:txBody>
-      </p:sp>
-      <p:sp>
-        <p:nvSpPr>
-          <p:cNvPr id="8" name="chip-Abdullah Rashid"/>
+            <a:endParaRPr lang="en-US" sz="1800" dirty="0"/>
+          </a:p>
+        </p:txBody>
+      </p:sp>
+      <p:sp>
+        <p:nvSpPr>
+          <p:cNvPr id="8" name="chip-1"/>
           <p:cNvSpPr/>
           <p:nvPr/>
         </p:nvSpPr>
         <p:spPr>
           <a:xfrm>
-            <a:off x="4480560" y="3246120"/>
-            <a:ext cx="3611880" cy="1097280"/>
+            <a:off x="4343400" y="3246120"/>
+            <a:ext cx="3657600" cy="960120"/>
           </a:xfrm>
           <a:prstGeom prst="roundRect">
             <a:avLst>
@@ -1764,7 +1764,7 @@
           <a:effectLst>
             <a:outerShdw sx="100000" sy="100000" kx="0" ky="0" algn="bl" rotWithShape="0" blurRad="101600" dist="25400" dir="5400000">
               <a:srgbClr val="0B1F3A">
-                <a:alpha val="8000"/>
+                <a:alpha val="10000"/>
               </a:srgbClr>
             </a:outerShdw>
           </a:effectLst>
@@ -1778,8 +1778,8 @@
         </p:nvSpPr>
         <p:spPr>
           <a:xfrm>
-            <a:off x="4663440" y="3429000"/>
-            <a:ext cx="3246120" cy="731520"/>
+            <a:off x="4480560" y="3383280"/>
+            <a:ext cx="3383280" cy="685800"/>
           </a:xfrm>
           <a:prstGeom prst="rect">
             <a:avLst/>
@@ -1795,27 +1795,27 @@
               <a:buNone/>
             </a:pPr>
             <a:r>
-              <a:rPr lang="en-US" sz="2000" b="1" dirty="0">
+              <a:rPr lang="en-US" sz="1800" b="1" dirty="0">
                 <a:solidFill>
                   <a:schemeClr val="tx1"/>
                 </a:solidFill>
               </a:rPr>
               <a:t>Abdullah Rashid</a:t>
             </a:r>
-            <a:endParaRPr lang="en-US" sz="2000" dirty="0"/>
-          </a:p>
-        </p:txBody>
-      </p:sp>
-      <p:sp>
-        <p:nvSpPr>
-          <p:cNvPr id="10" name="chip-Built with Cursor"/>
+            <a:endParaRPr lang="en-US" sz="1800" dirty="0"/>
+          </a:p>
+        </p:txBody>
+      </p:sp>
+      <p:sp>
+        <p:nvSpPr>
+          <p:cNvPr id="10" name="chip-2"/>
           <p:cNvSpPr/>
           <p:nvPr/>
         </p:nvSpPr>
         <p:spPr>
           <a:xfrm>
-            <a:off x="8321040" y="3246120"/>
-            <a:ext cx="3611880" cy="1097280"/>
+            <a:off x="8183880" y="3246120"/>
+            <a:ext cx="3657600" cy="960120"/>
           </a:xfrm>
           <a:prstGeom prst="roundRect">
             <a:avLst>
@@ -1829,7 +1829,7 @@
           <a:effectLst>
             <a:outerShdw sx="100000" sy="100000" kx="0" ky="0" algn="bl" rotWithShape="0" blurRad="101600" dist="25400" dir="5400000">
               <a:srgbClr val="0B1F3A">
-                <a:alpha val="8000"/>
+                <a:alpha val="10000"/>
               </a:srgbClr>
             </a:outerShdw>
           </a:effectLst>
@@ -1843,8 +1843,8 @@
         </p:nvSpPr>
         <p:spPr>
           <a:xfrm>
-            <a:off x="8503920" y="3429000"/>
-            <a:ext cx="3246120" cy="731520"/>
+            <a:off x="8321040" y="3383280"/>
+            <a:ext cx="3383280" cy="685800"/>
           </a:xfrm>
           <a:prstGeom prst="rect">
             <a:avLst/>
@@ -1860,14 +1860,14 @@
               <a:buNone/>
             </a:pPr>
             <a:r>
-              <a:rPr lang="en-US" sz="2000" b="1" dirty="0">
+              <a:rPr lang="en-US" sz="1800" b="1" dirty="0">
                 <a:solidFill>
                   <a:schemeClr val="tx1"/>
                 </a:solidFill>
               </a:rPr>
               <a:t>Built with Cursor</a:t>
             </a:r>
-            <a:endParaRPr lang="en-US" sz="2000" dirty="0"/>
+            <a:endParaRPr lang="en-US" sz="1800" dirty="0"/>
           </a:p>
         </p:txBody>
       </p:sp>
@@ -1887,8 +1887,8 @@
         </p:blipFill>
         <p:spPr>
           <a:xfrm>
-            <a:off x="3794760" y="4617720"/>
-            <a:ext cx="1325880" cy="1325880"/>
+            <a:off x="3840480" y="4480560"/>
+            <a:ext cx="1234440" cy="1234440"/>
           </a:xfrm>
           <a:prstGeom prst="rect">
             <a:avLst/>
@@ -1911,8 +1911,8 @@
         </p:blipFill>
         <p:spPr>
           <a:xfrm>
-            <a:off x="5440680" y="4617720"/>
-            <a:ext cx="1325880" cy="1325880"/>
+            <a:off x="5486400" y="4480560"/>
+            <a:ext cx="1234440" cy="1234440"/>
           </a:xfrm>
           <a:prstGeom prst="rect">
             <a:avLst/>
@@ -1935,8 +1935,8 @@
         </p:blipFill>
         <p:spPr>
           <a:xfrm>
-            <a:off x="7086600" y="4617720"/>
-            <a:ext cx="1325880" cy="1325880"/>
+            <a:off x="7132320" y="4480560"/>
+            <a:ext cx="1234440" cy="1234440"/>
           </a:xfrm>
           <a:prstGeom prst="rect">
             <a:avLst/>
@@ -1978,8 +1978,8 @@
         </p:nvSpPr>
         <p:spPr>
           <a:xfrm>
-            <a:off x="548640" y="256032"/>
-            <a:ext cx="11064240" cy="658368"/>
+            <a:off x="457200" y="201168"/>
+            <a:ext cx="11247120" cy="566928"/>
           </a:xfrm>
           <a:prstGeom prst="rect">
             <a:avLst/>
@@ -1995,31 +1995,31 @@
               <a:buNone/>
             </a:pPr>
             <a:r>
-              <a:rPr lang="en-US" sz="3600" b="1" dirty="0">
+              <a:rPr lang="en-US" sz="3000" b="1" dirty="0">
                 <a:solidFill>
                   <a:schemeClr val="tx1"/>
                 </a:solidFill>
               </a:rPr>
               <a:t>Maps get you there. They do not make you look.</a:t>
             </a:r>
-            <a:endParaRPr lang="en-US" sz="3600" dirty="0"/>
-          </a:p>
-        </p:txBody>
-      </p:sp>
-      <p:sp>
-        <p:nvSpPr>
-          <p:cNvPr id="3" name="problem-0"/>
+            <a:endParaRPr lang="en-US" sz="3000" dirty="0"/>
+          </a:p>
+        </p:txBody>
+      </p:sp>
+      <p:sp>
+        <p:nvSpPr>
+          <p:cNvPr id="3" name="p-0"/>
           <p:cNvSpPr/>
           <p:nvPr/>
         </p:nvSpPr>
         <p:spPr>
           <a:xfrm>
-            <a:off x="548640" y="1143000"/>
-            <a:ext cx="3611880" cy="3246120"/>
+            <a:off x="502920" y="1051560"/>
+            <a:ext cx="3657600" cy="3383280"/>
           </a:xfrm>
           <a:prstGeom prst="roundRect">
             <a:avLst>
-              <a:gd name="adj" fmla="val 4507"/>
+              <a:gd name="adj" fmla="val 3784"/>
             </a:avLst>
           </a:prstGeom>
           <a:solidFill>
@@ -2029,7 +2029,7 @@
           <a:effectLst>
             <a:outerShdw sx="100000" sy="100000" kx="0" ky="0" algn="bl" rotWithShape="0" blurRad="101600" dist="25400" dir="5400000">
               <a:srgbClr val="0B1F3A">
-                <a:alpha val="8000"/>
+                <a:alpha val="10000"/>
               </a:srgbClr>
             </a:outerShdw>
           </a:effectLst>
@@ -2037,14 +2037,14 @@
       </p:sp>
       <p:sp>
         <p:nvSpPr>
-          <p:cNvPr id="4" name="dot-0"/>
+          <p:cNvPr id="4" name="n-0"/>
           <p:cNvSpPr/>
           <p:nvPr/>
         </p:nvSpPr>
         <p:spPr>
           <a:xfrm>
-            <a:off x="1920240" y="1371600"/>
-            <a:ext cx="822960" cy="822960"/>
+            <a:off x="1920240" y="1325880"/>
+            <a:ext cx="777240" cy="777240"/>
           </a:xfrm>
           <a:prstGeom prst="ellipse">
             <a:avLst/>
@@ -2063,8 +2063,8 @@
         </p:nvSpPr>
         <p:spPr>
           <a:xfrm>
-            <a:off x="1920240" y="1481328"/>
-            <a:ext cx="822960" cy="594360"/>
+            <a:off x="1920240" y="1417320"/>
+            <a:ext cx="777240" cy="594360"/>
           </a:xfrm>
           <a:prstGeom prst="rect">
             <a:avLst/>
@@ -2099,8 +2099,8 @@
         </p:nvSpPr>
         <p:spPr>
           <a:xfrm>
-            <a:off x="777240" y="2377440"/>
-            <a:ext cx="3154680" cy="640080"/>
+            <a:off x="731520" y="2286000"/>
+            <a:ext cx="3200400" cy="640080"/>
           </a:xfrm>
           <a:prstGeom prst="rect">
             <a:avLst/>
@@ -2135,8 +2135,8 @@
         </p:nvSpPr>
         <p:spPr>
           <a:xfrm>
-            <a:off x="822960" y="3063240"/>
-            <a:ext cx="3063240" cy="1005840"/>
+            <a:off x="777240" y="2971800"/>
+            <a:ext cx="3108960" cy="1097280"/>
           </a:xfrm>
           <a:prstGeom prst="rect">
             <a:avLst/>
@@ -2165,18 +2165,18 @@
       </p:sp>
       <p:sp>
         <p:nvSpPr>
-          <p:cNvPr id="8" name="problem-1"/>
+          <p:cNvPr id="8" name="p-1"/>
           <p:cNvSpPr/>
           <p:nvPr/>
         </p:nvSpPr>
         <p:spPr>
           <a:xfrm>
-            <a:off x="4343400" y="1143000"/>
-            <a:ext cx="3611880" cy="3246120"/>
+            <a:off x="4343400" y="1051560"/>
+            <a:ext cx="3657600" cy="3383280"/>
           </a:xfrm>
           <a:prstGeom prst="roundRect">
             <a:avLst>
-              <a:gd name="adj" fmla="val 4507"/>
+              <a:gd name="adj" fmla="val 3784"/>
             </a:avLst>
           </a:prstGeom>
           <a:solidFill>
@@ -2186,7 +2186,7 @@
           <a:effectLst>
             <a:outerShdw sx="100000" sy="100000" kx="0" ky="0" algn="bl" rotWithShape="0" blurRad="101600" dist="25400" dir="5400000">
               <a:srgbClr val="0B1F3A">
-                <a:alpha val="8000"/>
+                <a:alpha val="10000"/>
               </a:srgbClr>
             </a:outerShdw>
           </a:effectLst>
@@ -2194,14 +2194,14 @@
       </p:sp>
       <p:sp>
         <p:nvSpPr>
-          <p:cNvPr id="9" name="dot-1"/>
+          <p:cNvPr id="9" name="n-1"/>
           <p:cNvSpPr/>
           <p:nvPr/>
         </p:nvSpPr>
         <p:spPr>
           <a:xfrm>
-            <a:off x="5715000" y="1371600"/>
-            <a:ext cx="822960" cy="822960"/>
+            <a:off x="5760720" y="1325880"/>
+            <a:ext cx="777240" cy="777240"/>
           </a:xfrm>
           <a:prstGeom prst="ellipse">
             <a:avLst/>
@@ -2220,8 +2220,8 @@
         </p:nvSpPr>
         <p:spPr>
           <a:xfrm>
-            <a:off x="5715000" y="1481328"/>
-            <a:ext cx="822960" cy="594360"/>
+            <a:off x="5760720" y="1417320"/>
+            <a:ext cx="777240" cy="594360"/>
           </a:xfrm>
           <a:prstGeom prst="rect">
             <a:avLst/>
@@ -2256,8 +2256,8 @@
         </p:nvSpPr>
         <p:spPr>
           <a:xfrm>
-            <a:off x="4572000" y="2377440"/>
-            <a:ext cx="3154680" cy="640080"/>
+            <a:off x="4572000" y="2286000"/>
+            <a:ext cx="3200400" cy="640080"/>
           </a:xfrm>
           <a:prstGeom prst="rect">
             <a:avLst/>
@@ -2292,8 +2292,8 @@
         </p:nvSpPr>
         <p:spPr>
           <a:xfrm>
-            <a:off x="4617720" y="3063240"/>
-            <a:ext cx="3063240" cy="1005840"/>
+            <a:off x="4617720" y="2971800"/>
+            <a:ext cx="3108960" cy="1097280"/>
           </a:xfrm>
           <a:prstGeom prst="rect">
             <a:avLst/>
@@ -2322,18 +2322,18 @@
       </p:sp>
       <p:sp>
         <p:nvSpPr>
-          <p:cNvPr id="13" name="problem-2"/>
+          <p:cNvPr id="13" name="p-2"/>
           <p:cNvSpPr/>
           <p:nvPr/>
         </p:nvSpPr>
         <p:spPr>
           <a:xfrm>
-            <a:off x="8138160" y="1143000"/>
-            <a:ext cx="3611880" cy="3246120"/>
+            <a:off x="8183880" y="1051560"/>
+            <a:ext cx="3657600" cy="3383280"/>
           </a:xfrm>
           <a:prstGeom prst="roundRect">
             <a:avLst>
-              <a:gd name="adj" fmla="val 4507"/>
+              <a:gd name="adj" fmla="val 3784"/>
             </a:avLst>
           </a:prstGeom>
           <a:solidFill>
@@ -2343,7 +2343,7 @@
           <a:effectLst>
             <a:outerShdw sx="100000" sy="100000" kx="0" ky="0" algn="bl" rotWithShape="0" blurRad="101600" dist="25400" dir="5400000">
               <a:srgbClr val="0B1F3A">
-                <a:alpha val="8000"/>
+                <a:alpha val="10000"/>
               </a:srgbClr>
             </a:outerShdw>
           </a:effectLst>
@@ -2351,14 +2351,14 @@
       </p:sp>
       <p:sp>
         <p:nvSpPr>
-          <p:cNvPr id="14" name="dot-2"/>
+          <p:cNvPr id="14" name="n-2"/>
           <p:cNvSpPr/>
           <p:nvPr/>
         </p:nvSpPr>
         <p:spPr>
           <a:xfrm>
-            <a:off x="9509760" y="1371600"/>
-            <a:ext cx="822960" cy="822960"/>
+            <a:off x="9601200" y="1325880"/>
+            <a:ext cx="777240" cy="777240"/>
           </a:xfrm>
           <a:prstGeom prst="ellipse">
             <a:avLst/>
@@ -2377,8 +2377,8 @@
         </p:nvSpPr>
         <p:spPr>
           <a:xfrm>
-            <a:off x="9509760" y="1481328"/>
-            <a:ext cx="822960" cy="594360"/>
+            <a:off x="9601200" y="1417320"/>
+            <a:ext cx="777240" cy="594360"/>
           </a:xfrm>
           <a:prstGeom prst="rect">
             <a:avLst/>
@@ -2413,8 +2413,8 @@
         </p:nvSpPr>
         <p:spPr>
           <a:xfrm>
-            <a:off x="8366760" y="2377440"/>
-            <a:ext cx="3154680" cy="640080"/>
+            <a:off x="8412480" y="2286000"/>
+            <a:ext cx="3200400" cy="640080"/>
           </a:xfrm>
           <a:prstGeom prst="rect">
             <a:avLst/>
@@ -2449,8 +2449,8 @@
         </p:nvSpPr>
         <p:spPr>
           <a:xfrm>
-            <a:off x="8412480" y="3063240"/>
-            <a:ext cx="3063240" cy="1005840"/>
+            <a:off x="8458200" y="2971800"/>
+            <a:ext cx="3108960" cy="1097280"/>
           </a:xfrm>
           <a:prstGeom prst="rect">
             <a:avLst/>
@@ -2471,7 +2471,7 @@
                   <a:schemeClr val="accent6"/>
                 </a:solidFill>
               </a:rPr>
-              <a:t>Campus already has stories. Nothing asks you to notice.</a:t>
+              <a:t>Campus already has stories.</a:t>
             </a:r>
             <a:endParaRPr lang="en-US" sz="1600" dirty="0"/>
           </a:p>
@@ -2485,8 +2485,8 @@
         </p:nvSpPr>
         <p:spPr>
           <a:xfrm>
-            <a:off x="548640" y="4617720"/>
-            <a:ext cx="11064240" cy="640080"/>
+            <a:off x="502920" y="4709160"/>
+            <a:ext cx="11155680" cy="640080"/>
           </a:xfrm>
           <a:prstGeom prst="rect">
             <a:avLst/>
@@ -2548,8 +2548,8 @@
         </p:nvSpPr>
         <p:spPr>
           <a:xfrm>
-            <a:off x="548640" y="256032"/>
-            <a:ext cx="11064240" cy="658368"/>
+            <a:off x="457200" y="201168"/>
+            <a:ext cx="11247120" cy="566928"/>
           </a:xfrm>
           <a:prstGeom prst="rect">
             <a:avLst/>
@@ -2565,31 +2565,31 @@
               <a:buNone/>
             </a:pPr>
             <a:r>
-              <a:rPr lang="en-US" sz="3600" b="1" dirty="0">
+              <a:rPr lang="en-US" sz="3000" b="1" dirty="0">
                 <a:solidFill>
                   <a:schemeClr val="tx1"/>
                 </a:solidFill>
               </a:rPr>
               <a:t>Explore  →  Walk  →  Discover  →  Collect</a:t>
             </a:r>
-            <a:endParaRPr lang="en-US" sz="3600" dirty="0"/>
-          </a:p>
-        </p:txBody>
-      </p:sp>
-      <p:sp>
-        <p:nvSpPr>
-          <p:cNvPr id="3" name="loop-Explore"/>
+            <a:endParaRPr lang="en-US" sz="3000" dirty="0"/>
+          </a:p>
+        </p:txBody>
+      </p:sp>
+      <p:sp>
+        <p:nvSpPr>
+          <p:cNvPr id="3" name="loop-0"/>
           <p:cNvSpPr/>
           <p:nvPr/>
         </p:nvSpPr>
         <p:spPr>
           <a:xfrm>
-            <a:off x="502920" y="1051560"/>
-            <a:ext cx="2788920" cy="3977640"/>
+            <a:off x="457200" y="960120"/>
+            <a:ext cx="4892040" cy="987552"/>
           </a:xfrm>
           <a:prstGeom prst="roundRect">
             <a:avLst>
-              <a:gd name="adj" fmla="val 5246"/>
+              <a:gd name="adj" fmla="val 12963"/>
             </a:avLst>
           </a:prstGeom>
           <a:solidFill>
@@ -2599,15 +2599,636 @@
           <a:effectLst>
             <a:outerShdw sx="100000" sy="100000" kx="0" ky="0" algn="bl" rotWithShape="0" blurRad="101600" dist="25400" dir="5400000">
               <a:srgbClr val="0B1F3A">
-                <a:alpha val="8000"/>
+                <a:alpha val="10000"/>
               </a:srgbClr>
             </a:outerShdw>
           </a:effectLst>
         </p:spPr>
       </p:sp>
+      <p:sp>
+        <p:nvSpPr>
+          <p:cNvPr id="4" name="loop-n-0"/>
+          <p:cNvSpPr/>
+          <p:nvPr/>
+        </p:nvSpPr>
+        <p:spPr>
+          <a:xfrm>
+            <a:off x="621792" y="1161288"/>
+            <a:ext cx="566928" cy="566928"/>
+          </a:xfrm>
+          <a:prstGeom prst="ellipse">
+            <a:avLst/>
+          </a:prstGeom>
+          <a:solidFill>
+            <a:schemeClr val="accent1"/>
+          </a:solidFill>
+          <a:ln/>
+        </p:spPr>
+      </p:sp>
+      <p:sp>
+        <p:nvSpPr>
+          <p:cNvPr id="5" name="Text 3"/>
+          <p:cNvSpPr txBox="1"/>
+          <p:nvPr/>
+        </p:nvSpPr>
+        <p:spPr>
+          <a:xfrm>
+            <a:off x="621792" y="1216152"/>
+            <a:ext cx="566928" cy="457200"/>
+          </a:xfrm>
+          <a:prstGeom prst="rect">
+            <a:avLst/>
+          </a:prstGeom>
+          <a:noFill/>
+          <a:ln/>
+        </p:spPr>
+        <p:txBody>
+          <a:bodyPr wrap="square" lIns="0" tIns="0" rIns="0" bIns="0" rtlCol="0" anchor="ctr"/>
+          <a:lstStyle/>
+          <a:p>
+            <a:pPr algn="ctr" indent="0" marL="0">
+              <a:buNone/>
+            </a:pPr>
+            <a:r>
+              <a:rPr lang="en-US" sz="1800" b="1" dirty="0">
+                <a:solidFill>
+                  <a:srgbClr val="FFFFFF"/>
+                </a:solidFill>
+              </a:rPr>
+              <a:t>1</a:t>
+            </a:r>
+            <a:endParaRPr lang="en-US" sz="1800" dirty="0"/>
+          </a:p>
+        </p:txBody>
+      </p:sp>
+      <p:sp>
+        <p:nvSpPr>
+          <p:cNvPr id="6" name="Text 4"/>
+          <p:cNvSpPr txBox="1"/>
+          <p:nvPr/>
+        </p:nvSpPr>
+        <p:spPr>
+          <a:xfrm>
+            <a:off x="1371600" y="1069848"/>
+            <a:ext cx="3749040" cy="347472"/>
+          </a:xfrm>
+          <a:prstGeom prst="rect">
+            <a:avLst/>
+          </a:prstGeom>
+          <a:noFill/>
+          <a:ln/>
+        </p:spPr>
+        <p:txBody>
+          <a:bodyPr wrap="square" lIns="0" tIns="0" rIns="0" bIns="0" rtlCol="0" anchor="ctr"/>
+          <a:lstStyle/>
+          <a:p>
+            <a:pPr indent="0" marL="0">
+              <a:buNone/>
+            </a:pPr>
+            <a:r>
+              <a:rPr lang="en-US" sz="1800" b="1" dirty="0">
+                <a:solidFill>
+                  <a:schemeClr val="tx1"/>
+                </a:solidFill>
+              </a:rPr>
+              <a:t>Explore</a:t>
+            </a:r>
+            <a:endParaRPr lang="en-US" sz="1800" dirty="0"/>
+          </a:p>
+        </p:txBody>
+      </p:sp>
+      <p:sp>
+        <p:nvSpPr>
+          <p:cNvPr id="7" name="Text 5"/>
+          <p:cNvSpPr txBox="1"/>
+          <p:nvPr/>
+        </p:nvSpPr>
+        <p:spPr>
+          <a:xfrm>
+            <a:off x="1371600" y="1417320"/>
+            <a:ext cx="3749040" cy="384048"/>
+          </a:xfrm>
+          <a:prstGeom prst="rect">
+            <a:avLst/>
+          </a:prstGeom>
+          <a:noFill/>
+          <a:ln/>
+        </p:spPr>
+        <p:txBody>
+          <a:bodyPr wrap="square" lIns="0" tIns="0" rIns="0" bIns="0" rtlCol="0" anchor="ctr"/>
+          <a:lstStyle/>
+          <a:p>
+            <a:pPr indent="0" marL="0">
+              <a:buNone/>
+            </a:pPr>
+            <a:r>
+              <a:rPr lang="en-US" sz="1400" dirty="0">
+                <a:solidFill>
+                  <a:schemeClr val="accent6"/>
+                </a:solidFill>
+              </a:rPr>
+              <a:t>Pip scouts a real nearby place.</a:t>
+            </a:r>
+            <a:endParaRPr lang="en-US" sz="1400" dirty="0"/>
+          </a:p>
+        </p:txBody>
+      </p:sp>
+      <p:sp>
+        <p:nvSpPr>
+          <p:cNvPr id="8" name="loop-1"/>
+          <p:cNvSpPr/>
+          <p:nvPr/>
+        </p:nvSpPr>
+        <p:spPr>
+          <a:xfrm>
+            <a:off x="457200" y="2057400"/>
+            <a:ext cx="4892040" cy="987552"/>
+          </a:xfrm>
+          <a:prstGeom prst="roundRect">
+            <a:avLst>
+              <a:gd name="adj" fmla="val 12963"/>
+            </a:avLst>
+          </a:prstGeom>
+          <a:solidFill>
+            <a:srgbClr val="FFFFFF"/>
+          </a:solidFill>
+          <a:ln/>
+          <a:effectLst>
+            <a:outerShdw sx="100000" sy="100000" kx="0" ky="0" algn="bl" rotWithShape="0" blurRad="101600" dist="25400" dir="5400000">
+              <a:srgbClr val="0B1F3A">
+                <a:alpha val="10000"/>
+              </a:srgbClr>
+            </a:outerShdw>
+          </a:effectLst>
+        </p:spPr>
+      </p:sp>
+      <p:sp>
+        <p:nvSpPr>
+          <p:cNvPr id="9" name="loop-n-1"/>
+          <p:cNvSpPr/>
+          <p:nvPr/>
+        </p:nvSpPr>
+        <p:spPr>
+          <a:xfrm>
+            <a:off x="621792" y="2258568"/>
+            <a:ext cx="566928" cy="566928"/>
+          </a:xfrm>
+          <a:prstGeom prst="ellipse">
+            <a:avLst/>
+          </a:prstGeom>
+          <a:solidFill>
+            <a:schemeClr val="accent1"/>
+          </a:solidFill>
+          <a:ln/>
+        </p:spPr>
+      </p:sp>
+      <p:sp>
+        <p:nvSpPr>
+          <p:cNvPr id="10" name="Text 8"/>
+          <p:cNvSpPr txBox="1"/>
+          <p:nvPr/>
+        </p:nvSpPr>
+        <p:spPr>
+          <a:xfrm>
+            <a:off x="621792" y="2313432"/>
+            <a:ext cx="566928" cy="457200"/>
+          </a:xfrm>
+          <a:prstGeom prst="rect">
+            <a:avLst/>
+          </a:prstGeom>
+          <a:noFill/>
+          <a:ln/>
+        </p:spPr>
+        <p:txBody>
+          <a:bodyPr wrap="square" lIns="0" tIns="0" rIns="0" bIns="0" rtlCol="0" anchor="ctr"/>
+          <a:lstStyle/>
+          <a:p>
+            <a:pPr algn="ctr" indent="0" marL="0">
+              <a:buNone/>
+            </a:pPr>
+            <a:r>
+              <a:rPr lang="en-US" sz="1800" b="1" dirty="0">
+                <a:solidFill>
+                  <a:srgbClr val="FFFFFF"/>
+                </a:solidFill>
+              </a:rPr>
+              <a:t>2</a:t>
+            </a:r>
+            <a:endParaRPr lang="en-US" sz="1800" dirty="0"/>
+          </a:p>
+        </p:txBody>
+      </p:sp>
+      <p:sp>
+        <p:nvSpPr>
+          <p:cNvPr id="11" name="Text 9"/>
+          <p:cNvSpPr txBox="1"/>
+          <p:nvPr/>
+        </p:nvSpPr>
+        <p:spPr>
+          <a:xfrm>
+            <a:off x="1371600" y="2167128"/>
+            <a:ext cx="3749040" cy="347472"/>
+          </a:xfrm>
+          <a:prstGeom prst="rect">
+            <a:avLst/>
+          </a:prstGeom>
+          <a:noFill/>
+          <a:ln/>
+        </p:spPr>
+        <p:txBody>
+          <a:bodyPr wrap="square" lIns="0" tIns="0" rIns="0" bIns="0" rtlCol="0" anchor="ctr"/>
+          <a:lstStyle/>
+          <a:p>
+            <a:pPr indent="0" marL="0">
+              <a:buNone/>
+            </a:pPr>
+            <a:r>
+              <a:rPr lang="en-US" sz="1800" b="1" dirty="0">
+                <a:solidFill>
+                  <a:schemeClr val="tx1"/>
+                </a:solidFill>
+              </a:rPr>
+              <a:t>Walk</a:t>
+            </a:r>
+            <a:endParaRPr lang="en-US" sz="1800" dirty="0"/>
+          </a:p>
+        </p:txBody>
+      </p:sp>
+      <p:sp>
+        <p:nvSpPr>
+          <p:cNvPr id="12" name="Text 10"/>
+          <p:cNvSpPr txBox="1"/>
+          <p:nvPr/>
+        </p:nvSpPr>
+        <p:spPr>
+          <a:xfrm>
+            <a:off x="1371600" y="2514600"/>
+            <a:ext cx="3749040" cy="384048"/>
+          </a:xfrm>
+          <a:prstGeom prst="rect">
+            <a:avLst/>
+          </a:prstGeom>
+          <a:noFill/>
+          <a:ln/>
+        </p:spPr>
+        <p:txBody>
+          <a:bodyPr wrap="square" lIns="0" tIns="0" rIns="0" bIns="0" rtlCol="0" anchor="ctr"/>
+          <a:lstStyle/>
+          <a:p>
+            <a:pPr indent="0" marL="0">
+              <a:buNone/>
+            </a:pPr>
+            <a:r>
+              <a:rPr lang="en-US" sz="1400" dirty="0">
+                <a:solidFill>
+                  <a:schemeClr val="accent6"/>
+                </a:solidFill>
+              </a:rPr>
+              <a:t>Fern turns it into a route.</a:t>
+            </a:r>
+            <a:endParaRPr lang="en-US" sz="1400" dirty="0"/>
+          </a:p>
+        </p:txBody>
+      </p:sp>
+      <p:sp>
+        <p:nvSpPr>
+          <p:cNvPr id="13" name="loop-2"/>
+          <p:cNvSpPr/>
+          <p:nvPr/>
+        </p:nvSpPr>
+        <p:spPr>
+          <a:xfrm>
+            <a:off x="457200" y="3154680"/>
+            <a:ext cx="4892040" cy="987552"/>
+          </a:xfrm>
+          <a:prstGeom prst="roundRect">
+            <a:avLst>
+              <a:gd name="adj" fmla="val 12963"/>
+            </a:avLst>
+          </a:prstGeom>
+          <a:solidFill>
+            <a:srgbClr val="FFFFFF"/>
+          </a:solidFill>
+          <a:ln/>
+          <a:effectLst>
+            <a:outerShdw sx="100000" sy="100000" kx="0" ky="0" algn="bl" rotWithShape="0" blurRad="101600" dist="25400" dir="5400000">
+              <a:srgbClr val="0B1F3A">
+                <a:alpha val="10000"/>
+              </a:srgbClr>
+            </a:outerShdw>
+          </a:effectLst>
+        </p:spPr>
+      </p:sp>
+      <p:sp>
+        <p:nvSpPr>
+          <p:cNvPr id="14" name="loop-n-2"/>
+          <p:cNvSpPr/>
+          <p:nvPr/>
+        </p:nvSpPr>
+        <p:spPr>
+          <a:xfrm>
+            <a:off x="621792" y="3355848"/>
+            <a:ext cx="566928" cy="566928"/>
+          </a:xfrm>
+          <a:prstGeom prst="ellipse">
+            <a:avLst/>
+          </a:prstGeom>
+          <a:solidFill>
+            <a:schemeClr val="accent1"/>
+          </a:solidFill>
+          <a:ln/>
+        </p:spPr>
+      </p:sp>
+      <p:sp>
+        <p:nvSpPr>
+          <p:cNvPr id="15" name="Text 13"/>
+          <p:cNvSpPr txBox="1"/>
+          <p:nvPr/>
+        </p:nvSpPr>
+        <p:spPr>
+          <a:xfrm>
+            <a:off x="621792" y="3410712"/>
+            <a:ext cx="566928" cy="457200"/>
+          </a:xfrm>
+          <a:prstGeom prst="rect">
+            <a:avLst/>
+          </a:prstGeom>
+          <a:noFill/>
+          <a:ln/>
+        </p:spPr>
+        <p:txBody>
+          <a:bodyPr wrap="square" lIns="0" tIns="0" rIns="0" bIns="0" rtlCol="0" anchor="ctr"/>
+          <a:lstStyle/>
+          <a:p>
+            <a:pPr algn="ctr" indent="0" marL="0">
+              <a:buNone/>
+            </a:pPr>
+            <a:r>
+              <a:rPr lang="en-US" sz="1800" b="1" dirty="0">
+                <a:solidFill>
+                  <a:srgbClr val="FFFFFF"/>
+                </a:solidFill>
+              </a:rPr>
+              <a:t>3</a:t>
+            </a:r>
+            <a:endParaRPr lang="en-US" sz="1800" dirty="0"/>
+          </a:p>
+        </p:txBody>
+      </p:sp>
+      <p:sp>
+        <p:nvSpPr>
+          <p:cNvPr id="16" name="Text 14"/>
+          <p:cNvSpPr txBox="1"/>
+          <p:nvPr/>
+        </p:nvSpPr>
+        <p:spPr>
+          <a:xfrm>
+            <a:off x="1371600" y="3264408"/>
+            <a:ext cx="3749040" cy="347472"/>
+          </a:xfrm>
+          <a:prstGeom prst="rect">
+            <a:avLst/>
+          </a:prstGeom>
+          <a:noFill/>
+          <a:ln/>
+        </p:spPr>
+        <p:txBody>
+          <a:bodyPr wrap="square" lIns="0" tIns="0" rIns="0" bIns="0" rtlCol="0" anchor="ctr"/>
+          <a:lstStyle/>
+          <a:p>
+            <a:pPr indent="0" marL="0">
+              <a:buNone/>
+            </a:pPr>
+            <a:r>
+              <a:rPr lang="en-US" sz="1800" b="1" dirty="0">
+                <a:solidFill>
+                  <a:schemeClr val="tx1"/>
+                </a:solidFill>
+              </a:rPr>
+              <a:t>Discover</a:t>
+            </a:r>
+            <a:endParaRPr lang="en-US" sz="1800" dirty="0"/>
+          </a:p>
+        </p:txBody>
+      </p:sp>
+      <p:sp>
+        <p:nvSpPr>
+          <p:cNvPr id="17" name="Text 15"/>
+          <p:cNvSpPr txBox="1"/>
+          <p:nvPr/>
+        </p:nvSpPr>
+        <p:spPr>
+          <a:xfrm>
+            <a:off x="1371600" y="3611880"/>
+            <a:ext cx="3749040" cy="384048"/>
+          </a:xfrm>
+          <a:prstGeom prst="rect">
+            <a:avLst/>
+          </a:prstGeom>
+          <a:noFill/>
+          <a:ln/>
+        </p:spPr>
+        <p:txBody>
+          <a:bodyPr wrap="square" lIns="0" tIns="0" rIns="0" bIns="0" rtlCol="0" anchor="ctr"/>
+          <a:lstStyle/>
+          <a:p>
+            <a:pPr indent="0" marL="0">
+              <a:buNone/>
+            </a:pPr>
+            <a:r>
+              <a:rPr lang="en-US" sz="1400" dirty="0">
+                <a:solidFill>
+                  <a:schemeClr val="accent6"/>
+                </a:solidFill>
+              </a:rPr>
+              <a:t>Moss tells the grounded story.</a:t>
+            </a:r>
+            <a:endParaRPr lang="en-US" sz="1400" dirty="0"/>
+          </a:p>
+        </p:txBody>
+      </p:sp>
+      <p:sp>
+        <p:nvSpPr>
+          <p:cNvPr id="18" name="loop-3"/>
+          <p:cNvSpPr/>
+          <p:nvPr/>
+        </p:nvSpPr>
+        <p:spPr>
+          <a:xfrm>
+            <a:off x="457200" y="4251960"/>
+            <a:ext cx="4892040" cy="987552"/>
+          </a:xfrm>
+          <a:prstGeom prst="roundRect">
+            <a:avLst>
+              <a:gd name="adj" fmla="val 12963"/>
+            </a:avLst>
+          </a:prstGeom>
+          <a:solidFill>
+            <a:srgbClr val="FFFFFF"/>
+          </a:solidFill>
+          <a:ln/>
+          <a:effectLst>
+            <a:outerShdw sx="100000" sy="100000" kx="0" ky="0" algn="bl" rotWithShape="0" blurRad="101600" dist="25400" dir="5400000">
+              <a:srgbClr val="0B1F3A">
+                <a:alpha val="10000"/>
+              </a:srgbClr>
+            </a:outerShdw>
+          </a:effectLst>
+        </p:spPr>
+      </p:sp>
+      <p:sp>
+        <p:nvSpPr>
+          <p:cNvPr id="19" name="loop-n-3"/>
+          <p:cNvSpPr/>
+          <p:nvPr/>
+        </p:nvSpPr>
+        <p:spPr>
+          <a:xfrm>
+            <a:off x="621792" y="4453128"/>
+            <a:ext cx="566928" cy="566928"/>
+          </a:xfrm>
+          <a:prstGeom prst="ellipse">
+            <a:avLst/>
+          </a:prstGeom>
+          <a:solidFill>
+            <a:schemeClr val="accent1"/>
+          </a:solidFill>
+          <a:ln/>
+        </p:spPr>
+      </p:sp>
+      <p:sp>
+        <p:nvSpPr>
+          <p:cNvPr id="20" name="Text 18"/>
+          <p:cNvSpPr txBox="1"/>
+          <p:nvPr/>
+        </p:nvSpPr>
+        <p:spPr>
+          <a:xfrm>
+            <a:off x="621792" y="4507992"/>
+            <a:ext cx="566928" cy="457200"/>
+          </a:xfrm>
+          <a:prstGeom prst="rect">
+            <a:avLst/>
+          </a:prstGeom>
+          <a:noFill/>
+          <a:ln/>
+        </p:spPr>
+        <p:txBody>
+          <a:bodyPr wrap="square" lIns="0" tIns="0" rIns="0" bIns="0" rtlCol="0" anchor="ctr"/>
+          <a:lstStyle/>
+          <a:p>
+            <a:pPr algn="ctr" indent="0" marL="0">
+              <a:buNone/>
+            </a:pPr>
+            <a:r>
+              <a:rPr lang="en-US" sz="1800" b="1" dirty="0">
+                <a:solidFill>
+                  <a:srgbClr val="FFFFFF"/>
+                </a:solidFill>
+              </a:rPr>
+              <a:t>4</a:t>
+            </a:r>
+            <a:endParaRPr lang="en-US" sz="1800" dirty="0"/>
+          </a:p>
+        </p:txBody>
+      </p:sp>
+      <p:sp>
+        <p:nvSpPr>
+          <p:cNvPr id="21" name="Text 19"/>
+          <p:cNvSpPr txBox="1"/>
+          <p:nvPr/>
+        </p:nvSpPr>
+        <p:spPr>
+          <a:xfrm>
+            <a:off x="1371600" y="4361688"/>
+            <a:ext cx="3749040" cy="347472"/>
+          </a:xfrm>
+          <a:prstGeom prst="rect">
+            <a:avLst/>
+          </a:prstGeom>
+          <a:noFill/>
+          <a:ln/>
+        </p:spPr>
+        <p:txBody>
+          <a:bodyPr wrap="square" lIns="0" tIns="0" rIns="0" bIns="0" rtlCol="0" anchor="ctr"/>
+          <a:lstStyle/>
+          <a:p>
+            <a:pPr indent="0" marL="0">
+              <a:buNone/>
+            </a:pPr>
+            <a:r>
+              <a:rPr lang="en-US" sz="1800" b="1" dirty="0">
+                <a:solidFill>
+                  <a:schemeClr val="tx1"/>
+                </a:solidFill>
+              </a:rPr>
+              <a:t>Collect</a:t>
+            </a:r>
+            <a:endParaRPr lang="en-US" sz="1800" dirty="0"/>
+          </a:p>
+        </p:txBody>
+      </p:sp>
+      <p:sp>
+        <p:nvSpPr>
+          <p:cNvPr id="22" name="Text 20"/>
+          <p:cNvSpPr txBox="1"/>
+          <p:nvPr/>
+        </p:nvSpPr>
+        <p:spPr>
+          <a:xfrm>
+            <a:off x="1371600" y="4709160"/>
+            <a:ext cx="3749040" cy="384048"/>
+          </a:xfrm>
+          <a:prstGeom prst="rect">
+            <a:avLst/>
+          </a:prstGeom>
+          <a:noFill/>
+          <a:ln/>
+        </p:spPr>
+        <p:txBody>
+          <a:bodyPr wrap="square" lIns="0" tIns="0" rIns="0" bIns="0" rtlCol="0" anchor="ctr"/>
+          <a:lstStyle/>
+          <a:p>
+            <a:pPr indent="0" marL="0">
+              <a:buNone/>
+            </a:pPr>
+            <a:r>
+              <a:rPr lang="en-US" sz="1400" dirty="0">
+                <a:solidFill>
+                  <a:schemeClr val="accent6"/>
+                </a:solidFill>
+              </a:rPr>
+              <a:t>Capture it. Walking fills eggs.</a:t>
+            </a:r>
+            <a:endParaRPr lang="en-US" sz="1400" dirty="0"/>
+          </a:p>
+        </p:txBody>
+      </p:sp>
+      <p:sp>
+        <p:nvSpPr>
+          <p:cNvPr id="23" name="solution-phone-frame"/>
+          <p:cNvSpPr/>
+          <p:nvPr/>
+        </p:nvSpPr>
+        <p:spPr>
+          <a:xfrm>
+            <a:off x="5596128" y="841248"/>
+            <a:ext cx="2767440" cy="5221224"/>
+          </a:xfrm>
+          <a:prstGeom prst="roundRect">
+            <a:avLst>
+              <a:gd name="adj" fmla="val 5947"/>
+            </a:avLst>
+          </a:prstGeom>
+          <a:solidFill>
+            <a:srgbClr val="0B1F3A"/>
+          </a:solidFill>
+          <a:ln/>
+        </p:spPr>
+      </p:sp>
       <p:pic>
         <p:nvPicPr>
-          <p:cNvPr id="4" name="art-Explore" descr="G:\broswer download\big-red-hacks2026\docs\presentation\assets\scout.png">    </p:cNvPr>
+          <p:cNvPr id="24" name="solution-phone" descr="G:\broswer download\big-red-hacks2026\docs\presentation\app_images\295D7A3E-924B-40C7-9900-0A4613317A96.jpg">    </p:cNvPr>
           <p:cNvPicPr>
             <a:picLocks noChangeAspect="1"/>
           </p:cNvPicPr>
@@ -2621,8 +3242,8 @@
         </p:blipFill>
         <p:spPr>
           <a:xfrm>
-            <a:off x="1005840" y="1234440"/>
-            <a:ext cx="1783080" cy="1783080"/>
+            <a:off x="5669280" y="914400"/>
+            <a:ext cx="2621136" cy="5074920"/>
           </a:xfrm>
           <a:prstGeom prst="rect">
             <a:avLst/>
@@ -2631,126 +3252,18 @@
       </p:pic>
       <p:sp>
         <p:nvSpPr>
-          <p:cNvPr id="5" name="Text 2"/>
-          <p:cNvSpPr txBox="1"/>
-          <p:nvPr/>
-        </p:nvSpPr>
-        <p:spPr>
-          <a:xfrm>
-            <a:off x="640080" y="3108960"/>
-            <a:ext cx="2514600" cy="411480"/>
-          </a:xfrm>
-          <a:prstGeom prst="rect">
-            <a:avLst/>
-          </a:prstGeom>
-          <a:noFill/>
-          <a:ln/>
-        </p:spPr>
-        <p:txBody>
-          <a:bodyPr wrap="square" lIns="0" tIns="0" rIns="0" bIns="0" rtlCol="0" anchor="ctr"/>
-          <a:lstStyle/>
-          <a:p>
-            <a:pPr algn="ctr" indent="0" marL="0">
-              <a:buNone/>
-            </a:pPr>
-            <a:r>
-              <a:rPr lang="en-US" sz="2200" b="1" dirty="0">
-                <a:solidFill>
-                  <a:schemeClr val="tx1"/>
-                </a:solidFill>
-              </a:rPr>
-              <a:t>Explore</a:t>
-            </a:r>
-            <a:endParaRPr lang="en-US" sz="2200" dirty="0"/>
-          </a:p>
-        </p:txBody>
-      </p:sp>
-      <p:sp>
-        <p:nvSpPr>
-          <p:cNvPr id="6" name="Text 3"/>
-          <p:cNvSpPr txBox="1"/>
-          <p:nvPr/>
-        </p:nvSpPr>
-        <p:spPr>
-          <a:xfrm>
-            <a:off x="640080" y="3520440"/>
-            <a:ext cx="2514600" cy="292608"/>
-          </a:xfrm>
-          <a:prstGeom prst="rect">
-            <a:avLst/>
-          </a:prstGeom>
-          <a:noFill/>
-          <a:ln/>
-        </p:spPr>
-        <p:txBody>
-          <a:bodyPr wrap="square" lIns="0" tIns="0" rIns="0" bIns="0" rtlCol="0" anchor="ctr"/>
-          <a:lstStyle/>
-          <a:p>
-            <a:pPr algn="ctr" indent="0" marL="0">
-              <a:buNone/>
-            </a:pPr>
-            <a:r>
-              <a:rPr lang="en-US" sz="1400" dirty="0">
-                <a:solidFill>
-                  <a:schemeClr val="accent1"/>
-                </a:solidFill>
-              </a:rPr>
-              <a:t>Pip</a:t>
-            </a:r>
-            <a:endParaRPr lang="en-US" sz="1400" dirty="0"/>
-          </a:p>
-        </p:txBody>
-      </p:sp>
-      <p:sp>
-        <p:nvSpPr>
-          <p:cNvPr id="7" name="Text 4"/>
-          <p:cNvSpPr txBox="1"/>
-          <p:nvPr/>
-        </p:nvSpPr>
-        <p:spPr>
-          <a:xfrm>
-            <a:off x="667512" y="3858768"/>
-            <a:ext cx="2468880" cy="1005840"/>
-          </a:xfrm>
-          <a:prstGeom prst="rect">
-            <a:avLst/>
-          </a:prstGeom>
-          <a:noFill/>
-          <a:ln/>
-        </p:spPr>
-        <p:txBody>
-          <a:bodyPr wrap="square" lIns="0" tIns="0" rIns="0" bIns="0" rtlCol="0" anchor="ctr"/>
-          <a:lstStyle/>
-          <a:p>
-            <a:pPr algn="ctr" indent="0" marL="0">
-              <a:buNone/>
-            </a:pPr>
-            <a:r>
-              <a:rPr lang="en-US" sz="1400" dirty="0">
-                <a:solidFill>
-                  <a:schemeClr val="accent6"/>
-                </a:solidFill>
-              </a:rPr>
-              <a:t>Scouts a nearby place with Wikipedia and OSM.</a:t>
-            </a:r>
-            <a:endParaRPr lang="en-US" sz="1400" dirty="0"/>
-          </a:p>
-        </p:txBody>
-      </p:sp>
-      <p:sp>
-        <p:nvSpPr>
-          <p:cNvPr id="8" name="loop-Walk"/>
+          <p:cNvPr id="25" name="sol-call-1"/>
           <p:cNvSpPr/>
           <p:nvPr/>
         </p:nvSpPr>
         <p:spPr>
           <a:xfrm>
-            <a:off x="3429000" y="1051560"/>
-            <a:ext cx="2788920" cy="3977640"/>
+            <a:off x="8455008" y="1691640"/>
+            <a:ext cx="3200400" cy="1234440"/>
           </a:xfrm>
           <a:prstGeom prst="roundRect">
             <a:avLst>
-              <a:gd name="adj" fmla="val 5246"/>
+              <a:gd name="adj" fmla="val 10370"/>
             </a:avLst>
           </a:prstGeom>
           <a:solidFill>
@@ -2760,103 +3273,43 @@
           <a:effectLst>
             <a:outerShdw sx="100000" sy="100000" kx="0" ky="0" algn="bl" rotWithShape="0" blurRad="101600" dist="25400" dir="5400000">
               <a:srgbClr val="0B1F3A">
-                <a:alpha val="8000"/>
+                <a:alpha val="10000"/>
               </a:srgbClr>
             </a:outerShdw>
           </a:effectLst>
         </p:spPr>
       </p:sp>
-      <p:pic>
-        <p:nvPicPr>
-          <p:cNvPr id="9" name="art-Walk" descr="G:\broswer download\big-red-hacks2026\docs\presentation\assets\pathfinder.png">    </p:cNvPr>
-          <p:cNvPicPr>
-            <a:picLocks noChangeAspect="1"/>
-          </p:cNvPicPr>
-          <p:nvPr/>
-        </p:nvPicPr>
-        <p:blipFill>
-          <a:blip r:embed="rId2"/>
-          <a:stretch>
-            <a:fillRect/>
-          </a:stretch>
-        </p:blipFill>
-        <p:spPr>
-          <a:xfrm>
-            <a:off x="3931920" y="1234440"/>
-            <a:ext cx="1783080" cy="1783080"/>
-          </a:xfrm>
-          <a:prstGeom prst="rect">
-            <a:avLst/>
-          </a:prstGeom>
-        </p:spPr>
-      </p:pic>
-      <p:sp>
-        <p:nvSpPr>
-          <p:cNvPr id="10" name="Text 6"/>
-          <p:cNvSpPr txBox="1"/>
-          <p:nvPr/>
-        </p:nvSpPr>
-        <p:spPr>
-          <a:xfrm>
-            <a:off x="3566160" y="3108960"/>
-            <a:ext cx="2514600" cy="411480"/>
-          </a:xfrm>
-          <a:prstGeom prst="rect">
-            <a:avLst/>
-          </a:prstGeom>
-          <a:noFill/>
-          <a:ln/>
-        </p:spPr>
-        <p:txBody>
-          <a:bodyPr wrap="square" lIns="0" tIns="0" rIns="0" bIns="0" rtlCol="0" anchor="ctr"/>
-          <a:lstStyle/>
-          <a:p>
-            <a:pPr algn="ctr" indent="0" marL="0">
-              <a:buNone/>
-            </a:pPr>
-            <a:r>
-              <a:rPr lang="en-US" sz="2200" b="1" dirty="0">
+      <p:sp>
+        <p:nvSpPr>
+          <p:cNvPr id="26" name="Text 23"/>
+          <p:cNvSpPr txBox="1"/>
+          <p:nvPr/>
+        </p:nvSpPr>
+        <p:spPr>
+          <a:xfrm>
+            <a:off x="8583024" y="1764792"/>
+            <a:ext cx="2944368" cy="1088136"/>
+          </a:xfrm>
+          <a:prstGeom prst="rect">
+            <a:avLst/>
+          </a:prstGeom>
+          <a:noFill/>
+          <a:ln/>
+        </p:spPr>
+        <p:txBody>
+          <a:bodyPr wrap="square" lIns="0" tIns="0" rIns="0" bIns="0" rtlCol="0" anchor="ctr"/>
+          <a:lstStyle/>
+          <a:p>
+            <a:pPr indent="0" marL="0">
+              <a:buNone/>
+            </a:pPr>
+            <a:r>
+              <a:rPr lang="en-US" sz="1400" dirty="0">
                 <a:solidFill>
                   <a:schemeClr val="tx1"/>
                 </a:solidFill>
               </a:rPr>
-              <a:t>Walk</a:t>
-            </a:r>
-            <a:endParaRPr lang="en-US" sz="2200" dirty="0"/>
-          </a:p>
-        </p:txBody>
-      </p:sp>
-      <p:sp>
-        <p:nvSpPr>
-          <p:cNvPr id="11" name="Text 7"/>
-          <p:cNvSpPr txBox="1"/>
-          <p:nvPr/>
-        </p:nvSpPr>
-        <p:spPr>
-          <a:xfrm>
-            <a:off x="3566160" y="3520440"/>
-            <a:ext cx="2514600" cy="292608"/>
-          </a:xfrm>
-          <a:prstGeom prst="rect">
-            <a:avLst/>
-          </a:prstGeom>
-          <a:noFill/>
-          <a:ln/>
-        </p:spPr>
-        <p:txBody>
-          <a:bodyPr wrap="square" lIns="0" tIns="0" rIns="0" bIns="0" rtlCol="0" anchor="ctr"/>
-          <a:lstStyle/>
-          <a:p>
-            <a:pPr algn="ctr" indent="0" marL="0">
-              <a:buNone/>
-            </a:pPr>
-            <a:r>
-              <a:rPr lang="en-US" sz="1400" dirty="0">
-                <a:solidFill>
-                  <a:schemeClr val="accent1"/>
-                </a:solidFill>
-              </a:rPr>
-              <a:t>Fern</a:t>
+              <a:t>Bailey Hall, a real campus place.</a:t>
             </a:r>
             <a:endParaRPr lang="en-US" sz="1400" dirty="0"/>
           </a:p>
@@ -2864,54 +3317,18 @@
       </p:sp>
       <p:sp>
         <p:nvSpPr>
-          <p:cNvPr id="12" name="Text 8"/>
-          <p:cNvSpPr txBox="1"/>
-          <p:nvPr/>
-        </p:nvSpPr>
-        <p:spPr>
-          <a:xfrm>
-            <a:off x="3593592" y="3858768"/>
-            <a:ext cx="2468880" cy="1005840"/>
-          </a:xfrm>
-          <a:prstGeom prst="rect">
-            <a:avLst/>
-          </a:prstGeom>
-          <a:noFill/>
-          <a:ln/>
-        </p:spPr>
-        <p:txBody>
-          <a:bodyPr wrap="square" lIns="0" tIns="0" rIns="0" bIns="0" rtlCol="0" anchor="ctr"/>
-          <a:lstStyle/>
-          <a:p>
-            <a:pPr algn="ctr" indent="0" marL="0">
-              <a:buNone/>
-            </a:pPr>
-            <a:r>
-              <a:rPr lang="en-US" sz="1400" dirty="0">
-                <a:solidFill>
-                  <a:schemeClr val="accent6"/>
-                </a:solidFill>
-              </a:rPr>
-              <a:t>Guides the route. The trail blooms.</a:t>
-            </a:r>
-            <a:endParaRPr lang="en-US" sz="1400" dirty="0"/>
-          </a:p>
-        </p:txBody>
-      </p:sp>
-      <p:sp>
-        <p:nvSpPr>
-          <p:cNvPr id="13" name="loop-Discover"/>
+          <p:cNvPr id="27" name="sol-call-2"/>
           <p:cNvSpPr/>
           <p:nvPr/>
         </p:nvSpPr>
         <p:spPr>
           <a:xfrm>
-            <a:off x="6355080" y="1051560"/>
-            <a:ext cx="2788920" cy="3977640"/>
+            <a:off x="8455008" y="3108960"/>
+            <a:ext cx="3200400" cy="1325880"/>
           </a:xfrm>
           <a:prstGeom prst="roundRect">
             <a:avLst>
-              <a:gd name="adj" fmla="val 5246"/>
+              <a:gd name="adj" fmla="val 9655"/>
             </a:avLst>
           </a:prstGeom>
           <a:solidFill>
@@ -2921,338 +3338,45 @@
           <a:effectLst>
             <a:outerShdw sx="100000" sy="100000" kx="0" ky="0" algn="bl" rotWithShape="0" blurRad="101600" dist="25400" dir="5400000">
               <a:srgbClr val="0B1F3A">
-                <a:alpha val="8000"/>
+                <a:alpha val="10000"/>
               </a:srgbClr>
             </a:outerShdw>
           </a:effectLst>
         </p:spPr>
       </p:sp>
-      <p:pic>
-        <p:nvPicPr>
-          <p:cNvPr id="14" name="art-Discover" descr="G:\broswer download\big-red-hacks2026\docs\presentation\assets\storyteller.png">    </p:cNvPr>
-          <p:cNvPicPr>
-            <a:picLocks noChangeAspect="1"/>
-          </p:cNvPicPr>
-          <p:nvPr/>
-        </p:nvPicPr>
-        <p:blipFill>
-          <a:blip r:embed="rId3"/>
-          <a:stretch>
-            <a:fillRect/>
-          </a:stretch>
-        </p:blipFill>
-        <p:spPr>
-          <a:xfrm>
-            <a:off x="6858000" y="1234440"/>
-            <a:ext cx="1783080" cy="1783080"/>
-          </a:xfrm>
-          <a:prstGeom prst="rect">
-            <a:avLst/>
-          </a:prstGeom>
-        </p:spPr>
-      </p:pic>
-      <p:sp>
-        <p:nvSpPr>
-          <p:cNvPr id="15" name="Text 10"/>
-          <p:cNvSpPr txBox="1"/>
-          <p:nvPr/>
-        </p:nvSpPr>
-        <p:spPr>
-          <a:xfrm>
-            <a:off x="6492240" y="3108960"/>
-            <a:ext cx="2514600" cy="411480"/>
-          </a:xfrm>
-          <a:prstGeom prst="rect">
-            <a:avLst/>
-          </a:prstGeom>
-          <a:noFill/>
-          <a:ln/>
-        </p:spPr>
-        <p:txBody>
-          <a:bodyPr wrap="square" lIns="0" tIns="0" rIns="0" bIns="0" rtlCol="0" anchor="ctr"/>
-          <a:lstStyle/>
-          <a:p>
-            <a:pPr algn="ctr" indent="0" marL="0">
-              <a:buNone/>
-            </a:pPr>
-            <a:r>
-              <a:rPr lang="en-US" sz="2200" b="1" dirty="0">
+      <p:sp>
+        <p:nvSpPr>
+          <p:cNvPr id="28" name="Text 25"/>
+          <p:cNvSpPr txBox="1"/>
+          <p:nvPr/>
+        </p:nvSpPr>
+        <p:spPr>
+          <a:xfrm>
+            <a:off x="8583024" y="3182112"/>
+            <a:ext cx="2944368" cy="1179576"/>
+          </a:xfrm>
+          <a:prstGeom prst="rect">
+            <a:avLst/>
+          </a:prstGeom>
+          <a:noFill/>
+          <a:ln/>
+        </p:spPr>
+        <p:txBody>
+          <a:bodyPr wrap="square" lIns="0" tIns="0" rIns="0" bIns="0" rtlCol="0" anchor="ctr"/>
+          <a:lstStyle/>
+          <a:p>
+            <a:pPr indent="0" marL="0">
+              <a:buNone/>
+            </a:pPr>
+            <a:r>
+              <a:rPr lang="en-US" sz="1400" dirty="0">
                 <a:solidFill>
                   <a:schemeClr val="tx1"/>
                 </a:solidFill>
               </a:rPr>
-              <a:t>Discover</a:t>
-            </a:r>
-            <a:endParaRPr lang="en-US" sz="2200" dirty="0"/>
-          </a:p>
-        </p:txBody>
-      </p:sp>
-      <p:sp>
-        <p:nvSpPr>
-          <p:cNvPr id="16" name="Text 11"/>
-          <p:cNvSpPr txBox="1"/>
-          <p:nvPr/>
-        </p:nvSpPr>
-        <p:spPr>
-          <a:xfrm>
-            <a:off x="6492240" y="3520440"/>
-            <a:ext cx="2514600" cy="292608"/>
-          </a:xfrm>
-          <a:prstGeom prst="rect">
-            <a:avLst/>
-          </a:prstGeom>
-          <a:noFill/>
-          <a:ln/>
-        </p:spPr>
-        <p:txBody>
-          <a:bodyPr wrap="square" lIns="0" tIns="0" rIns="0" bIns="0" rtlCol="0" anchor="ctr"/>
-          <a:lstStyle/>
-          <a:p>
-            <a:pPr algn="ctr" indent="0" marL="0">
-              <a:buNone/>
-            </a:pPr>
-            <a:r>
-              <a:rPr lang="en-US" sz="1400" dirty="0">
-                <a:solidFill>
-                  <a:schemeClr val="accent1"/>
-                </a:solidFill>
-              </a:rPr>
-              <a:t>Moss</a:t>
+              <a:t>Pick a squad pet, then tap Walk there.</a:t>
             </a:r>
             <a:endParaRPr lang="en-US" sz="1400" dirty="0"/>
-          </a:p>
-        </p:txBody>
-      </p:sp>
-      <p:sp>
-        <p:nvSpPr>
-          <p:cNvPr id="17" name="Text 12"/>
-          <p:cNvSpPr txBox="1"/>
-          <p:nvPr/>
-        </p:nvSpPr>
-        <p:spPr>
-          <a:xfrm>
-            <a:off x="6519672" y="3858768"/>
-            <a:ext cx="2468880" cy="1005840"/>
-          </a:xfrm>
-          <a:prstGeom prst="rect">
-            <a:avLst/>
-          </a:prstGeom>
-          <a:noFill/>
-          <a:ln/>
-        </p:spPr>
-        <p:txBody>
-          <a:bodyPr wrap="square" lIns="0" tIns="0" rIns="0" bIns="0" rtlCol="0" anchor="ctr"/>
-          <a:lstStyle/>
-          <a:p>
-            <a:pPr algn="ctr" indent="0" marL="0">
-              <a:buNone/>
-            </a:pPr>
-            <a:r>
-              <a:rPr lang="en-US" sz="1400" dirty="0">
-                <a:solidFill>
-                  <a:schemeClr val="accent6"/>
-                </a:solidFill>
-              </a:rPr>
-              <a:t>Tells the grounded story.</a:t>
-            </a:r>
-            <a:endParaRPr lang="en-US" sz="1400" dirty="0"/>
-          </a:p>
-        </p:txBody>
-      </p:sp>
-      <p:sp>
-        <p:nvSpPr>
-          <p:cNvPr id="18" name="loop-Collect"/>
-          <p:cNvSpPr/>
-          <p:nvPr/>
-        </p:nvSpPr>
-        <p:spPr>
-          <a:xfrm>
-            <a:off x="9281160" y="1051560"/>
-            <a:ext cx="2788920" cy="3977640"/>
-          </a:xfrm>
-          <a:prstGeom prst="roundRect">
-            <a:avLst>
-              <a:gd name="adj" fmla="val 5246"/>
-            </a:avLst>
-          </a:prstGeom>
-          <a:solidFill>
-            <a:srgbClr val="FFFFFF"/>
-          </a:solidFill>
-          <a:ln/>
-          <a:effectLst>
-            <a:outerShdw sx="100000" sy="100000" kx="0" ky="0" algn="bl" rotWithShape="0" blurRad="101600" dist="25400" dir="5400000">
-              <a:srgbClr val="0B1F3A">
-                <a:alpha val="8000"/>
-              </a:srgbClr>
-            </a:outerShdw>
-          </a:effectLst>
-        </p:spPr>
-      </p:sp>
-      <p:pic>
-        <p:nvPicPr>
-          <p:cNvPr id="19" name="art-Collect" descr="G:\broswer download\big-red-hacks2026\mobile\assets\badges\gold.png">    </p:cNvPr>
-          <p:cNvPicPr>
-            <a:picLocks noChangeAspect="1"/>
-          </p:cNvPicPr>
-          <p:nvPr/>
-        </p:nvPicPr>
-        <p:blipFill>
-          <a:blip r:embed="rId4"/>
-          <a:stretch>
-            <a:fillRect/>
-          </a:stretch>
-        </p:blipFill>
-        <p:spPr>
-          <a:xfrm>
-            <a:off x="9784080" y="1234440"/>
-            <a:ext cx="1783080" cy="1783080"/>
-          </a:xfrm>
-          <a:prstGeom prst="rect">
-            <a:avLst/>
-          </a:prstGeom>
-        </p:spPr>
-      </p:pic>
-      <p:sp>
-        <p:nvSpPr>
-          <p:cNvPr id="20" name="Text 14"/>
-          <p:cNvSpPr txBox="1"/>
-          <p:nvPr/>
-        </p:nvSpPr>
-        <p:spPr>
-          <a:xfrm>
-            <a:off x="9418320" y="3108960"/>
-            <a:ext cx="2514600" cy="411480"/>
-          </a:xfrm>
-          <a:prstGeom prst="rect">
-            <a:avLst/>
-          </a:prstGeom>
-          <a:noFill/>
-          <a:ln/>
-        </p:spPr>
-        <p:txBody>
-          <a:bodyPr wrap="square" lIns="0" tIns="0" rIns="0" bIns="0" rtlCol="0" anchor="ctr"/>
-          <a:lstStyle/>
-          <a:p>
-            <a:pPr algn="ctr" indent="0" marL="0">
-              <a:buNone/>
-            </a:pPr>
-            <a:r>
-              <a:rPr lang="en-US" sz="2200" b="1" dirty="0">
-                <a:solidFill>
-                  <a:schemeClr val="tx1"/>
-                </a:solidFill>
-              </a:rPr>
-              <a:t>Collect</a:t>
-            </a:r>
-            <a:endParaRPr lang="en-US" sz="2200" dirty="0"/>
-          </a:p>
-        </p:txBody>
-      </p:sp>
-      <p:sp>
-        <p:nvSpPr>
-          <p:cNvPr id="21" name="Text 15"/>
-          <p:cNvSpPr txBox="1"/>
-          <p:nvPr/>
-        </p:nvSpPr>
-        <p:spPr>
-          <a:xfrm>
-            <a:off x="9418320" y="3520440"/>
-            <a:ext cx="2514600" cy="292608"/>
-          </a:xfrm>
-          <a:prstGeom prst="rect">
-            <a:avLst/>
-          </a:prstGeom>
-          <a:noFill/>
-          <a:ln/>
-        </p:spPr>
-        <p:txBody>
-          <a:bodyPr wrap="square" lIns="0" tIns="0" rIns="0" bIns="0" rtlCol="0" anchor="ctr"/>
-          <a:lstStyle/>
-          <a:p>
-            <a:pPr algn="ctr" indent="0" marL="0">
-              <a:buNone/>
-            </a:pPr>
-            <a:r>
-              <a:rPr lang="en-US" sz="1400" dirty="0">
-                <a:solidFill>
-                  <a:schemeClr val="accent1"/>
-                </a:solidFill>
-              </a:rPr>
-              <a:t>You</a:t>
-            </a:r>
-            <a:endParaRPr lang="en-US" sz="1400" dirty="0"/>
-          </a:p>
-        </p:txBody>
-      </p:sp>
-      <p:sp>
-        <p:nvSpPr>
-          <p:cNvPr id="22" name="Text 16"/>
-          <p:cNvSpPr txBox="1"/>
-          <p:nvPr/>
-        </p:nvSpPr>
-        <p:spPr>
-          <a:xfrm>
-            <a:off x="9445752" y="3858768"/>
-            <a:ext cx="2468880" cy="1005840"/>
-          </a:xfrm>
-          <a:prstGeom prst="rect">
-            <a:avLst/>
-          </a:prstGeom>
-          <a:noFill/>
-          <a:ln/>
-        </p:spPr>
-        <p:txBody>
-          <a:bodyPr wrap="square" lIns="0" tIns="0" rIns="0" bIns="0" rtlCol="0" anchor="ctr"/>
-          <a:lstStyle/>
-          <a:p>
-            <a:pPr algn="ctr" indent="0" marL="0">
-              <a:buNone/>
-            </a:pPr>
-            <a:r>
-              <a:rPr lang="en-US" sz="1400" dirty="0">
-                <a:solidFill>
-                  <a:schemeClr val="accent6"/>
-                </a:solidFill>
-              </a:rPr>
-              <a:t>Capture the landmark. Eggs fill as you walk.</a:t>
-            </a:r>
-            <a:endParaRPr lang="en-US" sz="1400" dirty="0"/>
-          </a:p>
-        </p:txBody>
-      </p:sp>
-      <p:sp>
-        <p:nvSpPr>
-          <p:cNvPr id="23" name="Text 17"/>
-          <p:cNvSpPr txBox="1"/>
-          <p:nvPr/>
-        </p:nvSpPr>
-        <p:spPr>
-          <a:xfrm>
-            <a:off x="548640" y="5166360"/>
-            <a:ext cx="11064240" cy="1097280"/>
-          </a:xfrm>
-          <a:prstGeom prst="rect">
-            <a:avLst/>
-          </a:prstGeom>
-          <a:noFill/>
-          <a:ln/>
-        </p:spPr>
-        <p:txBody>
-          <a:bodyPr wrap="square" lIns="0" tIns="0" rIns="0" bIns="0" rtlCol="0" anchor="ctr"/>
-          <a:lstStyle/>
-          <a:p>
-            <a:pPr indent="0" marL="0">
-              <a:buNone/>
-            </a:pPr>
-            <a:r>
-              <a:rPr lang="en-US" sz="1600" dirty="0">
-                <a:solidFill>
-                  <a:schemeClr val="accent6"/>
-                </a:solidFill>
-              </a:rPr>
-              <a:t>Pip, Fern, and Moss — original art from the app.</a:t>
-            </a:r>
-            <a:endParaRPr lang="en-US" sz="1600" dirty="0"/>
           </a:p>
         </p:txBody>
       </p:sp>
@@ -3291,8 +3415,8 @@
         </p:nvSpPr>
         <p:spPr>
           <a:xfrm>
-            <a:off x="548640" y="256032"/>
-            <a:ext cx="11064240" cy="658368"/>
+            <a:off x="457200" y="201168"/>
+            <a:ext cx="11247120" cy="566928"/>
           </a:xfrm>
           <a:prstGeom prst="rect">
             <a:avLst/>
@@ -3308,14 +3432,14 @@
               <a:buNone/>
             </a:pPr>
             <a:r>
-              <a:rPr lang="en-US" sz="3600" b="1" dirty="0">
+              <a:rPr lang="en-US" sz="3000" b="1" dirty="0">
                 <a:solidFill>
                   <a:schemeClr val="tx1"/>
                 </a:solidFill>
               </a:rPr>
               <a:t>Keep this slide up. Hand them the phone.</a:t>
             </a:r>
-            <a:endParaRPr lang="en-US" sz="3600" dirty="0"/>
+            <a:endParaRPr lang="en-US" sz="3000" dirty="0"/>
           </a:p>
         </p:txBody>
       </p:sp>
@@ -3327,22 +3451,22 @@
         </p:nvSpPr>
         <p:spPr>
           <a:xfrm>
-            <a:off x="548640" y="1051560"/>
-            <a:ext cx="11109960" cy="685800"/>
+            <a:off x="457200" y="868680"/>
+            <a:ext cx="11292840" cy="530352"/>
           </a:xfrm>
           <a:prstGeom prst="roundRect">
             <a:avLst>
-              <a:gd name="adj" fmla="val 21333"/>
+              <a:gd name="adj" fmla="val 24138"/>
             </a:avLst>
           </a:prstGeom>
           <a:solidFill>
-            <a:schemeClr val="tx2"/>
+            <a:srgbClr val="0B1F3A"/>
           </a:solidFill>
           <a:ln/>
           <a:effectLst>
             <a:outerShdw sx="100000" sy="100000" kx="0" ky="0" algn="bl" rotWithShape="0" blurRad="101600" dist="25400" dir="5400000">
               <a:srgbClr val="0B1F3A">
-                <a:alpha val="8000"/>
+                <a:alpha val="10000"/>
               </a:srgbClr>
             </a:outerShdw>
           </a:effectLst>
@@ -3356,8 +3480,8 @@
         </p:nvSpPr>
         <p:spPr>
           <a:xfrm>
-            <a:off x="731520" y="1143000"/>
-            <a:ext cx="10744200" cy="502920"/>
+            <a:off x="594360" y="932688"/>
+            <a:ext cx="11018520" cy="402336"/>
           </a:xfrm>
           <a:prstGeom prst="rect">
             <a:avLst/>
@@ -3373,31 +3497,101 @@
               <a:buNone/>
             </a:pPr>
             <a:r>
-              <a:rPr lang="en-US" sz="2000" b="1" dirty="0">
+              <a:rPr lang="en-US" sz="1800" b="1" dirty="0">
                 <a:solidFill>
                   <a:schemeClr val="accent3"/>
                 </a:solidFill>
               </a:rPr>
-              <a:t>Demo Walk is ON  ·  steps are simulated at the table</a:t>
-            </a:r>
-            <a:endParaRPr lang="en-US" sz="2000" dirty="0"/>
-          </a:p>
-        </p:txBody>
-      </p:sp>
-      <p:sp>
-        <p:nvSpPr>
-          <p:cNvPr id="5" name="demo-1"/>
+              <a:t>Demo Walk is ON  ·  steps at the table are simulated</a:t>
+            </a:r>
+            <a:endParaRPr lang="en-US" sz="1800" dirty="0"/>
+          </a:p>
+        </p:txBody>
+      </p:sp>
+      <p:pic>
+        <p:nvPicPr>
+          <p:cNvPr id="5" name="demo-league" descr="G:\broswer download\big-red-hacks2026\docs\presentation\app_images\ED702DFD-F3B0-4517-8C60-E4FEB548C8EB.jpg">    </p:cNvPr>
+          <p:cNvPicPr>
+            <a:picLocks noChangeAspect="1"/>
+          </p:cNvPicPr>
+          <p:nvPr/>
+        </p:nvPicPr>
+        <p:blipFill>
+          <a:blip r:embed="rId1"/>
+          <a:stretch>
+            <a:fillRect/>
+          </a:stretch>
+        </p:blipFill>
+        <p:spPr>
+          <a:xfrm>
+            <a:off x="457200" y="1554480"/>
+            <a:ext cx="4089313" cy="4160520"/>
+          </a:xfrm>
+          <a:prstGeom prst="rect">
+            <a:avLst/>
+          </a:prstGeom>
+        </p:spPr>
+      </p:pic>
+      <p:sp>
+        <p:nvSpPr>
+          <p:cNvPr id="6" name="demo-walk-frame"/>
           <p:cNvSpPr/>
           <p:nvPr/>
         </p:nvSpPr>
         <p:spPr>
           <a:xfrm>
-            <a:off x="548640" y="1965960"/>
-            <a:ext cx="2788920" cy="2331720"/>
+            <a:off x="4674529" y="1481328"/>
+            <a:ext cx="2295164" cy="4306824"/>
           </a:xfrm>
           <a:prstGeom prst="roundRect">
             <a:avLst>
-              <a:gd name="adj" fmla="val 6275"/>
+              <a:gd name="adj" fmla="val 7171"/>
+            </a:avLst>
+          </a:prstGeom>
+          <a:solidFill>
+            <a:srgbClr val="0B1F3A"/>
+          </a:solidFill>
+          <a:ln/>
+        </p:spPr>
+      </p:sp>
+      <p:pic>
+        <p:nvPicPr>
+          <p:cNvPr id="7" name="demo-walk" descr="G:\broswer download\big-red-hacks2026\docs\presentation\app_images\295D7A3E-924B-40C7-9900-0A4613317A96.jpg">    </p:cNvPr>
+          <p:cNvPicPr>
+            <a:picLocks noChangeAspect="1"/>
+          </p:cNvPicPr>
+          <p:nvPr/>
+        </p:nvPicPr>
+        <p:blipFill>
+          <a:blip r:embed="rId2"/>
+          <a:stretch>
+            <a:fillRect/>
+          </a:stretch>
+        </p:blipFill>
+        <p:spPr>
+          <a:xfrm>
+            <a:off x="4747681" y="1554480"/>
+            <a:ext cx="2148860" cy="4160520"/>
+          </a:xfrm>
+          <a:prstGeom prst="rect">
+            <a:avLst/>
+          </a:prstGeom>
+        </p:spPr>
+      </p:pic>
+      <p:sp>
+        <p:nvSpPr>
+          <p:cNvPr id="8" name="c1"/>
+          <p:cNvSpPr/>
+          <p:nvPr/>
+        </p:nvSpPr>
+        <p:spPr>
+          <a:xfrm>
+            <a:off x="7097709" y="1554480"/>
+            <a:ext cx="4652331" cy="1280160"/>
+          </a:xfrm>
+          <a:prstGeom prst="roundRect">
+            <a:avLst>
+              <a:gd name="adj" fmla="val 10000"/>
             </a:avLst>
           </a:prstGeom>
           <a:solidFill>
@@ -3407,7 +3601,7 @@
           <a:effectLst>
             <a:outerShdw sx="100000" sy="100000" kx="0" ky="0" algn="bl" rotWithShape="0" blurRad="101600" dist="25400" dir="5400000">
               <a:srgbClr val="0B1F3A">
-                <a:alpha val="8000"/>
+                <a:alpha val="10000"/>
               </a:srgbClr>
             </a:outerShdw>
           </a:effectLst>
@@ -3415,110 +3609,54 @@
       </p:sp>
       <p:sp>
         <p:nvSpPr>
-          <p:cNvPr id="6" name="n-1"/>
+          <p:cNvPr id="9" name="Text 5"/>
+          <p:cNvSpPr txBox="1"/>
+          <p:nvPr/>
+        </p:nvSpPr>
+        <p:spPr>
+          <a:xfrm>
+            <a:off x="7225725" y="1627632"/>
+            <a:ext cx="4396299" cy="1133856"/>
+          </a:xfrm>
+          <a:prstGeom prst="rect">
+            <a:avLst/>
+          </a:prstGeom>
+          <a:noFill/>
+          <a:ln/>
+        </p:spPr>
+        <p:txBody>
+          <a:bodyPr wrap="square" lIns="0" tIns="0" rIns="0" bIns="0" rtlCol="0" anchor="ctr"/>
+          <a:lstStyle/>
+          <a:p>
+            <a:pPr indent="0" marL="0">
+              <a:buNone/>
+            </a:pPr>
+            <a:r>
+              <a:rPr lang="en-US" sz="1400" dirty="0">
+                <a:solidFill>
+                  <a:schemeClr val="tx1"/>
+                </a:solidFill>
+              </a:rPr>
+              <a:t>1–2  Pip explores. League-up. Practice walk.</a:t>
+            </a:r>
+            <a:endParaRPr lang="en-US" sz="1400" dirty="0"/>
+          </a:p>
+        </p:txBody>
+      </p:sp>
+      <p:sp>
+        <p:nvSpPr>
+          <p:cNvPr id="10" name="c2"/>
           <p:cNvSpPr/>
           <p:nvPr/>
         </p:nvSpPr>
         <p:spPr>
           <a:xfrm>
-            <a:off x="1554480" y="2194560"/>
-            <a:ext cx="731520" cy="731520"/>
-          </a:xfrm>
-          <a:prstGeom prst="ellipse">
-            <a:avLst/>
-          </a:prstGeom>
-          <a:solidFill>
-            <a:schemeClr val="accent1"/>
-          </a:solidFill>
-          <a:ln/>
-        </p:spPr>
-      </p:sp>
-      <p:sp>
-        <p:nvSpPr>
-          <p:cNvPr id="7" name="Text 5"/>
-          <p:cNvSpPr txBox="1"/>
-          <p:nvPr/>
-        </p:nvSpPr>
-        <p:spPr>
-          <a:xfrm>
-            <a:off x="1554480" y="2286000"/>
-            <a:ext cx="731520" cy="548640"/>
-          </a:xfrm>
-          <a:prstGeom prst="rect">
-            <a:avLst/>
-          </a:prstGeom>
-          <a:noFill/>
-          <a:ln/>
-        </p:spPr>
-        <p:txBody>
-          <a:bodyPr wrap="square" lIns="0" tIns="0" rIns="0" bIns="0" rtlCol="0" anchor="ctr"/>
-          <a:lstStyle/>
-          <a:p>
-            <a:pPr algn="ctr" indent="0" marL="0">
-              <a:buNone/>
-            </a:pPr>
-            <a:r>
-              <a:rPr lang="en-US" sz="2400" b="1" dirty="0">
-                <a:solidFill>
-                  <a:srgbClr val="FFFFFF"/>
-                </a:solidFill>
-              </a:rPr>
-              <a:t>1</a:t>
-            </a:r>
-            <a:endParaRPr lang="en-US" sz="2400" dirty="0"/>
-          </a:p>
-        </p:txBody>
-      </p:sp>
-      <p:sp>
-        <p:nvSpPr>
-          <p:cNvPr id="8" name="Text 6"/>
-          <p:cNvSpPr txBox="1"/>
-          <p:nvPr/>
-        </p:nvSpPr>
-        <p:spPr>
-          <a:xfrm>
-            <a:off x="685800" y="3108960"/>
-            <a:ext cx="2514600" cy="868680"/>
-          </a:xfrm>
-          <a:prstGeom prst="rect">
-            <a:avLst/>
-          </a:prstGeom>
-          <a:noFill/>
-          <a:ln/>
-        </p:spPr>
-        <p:txBody>
-          <a:bodyPr wrap="square" lIns="0" tIns="0" rIns="0" bIns="0" rtlCol="0" anchor="ctr"/>
-          <a:lstStyle/>
-          <a:p>
-            <a:pPr algn="ctr" indent="0" marL="0">
-              <a:buNone/>
-            </a:pPr>
-            <a:r>
-              <a:rPr lang="en-US" sz="2200" b="1" dirty="0">
-                <a:solidFill>
-                  <a:schemeClr val="tx1"/>
-                </a:solidFill>
-              </a:rPr>
-              <a:t>Pip explores</a:t>
-            </a:r>
-            <a:endParaRPr lang="en-US" sz="2200" dirty="0"/>
-          </a:p>
-        </p:txBody>
-      </p:sp>
-      <p:sp>
-        <p:nvSpPr>
-          <p:cNvPr id="9" name="demo-2"/>
-          <p:cNvSpPr/>
-          <p:nvPr/>
-        </p:nvSpPr>
-        <p:spPr>
-          <a:xfrm>
-            <a:off x="3474720" y="1965960"/>
-            <a:ext cx="2788920" cy="2331720"/>
+            <a:off x="7097709" y="2971800"/>
+            <a:ext cx="4652331" cy="1280160"/>
           </a:xfrm>
           <a:prstGeom prst="roundRect">
             <a:avLst>
-              <a:gd name="adj" fmla="val 6275"/>
+              <a:gd name="adj" fmla="val 10000"/>
             </a:avLst>
           </a:prstGeom>
           <a:solidFill>
@@ -3528,7 +3666,7 @@
           <a:effectLst>
             <a:outerShdw sx="100000" sy="100000" kx="0" ky="0" algn="bl" rotWithShape="0" blurRad="101600" dist="25400" dir="5400000">
               <a:srgbClr val="0B1F3A">
-                <a:alpha val="8000"/>
+                <a:alpha val="10000"/>
               </a:srgbClr>
             </a:outerShdw>
           </a:effectLst>
@@ -3536,110 +3674,54 @@
       </p:sp>
       <p:sp>
         <p:nvSpPr>
-          <p:cNvPr id="10" name="n-2"/>
+          <p:cNvPr id="11" name="Text 7"/>
+          <p:cNvSpPr txBox="1"/>
+          <p:nvPr/>
+        </p:nvSpPr>
+        <p:spPr>
+          <a:xfrm>
+            <a:off x="7225725" y="3044952"/>
+            <a:ext cx="4396299" cy="1133856"/>
+          </a:xfrm>
+          <a:prstGeom prst="rect">
+            <a:avLst/>
+          </a:prstGeom>
+          <a:noFill/>
+          <a:ln/>
+        </p:spPr>
+        <p:txBody>
+          <a:bodyPr wrap="square" lIns="0" tIns="0" rIns="0" bIns="0" rtlCol="0" anchor="ctr"/>
+          <a:lstStyle/>
+          <a:p>
+            <a:pPr indent="0" marL="0">
+              <a:buNone/>
+            </a:pPr>
+            <a:r>
+              <a:rPr lang="en-US" sz="1400" dirty="0">
+                <a:solidFill>
+                  <a:schemeClr val="tx1"/>
+                </a:solidFill>
+              </a:rPr>
+              <a:t>3  Pick Bailey Hall. Start the 161 m walk.</a:t>
+            </a:r>
+            <a:endParaRPr lang="en-US" sz="1400" dirty="0"/>
+          </a:p>
+        </p:txBody>
+      </p:sp>
+      <p:sp>
+        <p:nvSpPr>
+          <p:cNvPr id="12" name="c3"/>
           <p:cNvSpPr/>
           <p:nvPr/>
         </p:nvSpPr>
         <p:spPr>
           <a:xfrm>
-            <a:off x="4480560" y="2194560"/>
-            <a:ext cx="731520" cy="731520"/>
-          </a:xfrm>
-          <a:prstGeom prst="ellipse">
-            <a:avLst/>
-          </a:prstGeom>
-          <a:solidFill>
-            <a:schemeClr val="accent1"/>
-          </a:solidFill>
-          <a:ln/>
-        </p:spPr>
-      </p:sp>
-      <p:sp>
-        <p:nvSpPr>
-          <p:cNvPr id="11" name="Text 9"/>
-          <p:cNvSpPr txBox="1"/>
-          <p:nvPr/>
-        </p:nvSpPr>
-        <p:spPr>
-          <a:xfrm>
-            <a:off x="4480560" y="2286000"/>
-            <a:ext cx="731520" cy="548640"/>
-          </a:xfrm>
-          <a:prstGeom prst="rect">
-            <a:avLst/>
-          </a:prstGeom>
-          <a:noFill/>
-          <a:ln/>
-        </p:spPr>
-        <p:txBody>
-          <a:bodyPr wrap="square" lIns="0" tIns="0" rIns="0" bIns="0" rtlCol="0" anchor="ctr"/>
-          <a:lstStyle/>
-          <a:p>
-            <a:pPr algn="ctr" indent="0" marL="0">
-              <a:buNone/>
-            </a:pPr>
-            <a:r>
-              <a:rPr lang="en-US" sz="2400" b="1" dirty="0">
-                <a:solidFill>
-                  <a:srgbClr val="FFFFFF"/>
-                </a:solidFill>
-              </a:rPr>
-              <a:t>2</a:t>
-            </a:r>
-            <a:endParaRPr lang="en-US" sz="2400" dirty="0"/>
-          </a:p>
-        </p:txBody>
-      </p:sp>
-      <p:sp>
-        <p:nvSpPr>
-          <p:cNvPr id="12" name="Text 10"/>
-          <p:cNvSpPr txBox="1"/>
-          <p:nvPr/>
-        </p:nvSpPr>
-        <p:spPr>
-          <a:xfrm>
-            <a:off x="3611880" y="3108960"/>
-            <a:ext cx="2514600" cy="868680"/>
-          </a:xfrm>
-          <a:prstGeom prst="rect">
-            <a:avLst/>
-          </a:prstGeom>
-          <a:noFill/>
-          <a:ln/>
-        </p:spPr>
-        <p:txBody>
-          <a:bodyPr wrap="square" lIns="0" tIns="0" rIns="0" bIns="0" rtlCol="0" anchor="ctr"/>
-          <a:lstStyle/>
-          <a:p>
-            <a:pPr algn="ctr" indent="0" marL="0">
-              <a:buNone/>
-            </a:pPr>
-            <a:r>
-              <a:rPr lang="en-US" sz="2200" b="1" dirty="0">
-                <a:solidFill>
-                  <a:schemeClr val="tx1"/>
-                </a:solidFill>
-              </a:rPr>
-              <a:t>Choose a place</a:t>
-            </a:r>
-            <a:endParaRPr lang="en-US" sz="2200" dirty="0"/>
-          </a:p>
-        </p:txBody>
-      </p:sp>
-      <p:sp>
-        <p:nvSpPr>
-          <p:cNvPr id="13" name="demo-3"/>
-          <p:cNvSpPr/>
-          <p:nvPr/>
-        </p:nvSpPr>
-        <p:spPr>
-          <a:xfrm>
-            <a:off x="6400800" y="1965960"/>
-            <a:ext cx="2788920" cy="2331720"/>
+            <a:off x="7097709" y="4389120"/>
+            <a:ext cx="4652331" cy="1280160"/>
           </a:xfrm>
           <a:prstGeom prst="roundRect">
             <a:avLst>
-              <a:gd name="adj" fmla="val 6275"/>
+              <a:gd name="adj" fmla="val 10000"/>
             </a:avLst>
           </a:prstGeom>
           <a:solidFill>
@@ -3649,7 +3731,7 @@
           <a:effectLst>
             <a:outerShdw sx="100000" sy="100000" kx="0" ky="0" algn="bl" rotWithShape="0" blurRad="101600" dist="25400" dir="5400000">
               <a:srgbClr val="0B1F3A">
-                <a:alpha val="8000"/>
+                <a:alpha val="10000"/>
               </a:srgbClr>
             </a:outerShdw>
           </a:effectLst>
@@ -3657,315 +3739,37 @@
       </p:sp>
       <p:sp>
         <p:nvSpPr>
-          <p:cNvPr id="14" name="n-3"/>
-          <p:cNvSpPr/>
-          <p:nvPr/>
-        </p:nvSpPr>
-        <p:spPr>
-          <a:xfrm>
-            <a:off x="7406640" y="2194560"/>
-            <a:ext cx="731520" cy="731520"/>
-          </a:xfrm>
-          <a:prstGeom prst="ellipse">
-            <a:avLst/>
-          </a:prstGeom>
-          <a:solidFill>
-            <a:schemeClr val="accent1"/>
-          </a:solidFill>
-          <a:ln/>
-        </p:spPr>
-      </p:sp>
-      <p:sp>
-        <p:nvSpPr>
-          <p:cNvPr id="15" name="Text 13"/>
-          <p:cNvSpPr txBox="1"/>
-          <p:nvPr/>
-        </p:nvSpPr>
-        <p:spPr>
-          <a:xfrm>
-            <a:off x="7406640" y="2286000"/>
-            <a:ext cx="731520" cy="548640"/>
-          </a:xfrm>
-          <a:prstGeom prst="rect">
-            <a:avLst/>
-          </a:prstGeom>
-          <a:noFill/>
-          <a:ln/>
-        </p:spPr>
-        <p:txBody>
-          <a:bodyPr wrap="square" lIns="0" tIns="0" rIns="0" bIns="0" rtlCol="0" anchor="ctr"/>
-          <a:lstStyle/>
-          <a:p>
-            <a:pPr algn="ctr" indent="0" marL="0">
-              <a:buNone/>
-            </a:pPr>
-            <a:r>
-              <a:rPr lang="en-US" sz="2400" b="1" dirty="0">
-                <a:solidFill>
-                  <a:srgbClr val="FFFFFF"/>
-                </a:solidFill>
-              </a:rPr>
-              <a:t>3</a:t>
-            </a:r>
-            <a:endParaRPr lang="en-US" sz="2400" dirty="0"/>
-          </a:p>
-        </p:txBody>
-      </p:sp>
-      <p:sp>
-        <p:nvSpPr>
-          <p:cNvPr id="16" name="Text 14"/>
-          <p:cNvSpPr txBox="1"/>
-          <p:nvPr/>
-        </p:nvSpPr>
-        <p:spPr>
-          <a:xfrm>
-            <a:off x="6537960" y="3108960"/>
-            <a:ext cx="2514600" cy="868680"/>
-          </a:xfrm>
-          <a:prstGeom prst="rect">
-            <a:avLst/>
-          </a:prstGeom>
-          <a:noFill/>
-          <a:ln/>
-        </p:spPr>
-        <p:txBody>
-          <a:bodyPr wrap="square" lIns="0" tIns="0" rIns="0" bIns="0" rtlCol="0" anchor="ctr"/>
-          <a:lstStyle/>
-          <a:p>
-            <a:pPr algn="ctr" indent="0" marL="0">
-              <a:buNone/>
-            </a:pPr>
-            <a:r>
-              <a:rPr lang="en-US" sz="2200" b="1" dirty="0">
+          <p:cNvPr id="13" name="Text 9"/>
+          <p:cNvSpPr txBox="1"/>
+          <p:nvPr/>
+        </p:nvSpPr>
+        <p:spPr>
+          <a:xfrm>
+            <a:off x="7225725" y="4462272"/>
+            <a:ext cx="4396299" cy="1133856"/>
+          </a:xfrm>
+          <a:prstGeom prst="rect">
+            <a:avLst/>
+          </a:prstGeom>
+          <a:noFill/>
+          <a:ln/>
+        </p:spPr>
+        <p:txBody>
+          <a:bodyPr wrap="square" lIns="0" tIns="0" rIns="0" bIns="0" rtlCol="0" anchor="ctr"/>
+          <a:lstStyle/>
+          <a:p>
+            <a:pPr indent="0" marL="0">
+              <a:buNone/>
+            </a:pPr>
+            <a:r>
+              <a:rPr lang="en-US" sz="1400" dirty="0">
                 <a:solidFill>
                   <a:schemeClr val="tx1"/>
                 </a:solidFill>
               </a:rPr>
-              <a:t>Start a walk</a:t>
-            </a:r>
-            <a:endParaRPr lang="en-US" sz="2200" dirty="0"/>
-          </a:p>
-        </p:txBody>
-      </p:sp>
-      <p:sp>
-        <p:nvSpPr>
-          <p:cNvPr id="17" name="demo-4"/>
-          <p:cNvSpPr/>
-          <p:nvPr/>
-        </p:nvSpPr>
-        <p:spPr>
-          <a:xfrm>
-            <a:off x="9326880" y="1965960"/>
-            <a:ext cx="2788920" cy="2331720"/>
-          </a:xfrm>
-          <a:prstGeom prst="roundRect">
-            <a:avLst>
-              <a:gd name="adj" fmla="val 6275"/>
-            </a:avLst>
-          </a:prstGeom>
-          <a:solidFill>
-            <a:srgbClr val="FFFFFF"/>
-          </a:solidFill>
-          <a:ln/>
-          <a:effectLst>
-            <a:outerShdw sx="100000" sy="100000" kx="0" ky="0" algn="bl" rotWithShape="0" blurRad="101600" dist="25400" dir="5400000">
-              <a:srgbClr val="0B1F3A">
-                <a:alpha val="8000"/>
-              </a:srgbClr>
-            </a:outerShdw>
-          </a:effectLst>
-        </p:spPr>
-      </p:sp>
-      <p:sp>
-        <p:nvSpPr>
-          <p:cNvPr id="18" name="n-4"/>
-          <p:cNvSpPr/>
-          <p:nvPr/>
-        </p:nvSpPr>
-        <p:spPr>
-          <a:xfrm>
-            <a:off x="10332720" y="2194560"/>
-            <a:ext cx="731520" cy="731520"/>
-          </a:xfrm>
-          <a:prstGeom prst="ellipse">
-            <a:avLst/>
-          </a:prstGeom>
-          <a:solidFill>
-            <a:schemeClr val="accent1"/>
-          </a:solidFill>
-          <a:ln/>
-        </p:spPr>
-      </p:sp>
-      <p:sp>
-        <p:nvSpPr>
-          <p:cNvPr id="19" name="Text 17"/>
-          <p:cNvSpPr txBox="1"/>
-          <p:nvPr/>
-        </p:nvSpPr>
-        <p:spPr>
-          <a:xfrm>
-            <a:off x="10332720" y="2286000"/>
-            <a:ext cx="731520" cy="548640"/>
-          </a:xfrm>
-          <a:prstGeom prst="rect">
-            <a:avLst/>
-          </a:prstGeom>
-          <a:noFill/>
-          <a:ln/>
-        </p:spPr>
-        <p:txBody>
-          <a:bodyPr wrap="square" lIns="0" tIns="0" rIns="0" bIns="0" rtlCol="0" anchor="ctr"/>
-          <a:lstStyle/>
-          <a:p>
-            <a:pPr algn="ctr" indent="0" marL="0">
-              <a:buNone/>
-            </a:pPr>
-            <a:r>
-              <a:rPr lang="en-US" sz="2400" b="1" dirty="0">
-                <a:solidFill>
-                  <a:srgbClr val="FFFFFF"/>
-                </a:solidFill>
-              </a:rPr>
-              <a:t>4</a:t>
-            </a:r>
-            <a:endParaRPr lang="en-US" sz="2400" dirty="0"/>
-          </a:p>
-        </p:txBody>
-      </p:sp>
-      <p:sp>
-        <p:nvSpPr>
-          <p:cNvPr id="20" name="Text 18"/>
-          <p:cNvSpPr txBox="1"/>
-          <p:nvPr/>
-        </p:nvSpPr>
-        <p:spPr>
-          <a:xfrm>
-            <a:off x="9464040" y="3108960"/>
-            <a:ext cx="2514600" cy="868680"/>
-          </a:xfrm>
-          <a:prstGeom prst="rect">
-            <a:avLst/>
-          </a:prstGeom>
-          <a:noFill/>
-          <a:ln/>
-        </p:spPr>
-        <p:txBody>
-          <a:bodyPr wrap="square" lIns="0" tIns="0" rIns="0" bIns="0" rtlCol="0" anchor="ctr"/>
-          <a:lstStyle/>
-          <a:p>
-            <a:pPr algn="ctr" indent="0" marL="0">
-              <a:buNone/>
-            </a:pPr>
-            <a:r>
-              <a:rPr lang="en-US" sz="2200" b="1" dirty="0">
-                <a:solidFill>
-                  <a:schemeClr val="tx1"/>
-                </a:solidFill>
-              </a:rPr>
-              <a:t>Capture</a:t>
-            </a:r>
-            <a:endParaRPr lang="en-US" sz="2200" dirty="0"/>
-          </a:p>
-        </p:txBody>
-      </p:sp>
-      <p:sp>
-        <p:nvSpPr>
-          <p:cNvPr id="21" name="missing-shots"/>
-          <p:cNvSpPr/>
-          <p:nvPr/>
-        </p:nvSpPr>
-        <p:spPr>
-          <a:xfrm>
-            <a:off x="548640" y="4526280"/>
-            <a:ext cx="11109960" cy="1691640"/>
-          </a:xfrm>
-          <a:prstGeom prst="roundRect">
-            <a:avLst>
-              <a:gd name="adj" fmla="val 8649"/>
-            </a:avLst>
-          </a:prstGeom>
-          <a:solidFill>
-            <a:srgbClr val="E8F5FF"/>
-          </a:solidFill>
-          <a:ln/>
-          <a:effectLst>
-            <a:outerShdw sx="100000" sy="100000" kx="0" ky="0" algn="bl" rotWithShape="0" blurRad="101600" dist="25400" dir="5400000">
-              <a:srgbClr val="0B1F3A">
-                <a:alpha val="8000"/>
-              </a:srgbClr>
-            </a:outerShdw>
-          </a:effectLst>
-        </p:spPr>
-      </p:sp>
-      <p:sp>
-        <p:nvSpPr>
-          <p:cNvPr id="22" name="Text 20"/>
-          <p:cNvSpPr txBox="1"/>
-          <p:nvPr/>
-        </p:nvSpPr>
-        <p:spPr>
-          <a:xfrm>
-            <a:off x="777240" y="4709160"/>
-            <a:ext cx="10652760" cy="457200"/>
-          </a:xfrm>
-          <a:prstGeom prst="rect">
-            <a:avLst/>
-          </a:prstGeom>
-          <a:noFill/>
-          <a:ln/>
-        </p:spPr>
-        <p:txBody>
-          <a:bodyPr wrap="square" lIns="0" tIns="0" rIns="0" bIns="0" rtlCol="0" anchor="ctr"/>
-          <a:lstStyle/>
-          <a:p>
-            <a:pPr indent="0" marL="0">
-              <a:buNone/>
-            </a:pPr>
-            <a:r>
-              <a:rPr lang="en-US" sz="2200" b="1" dirty="0">
-                <a:solidFill>
-                  <a:schemeClr val="tx1"/>
-                </a:solidFill>
-              </a:rPr>
-              <a:t>Follow these four taps on the phone.</a:t>
-            </a:r>
-            <a:endParaRPr lang="en-US" sz="2200" dirty="0"/>
-          </a:p>
-        </p:txBody>
-      </p:sp>
-      <p:sp>
-        <p:nvSpPr>
-          <p:cNvPr id="23" name="Text 21"/>
-          <p:cNvSpPr txBox="1"/>
-          <p:nvPr/>
-        </p:nvSpPr>
-        <p:spPr>
-          <a:xfrm>
-            <a:off x="777240" y="5212080"/>
-            <a:ext cx="10652760" cy="731520"/>
-          </a:xfrm>
-          <a:prstGeom prst="rect">
-            <a:avLst/>
-          </a:prstGeom>
-          <a:noFill/>
-          <a:ln/>
-        </p:spPr>
-        <p:txBody>
-          <a:bodyPr wrap="square" lIns="0" tIns="0" rIns="0" bIns="0" rtlCol="0" anchor="ctr"/>
-          <a:lstStyle/>
-          <a:p>
-            <a:pPr indent="0" marL="0">
-              <a:buNone/>
-            </a:pPr>
-            <a:r>
-              <a:rPr lang="en-US" sz="1600" dirty="0">
-                <a:solidFill>
-                  <a:schemeClr val="accent6"/>
-                </a:solidFill>
-              </a:rPr>
-              <a:t>Hide the Expo tools button. If voice is slow, keep going.</a:t>
-            </a:r>
-            <a:endParaRPr lang="en-US" sz="1600" dirty="0"/>
+              <a:t>4  Capture the landmark. Hide Expo tools.</a:t>
+            </a:r>
+            <a:endParaRPr lang="en-US" sz="1400" dirty="0"/>
           </a:p>
         </p:txBody>
       </p:sp>
@@ -4004,8 +3808,8 @@
         </p:nvSpPr>
         <p:spPr>
           <a:xfrm>
-            <a:off x="548640" y="256032"/>
-            <a:ext cx="11064240" cy="658368"/>
+            <a:off x="457200" y="201168"/>
+            <a:ext cx="11247120" cy="566928"/>
           </a:xfrm>
           <a:prstGeom prst="rect">
             <a:avLst/>
@@ -4021,31 +3825,31 @@
               <a:buNone/>
             </a:pPr>
             <a:r>
-              <a:rPr lang="en-US" sz="3600" b="1" dirty="0">
+              <a:rPr lang="en-US" sz="3000" b="1" dirty="0">
                 <a:solidFill>
                   <a:schemeClr val="tx1"/>
                 </a:solidFill>
               </a:rPr>
               <a:t>A phone, a small API, the real world</a:t>
             </a:r>
-            <a:endParaRPr lang="en-US" sz="3600" dirty="0"/>
-          </a:p>
-        </p:txBody>
-      </p:sp>
-      <p:sp>
-        <p:nvSpPr>
-          <p:cNvPr id="3" name="arch-Phone"/>
+            <a:endParaRPr lang="en-US" sz="3000" dirty="0"/>
+          </a:p>
+        </p:txBody>
+      </p:sp>
+      <p:sp>
+        <p:nvSpPr>
+          <p:cNvPr id="3" name="arch-0"/>
           <p:cNvSpPr/>
           <p:nvPr/>
         </p:nvSpPr>
         <p:spPr>
           <a:xfrm>
-            <a:off x="640080" y="1371600"/>
-            <a:ext cx="3246120" cy="2468880"/>
+            <a:off x="502920" y="1097280"/>
+            <a:ext cx="3383280" cy="2240280"/>
           </a:xfrm>
           <a:prstGeom prst="roundRect">
             <a:avLst>
-              <a:gd name="adj" fmla="val 5926"/>
+              <a:gd name="adj" fmla="val 5714"/>
             </a:avLst>
           </a:prstGeom>
           <a:solidFill>
@@ -4055,7 +3859,7 @@
           <a:effectLst>
             <a:outerShdw sx="100000" sy="100000" kx="0" ky="0" algn="bl" rotWithShape="0" blurRad="101600" dist="25400" dir="5400000">
               <a:srgbClr val="0B1F3A">
-                <a:alpha val="8000"/>
+                <a:alpha val="10000"/>
               </a:srgbClr>
             </a:outerShdw>
           </a:effectLst>
@@ -4069,8 +3873,8 @@
         </p:nvSpPr>
         <p:spPr>
           <a:xfrm>
-            <a:off x="822960" y="1600200"/>
-            <a:ext cx="2880360" cy="548640"/>
+            <a:off x="704088" y="1280160"/>
+            <a:ext cx="2971800" cy="457200"/>
           </a:xfrm>
           <a:prstGeom prst="rect">
             <a:avLst/>
@@ -4086,14 +3890,14 @@
               <a:buNone/>
             </a:pPr>
             <a:r>
-              <a:rPr lang="en-US" sz="2600" b="1" dirty="0">
+              <a:rPr lang="en-US" sz="2400" b="1" dirty="0">
                 <a:solidFill>
                   <a:schemeClr val="tx1"/>
                 </a:solidFill>
               </a:rPr>
               <a:t>Phone</a:t>
             </a:r>
-            <a:endParaRPr lang="en-US" sz="2600" dirty="0"/>
+            <a:endParaRPr lang="en-US" sz="2400" dirty="0"/>
           </a:p>
         </p:txBody>
       </p:sp>
@@ -4105,8 +3909,8 @@
         </p:nvSpPr>
         <p:spPr>
           <a:xfrm>
-            <a:off x="822960" y="2286000"/>
-            <a:ext cx="2880360" cy="1234440"/>
+            <a:off x="704088" y="1874520"/>
+            <a:ext cx="2971800" cy="1188720"/>
           </a:xfrm>
           <a:prstGeom prst="rect">
             <a:avLst/>
@@ -4149,14 +3953,14 @@
       </p:sp>
       <p:sp>
         <p:nvSpPr>
-          <p:cNvPr id="6" name="arrow-0"/>
-          <p:cNvSpPr txBox="1"/>
-          <p:nvPr/>
-        </p:nvSpPr>
-        <p:spPr>
-          <a:xfrm>
-            <a:off x="3840480" y="2194560"/>
-            <a:ext cx="685800" cy="640080"/>
+          <p:cNvPr id="6" name="Text 4"/>
+          <p:cNvSpPr txBox="1"/>
+          <p:nvPr/>
+        </p:nvSpPr>
+        <p:spPr>
+          <a:xfrm>
+            <a:off x="3749040" y="1920240"/>
+            <a:ext cx="640080" cy="502920"/>
           </a:xfrm>
           <a:prstGeom prst="rect">
             <a:avLst/>
@@ -4172,41 +3976,41 @@
               <a:buNone/>
             </a:pPr>
             <a:r>
-              <a:rPr lang="en-US" sz="3200" b="1" dirty="0">
+              <a:rPr lang="en-US" sz="2800" b="1" dirty="0">
                 <a:solidFill>
                   <a:schemeClr val="accent1"/>
                 </a:solidFill>
               </a:rPr>
               <a:t>→</a:t>
             </a:r>
-            <a:endParaRPr lang="en-US" sz="3200" dirty="0"/>
-          </a:p>
-        </p:txBody>
-      </p:sp>
-      <p:sp>
-        <p:nvSpPr>
-          <p:cNvPr id="7" name="arch-API"/>
+            <a:endParaRPr lang="en-US" sz="2800" dirty="0"/>
+          </a:p>
+        </p:txBody>
+      </p:sp>
+      <p:sp>
+        <p:nvSpPr>
+          <p:cNvPr id="7" name="arch-1"/>
           <p:cNvSpPr/>
           <p:nvPr/>
         </p:nvSpPr>
         <p:spPr>
           <a:xfrm>
-            <a:off x="4480560" y="1371600"/>
-            <a:ext cx="3246120" cy="2468880"/>
+            <a:off x="4389120" y="1097280"/>
+            <a:ext cx="3383280" cy="2240280"/>
           </a:xfrm>
           <a:prstGeom prst="roundRect">
             <a:avLst>
-              <a:gd name="adj" fmla="val 5926"/>
+              <a:gd name="adj" fmla="val 5714"/>
             </a:avLst>
           </a:prstGeom>
           <a:solidFill>
-            <a:schemeClr val="tx2"/>
+            <a:srgbClr val="0B1F3A"/>
           </a:solidFill>
           <a:ln/>
           <a:effectLst>
             <a:outerShdw sx="100000" sy="100000" kx="0" ky="0" algn="bl" rotWithShape="0" blurRad="101600" dist="25400" dir="5400000">
               <a:srgbClr val="0B1F3A">
-                <a:alpha val="8000"/>
+                <a:alpha val="10000"/>
               </a:srgbClr>
             </a:outerShdw>
           </a:effectLst>
@@ -4220,8 +4024,8 @@
         </p:nvSpPr>
         <p:spPr>
           <a:xfrm>
-            <a:off x="4663440" y="1600200"/>
-            <a:ext cx="2880360" cy="548640"/>
+            <a:off x="4590288" y="1280160"/>
+            <a:ext cx="2971800" cy="457200"/>
           </a:xfrm>
           <a:prstGeom prst="rect">
             <a:avLst/>
@@ -4237,14 +4041,14 @@
               <a:buNone/>
             </a:pPr>
             <a:r>
-              <a:rPr lang="en-US" sz="2600" b="1" dirty="0">
+              <a:rPr lang="en-US" sz="2400" b="1" dirty="0">
                 <a:solidFill>
                   <a:schemeClr val="accent3"/>
                 </a:solidFill>
               </a:rPr>
               <a:t>API</a:t>
             </a:r>
-            <a:endParaRPr lang="en-US" sz="2600" dirty="0"/>
+            <a:endParaRPr lang="en-US" sz="2400" dirty="0"/>
           </a:p>
         </p:txBody>
       </p:sp>
@@ -4256,8 +4060,8 @@
         </p:nvSpPr>
         <p:spPr>
           <a:xfrm>
-            <a:off x="4663440" y="2286000"/>
-            <a:ext cx="2880360" cy="1234440"/>
+            <a:off x="4590288" y="1874520"/>
+            <a:ext cx="2971800" cy="1188720"/>
           </a:xfrm>
           <a:prstGeom prst="rect">
             <a:avLst/>
@@ -4300,14 +4104,14 @@
       </p:sp>
       <p:sp>
         <p:nvSpPr>
-          <p:cNvPr id="10" name="arrow-1"/>
-          <p:cNvSpPr txBox="1"/>
-          <p:nvPr/>
-        </p:nvSpPr>
-        <p:spPr>
-          <a:xfrm>
-            <a:off x="7680960" y="2194560"/>
-            <a:ext cx="685800" cy="640080"/>
+          <p:cNvPr id="10" name="Text 8"/>
+          <p:cNvSpPr txBox="1"/>
+          <p:nvPr/>
+        </p:nvSpPr>
+        <p:spPr>
+          <a:xfrm>
+            <a:off x="7635240" y="1920240"/>
+            <a:ext cx="640080" cy="502920"/>
           </a:xfrm>
           <a:prstGeom prst="rect">
             <a:avLst/>
@@ -4323,31 +4127,31 @@
               <a:buNone/>
             </a:pPr>
             <a:r>
-              <a:rPr lang="en-US" sz="3200" b="1" dirty="0">
+              <a:rPr lang="en-US" sz="2800" b="1" dirty="0">
                 <a:solidFill>
                   <a:schemeClr val="accent1"/>
                 </a:solidFill>
               </a:rPr>
               <a:t>→</a:t>
             </a:r>
-            <a:endParaRPr lang="en-US" sz="3200" dirty="0"/>
-          </a:p>
-        </p:txBody>
-      </p:sp>
-      <p:sp>
-        <p:nvSpPr>
-          <p:cNvPr id="11" name="arch-World"/>
+            <a:endParaRPr lang="en-US" sz="2800" dirty="0"/>
+          </a:p>
+        </p:txBody>
+      </p:sp>
+      <p:sp>
+        <p:nvSpPr>
+          <p:cNvPr id="11" name="arch-2"/>
           <p:cNvSpPr/>
           <p:nvPr/>
         </p:nvSpPr>
         <p:spPr>
           <a:xfrm>
-            <a:off x="8321040" y="1371600"/>
-            <a:ext cx="3246120" cy="2468880"/>
+            <a:off x="8275320" y="1097280"/>
+            <a:ext cx="3383280" cy="2240280"/>
           </a:xfrm>
           <a:prstGeom prst="roundRect">
             <a:avLst>
-              <a:gd name="adj" fmla="val 5926"/>
+              <a:gd name="adj" fmla="val 5714"/>
             </a:avLst>
           </a:prstGeom>
           <a:solidFill>
@@ -4357,7 +4161,7 @@
           <a:effectLst>
             <a:outerShdw sx="100000" sy="100000" kx="0" ky="0" algn="bl" rotWithShape="0" blurRad="101600" dist="25400" dir="5400000">
               <a:srgbClr val="0B1F3A">
-                <a:alpha val="8000"/>
+                <a:alpha val="10000"/>
               </a:srgbClr>
             </a:outerShdw>
           </a:effectLst>
@@ -4371,8 +4175,8 @@
         </p:nvSpPr>
         <p:spPr>
           <a:xfrm>
-            <a:off x="8503920" y="1600200"/>
-            <a:ext cx="2880360" cy="548640"/>
+            <a:off x="8476488" y="1280160"/>
+            <a:ext cx="2971800" cy="457200"/>
           </a:xfrm>
           <a:prstGeom prst="rect">
             <a:avLst/>
@@ -4388,14 +4192,14 @@
               <a:buNone/>
             </a:pPr>
             <a:r>
-              <a:rPr lang="en-US" sz="2600" b="1" dirty="0">
+              <a:rPr lang="en-US" sz="2400" b="1" dirty="0">
                 <a:solidFill>
                   <a:schemeClr val="tx1"/>
                 </a:solidFill>
               </a:rPr>
               <a:t>World</a:t>
             </a:r>
-            <a:endParaRPr lang="en-US" sz="2600" dirty="0"/>
+            <a:endParaRPr lang="en-US" sz="2400" dirty="0"/>
           </a:p>
         </p:txBody>
       </p:sp>
@@ -4407,8 +4211,8 @@
         </p:nvSpPr>
         <p:spPr>
           <a:xfrm>
-            <a:off x="8503920" y="2286000"/>
-            <a:ext cx="2880360" cy="1234440"/>
+            <a:off x="8476488" y="1874520"/>
+            <a:ext cx="2971800" cy="1188720"/>
           </a:xfrm>
           <a:prstGeom prst="rect">
             <a:avLst/>
@@ -4451,14 +4255,14 @@
       </p:sp>
       <p:sp>
         <p:nvSpPr>
-          <p:cNvPr id="14" name="fact-dot-0"/>
+          <p:cNvPr id="14" name="f-0"/>
           <p:cNvSpPr/>
           <p:nvPr/>
         </p:nvSpPr>
         <p:spPr>
           <a:xfrm>
-            <a:off x="685800" y="4270248"/>
-            <a:ext cx="256032" cy="256032"/>
+            <a:off x="594360" y="3822192"/>
+            <a:ext cx="292608" cy="292608"/>
           </a:xfrm>
           <a:prstGeom prst="ellipse">
             <a:avLst/>
@@ -4477,8 +4281,8 @@
         </p:nvSpPr>
         <p:spPr>
           <a:xfrm>
-            <a:off x="1097280" y="4160520"/>
-            <a:ext cx="10424160" cy="502920"/>
+            <a:off x="1051560" y="3657600"/>
+            <a:ext cx="10515600" cy="640080"/>
           </a:xfrm>
           <a:prstGeom prst="rect">
             <a:avLst/>
@@ -4507,14 +4311,14 @@
       </p:sp>
       <p:sp>
         <p:nvSpPr>
-          <p:cNvPr id="16" name="fact-dot-1"/>
+          <p:cNvPr id="16" name="f-1"/>
           <p:cNvSpPr/>
           <p:nvPr/>
         </p:nvSpPr>
         <p:spPr>
           <a:xfrm>
-            <a:off x="685800" y="4910328"/>
-            <a:ext cx="256032" cy="256032"/>
+            <a:off x="594360" y="4599432"/>
+            <a:ext cx="292608" cy="292608"/>
           </a:xfrm>
           <a:prstGeom prst="ellipse">
             <a:avLst/>
@@ -4533,8 +4337,8 @@
         </p:nvSpPr>
         <p:spPr>
           <a:xfrm>
-            <a:off x="1097280" y="4800600"/>
-            <a:ext cx="10424160" cy="502920"/>
+            <a:off x="1051560" y="4434840"/>
+            <a:ext cx="10515600" cy="640080"/>
           </a:xfrm>
           <a:prstGeom prst="rect">
             <a:avLst/>
@@ -4563,14 +4367,14 @@
       </p:sp>
       <p:sp>
         <p:nvSpPr>
-          <p:cNvPr id="18" name="fact-dot-2"/>
+          <p:cNvPr id="18" name="f-2"/>
           <p:cNvSpPr/>
           <p:nvPr/>
         </p:nvSpPr>
         <p:spPr>
           <a:xfrm>
-            <a:off x="685800" y="5550408"/>
-            <a:ext cx="256032" cy="256032"/>
+            <a:off x="594360" y="5376672"/>
+            <a:ext cx="292608" cy="292608"/>
           </a:xfrm>
           <a:prstGeom prst="ellipse">
             <a:avLst/>
@@ -4589,8 +4393,8 @@
         </p:nvSpPr>
         <p:spPr>
           <a:xfrm>
-            <a:off x="1097280" y="5440680"/>
-            <a:ext cx="10424160" cy="502920"/>
+            <a:off x="1051560" y="5212080"/>
+            <a:ext cx="10515600" cy="640080"/>
           </a:xfrm>
           <a:prstGeom prst="rect">
             <a:avLst/>
@@ -4652,8 +4456,8 @@
         </p:nvSpPr>
         <p:spPr>
           <a:xfrm>
-            <a:off x="548640" y="256032"/>
-            <a:ext cx="11064240" cy="658368"/>
+            <a:off x="457200" y="201168"/>
+            <a:ext cx="11247120" cy="566928"/>
           </a:xfrm>
           <a:prstGeom prst="rect">
             <a:avLst/>
@@ -4669,49 +4473,20 @@
               <a:buNone/>
             </a:pPr>
             <a:r>
-              <a:rPr lang="en-US" sz="3600" b="1" dirty="0">
+              <a:rPr lang="en-US" sz="3000" b="1" dirty="0">
                 <a:solidFill>
                   <a:schemeClr val="tx1"/>
                 </a:solidFill>
               </a:rPr>
-              <a:t>Walking becomes play</a:t>
-            </a:r>
-            <a:endParaRPr lang="en-US" sz="3600" dirty="0"/>
-          </a:p>
-        </p:txBody>
-      </p:sp>
-      <p:sp>
-        <p:nvSpPr>
-          <p:cNvPr id="3" name="special-0"/>
-          <p:cNvSpPr/>
-          <p:nvPr/>
-        </p:nvSpPr>
-        <p:spPr>
-          <a:xfrm>
-            <a:off x="502920" y="1097280"/>
-            <a:ext cx="3657600" cy="3794760"/>
-          </a:xfrm>
-          <a:prstGeom prst="roundRect">
-            <a:avLst>
-              <a:gd name="adj" fmla="val 4000"/>
-            </a:avLst>
-          </a:prstGeom>
-          <a:solidFill>
-            <a:srgbClr val="FFFFFF"/>
-          </a:solidFill>
-          <a:ln/>
-          <a:effectLst>
-            <a:outerShdw sx="100000" sy="100000" kx="0" ky="0" algn="bl" rotWithShape="0" blurRad="101600" dist="25400" dir="5400000">
-              <a:srgbClr val="0B1F3A">
-                <a:alpha val="8000"/>
-              </a:srgbClr>
-            </a:outerShdw>
-          </a:effectLst>
-        </p:spPr>
+              <a:t>Walking earns creatures and landmarks</a:t>
+            </a:r>
+            <a:endParaRPr lang="en-US" sz="3000" dirty="0"/>
+          </a:p>
+        </p:txBody>
       </p:sp>
       <p:pic>
         <p:nvPicPr>
-          <p:cNvPr id="4" name="special-art-0" descr="G:\broswer download\big-red-hacks2026\mobile\assets\splash-icon.png">    </p:cNvPr>
+          <p:cNvPr id="3" name="egg" descr="G:\broswer download\big-red-hacks2026\docs\presentation\app_images\C2EA70B0-0CD6-4D92-AAFE-8EC1C33A2133.jpg">    </p:cNvPr>
           <p:cNvPicPr>
             <a:picLocks noChangeAspect="1"/>
           </p:cNvPicPr>
@@ -4725,118 +4500,17 @@
         </p:blipFill>
         <p:spPr>
           <a:xfrm>
-            <a:off x="1600200" y="1280160"/>
-            <a:ext cx="1417320" cy="1417320"/>
+            <a:off x="411480" y="960120"/>
+            <a:ext cx="3246120" cy="2877365"/>
           </a:xfrm>
           <a:prstGeom prst="rect">
             <a:avLst/>
           </a:prstGeom>
         </p:spPr>
       </p:pic>
-      <p:sp>
-        <p:nvSpPr>
-          <p:cNvPr id="5" name="Text 2"/>
-          <p:cNvSpPr txBox="1"/>
-          <p:nvPr/>
-        </p:nvSpPr>
-        <p:spPr>
-          <a:xfrm>
-            <a:off x="704088" y="2834640"/>
-            <a:ext cx="3246120" cy="640080"/>
-          </a:xfrm>
-          <a:prstGeom prst="rect">
-            <a:avLst/>
-          </a:prstGeom>
-          <a:noFill/>
-          <a:ln/>
-        </p:spPr>
-        <p:txBody>
-          <a:bodyPr wrap="square" lIns="0" tIns="0" rIns="0" bIns="0" rtlCol="0" anchor="ctr"/>
-          <a:lstStyle/>
-          <a:p>
-            <a:pPr indent="0" marL="0">
-              <a:buNone/>
-            </a:pPr>
-            <a:r>
-              <a:rPr lang="en-US" sz="2000" b="1" dirty="0">
-                <a:solidFill>
-                  <a:schemeClr val="tx1"/>
-                </a:solidFill>
-              </a:rPr>
-              <a:t>The map is a trail</a:t>
-            </a:r>
-            <a:endParaRPr lang="en-US" sz="2000" dirty="0"/>
-          </a:p>
-        </p:txBody>
-      </p:sp>
-      <p:sp>
-        <p:nvSpPr>
-          <p:cNvPr id="6" name="Text 3"/>
-          <p:cNvSpPr txBox="1"/>
-          <p:nvPr/>
-        </p:nvSpPr>
-        <p:spPr>
-          <a:xfrm>
-            <a:off x="704088" y="3520440"/>
-            <a:ext cx="3246120" cy="1097280"/>
-          </a:xfrm>
-          <a:prstGeom prst="rect">
-            <a:avLst/>
-          </a:prstGeom>
-          <a:noFill/>
-          <a:ln/>
-        </p:spPr>
-        <p:txBody>
-          <a:bodyPr wrap="square" lIns="0" tIns="0" rIns="0" bIns="0" rtlCol="0" anchor="ctr"/>
-          <a:lstStyle/>
-          <a:p>
-            <a:pPr indent="0" marL="0">
-              <a:buNone/>
-            </a:pPr>
-            <a:r>
-              <a:rPr lang="en-US" sz="1600" dirty="0">
-                <a:solidFill>
-                  <a:schemeClr val="accent6"/>
-                </a:solidFill>
-              </a:rPr>
-              <a:t>A blooming path and a squad, not only a blue line.</a:t>
-            </a:r>
-            <a:endParaRPr lang="en-US" sz="1600" dirty="0"/>
-          </a:p>
-        </p:txBody>
-      </p:sp>
-      <p:sp>
-        <p:nvSpPr>
-          <p:cNvPr id="7" name="special-1"/>
-          <p:cNvSpPr/>
-          <p:nvPr/>
-        </p:nvSpPr>
-        <p:spPr>
-          <a:xfrm>
-            <a:off x="4343400" y="1097280"/>
-            <a:ext cx="3657600" cy="3794760"/>
-          </a:xfrm>
-          <a:prstGeom prst="roundRect">
-            <a:avLst>
-              <a:gd name="adj" fmla="val 4000"/>
-            </a:avLst>
-          </a:prstGeom>
-          <a:solidFill>
-            <a:srgbClr val="FFFFFF"/>
-          </a:solidFill>
-          <a:ln/>
-          <a:effectLst>
-            <a:outerShdw sx="100000" sy="100000" kx="0" ky="0" algn="bl" rotWithShape="0" blurRad="101600" dist="25400" dir="5400000">
-              <a:srgbClr val="0B1F3A">
-                <a:alpha val="8000"/>
-              </a:srgbClr>
-            </a:outerShdw>
-          </a:effectLst>
-        </p:spPr>
-      </p:sp>
       <p:pic>
         <p:nvPicPr>
-          <p:cNvPr id="8" name="special-art-1" descr="G:\broswer download\big-red-hacks2026\mobile\assets\badges\gold.png">    </p:cNvPr>
+          <p:cNvPr id="4" name="mochi" descr="G:\broswer download\big-red-hacks2026\docs\presentation\app_images\0B82DD1F-6522-46CD-8774-F7C4336505D4.jpg">    </p:cNvPr>
           <p:cNvPicPr>
             <a:picLocks noChangeAspect="1"/>
           </p:cNvPicPr>
@@ -4850,8 +4524,8 @@
         </p:blipFill>
         <p:spPr>
           <a:xfrm>
-            <a:off x="5440680" y="1280160"/>
-            <a:ext cx="1417320" cy="1417320"/>
+            <a:off x="3794760" y="960120"/>
+            <a:ext cx="3063240" cy="3807460"/>
           </a:xfrm>
           <a:prstGeom prst="rect">
             <a:avLst/>
@@ -4860,108 +4534,29 @@
       </p:pic>
       <p:sp>
         <p:nvSpPr>
-          <p:cNvPr id="9" name="Text 5"/>
-          <p:cNvSpPr txBox="1"/>
-          <p:nvPr/>
-        </p:nvSpPr>
-        <p:spPr>
-          <a:xfrm>
-            <a:off x="4544568" y="2834640"/>
-            <a:ext cx="3246120" cy="640080"/>
-          </a:xfrm>
-          <a:prstGeom prst="rect">
-            <a:avLst/>
-          </a:prstGeom>
-          <a:noFill/>
-          <a:ln/>
-        </p:spPr>
-        <p:txBody>
-          <a:bodyPr wrap="square" lIns="0" tIns="0" rIns="0" bIns="0" rtlCol="0" anchor="ctr"/>
-          <a:lstStyle/>
-          <a:p>
-            <a:pPr indent="0" marL="0">
-              <a:buNone/>
-            </a:pPr>
-            <a:r>
-              <a:rPr lang="en-US" sz="2000" b="1" dirty="0">
-                <a:solidFill>
-                  <a:schemeClr val="tx1"/>
-                </a:solidFill>
-              </a:rPr>
-              <a:t>Steps earn creatures</a:t>
-            </a:r>
-            <a:endParaRPr lang="en-US" sz="2000" dirty="0"/>
-          </a:p>
-        </p:txBody>
-      </p:sp>
-      <p:sp>
-        <p:nvSpPr>
-          <p:cNvPr id="10" name="Text 6"/>
-          <p:cNvSpPr txBox="1"/>
-          <p:nvPr/>
-        </p:nvSpPr>
-        <p:spPr>
-          <a:xfrm>
-            <a:off x="4544568" y="3520440"/>
-            <a:ext cx="3246120" cy="1097280"/>
-          </a:xfrm>
-          <a:prstGeom prst="rect">
-            <a:avLst/>
-          </a:prstGeom>
-          <a:noFill/>
-          <a:ln/>
-        </p:spPr>
-        <p:txBody>
-          <a:bodyPr wrap="square" lIns="0" tIns="0" rIns="0" bIns="0" rtlCol="0" anchor="ctr"/>
-          <a:lstStyle/>
-          <a:p>
-            <a:pPr indent="0" marL="0">
-              <a:buNone/>
-            </a:pPr>
-            <a:r>
-              <a:rPr lang="en-US" sz="1600" dirty="0">
-                <a:solidFill>
-                  <a:schemeClr val="accent6"/>
-                </a:solidFill>
-              </a:rPr>
-              <a:t>Eggs, ranks, and captures — completable in Demo Walk.</a:t>
-            </a:r>
-            <a:endParaRPr lang="en-US" sz="1600" dirty="0"/>
-          </a:p>
-        </p:txBody>
-      </p:sp>
-      <p:sp>
-        <p:nvSpPr>
-          <p:cNvPr id="11" name="special-2"/>
+          <p:cNvPr id="5" name="captured-frame"/>
           <p:cNvSpPr/>
           <p:nvPr/>
         </p:nvSpPr>
         <p:spPr>
           <a:xfrm>
-            <a:off x="8183880" y="1097280"/>
-            <a:ext cx="3657600" cy="3794760"/>
+            <a:off x="6967728" y="886968"/>
+            <a:ext cx="2420049" cy="4352544"/>
           </a:xfrm>
           <a:prstGeom prst="roundRect">
             <a:avLst>
-              <a:gd name="adj" fmla="val 4000"/>
+              <a:gd name="adj" fmla="val 6801"/>
             </a:avLst>
           </a:prstGeom>
           <a:solidFill>
-            <a:srgbClr val="FFFFFF"/>
-          </a:solidFill>
-          <a:ln/>
-          <a:effectLst>
-            <a:outerShdw sx="100000" sy="100000" kx="0" ky="0" algn="bl" rotWithShape="0" blurRad="101600" dist="25400" dir="5400000">
-              <a:srgbClr val="0B1F3A">
-                <a:alpha val="8000"/>
-              </a:srgbClr>
-            </a:outerShdw>
-          </a:effectLst>
+            <a:srgbClr val="0B1F3A"/>
+          </a:solidFill>
+          <a:ln/>
         </p:spPr>
       </p:sp>
       <p:pic>
         <p:nvPicPr>
-          <p:cNvPr id="12" name="special-art-2" descr="G:\broswer download\big-red-hacks2026\docs\presentation\assets\scout.png">    </p:cNvPr>
+          <p:cNvPr id="6" name="captured" descr="G:\broswer download\big-red-hacks2026\docs\presentation\app_images\D8BE4252-56A8-4B93-B944-9D82B404BB87.jpg">    </p:cNvPr>
           <p:cNvPicPr>
             <a:picLocks noChangeAspect="1"/>
           </p:cNvPicPr>
@@ -4975,8 +4570,8 @@
         </p:blipFill>
         <p:spPr>
           <a:xfrm>
-            <a:off x="9281160" y="1280160"/>
-            <a:ext cx="1417320" cy="1417320"/>
+            <a:off x="7040880" y="960120"/>
+            <a:ext cx="2273745" cy="4206240"/>
           </a:xfrm>
           <a:prstGeom prst="rect">
             <a:avLst/>
@@ -4985,100 +4580,28 @@
       </p:pic>
       <p:sp>
         <p:nvSpPr>
-          <p:cNvPr id="13" name="Text 8"/>
-          <p:cNvSpPr txBox="1"/>
-          <p:nvPr/>
-        </p:nvSpPr>
-        <p:spPr>
-          <a:xfrm>
-            <a:off x="8385048" y="2834640"/>
-            <a:ext cx="3246120" cy="640080"/>
-          </a:xfrm>
-          <a:prstGeom prst="rect">
-            <a:avLst/>
-          </a:prstGeom>
-          <a:noFill/>
-          <a:ln/>
-        </p:spPr>
-        <p:txBody>
-          <a:bodyPr wrap="square" lIns="0" tIns="0" rIns="0" bIns="0" rtlCol="0" anchor="ctr"/>
-          <a:lstStyle/>
-          <a:p>
-            <a:pPr indent="0" marL="0">
-              <a:buNone/>
-            </a:pPr>
-            <a:r>
-              <a:rPr lang="en-US" sz="2000" b="1" dirty="0">
-                <a:solidFill>
-                  <a:schemeClr val="tx1"/>
-                </a:solidFill>
-              </a:rPr>
-              <a:t>It continues in iMessage</a:t>
-            </a:r>
-            <a:endParaRPr lang="en-US" sz="2000" dirty="0"/>
-          </a:p>
-        </p:txBody>
-      </p:sp>
-      <p:sp>
-        <p:nvSpPr>
-          <p:cNvPr id="14" name="Text 9"/>
-          <p:cNvSpPr txBox="1"/>
-          <p:nvPr/>
-        </p:nvSpPr>
-        <p:spPr>
-          <a:xfrm>
-            <a:off x="8385048" y="3520440"/>
-            <a:ext cx="3246120" cy="1097280"/>
-          </a:xfrm>
-          <a:prstGeom prst="rect">
-            <a:avLst/>
-          </a:prstGeom>
-          <a:noFill/>
-          <a:ln/>
-        </p:spPr>
-        <p:txBody>
-          <a:bodyPr wrap="square" lIns="0" tIns="0" rIns="0" bIns="0" rtlCol="0" anchor="ctr"/>
-          <a:lstStyle/>
-          <a:p>
-            <a:pPr indent="0" marL="0">
-              <a:buNone/>
-            </a:pPr>
-            <a:r>
-              <a:rPr lang="en-US" sz="1600" dirty="0">
-                <a:solidFill>
-                  <a:schemeClr val="accent6"/>
-                </a:solidFill>
-              </a:rPr>
-              <a:t>Same squad over Photon. Terminal today; iMessage with keys.</a:t>
-            </a:r>
-            <a:endParaRPr lang="en-US" sz="1600" dirty="0"/>
-          </a:p>
-        </p:txBody>
-      </p:sp>
-      <p:sp>
-        <p:nvSpPr>
-          <p:cNvPr id="15" name="working"/>
+          <p:cNvPr id="7" name="egg-c"/>
           <p:cNvSpPr/>
           <p:nvPr/>
         </p:nvSpPr>
         <p:spPr>
           <a:xfrm>
-            <a:off x="502920" y="5074920"/>
-            <a:ext cx="5532120" cy="1188720"/>
+            <a:off x="411480" y="3947213"/>
+            <a:ext cx="3246120" cy="1051560"/>
           </a:xfrm>
           <a:prstGeom prst="roundRect">
             <a:avLst>
-              <a:gd name="adj" fmla="val 12308"/>
+              <a:gd name="adj" fmla="val 12174"/>
             </a:avLst>
           </a:prstGeom>
           <a:solidFill>
-            <a:schemeClr val="bg2"/>
+            <a:srgbClr val="FFFFFF"/>
           </a:solidFill>
           <a:ln/>
           <a:effectLst>
             <a:outerShdw sx="100000" sy="100000" kx="0" ky="0" algn="bl" rotWithShape="0" blurRad="101600" dist="25400" dir="5400000">
               <a:srgbClr val="0B1F3A">
-                <a:alpha val="8000"/>
+                <a:alpha val="10000"/>
               </a:srgbClr>
             </a:outerShdw>
           </a:effectLst>
@@ -5086,14 +4609,14 @@
       </p:sp>
       <p:sp>
         <p:nvSpPr>
-          <p:cNvPr id="16" name="Text 11"/>
-          <p:cNvSpPr txBox="1"/>
-          <p:nvPr/>
-        </p:nvSpPr>
-        <p:spPr>
-          <a:xfrm>
-            <a:off x="685800" y="5257800"/>
-            <a:ext cx="5166360" cy="822960"/>
+          <p:cNvPr id="8" name="Text 3"/>
+          <p:cNvSpPr txBox="1"/>
+          <p:nvPr/>
+        </p:nvSpPr>
+        <p:spPr>
+          <a:xfrm>
+            <a:off x="539496" y="4020365"/>
+            <a:ext cx="2990088" cy="905256"/>
           </a:xfrm>
           <a:prstGeom prst="rect">
             <a:avLst/>
@@ -5109,41 +4632,41 @@
               <a:buNone/>
             </a:pPr>
             <a:r>
-              <a:rPr lang="en-US" sz="1600" dirty="0">
+              <a:rPr lang="en-US" sz="1400" dirty="0">
                 <a:solidFill>
                   <a:schemeClr val="tx1"/>
                 </a:solidFill>
               </a:rPr>
-              <a:t>Working  ·  ISS overhead can boost rare hatches.</a:t>
-            </a:r>
-            <a:endParaRPr lang="en-US" sz="1600" dirty="0"/>
-          </a:p>
-        </p:txBody>
-      </p:sp>
-      <p:sp>
-        <p:nvSpPr>
-          <p:cNvPr id="17" name="later"/>
+              <a:t>An egg fills as you walk. Demo walks on.</a:t>
+            </a:r>
+            <a:endParaRPr lang="en-US" sz="1400" dirty="0"/>
+          </a:p>
+        </p:txBody>
+      </p:sp>
+      <p:sp>
+        <p:nvSpPr>
+          <p:cNvPr id="9" name="mochi-c"/>
           <p:cNvSpPr/>
           <p:nvPr/>
         </p:nvSpPr>
         <p:spPr>
           <a:xfrm>
-            <a:off x="6217920" y="5074920"/>
-            <a:ext cx="5440680" cy="1188720"/>
+            <a:off x="3794760" y="4877308"/>
+            <a:ext cx="3063240" cy="1051560"/>
           </a:xfrm>
           <a:prstGeom prst="roundRect">
             <a:avLst>
-              <a:gd name="adj" fmla="val 12308"/>
+              <a:gd name="adj" fmla="val 12174"/>
             </a:avLst>
           </a:prstGeom>
           <a:solidFill>
-            <a:srgbClr val="E8F5FF"/>
+            <a:srgbClr val="FFFFFF"/>
           </a:solidFill>
           <a:ln/>
           <a:effectLst>
             <a:outerShdw sx="100000" sy="100000" kx="0" ky="0" algn="bl" rotWithShape="0" blurRad="101600" dist="25400" dir="5400000">
               <a:srgbClr val="0B1F3A">
-                <a:alpha val="8000"/>
+                <a:alpha val="10000"/>
               </a:srgbClr>
             </a:outerShdw>
           </a:effectLst>
@@ -5151,14 +4674,14 @@
       </p:sp>
       <p:sp>
         <p:nvSpPr>
-          <p:cNvPr id="18" name="Text 13"/>
-          <p:cNvSpPr txBox="1"/>
-          <p:nvPr/>
-        </p:nvSpPr>
-        <p:spPr>
-          <a:xfrm>
-            <a:off x="6400800" y="5257800"/>
-            <a:ext cx="5074920" cy="822960"/>
+          <p:cNvPr id="10" name="Text 5"/>
+          <p:cNvSpPr txBox="1"/>
+          <p:nvPr/>
+        </p:nvSpPr>
+        <p:spPr>
+          <a:xfrm>
+            <a:off x="3922776" y="4950460"/>
+            <a:ext cx="2807208" cy="905256"/>
           </a:xfrm>
           <a:prstGeom prst="rect">
             <a:avLst/>
@@ -5174,14 +4697,79 @@
               <a:buNone/>
             </a:pPr>
             <a:r>
-              <a:rPr lang="en-US" sz="1600" dirty="0">
-                <a:solidFill>
-                  <a:schemeClr val="accent6"/>
-                </a:solidFill>
-              </a:rPr>
-              <a:t>Later  ·  live Grok without a key, cloud deploy, background tracking.</a:t>
-            </a:r>
-            <a:endParaRPr lang="en-US" sz="1600" dirty="0"/>
+              <a:rPr lang="en-US" sz="1400" dirty="0">
+                <a:solidFill>
+                  <a:schemeClr val="tx1"/>
+                </a:solidFill>
+              </a:rPr>
+              <a:t>Meet Mochi — a rare Storyteller from a hatch.</a:t>
+            </a:r>
+            <a:endParaRPr lang="en-US" sz="1400" dirty="0"/>
+          </a:p>
+        </p:txBody>
+      </p:sp>
+      <p:sp>
+        <p:nvSpPr>
+          <p:cNvPr id="11" name="cap-c"/>
+          <p:cNvSpPr/>
+          <p:nvPr/>
+        </p:nvSpPr>
+        <p:spPr>
+          <a:xfrm>
+            <a:off x="7040880" y="5276088"/>
+            <a:ext cx="4663440" cy="640080"/>
+          </a:xfrm>
+          <a:prstGeom prst="roundRect">
+            <a:avLst>
+              <a:gd name="adj" fmla="val 20000"/>
+            </a:avLst>
+          </a:prstGeom>
+          <a:solidFill>
+            <a:srgbClr val="FFFFFF"/>
+          </a:solidFill>
+          <a:ln/>
+          <a:effectLst>
+            <a:outerShdw sx="100000" sy="100000" kx="0" ky="0" algn="bl" rotWithShape="0" blurRad="101600" dist="25400" dir="5400000">
+              <a:srgbClr val="0B1F3A">
+                <a:alpha val="10000"/>
+              </a:srgbClr>
+            </a:outerShdw>
+          </a:effectLst>
+        </p:spPr>
+      </p:sp>
+      <p:sp>
+        <p:nvSpPr>
+          <p:cNvPr id="12" name="Text 7"/>
+          <p:cNvSpPr txBox="1"/>
+          <p:nvPr/>
+        </p:nvSpPr>
+        <p:spPr>
+          <a:xfrm>
+            <a:off x="7168896" y="5349240"/>
+            <a:ext cx="4407408" cy="493776"/>
+          </a:xfrm>
+          <a:prstGeom prst="rect">
+            <a:avLst/>
+          </a:prstGeom>
+          <a:noFill/>
+          <a:ln/>
+        </p:spPr>
+        <p:txBody>
+          <a:bodyPr wrap="square" lIns="0" tIns="0" rIns="0" bIns="0" rtlCol="0" anchor="ctr"/>
+          <a:lstStyle/>
+          <a:p>
+            <a:pPr indent="0" marL="0">
+              <a:buNone/>
+            </a:pPr>
+            <a:r>
+              <a:rPr lang="en-US" sz="1400" dirty="0">
+                <a:solidFill>
+                  <a:schemeClr val="tx1"/>
+                </a:solidFill>
+              </a:rPr>
+              <a:t>Nova holds Bailey Hall.</a:t>
+            </a:r>
+            <a:endParaRPr lang="en-US" sz="1400" dirty="0"/>
           </a:p>
         </p:txBody>
       </p:sp>
@@ -5220,8 +4808,8 @@
         </p:nvSpPr>
         <p:spPr>
           <a:xfrm>
-            <a:off x="548640" y="256032"/>
-            <a:ext cx="11064240" cy="658368"/>
+            <a:off x="457200" y="201168"/>
+            <a:ext cx="11247120" cy="566928"/>
           </a:xfrm>
           <a:prstGeom prst="rect">
             <a:avLst/>
@@ -5237,14 +4825,14 @@
               <a:buNone/>
             </a:pPr>
             <a:r>
-              <a:rPr lang="en-US" sz="3600" b="1" dirty="0">
+              <a:rPr lang="en-US" sz="3000" b="1" dirty="0">
                 <a:solidFill>
                   <a:schemeClr val="tx1"/>
                 </a:solidFill>
               </a:rPr>
               <a:t>Everyday walks. Extraordinary company.</a:t>
             </a:r>
-            <a:endParaRPr lang="en-US" sz="3600" dirty="0"/>
+            <a:endParaRPr lang="en-US" sz="3000" dirty="0"/>
           </a:p>
         </p:txBody>
       </p:sp>
@@ -5256,8 +4844,8 @@
         </p:nvSpPr>
         <p:spPr>
           <a:xfrm>
-            <a:off x="548640" y="1005840"/>
-            <a:ext cx="11064240" cy="411480"/>
+            <a:off x="457200" y="914400"/>
+            <a:ext cx="11247120" cy="365760"/>
           </a:xfrm>
           <a:prstGeom prst="rect">
             <a:avLst/>
@@ -5292,8 +4880,8 @@
         </p:nvSpPr>
         <p:spPr>
           <a:xfrm>
-            <a:off x="548640" y="1554480"/>
-            <a:ext cx="11064240" cy="365760"/>
+            <a:off x="457200" y="1417320"/>
+            <a:ext cx="11247120" cy="320040"/>
           </a:xfrm>
           <a:prstGeom prst="rect">
             <a:avLst/>
@@ -5328,12 +4916,12 @@
         </p:nvSpPr>
         <p:spPr>
           <a:xfrm>
-            <a:off x="548640" y="2057400"/>
-            <a:ext cx="3611880" cy="2148840"/>
+            <a:off x="457200" y="1874520"/>
+            <a:ext cx="3657600" cy="2057400"/>
           </a:xfrm>
           <a:prstGeom prst="roundRect">
             <a:avLst>
-              <a:gd name="adj" fmla="val 6809"/>
+              <a:gd name="adj" fmla="val 6222"/>
             </a:avLst>
           </a:prstGeom>
           <a:solidFill>
@@ -5343,7 +4931,7 @@
           <a:effectLst>
             <a:outerShdw sx="100000" sy="100000" kx="0" ky="0" algn="bl" rotWithShape="0" blurRad="101600" dist="25400" dir="5400000">
               <a:srgbClr val="0B1F3A">
-                <a:alpha val="8000"/>
+                <a:alpha val="10000"/>
               </a:srgbClr>
             </a:outerShdw>
           </a:effectLst>
@@ -5357,8 +4945,8 @@
         </p:nvSpPr>
         <p:spPr>
           <a:xfrm>
-            <a:off x="749808" y="2286000"/>
-            <a:ext cx="3200400" cy="777240"/>
+            <a:off x="658368" y="2057400"/>
+            <a:ext cx="3246120" cy="777240"/>
           </a:xfrm>
           <a:prstGeom prst="rect">
             <a:avLst/>
@@ -5393,8 +4981,8 @@
         </p:nvSpPr>
         <p:spPr>
           <a:xfrm>
-            <a:off x="749808" y="3108960"/>
-            <a:ext cx="3200400" cy="822960"/>
+            <a:off x="658368" y="2880360"/>
+            <a:ext cx="3246120" cy="777240"/>
           </a:xfrm>
           <a:prstGeom prst="rect">
             <a:avLst/>
@@ -5429,12 +5017,12 @@
         </p:nvSpPr>
         <p:spPr>
           <a:xfrm>
-            <a:off x="4343400" y="2057400"/>
-            <a:ext cx="3611880" cy="2148840"/>
+            <a:off x="4297680" y="1874520"/>
+            <a:ext cx="3657600" cy="2057400"/>
           </a:xfrm>
           <a:prstGeom prst="roundRect">
             <a:avLst>
-              <a:gd name="adj" fmla="val 6809"/>
+              <a:gd name="adj" fmla="val 6222"/>
             </a:avLst>
           </a:prstGeom>
           <a:solidFill>
@@ -5444,7 +5032,7 @@
           <a:effectLst>
             <a:outerShdw sx="100000" sy="100000" kx="0" ky="0" algn="bl" rotWithShape="0" blurRad="101600" dist="25400" dir="5400000">
               <a:srgbClr val="0B1F3A">
-                <a:alpha val="8000"/>
+                <a:alpha val="10000"/>
               </a:srgbClr>
             </a:outerShdw>
           </a:effectLst>
@@ -5458,8 +5046,8 @@
         </p:nvSpPr>
         <p:spPr>
           <a:xfrm>
-            <a:off x="4544568" y="2286000"/>
-            <a:ext cx="3200400" cy="777240"/>
+            <a:off x="4498848" y="2057400"/>
+            <a:ext cx="3246120" cy="777240"/>
           </a:xfrm>
           <a:prstGeom prst="rect">
             <a:avLst/>
@@ -5494,8 +5082,8 @@
         </p:nvSpPr>
         <p:spPr>
           <a:xfrm>
-            <a:off x="4544568" y="3108960"/>
-            <a:ext cx="3200400" cy="822960"/>
+            <a:off x="4498848" y="2880360"/>
+            <a:ext cx="3246120" cy="777240"/>
           </a:xfrm>
           <a:prstGeom prst="rect">
             <a:avLst/>
@@ -5530,12 +5118,12 @@
         </p:nvSpPr>
         <p:spPr>
           <a:xfrm>
-            <a:off x="8138160" y="2057400"/>
-            <a:ext cx="3611880" cy="2148840"/>
+            <a:off x="8138160" y="1874520"/>
+            <a:ext cx="3657600" cy="2057400"/>
           </a:xfrm>
           <a:prstGeom prst="roundRect">
             <a:avLst>
-              <a:gd name="adj" fmla="val 6809"/>
+              <a:gd name="adj" fmla="val 6222"/>
             </a:avLst>
           </a:prstGeom>
           <a:solidFill>
@@ -5545,7 +5133,7 @@
           <a:effectLst>
             <a:outerShdw sx="100000" sy="100000" kx="0" ky="0" algn="bl" rotWithShape="0" blurRad="101600" dist="25400" dir="5400000">
               <a:srgbClr val="0B1F3A">
-                <a:alpha val="8000"/>
+                <a:alpha val="10000"/>
               </a:srgbClr>
             </a:outerShdw>
           </a:effectLst>
@@ -5559,8 +5147,8 @@
         </p:nvSpPr>
         <p:spPr>
           <a:xfrm>
-            <a:off x="8339328" y="2286000"/>
-            <a:ext cx="3200400" cy="777240"/>
+            <a:off x="8339328" y="2057400"/>
+            <a:ext cx="3246120" cy="777240"/>
           </a:xfrm>
           <a:prstGeom prst="rect">
             <a:avLst/>
@@ -5595,8 +5183,8 @@
         </p:nvSpPr>
         <p:spPr>
           <a:xfrm>
-            <a:off x="8339328" y="3108960"/>
-            <a:ext cx="3200400" cy="822960"/>
+            <a:off x="8339328" y="2880360"/>
+            <a:ext cx="3246120" cy="777240"/>
           </a:xfrm>
           <a:prstGeom prst="rect">
             <a:avLst/>
@@ -5639,8 +5227,8 @@
         </p:blipFill>
         <p:spPr>
           <a:xfrm>
-            <a:off x="640080" y="4480560"/>
-            <a:ext cx="1234440" cy="1234440"/>
+            <a:off x="502920" y="4251960"/>
+            <a:ext cx="1143000" cy="1143000"/>
           </a:xfrm>
           <a:prstGeom prst="rect">
             <a:avLst/>
@@ -5655,8 +5243,8 @@
         </p:nvSpPr>
         <p:spPr>
           <a:xfrm>
-            <a:off x="2011680" y="4709160"/>
-            <a:ext cx="9509760" cy="502920"/>
+            <a:off x="1874520" y="4389120"/>
+            <a:ext cx="9692640" cy="457200"/>
           </a:xfrm>
           <a:prstGeom prst="rect">
             <a:avLst/>
@@ -5691,8 +5279,8 @@
         </p:nvSpPr>
         <p:spPr>
           <a:xfrm>
-            <a:off x="2011680" y="5257800"/>
-            <a:ext cx="9509760" cy="365760"/>
+            <a:off x="1874520" y="4892040"/>
+            <a:ext cx="9692640" cy="365760"/>
           </a:xfrm>
           <a:prstGeom prst="rect">
             <a:avLst/>

--- a/docs/presentation/HuskiesPaws-BigRedHacks-2026.pptx
+++ b/docs/presentation/HuskiesPaws-BigRedHacks-2026.pptx
@@ -12,9 +12,10 @@
     <p:sldId id="260" r:id="rId6"/>
     <p:sldId id="261" r:id="rId7"/>
     <p:sldId id="262" r:id="rId8"/>
+    <p:sldId id="263" r:id="rId9"/>
   </p:sldIdLst>
   <p:notesMasterIdLst>
-    <p:notesMasterId r:id="rId9"/>
+    <p:notesMasterId r:id="rId10"/>
   </p:notesMasterIdLst>
   <p:sldSz cx="12191695" cy="6858000"/>
   <p:notesSz cx="6858000" cy="12191695"/>
@@ -113,27 +114,28 @@
   <p:extLst>
     <p:ext uri="{521415D9-36F7-43E2-AB2F-B90AF26B5E84}">
       <p14:sectionLst xmlns:p14="http://schemas.microsoft.com/office/powerpoint/2010/main">
-        <p14:section name="Pitch" id="{75c60f64-f831-6c14-78a7-61d93ef339ec}">
+        <p14:section name="Pitch" id="{988b1e71-1b5d-ce37-e0b3-2e366a6be4a8}">
           <p14:sldIdLst>
             <p14:sldId id="256"/>
             <p14:sldId id="257"/>
             <p14:sldId id="258"/>
           </p14:sldIdLst>
         </p14:section>
-        <p14:section name="Demo" id="{e85ba79f-efed-ae6f-698c-c17e38775cb1}">
+        <p14:section name="Demo" id="{0c1816e8-be19-15fd-7d77-6dcd8daab24e}">
           <p14:sldIdLst>
             <p14:sldId id="259"/>
           </p14:sldIdLst>
         </p14:section>
-        <p14:section name="Build" id="{a9fd02b3-0671-ec03-9fc5-fd48b3121434}">
+        <p14:section name="Build" id="{b5eb30e9-30c5-4312-17a8-e057b997c40a}">
           <p14:sldIdLst>
             <p14:sldId id="260"/>
             <p14:sldId id="261"/>
+            <p14:sldId id="262"/>
           </p14:sldIdLst>
         </p14:section>
-        <p14:section name="Close" id="{781d7c0b-19e4-d151-c0d1-62d4b7a8e03b}">
+        <p14:section name="Close" id="{aaf720ed-59fe-31f5-874c-9e96a20bad09}">
           <p14:sldIdLst>
-            <p14:sldId id="262"/>
+            <p14:sldId id="263"/>
           </p14:sldIdLst>
         </p14:section>
       </p14:sectionLst>
@@ -892,7 +894,7 @@
           <a:p>
             <a:r>
               <a:rPr lang="en-US" dirty="0"/>
-              <a:t>About 25 seconds. Phone talks to our Node API. Secrets never ship in the app. Wikipedia and OSM ground the adventure. Speech and Imagine are optional. Shared core keeps pets, ranks, and walks consistent. Photon is iMessage. Built in Cursor. Do not say Render is live unless health is green.</a:t>
+              <a:t>About 25 seconds. Phone talks to our Node API. Secrets never ship in the app. Wikipedia and OSM ground the adventure. The text path is iMessage, Photon Spectrum, the Node.js companion, and the same shared backend. Scout, Storyteller, and Pathfinder are roles. Built in Cursor. Do not say Render is live unless health is green.</a:t>
             </a:r>
             <a:endParaRPr lang="en-US" dirty="0"/>
           </a:p>
@@ -980,7 +982,8 @@
           <a:p>
             <a:r>
               <a:rPr lang="en-US" dirty="0"/>
-              <a:t>About 25 seconds. Three things they saw: navigation is play; walking earns creatures; you can hold a real landmark. ISS rare-hatch boost is in shared logic. Be honest about Grok keys, deploy, and background GPS. The squad can also live in iMessage.</a:t>
+              <a:t>Photon extends HuskiesPaws into iMessage. Players can interact with the squad by text, and walking updates connect the mobile adventure back to the conversation.
+Scout explores, the Storyteller tells the story, and the Pathfinder sends walking directions. Those are roles with template replies filled from Wikipedia and maps, not models collaborating. The explore, take me there, arrived sequence is covered by companion tests. This screenshot is a real Explore reply. Story voice notes and unprompted milestone texts are implemented; live iMessage delivery is not verified here.</a:t>
             </a:r>
             <a:endParaRPr lang="en-US" dirty="0"/>
           </a:p>
@@ -1068,7 +1071,7 @@
           <a:p>
             <a:r>
               <a:rPr lang="en-US" dirty="0"/>
-              <a:t>About 25 seconds. Close on campus exploration — not inflated stats. Next is planned: background tracking, a deploy that stays awake, richer social play. Line: Everyday walks. Extraordinary company. Hand them the phone.</a:t>
+              <a:t>About 25 seconds. Three things they saw: navigation is play; walking earns creatures; you can hold a real landmark. ISS rare-hatch boost is in shared logic. Be honest about Grok keys, deploy, and background GPS. The squad can also live in iMessage.</a:t>
             </a:r>
             <a:endParaRPr lang="en-US" dirty="0"/>
           </a:p>
@@ -1092,6 +1095,94 @@
             <a:fld id="{F7021451-1387-4CA6-816F-3879F97B5CBC}" type="slidenum">
               <a:rPr lang="en-US"/>
               <a:t>7</a:t>
+            </a:fld>
+            <a:endParaRPr lang="en-US"/>
+          </a:p>
+        </p:txBody>
+      </p:sp>
+    </p:spTree>
+    <p:extLst>
+      <p:ext uri="{BB962C8B-B14F-4D97-AF65-F5344CB8AC3E}">
+        <p14:creationId xmlns:p14="http://schemas.microsoft.com/office/powerpoint/2010/main" val="1024086991"/>
+      </p:ext>
+    </p:extLst>
+  </p:cSld>
+  <p:clrMapOvr>
+    <a:masterClrMapping/>
+  </p:clrMapOvr>
+</p:notes>
+</file>
+
+<file path=ppt/notesSlides/notesSlide8.xml><?xml version="1.0" encoding="utf-8"?>
+<p:notes xmlns:a="http://schemas.openxmlformats.org/drawingml/2006/main" xmlns:r="http://schemas.openxmlformats.org/officeDocument/2006/relationships" xmlns:p="http://schemas.openxmlformats.org/presentationml/2006/main">
+  <p:cSld>
+    <p:spTree>
+      <p:nvGrpSpPr>
+        <p:cNvPr id="1" name=""/>
+        <p:cNvGrpSpPr/>
+        <p:nvPr/>
+      </p:nvGrpSpPr>
+      <p:grpSpPr>
+        <a:xfrm>
+          <a:off x="0" y="0"/>
+          <a:ext cx="0" cy="0"/>
+          <a:chOff x="0" y="0"/>
+          <a:chExt cx="0" cy="0"/>
+        </a:xfrm>
+      </p:grpSpPr>
+      <p:sp>
+        <p:nvSpPr>
+          <p:cNvPr id="2" name="Slide Image Placeholder 1"/>
+          <p:cNvSpPr>
+            <a:spLocks noGrp="1" noRot="1" noChangeAspect="1"/>
+          </p:cNvSpPr>
+          <p:nvPr>
+            <p:ph type="sldImg"/>
+          </p:nvPr>
+        </p:nvSpPr>
+        <p:spPr/>
+      </p:sp>
+      <p:sp>
+        <p:nvSpPr>
+          <p:cNvPr id="3" name="Notes Placeholder 2"/>
+          <p:cNvSpPr>
+            <a:spLocks noGrp="1"/>
+          </p:cNvSpPr>
+          <p:nvPr>
+            <p:ph type="body" idx="1"/>
+          </p:nvPr>
+        </p:nvSpPr>
+        <p:spPr/>
+        <p:txBody>
+          <a:bodyPr/>
+          <a:lstStyle/>
+          <a:p>
+            <a:r>
+              <a:rPr lang="en-US" dirty="0"/>
+              <a:t>About 25 seconds. Close on campus exploration — not inflated stats. Next is planned: background tracking, a deploy that stays awake, richer social play. Line: Everyday walks. Extraordinary company. Hand them the phone.</a:t>
+            </a:r>
+            <a:endParaRPr lang="en-US" dirty="0"/>
+          </a:p>
+        </p:txBody>
+      </p:sp>
+      <p:sp>
+        <p:nvSpPr>
+          <p:cNvPr id="4" name="Slide Number Placeholder 3"/>
+          <p:cNvSpPr>
+            <a:spLocks noGrp="1"/>
+          </p:cNvSpPr>
+          <p:nvPr>
+            <p:ph type="sldNum" sz="quarter" idx="10"/>
+          </p:nvPr>
+        </p:nvSpPr>
+        <p:spPr/>
+        <p:txBody>
+          <a:bodyPr/>
+          <a:lstStyle/>
+          <a:p>
+            <a:fld id="{F7021451-1387-4CA6-816F-3879F97B5CBC}" type="slidenum">
+              <a:rPr lang="en-US"/>
+              <a:t>8</a:t>
             </a:fld>
             <a:endParaRPr lang="en-US"/>
           </a:p>
@@ -3844,12 +3935,12 @@
         </p:nvSpPr>
         <p:spPr>
           <a:xfrm>
-            <a:off x="502920" y="1097280"/>
-            <a:ext cx="3383280" cy="2240280"/>
+            <a:off x="502920" y="960120"/>
+            <a:ext cx="3383280" cy="1783080"/>
           </a:xfrm>
           <a:prstGeom prst="roundRect">
             <a:avLst>
-              <a:gd name="adj" fmla="val 5714"/>
+              <a:gd name="adj" fmla="val 7179"/>
             </a:avLst>
           </a:prstGeom>
           <a:solidFill>
@@ -3873,8 +3964,8 @@
         </p:nvSpPr>
         <p:spPr>
           <a:xfrm>
-            <a:off x="704088" y="1280160"/>
-            <a:ext cx="2971800" cy="457200"/>
+            <a:off x="704088" y="1078992"/>
+            <a:ext cx="2971800" cy="384048"/>
           </a:xfrm>
           <a:prstGeom prst="rect">
             <a:avLst/>
@@ -3890,14 +3981,14 @@
               <a:buNone/>
             </a:pPr>
             <a:r>
-              <a:rPr lang="en-US" sz="2400" b="1" dirty="0">
+              <a:rPr lang="en-US" sz="2200" b="1" dirty="0">
                 <a:solidFill>
                   <a:schemeClr val="tx1"/>
                 </a:solidFill>
               </a:rPr>
               <a:t>Phone</a:t>
             </a:r>
-            <a:endParaRPr lang="en-US" sz="2400" dirty="0"/>
+            <a:endParaRPr lang="en-US" sz="2200" dirty="0"/>
           </a:p>
         </p:txBody>
       </p:sp>
@@ -3909,8 +4000,8 @@
         </p:nvSpPr>
         <p:spPr>
           <a:xfrm>
-            <a:off x="704088" y="1874520"/>
-            <a:ext cx="2971800" cy="1188720"/>
+            <a:off x="704088" y="1536192"/>
+            <a:ext cx="2971800" cy="960120"/>
           </a:xfrm>
           <a:prstGeom prst="rect">
             <a:avLst/>
@@ -3926,28 +4017,28 @@
               <a:buNone/>
             </a:pPr>
             <a:r>
-              <a:rPr lang="en-US" sz="1800" dirty="0">
+              <a:rPr lang="en-US" sz="1600" dirty="0">
                 <a:solidFill>
                   <a:schemeClr val="accent6"/>
                 </a:solidFill>
               </a:rPr>
               <a:t>Expo app</a:t>
             </a:r>
-            <a:endParaRPr lang="en-US" sz="1800" dirty="0"/>
+            <a:endParaRPr lang="en-US" sz="1600" dirty="0"/>
           </a:p>
           <a:p>
             <a:pPr indent="0" marL="0">
               <a:buNone/>
             </a:pPr>
             <a:r>
-              <a:rPr lang="en-US" sz="1800" dirty="0">
+              <a:rPr lang="en-US" sz="1600" dirty="0">
                 <a:solidFill>
                   <a:schemeClr val="accent6"/>
                 </a:solidFill>
               </a:rPr>
               <a:t>Shared game logic</a:t>
             </a:r>
-            <a:endParaRPr lang="en-US" sz="1800" dirty="0"/>
+            <a:endParaRPr lang="en-US" sz="1600" dirty="0"/>
           </a:p>
         </p:txBody>
       </p:sp>
@@ -3959,8 +4050,8 @@
         </p:nvSpPr>
         <p:spPr>
           <a:xfrm>
-            <a:off x="3749040" y="1920240"/>
-            <a:ext cx="640080" cy="502920"/>
+            <a:off x="3749040" y="1554480"/>
+            <a:ext cx="640080" cy="457200"/>
           </a:xfrm>
           <a:prstGeom prst="rect">
             <a:avLst/>
@@ -3976,14 +4067,14 @@
               <a:buNone/>
             </a:pPr>
             <a:r>
-              <a:rPr lang="en-US" sz="2800" b="1" dirty="0">
+              <a:rPr lang="en-US" sz="2600" b="1" dirty="0">
                 <a:solidFill>
                   <a:schemeClr val="accent1"/>
                 </a:solidFill>
               </a:rPr>
               <a:t>→</a:t>
             </a:r>
-            <a:endParaRPr lang="en-US" sz="2800" dirty="0"/>
+            <a:endParaRPr lang="en-US" sz="2600" dirty="0"/>
           </a:p>
         </p:txBody>
       </p:sp>
@@ -3995,12 +4086,12 @@
         </p:nvSpPr>
         <p:spPr>
           <a:xfrm>
-            <a:off x="4389120" y="1097280"/>
-            <a:ext cx="3383280" cy="2240280"/>
+            <a:off x="4389120" y="960120"/>
+            <a:ext cx="3383280" cy="1783080"/>
           </a:xfrm>
           <a:prstGeom prst="roundRect">
             <a:avLst>
-              <a:gd name="adj" fmla="val 5714"/>
+              <a:gd name="adj" fmla="val 7179"/>
             </a:avLst>
           </a:prstGeom>
           <a:solidFill>
@@ -4024,8 +4115,8 @@
         </p:nvSpPr>
         <p:spPr>
           <a:xfrm>
-            <a:off x="4590288" y="1280160"/>
-            <a:ext cx="2971800" cy="457200"/>
+            <a:off x="4590288" y="1078992"/>
+            <a:ext cx="2971800" cy="384048"/>
           </a:xfrm>
           <a:prstGeom prst="rect">
             <a:avLst/>
@@ -4041,14 +4132,14 @@
               <a:buNone/>
             </a:pPr>
             <a:r>
-              <a:rPr lang="en-US" sz="2400" b="1" dirty="0">
+              <a:rPr lang="en-US" sz="2200" b="1" dirty="0">
                 <a:solidFill>
                   <a:schemeClr val="accent3"/>
                 </a:solidFill>
               </a:rPr>
               <a:t>API</a:t>
             </a:r>
-            <a:endParaRPr lang="en-US" sz="2400" dirty="0"/>
+            <a:endParaRPr lang="en-US" sz="2200" dirty="0"/>
           </a:p>
         </p:txBody>
       </p:sp>
@@ -4060,8 +4151,8 @@
         </p:nvSpPr>
         <p:spPr>
           <a:xfrm>
-            <a:off x="4590288" y="1874520"/>
-            <a:ext cx="2971800" cy="1188720"/>
+            <a:off x="4590288" y="1536192"/>
+            <a:ext cx="2971800" cy="960120"/>
           </a:xfrm>
           <a:prstGeom prst="rect">
             <a:avLst/>
@@ -4077,28 +4168,28 @@
               <a:buNone/>
             </a:pPr>
             <a:r>
-              <a:rPr lang="en-US" sz="1800" dirty="0">
+              <a:rPr lang="en-US" sz="1600" dirty="0">
                 <a:solidFill>
                   <a:srgbClr val="FFFFFF"/>
                 </a:solidFill>
               </a:rPr>
               <a:t>Node /api</a:t>
             </a:r>
-            <a:endParaRPr lang="en-US" sz="1800" dirty="0"/>
+            <a:endParaRPr lang="en-US" sz="1600" dirty="0"/>
           </a:p>
           <a:p>
             <a:pPr indent="0" marL="0">
               <a:buNone/>
             </a:pPr>
             <a:r>
-              <a:rPr lang="en-US" sz="1800" dirty="0">
+              <a:rPr lang="en-US" sz="1600" dirty="0">
                 <a:solidFill>
                   <a:srgbClr val="FFFFFF"/>
                 </a:solidFill>
               </a:rPr>
               <a:t>Secrets stay here</a:t>
             </a:r>
-            <a:endParaRPr lang="en-US" sz="1800" dirty="0"/>
+            <a:endParaRPr lang="en-US" sz="1600" dirty="0"/>
           </a:p>
         </p:txBody>
       </p:sp>
@@ -4110,8 +4201,8 @@
         </p:nvSpPr>
         <p:spPr>
           <a:xfrm>
-            <a:off x="7635240" y="1920240"/>
-            <a:ext cx="640080" cy="502920"/>
+            <a:off x="7635240" y="1554480"/>
+            <a:ext cx="640080" cy="457200"/>
           </a:xfrm>
           <a:prstGeom prst="rect">
             <a:avLst/>
@@ -4127,14 +4218,14 @@
               <a:buNone/>
             </a:pPr>
             <a:r>
-              <a:rPr lang="en-US" sz="2800" b="1" dirty="0">
+              <a:rPr lang="en-US" sz="2600" b="1" dirty="0">
                 <a:solidFill>
                   <a:schemeClr val="accent1"/>
                 </a:solidFill>
               </a:rPr>
               <a:t>→</a:t>
             </a:r>
-            <a:endParaRPr lang="en-US" sz="2800" dirty="0"/>
+            <a:endParaRPr lang="en-US" sz="2600" dirty="0"/>
           </a:p>
         </p:txBody>
       </p:sp>
@@ -4146,12 +4237,12 @@
         </p:nvSpPr>
         <p:spPr>
           <a:xfrm>
-            <a:off x="8275320" y="1097280"/>
-            <a:ext cx="3383280" cy="2240280"/>
+            <a:off x="8275320" y="960120"/>
+            <a:ext cx="3383280" cy="1783080"/>
           </a:xfrm>
           <a:prstGeom prst="roundRect">
             <a:avLst>
-              <a:gd name="adj" fmla="val 5714"/>
+              <a:gd name="adj" fmla="val 7179"/>
             </a:avLst>
           </a:prstGeom>
           <a:solidFill>
@@ -4175,8 +4266,8 @@
         </p:nvSpPr>
         <p:spPr>
           <a:xfrm>
-            <a:off x="8476488" y="1280160"/>
-            <a:ext cx="2971800" cy="457200"/>
+            <a:off x="8476488" y="1078992"/>
+            <a:ext cx="2971800" cy="384048"/>
           </a:xfrm>
           <a:prstGeom prst="rect">
             <a:avLst/>
@@ -4192,14 +4283,14 @@
               <a:buNone/>
             </a:pPr>
             <a:r>
-              <a:rPr lang="en-US" sz="2400" b="1" dirty="0">
+              <a:rPr lang="en-US" sz="2200" b="1" dirty="0">
                 <a:solidFill>
                   <a:schemeClr val="tx1"/>
                 </a:solidFill>
               </a:rPr>
               <a:t>World</a:t>
             </a:r>
-            <a:endParaRPr lang="en-US" sz="2400" dirty="0"/>
+            <a:endParaRPr lang="en-US" sz="2200" dirty="0"/>
           </a:p>
         </p:txBody>
       </p:sp>
@@ -4211,8 +4302,8 @@
         </p:nvSpPr>
         <p:spPr>
           <a:xfrm>
-            <a:off x="8476488" y="1874520"/>
-            <a:ext cx="2971800" cy="1188720"/>
+            <a:off x="8476488" y="1536192"/>
+            <a:ext cx="2971800" cy="960120"/>
           </a:xfrm>
           <a:prstGeom prst="rect">
             <a:avLst/>
@@ -4228,15 +4319,639 @@
               <a:buNone/>
             </a:pPr>
             <a:r>
+              <a:rPr lang="en-US" sz="1600" dirty="0">
+                <a:solidFill>
+                  <a:schemeClr val="accent6"/>
+                </a:solidFill>
+              </a:rPr>
+              <a:t>Wikipedia · OSM</a:t>
+            </a:r>
+            <a:endParaRPr lang="en-US" sz="1600" dirty="0"/>
+          </a:p>
+          <a:p>
+            <a:pPr indent="0" marL="0">
+              <a:buNone/>
+            </a:pPr>
+            <a:r>
+              <a:rPr lang="en-US" sz="1600" dirty="0">
+                <a:solidFill>
+                  <a:schemeClr val="accent6"/>
+                </a:solidFill>
+              </a:rPr>
+              <a:t>Voice and art optional</a:t>
+            </a:r>
+            <a:endParaRPr lang="en-US" sz="1600" dirty="0"/>
+          </a:p>
+        </p:txBody>
+      </p:sp>
+      <p:sp>
+        <p:nvSpPr>
+          <p:cNvPr id="14" name="chain-0"/>
+          <p:cNvSpPr/>
+          <p:nvPr/>
+        </p:nvSpPr>
+        <p:spPr>
+          <a:xfrm>
+            <a:off x="457200" y="2944368"/>
+            <a:ext cx="2542032" cy="1353312"/>
+          </a:xfrm>
+          <a:prstGeom prst="roundRect">
+            <a:avLst>
+              <a:gd name="adj" fmla="val 9459"/>
+            </a:avLst>
+          </a:prstGeom>
+          <a:solidFill>
+            <a:srgbClr val="FFFFFF"/>
+          </a:solidFill>
+          <a:ln/>
+          <a:effectLst>
+            <a:outerShdw sx="100000" sy="100000" kx="0" ky="0" algn="bl" rotWithShape="0" blurRad="101600" dist="25400" dir="5400000">
+              <a:srgbClr val="0B1F3A">
+                <a:alpha val="10000"/>
+              </a:srgbClr>
+            </a:outerShdw>
+          </a:effectLst>
+        </p:spPr>
+      </p:sp>
+      <p:sp>
+        <p:nvSpPr>
+          <p:cNvPr id="15" name="Text 13"/>
+          <p:cNvSpPr txBox="1"/>
+          <p:nvPr/>
+        </p:nvSpPr>
+        <p:spPr>
+          <a:xfrm>
+            <a:off x="566928" y="3072384"/>
+            <a:ext cx="2322576" cy="530352"/>
+          </a:xfrm>
+          <a:prstGeom prst="rect">
+            <a:avLst/>
+          </a:prstGeom>
+          <a:noFill/>
+          <a:ln/>
+        </p:spPr>
+        <p:txBody>
+          <a:bodyPr wrap="square" lIns="0" tIns="0" rIns="0" bIns="0" rtlCol="0" anchor="ctr"/>
+          <a:lstStyle/>
+          <a:p>
+            <a:pPr indent="0" marL="0">
+              <a:buNone/>
+            </a:pPr>
+            <a:r>
+              <a:rPr lang="en-US" sz="1500" b="1" dirty="0">
+                <a:solidFill>
+                  <a:schemeClr val="tx1"/>
+                </a:solidFill>
+              </a:rPr>
+              <a:t>iMessage</a:t>
+            </a:r>
+            <a:endParaRPr lang="en-US" sz="1500" dirty="0"/>
+          </a:p>
+        </p:txBody>
+      </p:sp>
+      <p:sp>
+        <p:nvSpPr>
+          <p:cNvPr id="16" name="Text 14"/>
+          <p:cNvSpPr txBox="1"/>
+          <p:nvPr/>
+        </p:nvSpPr>
+        <p:spPr>
+          <a:xfrm>
+            <a:off x="566928" y="3657600"/>
+            <a:ext cx="2322576" cy="420624"/>
+          </a:xfrm>
+          <a:prstGeom prst="rect">
+            <a:avLst/>
+          </a:prstGeom>
+          <a:noFill/>
+          <a:ln/>
+        </p:spPr>
+        <p:txBody>
+          <a:bodyPr wrap="square" lIns="0" tIns="0" rIns="0" bIns="0" rtlCol="0" anchor="ctr"/>
+          <a:lstStyle/>
+          <a:p>
+            <a:pPr indent="0" marL="0">
+              <a:buNone/>
+            </a:pPr>
+            <a:r>
+              <a:rPr lang="en-US" sz="1300" dirty="0">
+                <a:solidFill>
+                  <a:schemeClr val="accent6"/>
+                </a:solidFill>
+              </a:rPr>
+              <a:t>The player's chat</a:t>
+            </a:r>
+            <a:endParaRPr lang="en-US" sz="1300" dirty="0"/>
+          </a:p>
+        </p:txBody>
+      </p:sp>
+      <p:sp>
+        <p:nvSpPr>
+          <p:cNvPr id="17" name="Text 15"/>
+          <p:cNvSpPr txBox="1"/>
+          <p:nvPr/>
+        </p:nvSpPr>
+        <p:spPr>
+          <a:xfrm>
+            <a:off x="2962656" y="3401568"/>
+            <a:ext cx="420624" cy="365760"/>
+          </a:xfrm>
+          <a:prstGeom prst="rect">
+            <a:avLst/>
+          </a:prstGeom>
+          <a:noFill/>
+          <a:ln/>
+        </p:spPr>
+        <p:txBody>
+          <a:bodyPr wrap="square" lIns="0" tIns="0" rIns="0" bIns="0" rtlCol="0" anchor="ctr"/>
+          <a:lstStyle/>
+          <a:p>
+            <a:pPr algn="ctr" indent="0" marL="0">
+              <a:buNone/>
+            </a:pPr>
+            <a:r>
+              <a:rPr lang="en-US" sz="1600" b="1" dirty="0">
+                <a:solidFill>
+                  <a:schemeClr val="accent1"/>
+                </a:solidFill>
+              </a:rPr>
+              <a:t>↔</a:t>
+            </a:r>
+            <a:endParaRPr lang="en-US" sz="1600" dirty="0"/>
+          </a:p>
+        </p:txBody>
+      </p:sp>
+      <p:sp>
+        <p:nvSpPr>
+          <p:cNvPr id="18" name="chain-1"/>
+          <p:cNvSpPr/>
+          <p:nvPr/>
+        </p:nvSpPr>
+        <p:spPr>
+          <a:xfrm>
+            <a:off x="3364992" y="2944368"/>
+            <a:ext cx="2542032" cy="1353312"/>
+          </a:xfrm>
+          <a:prstGeom prst="roundRect">
+            <a:avLst>
+              <a:gd name="adj" fmla="val 9459"/>
+            </a:avLst>
+          </a:prstGeom>
+          <a:solidFill>
+            <a:srgbClr val="0B1F3A"/>
+          </a:solidFill>
+          <a:ln/>
+          <a:effectLst>
+            <a:outerShdw sx="100000" sy="100000" kx="0" ky="0" algn="bl" rotWithShape="0" blurRad="101600" dist="25400" dir="5400000">
+              <a:srgbClr val="0B1F3A">
+                <a:alpha val="10000"/>
+              </a:srgbClr>
+            </a:outerShdw>
+          </a:effectLst>
+        </p:spPr>
+      </p:sp>
+      <p:sp>
+        <p:nvSpPr>
+          <p:cNvPr id="19" name="Text 17"/>
+          <p:cNvSpPr txBox="1"/>
+          <p:nvPr/>
+        </p:nvSpPr>
+        <p:spPr>
+          <a:xfrm>
+            <a:off x="3474720" y="3072384"/>
+            <a:ext cx="2322576" cy="530352"/>
+          </a:xfrm>
+          <a:prstGeom prst="rect">
+            <a:avLst/>
+          </a:prstGeom>
+          <a:noFill/>
+          <a:ln/>
+        </p:spPr>
+        <p:txBody>
+          <a:bodyPr wrap="square" lIns="0" tIns="0" rIns="0" bIns="0" rtlCol="0" anchor="ctr"/>
+          <a:lstStyle/>
+          <a:p>
+            <a:pPr indent="0" marL="0">
+              <a:buNone/>
+            </a:pPr>
+            <a:r>
+              <a:rPr lang="en-US" sz="1500" b="1" dirty="0">
+                <a:solidFill>
+                  <a:schemeClr val="accent3"/>
+                </a:solidFill>
+              </a:rPr>
+              <a:t>Photon Spectrum</a:t>
+            </a:r>
+            <a:endParaRPr lang="en-US" sz="1500" dirty="0"/>
+          </a:p>
+        </p:txBody>
+      </p:sp>
+      <p:sp>
+        <p:nvSpPr>
+          <p:cNvPr id="20" name="Text 18"/>
+          <p:cNvSpPr txBox="1"/>
+          <p:nvPr/>
+        </p:nvSpPr>
+        <p:spPr>
+          <a:xfrm>
+            <a:off x="3474720" y="3657600"/>
+            <a:ext cx="2322576" cy="420624"/>
+          </a:xfrm>
+          <a:prstGeom prst="rect">
+            <a:avLst/>
+          </a:prstGeom>
+          <a:noFill/>
+          <a:ln/>
+        </p:spPr>
+        <p:txBody>
+          <a:bodyPr wrap="square" lIns="0" tIns="0" rIns="0" bIns="0" rtlCol="0" anchor="ctr"/>
+          <a:lstStyle/>
+          <a:p>
+            <a:pPr indent="0" marL="0">
+              <a:buNone/>
+            </a:pPr>
+            <a:r>
+              <a:rPr lang="en-US" sz="1300" dirty="0">
+                <a:solidFill>
+                  <a:srgbClr val="FFFFFF"/>
+                </a:solidFill>
+              </a:rPr>
+              <a:t>The iMessage line</a:t>
+            </a:r>
+            <a:endParaRPr lang="en-US" sz="1300" dirty="0"/>
+          </a:p>
+        </p:txBody>
+      </p:sp>
+      <p:sp>
+        <p:nvSpPr>
+          <p:cNvPr id="21" name="Text 19"/>
+          <p:cNvSpPr txBox="1"/>
+          <p:nvPr/>
+        </p:nvSpPr>
+        <p:spPr>
+          <a:xfrm>
+            <a:off x="5870448" y="3401568"/>
+            <a:ext cx="420624" cy="365760"/>
+          </a:xfrm>
+          <a:prstGeom prst="rect">
+            <a:avLst/>
+          </a:prstGeom>
+          <a:noFill/>
+          <a:ln/>
+        </p:spPr>
+        <p:txBody>
+          <a:bodyPr wrap="square" lIns="0" tIns="0" rIns="0" bIns="0" rtlCol="0" anchor="ctr"/>
+          <a:lstStyle/>
+          <a:p>
+            <a:pPr algn="ctr" indent="0" marL="0">
+              <a:buNone/>
+            </a:pPr>
+            <a:r>
+              <a:rPr lang="en-US" sz="1600" b="1" dirty="0">
+                <a:solidFill>
+                  <a:schemeClr val="accent1"/>
+                </a:solidFill>
+              </a:rPr>
+              <a:t>↔</a:t>
+            </a:r>
+            <a:endParaRPr lang="en-US" sz="1600" dirty="0"/>
+          </a:p>
+        </p:txBody>
+      </p:sp>
+      <p:sp>
+        <p:nvSpPr>
+          <p:cNvPr id="22" name="chain-2"/>
+          <p:cNvSpPr/>
+          <p:nvPr/>
+        </p:nvSpPr>
+        <p:spPr>
+          <a:xfrm>
+            <a:off x="6272784" y="2944368"/>
+            <a:ext cx="2542032" cy="1353312"/>
+          </a:xfrm>
+          <a:prstGeom prst="roundRect">
+            <a:avLst>
+              <a:gd name="adj" fmla="val 9459"/>
+            </a:avLst>
+          </a:prstGeom>
+          <a:solidFill>
+            <a:srgbClr val="FFFFFF"/>
+          </a:solidFill>
+          <a:ln/>
+          <a:effectLst>
+            <a:outerShdw sx="100000" sy="100000" kx="0" ky="0" algn="bl" rotWithShape="0" blurRad="101600" dist="25400" dir="5400000">
+              <a:srgbClr val="0B1F3A">
+                <a:alpha val="10000"/>
+              </a:srgbClr>
+            </a:outerShdw>
+          </a:effectLst>
+        </p:spPr>
+      </p:sp>
+      <p:sp>
+        <p:nvSpPr>
+          <p:cNvPr id="23" name="Text 21"/>
+          <p:cNvSpPr txBox="1"/>
+          <p:nvPr/>
+        </p:nvSpPr>
+        <p:spPr>
+          <a:xfrm>
+            <a:off x="6382512" y="3072384"/>
+            <a:ext cx="2322576" cy="530352"/>
+          </a:xfrm>
+          <a:prstGeom prst="rect">
+            <a:avLst/>
+          </a:prstGeom>
+          <a:noFill/>
+          <a:ln/>
+        </p:spPr>
+        <p:txBody>
+          <a:bodyPr wrap="square" lIns="0" tIns="0" rIns="0" bIns="0" rtlCol="0" anchor="ctr"/>
+          <a:lstStyle/>
+          <a:p>
+            <a:pPr indent="0" marL="0">
+              <a:buNone/>
+            </a:pPr>
+            <a:r>
+              <a:rPr lang="en-US" sz="1500" b="1" dirty="0">
+                <a:solidFill>
+                  <a:schemeClr val="tx1"/>
+                </a:solidFill>
+              </a:rPr>
+              <a:t>Node.js companion</a:t>
+            </a:r>
+            <a:endParaRPr lang="en-US" sz="1500" dirty="0"/>
+          </a:p>
+        </p:txBody>
+      </p:sp>
+      <p:sp>
+        <p:nvSpPr>
+          <p:cNvPr id="24" name="Text 22"/>
+          <p:cNvSpPr txBox="1"/>
+          <p:nvPr/>
+        </p:nvSpPr>
+        <p:spPr>
+          <a:xfrm>
+            <a:off x="6382512" y="3657600"/>
+            <a:ext cx="2322576" cy="420624"/>
+          </a:xfrm>
+          <a:prstGeom prst="rect">
+            <a:avLst/>
+          </a:prstGeom>
+          <a:noFill/>
+          <a:ln/>
+        </p:spPr>
+        <p:txBody>
+          <a:bodyPr wrap="square" lIns="0" tIns="0" rIns="0" bIns="0" rtlCol="0" anchor="ctr"/>
+          <a:lstStyle/>
+          <a:p>
+            <a:pPr indent="0" marL="0">
+              <a:buNone/>
+            </a:pPr>
+            <a:r>
+              <a:rPr lang="en-US" sz="1300" dirty="0">
+                <a:solidFill>
+                  <a:schemeClr val="accent6"/>
+                </a:solidFill>
+              </a:rPr>
+              <a:t>Role-based replies</a:t>
+            </a:r>
+            <a:endParaRPr lang="en-US" sz="1300" dirty="0"/>
+          </a:p>
+        </p:txBody>
+      </p:sp>
+      <p:sp>
+        <p:nvSpPr>
+          <p:cNvPr id="25" name="Text 23"/>
+          <p:cNvSpPr txBox="1"/>
+          <p:nvPr/>
+        </p:nvSpPr>
+        <p:spPr>
+          <a:xfrm>
+            <a:off x="8778240" y="3401568"/>
+            <a:ext cx="420624" cy="365760"/>
+          </a:xfrm>
+          <a:prstGeom prst="rect">
+            <a:avLst/>
+          </a:prstGeom>
+          <a:noFill/>
+          <a:ln/>
+        </p:spPr>
+        <p:txBody>
+          <a:bodyPr wrap="square" lIns="0" tIns="0" rIns="0" bIns="0" rtlCol="0" anchor="ctr"/>
+          <a:lstStyle/>
+          <a:p>
+            <a:pPr algn="ctr" indent="0" marL="0">
+              <a:buNone/>
+            </a:pPr>
+            <a:r>
+              <a:rPr lang="en-US" sz="1600" b="1" dirty="0">
+                <a:solidFill>
+                  <a:schemeClr val="accent1"/>
+                </a:solidFill>
+              </a:rPr>
+              <a:t>↔</a:t>
+            </a:r>
+            <a:endParaRPr lang="en-US" sz="1600" dirty="0"/>
+          </a:p>
+        </p:txBody>
+      </p:sp>
+      <p:sp>
+        <p:nvSpPr>
+          <p:cNvPr id="26" name="chain-3"/>
+          <p:cNvSpPr/>
+          <p:nvPr/>
+        </p:nvSpPr>
+        <p:spPr>
+          <a:xfrm>
+            <a:off x="9180576" y="2944368"/>
+            <a:ext cx="2542032" cy="1353312"/>
+          </a:xfrm>
+          <a:prstGeom prst="roundRect">
+            <a:avLst>
+              <a:gd name="adj" fmla="val 9459"/>
+            </a:avLst>
+          </a:prstGeom>
+          <a:solidFill>
+            <a:srgbClr val="FFFFFF"/>
+          </a:solidFill>
+          <a:ln/>
+          <a:effectLst>
+            <a:outerShdw sx="100000" sy="100000" kx="0" ky="0" algn="bl" rotWithShape="0" blurRad="101600" dist="25400" dir="5400000">
+              <a:srgbClr val="0B1F3A">
+                <a:alpha val="10000"/>
+              </a:srgbClr>
+            </a:outerShdw>
+          </a:effectLst>
+        </p:spPr>
+      </p:sp>
+      <p:sp>
+        <p:nvSpPr>
+          <p:cNvPr id="27" name="Text 25"/>
+          <p:cNvSpPr txBox="1"/>
+          <p:nvPr/>
+        </p:nvSpPr>
+        <p:spPr>
+          <a:xfrm>
+            <a:off x="9290304" y="3072384"/>
+            <a:ext cx="2322576" cy="530352"/>
+          </a:xfrm>
+          <a:prstGeom prst="rect">
+            <a:avLst/>
+          </a:prstGeom>
+          <a:noFill/>
+          <a:ln/>
+        </p:spPr>
+        <p:txBody>
+          <a:bodyPr wrap="square" lIns="0" tIns="0" rIns="0" bIns="0" rtlCol="0" anchor="ctr"/>
+          <a:lstStyle/>
+          <a:p>
+            <a:pPr indent="0" marL="0">
+              <a:buNone/>
+            </a:pPr>
+            <a:r>
+              <a:rPr lang="en-US" sz="1500" b="1" dirty="0">
+                <a:solidFill>
+                  <a:schemeClr val="tx1"/>
+                </a:solidFill>
+              </a:rPr>
+              <a:t>Shared backend</a:t>
+            </a:r>
+            <a:endParaRPr lang="en-US" sz="1500" dirty="0"/>
+          </a:p>
+        </p:txBody>
+      </p:sp>
+      <p:sp>
+        <p:nvSpPr>
+          <p:cNvPr id="28" name="Text 26"/>
+          <p:cNvSpPr txBox="1"/>
+          <p:nvPr/>
+        </p:nvSpPr>
+        <p:spPr>
+          <a:xfrm>
+            <a:off x="9290304" y="3657600"/>
+            <a:ext cx="2322576" cy="420624"/>
+          </a:xfrm>
+          <a:prstGeom prst="rect">
+            <a:avLst/>
+          </a:prstGeom>
+          <a:noFill/>
+          <a:ln/>
+        </p:spPr>
+        <p:txBody>
+          <a:bodyPr wrap="square" lIns="0" tIns="0" rIns="0" bIns="0" rtlCol="0" anchor="ctr"/>
+          <a:lstStyle/>
+          <a:p>
+            <a:pPr indent="0" marL="0">
+              <a:buNone/>
+            </a:pPr>
+            <a:r>
+              <a:rPr lang="en-US" sz="1300" dirty="0">
+                <a:solidFill>
+                  <a:schemeClr val="accent6"/>
+                </a:solidFill>
+              </a:rPr>
+              <a:t>core/ and /api</a:t>
+            </a:r>
+            <a:endParaRPr lang="en-US" sz="1300" dirty="0"/>
+          </a:p>
+        </p:txBody>
+      </p:sp>
+      <p:sp>
+        <p:nvSpPr>
+          <p:cNvPr id="29" name="f-0"/>
+          <p:cNvSpPr/>
+          <p:nvPr/>
+        </p:nvSpPr>
+        <p:spPr>
+          <a:xfrm>
+            <a:off x="594360" y="4736592"/>
+            <a:ext cx="292608" cy="292608"/>
+          </a:xfrm>
+          <a:prstGeom prst="ellipse">
+            <a:avLst/>
+          </a:prstGeom>
+          <a:solidFill>
+            <a:schemeClr val="accent2"/>
+          </a:solidFill>
+          <a:ln/>
+        </p:spPr>
+      </p:sp>
+      <p:sp>
+        <p:nvSpPr>
+          <p:cNvPr id="30" name="Text 28"/>
+          <p:cNvSpPr txBox="1"/>
+          <p:nvPr/>
+        </p:nvSpPr>
+        <p:spPr>
+          <a:xfrm>
+            <a:off x="1051560" y="4590288"/>
+            <a:ext cx="10515600" cy="566928"/>
+          </a:xfrm>
+          <a:prstGeom prst="rect">
+            <a:avLst/>
+          </a:prstGeom>
+          <a:noFill/>
+          <a:ln/>
+        </p:spPr>
+        <p:txBody>
+          <a:bodyPr wrap="square" lIns="0" tIns="0" rIns="0" bIns="0" rtlCol="0" anchor="ctr"/>
+          <a:lstStyle/>
+          <a:p>
+            <a:pPr indent="0" marL="0">
+              <a:buNone/>
+            </a:pPr>
+            <a:r>
               <a:rPr lang="en-US" sz="1800" dirty="0">
                 <a:solidFill>
-                  <a:schemeClr val="accent6"/>
-                </a:solidFill>
-              </a:rPr>
-              <a:t>Wikipedia · OSM</a:t>
+                  <a:schemeClr val="tx1"/>
+                </a:solidFill>
+              </a:rPr>
+              <a:t>Facts and routes come from tools, not the model.</a:t>
             </a:r>
             <a:endParaRPr lang="en-US" sz="1800" dirty="0"/>
           </a:p>
+        </p:txBody>
+      </p:sp>
+      <p:sp>
+        <p:nvSpPr>
+          <p:cNvPr id="31" name="f-1"/>
+          <p:cNvSpPr/>
+          <p:nvPr/>
+        </p:nvSpPr>
+        <p:spPr>
+          <a:xfrm>
+            <a:off x="594360" y="5303520"/>
+            <a:ext cx="292608" cy="292608"/>
+          </a:xfrm>
+          <a:prstGeom prst="ellipse">
+            <a:avLst/>
+          </a:prstGeom>
+          <a:solidFill>
+            <a:schemeClr val="accent2"/>
+          </a:solidFill>
+          <a:ln/>
+        </p:spPr>
+      </p:sp>
+      <p:sp>
+        <p:nvSpPr>
+          <p:cNvPr id="32" name="Text 30"/>
+          <p:cNvSpPr txBox="1"/>
+          <p:nvPr/>
+        </p:nvSpPr>
+        <p:spPr>
+          <a:xfrm>
+            <a:off x="1051560" y="5157216"/>
+            <a:ext cx="10515600" cy="566928"/>
+          </a:xfrm>
+          <a:prstGeom prst="rect">
+            <a:avLst/>
+          </a:prstGeom>
+          <a:noFill/>
+          <a:ln/>
+        </p:spPr>
+        <p:txBody>
+          <a:bodyPr wrap="square" lIns="0" tIns="0" rIns="0" bIns="0" rtlCol="0" anchor="ctr"/>
+          <a:lstStyle/>
           <a:p>
             <a:pPr indent="0" marL="0">
               <a:buNone/>
@@ -4244,10 +4959,10 @@
             <a:r>
               <a:rPr lang="en-US" sz="1800" dirty="0">
                 <a:solidFill>
-                  <a:schemeClr val="accent6"/>
-                </a:solidFill>
-              </a:rPr>
-              <a:t>Voice and art optional</a:t>
+                  <a:schemeClr val="tx1"/>
+                </a:solidFill>
+              </a:rPr>
+              <a:t>Scout, Storyteller, and Pathfinder are roles, not collaborating models.</a:t>
             </a:r>
             <a:endParaRPr lang="en-US" sz="1800" dirty="0"/>
           </a:p>
@@ -4255,13 +4970,13 @@
       </p:sp>
       <p:sp>
         <p:nvSpPr>
-          <p:cNvPr id="14" name="f-0"/>
+          <p:cNvPr id="33" name="f-2"/>
           <p:cNvSpPr/>
           <p:nvPr/>
         </p:nvSpPr>
         <p:spPr>
           <a:xfrm>
-            <a:off x="594360" y="3822192"/>
+            <a:off x="594360" y="5870448"/>
             <a:ext cx="292608" cy="292608"/>
           </a:xfrm>
           <a:prstGeom prst="ellipse">
@@ -4275,14 +4990,14 @@
       </p:sp>
       <p:sp>
         <p:nvSpPr>
-          <p:cNvPr id="15" name="Text 13"/>
-          <p:cNvSpPr txBox="1"/>
-          <p:nvPr/>
-        </p:nvSpPr>
-        <p:spPr>
-          <a:xfrm>
-            <a:off x="1051560" y="3657600"/>
-            <a:ext cx="10515600" cy="640080"/>
+          <p:cNvPr id="34" name="Text 32"/>
+          <p:cNvSpPr txBox="1"/>
+          <p:nvPr/>
+        </p:nvSpPr>
+        <p:spPr>
+          <a:xfrm>
+            <a:off x="1051560" y="5724144"/>
+            <a:ext cx="10515600" cy="566928"/>
           </a:xfrm>
           <a:prstGeom prst="rect">
             <a:avLst/>
@@ -4298,126 +5013,14 @@
               <a:buNone/>
             </a:pPr>
             <a:r>
-              <a:rPr lang="en-US" sz="2000" dirty="0">
+              <a:rPr lang="en-US" sz="1800" dirty="0">
                 <a:solidFill>
                   <a:schemeClr val="tx1"/>
                 </a:solidFill>
               </a:rPr>
-              <a:t>Facts and routes come from tools, not the model.</a:t>
-            </a:r>
-            <a:endParaRPr lang="en-US" sz="2000" dirty="0"/>
-          </a:p>
-        </p:txBody>
-      </p:sp>
-      <p:sp>
-        <p:nvSpPr>
-          <p:cNvPr id="16" name="f-1"/>
-          <p:cNvSpPr/>
-          <p:nvPr/>
-        </p:nvSpPr>
-        <p:spPr>
-          <a:xfrm>
-            <a:off x="594360" y="4599432"/>
-            <a:ext cx="292608" cy="292608"/>
-          </a:xfrm>
-          <a:prstGeom prst="ellipse">
-            <a:avLst/>
-          </a:prstGeom>
-          <a:solidFill>
-            <a:schemeClr val="accent2"/>
-          </a:solidFill>
-          <a:ln/>
-        </p:spPr>
-      </p:sp>
-      <p:sp>
-        <p:nvSpPr>
-          <p:cNvPr id="17" name="Text 15"/>
-          <p:cNvSpPr txBox="1"/>
-          <p:nvPr/>
-        </p:nvSpPr>
-        <p:spPr>
-          <a:xfrm>
-            <a:off x="1051560" y="4434840"/>
-            <a:ext cx="10515600" cy="640080"/>
-          </a:xfrm>
-          <a:prstGeom prst="rect">
-            <a:avLst/>
-          </a:prstGeom>
-          <a:noFill/>
-          <a:ln/>
-        </p:spPr>
-        <p:txBody>
-          <a:bodyPr wrap="square" lIns="0" tIns="0" rIns="0" bIns="0" rtlCol="0" anchor="ctr"/>
-          <a:lstStyle/>
-          <a:p>
-            <a:pPr indent="0" marL="0">
-              <a:buNone/>
-            </a:pPr>
-            <a:r>
-              <a:rPr lang="en-US" sz="2000" dirty="0">
-                <a:solidFill>
-                  <a:schemeClr val="tx1"/>
-                </a:solidFill>
-              </a:rPr>
-              <a:t>Photon carries the same squad into iMessage.</a:t>
-            </a:r>
-            <a:endParaRPr lang="en-US" sz="2000" dirty="0"/>
-          </a:p>
-        </p:txBody>
-      </p:sp>
-      <p:sp>
-        <p:nvSpPr>
-          <p:cNvPr id="18" name="f-2"/>
-          <p:cNvSpPr/>
-          <p:nvPr/>
-        </p:nvSpPr>
-        <p:spPr>
-          <a:xfrm>
-            <a:off x="594360" y="5376672"/>
-            <a:ext cx="292608" cy="292608"/>
-          </a:xfrm>
-          <a:prstGeom prst="ellipse">
-            <a:avLst/>
-          </a:prstGeom>
-          <a:solidFill>
-            <a:schemeClr val="accent2"/>
-          </a:solidFill>
-          <a:ln/>
-        </p:spPr>
-      </p:sp>
-      <p:sp>
-        <p:nvSpPr>
-          <p:cNvPr id="19" name="Text 17"/>
-          <p:cNvSpPr txBox="1"/>
-          <p:nvPr/>
-        </p:nvSpPr>
-        <p:spPr>
-          <a:xfrm>
-            <a:off x="1051560" y="5212080"/>
-            <a:ext cx="10515600" cy="640080"/>
-          </a:xfrm>
-          <a:prstGeom prst="rect">
-            <a:avLst/>
-          </a:prstGeom>
-          <a:noFill/>
-          <a:ln/>
-        </p:spPr>
-        <p:txBody>
-          <a:bodyPr wrap="square" lIns="0" tIns="0" rIns="0" bIns="0" rtlCol="0" anchor="ctr"/>
-          <a:lstStyle/>
-          <a:p>
-            <a:pPr indent="0" marL="0">
-              <a:buNone/>
-            </a:pPr>
-            <a:r>
-              <a:rPr lang="en-US" sz="2000" dirty="0">
-                <a:solidFill>
-                  <a:schemeClr val="tx1"/>
-                </a:solidFill>
-              </a:rPr>
               <a:t>Designed and iterated in Cursor.</a:t>
             </a:r>
-            <a:endParaRPr lang="en-US" sz="2000" dirty="0"/>
+            <a:endParaRPr lang="en-US" sz="1800" dirty="0"/>
           </a:p>
         </p:txBody>
       </p:sp>
@@ -4478,15 +5081,855 @@
                   <a:schemeClr val="tx1"/>
                 </a:solidFill>
               </a:rPr>
-              <a:t>Walking earns creatures and landmarks</a:t>
+              <a:t>Your adventure continues in iMessage</a:t>
             </a:r>
             <a:endParaRPr lang="en-US" sz="3000" dirty="0"/>
           </a:p>
         </p:txBody>
+      </p:sp>
+      <p:sp>
+        <p:nvSpPr>
+          <p:cNvPr id="3" name="im-0"/>
+          <p:cNvSpPr/>
+          <p:nvPr/>
+        </p:nvSpPr>
+        <p:spPr>
+          <a:xfrm>
+            <a:off x="457200" y="932688"/>
+            <a:ext cx="8092440" cy="1060704"/>
+          </a:xfrm>
+          <a:prstGeom prst="roundRect">
+            <a:avLst>
+              <a:gd name="adj" fmla="val 12069"/>
+            </a:avLst>
+          </a:prstGeom>
+          <a:solidFill>
+            <a:srgbClr val="FFFFFF"/>
+          </a:solidFill>
+          <a:ln/>
+          <a:effectLst>
+            <a:outerShdw sx="100000" sy="100000" kx="0" ky="0" algn="bl" rotWithShape="0" blurRad="101600" dist="25400" dir="5400000">
+              <a:srgbClr val="0B1F3A">
+                <a:alpha val="10000"/>
+              </a:srgbClr>
+            </a:outerShdw>
+          </a:effectLst>
+        </p:spPr>
+      </p:sp>
+      <p:sp>
+        <p:nvSpPr>
+          <p:cNvPr id="4" name="im-n-0"/>
+          <p:cNvSpPr/>
+          <p:nvPr/>
+        </p:nvSpPr>
+        <p:spPr>
+          <a:xfrm>
+            <a:off x="640080" y="1188720"/>
+            <a:ext cx="530352" cy="530352"/>
+          </a:xfrm>
+          <a:prstGeom prst="ellipse">
+            <a:avLst/>
+          </a:prstGeom>
+          <a:solidFill>
+            <a:schemeClr val="accent1"/>
+          </a:solidFill>
+          <a:ln/>
+        </p:spPr>
+      </p:sp>
+      <p:sp>
+        <p:nvSpPr>
+          <p:cNvPr id="5" name="Text 3"/>
+          <p:cNvSpPr txBox="1"/>
+          <p:nvPr/>
+        </p:nvSpPr>
+        <p:spPr>
+          <a:xfrm>
+            <a:off x="640080" y="1243584"/>
+            <a:ext cx="530352" cy="420624"/>
+          </a:xfrm>
+          <a:prstGeom prst="rect">
+            <a:avLst/>
+          </a:prstGeom>
+          <a:noFill/>
+          <a:ln/>
+        </p:spPr>
+        <p:txBody>
+          <a:bodyPr wrap="square" lIns="0" tIns="0" rIns="0" bIns="0" rtlCol="0" anchor="ctr"/>
+          <a:lstStyle/>
+          <a:p>
+            <a:pPr algn="ctr" indent="0" marL="0">
+              <a:buNone/>
+            </a:pPr>
+            <a:r>
+              <a:rPr lang="en-US" sz="1600" b="1" dirty="0">
+                <a:solidFill>
+                  <a:srgbClr val="FFFFFF"/>
+                </a:solidFill>
+              </a:rPr>
+              <a:t>1</a:t>
+            </a:r>
+            <a:endParaRPr lang="en-US" sz="1600" dirty="0"/>
+          </a:p>
+        </p:txBody>
+      </p:sp>
+      <p:sp>
+        <p:nvSpPr>
+          <p:cNvPr id="6" name="Text 4"/>
+          <p:cNvSpPr txBox="1"/>
+          <p:nvPr/>
+        </p:nvSpPr>
+        <p:spPr>
+          <a:xfrm>
+            <a:off x="1371600" y="1042416"/>
+            <a:ext cx="6949440" cy="329184"/>
+          </a:xfrm>
+          <a:prstGeom prst="rect">
+            <a:avLst/>
+          </a:prstGeom>
+          <a:noFill/>
+          <a:ln/>
+        </p:spPr>
+        <p:txBody>
+          <a:bodyPr wrap="square" lIns="0" tIns="0" rIns="0" bIns="0" rtlCol="0" anchor="ctr"/>
+          <a:lstStyle/>
+          <a:p>
+            <a:pPr indent="0" marL="0">
+              <a:buNone/>
+            </a:pPr>
+            <a:r>
+              <a:rPr lang="en-US" sz="1800" b="1" dirty="0">
+                <a:solidFill>
+                  <a:schemeClr val="tx1"/>
+                </a:solidFill>
+              </a:rPr>
+              <a:t>Text the squad</a:t>
+            </a:r>
+            <a:endParaRPr lang="en-US" sz="1800" dirty="0"/>
+          </a:p>
+        </p:txBody>
+      </p:sp>
+      <p:sp>
+        <p:nvSpPr>
+          <p:cNvPr id="7" name="Text 5"/>
+          <p:cNvSpPr txBox="1"/>
+          <p:nvPr/>
+        </p:nvSpPr>
+        <p:spPr>
+          <a:xfrm>
+            <a:off x="1371600" y="1389888"/>
+            <a:ext cx="6949440" cy="475488"/>
+          </a:xfrm>
+          <a:prstGeom prst="rect">
+            <a:avLst/>
+          </a:prstGeom>
+          <a:noFill/>
+          <a:ln/>
+        </p:spPr>
+        <p:txBody>
+          <a:bodyPr wrap="square" lIns="0" tIns="0" rIns="0" bIns="0" rtlCol="0" anchor="ctr"/>
+          <a:lstStyle/>
+          <a:p>
+            <a:pPr indent="0" marL="0">
+              <a:buNone/>
+            </a:pPr>
+            <a:r>
+              <a:rPr lang="en-US" sz="1500" dirty="0">
+                <a:solidFill>
+                  <a:schemeClr val="accent6"/>
+                </a:solidFill>
+              </a:rPr>
+              <a:t>Explore nearby landmarks, hear stories, and get walking directions.</a:t>
+            </a:r>
+            <a:endParaRPr lang="en-US" sz="1500" dirty="0"/>
+          </a:p>
+        </p:txBody>
+      </p:sp>
+      <p:sp>
+        <p:nvSpPr>
+          <p:cNvPr id="8" name="im-1"/>
+          <p:cNvSpPr/>
+          <p:nvPr/>
+        </p:nvSpPr>
+        <p:spPr>
+          <a:xfrm>
+            <a:off x="457200" y="2103120"/>
+            <a:ext cx="8092440" cy="1060704"/>
+          </a:xfrm>
+          <a:prstGeom prst="roundRect">
+            <a:avLst>
+              <a:gd name="adj" fmla="val 12069"/>
+            </a:avLst>
+          </a:prstGeom>
+          <a:solidFill>
+            <a:srgbClr val="FFFFFF"/>
+          </a:solidFill>
+          <a:ln/>
+          <a:effectLst>
+            <a:outerShdw sx="100000" sy="100000" kx="0" ky="0" algn="bl" rotWithShape="0" blurRad="101600" dist="25400" dir="5400000">
+              <a:srgbClr val="0B1F3A">
+                <a:alpha val="10000"/>
+              </a:srgbClr>
+            </a:outerShdw>
+          </a:effectLst>
+        </p:spPr>
+      </p:sp>
+      <p:sp>
+        <p:nvSpPr>
+          <p:cNvPr id="9" name="im-n-1"/>
+          <p:cNvSpPr/>
+          <p:nvPr/>
+        </p:nvSpPr>
+        <p:spPr>
+          <a:xfrm>
+            <a:off x="640080" y="2359152"/>
+            <a:ext cx="530352" cy="530352"/>
+          </a:xfrm>
+          <a:prstGeom prst="ellipse">
+            <a:avLst/>
+          </a:prstGeom>
+          <a:solidFill>
+            <a:schemeClr val="accent1"/>
+          </a:solidFill>
+          <a:ln/>
+        </p:spPr>
+      </p:sp>
+      <p:sp>
+        <p:nvSpPr>
+          <p:cNvPr id="10" name="Text 8"/>
+          <p:cNvSpPr txBox="1"/>
+          <p:nvPr/>
+        </p:nvSpPr>
+        <p:spPr>
+          <a:xfrm>
+            <a:off x="640080" y="2414016"/>
+            <a:ext cx="530352" cy="420624"/>
+          </a:xfrm>
+          <a:prstGeom prst="rect">
+            <a:avLst/>
+          </a:prstGeom>
+          <a:noFill/>
+          <a:ln/>
+        </p:spPr>
+        <p:txBody>
+          <a:bodyPr wrap="square" lIns="0" tIns="0" rIns="0" bIns="0" rtlCol="0" anchor="ctr"/>
+          <a:lstStyle/>
+          <a:p>
+            <a:pPr algn="ctr" indent="0" marL="0">
+              <a:buNone/>
+            </a:pPr>
+            <a:r>
+              <a:rPr lang="en-US" sz="1600" b="1" dirty="0">
+                <a:solidFill>
+                  <a:srgbClr val="FFFFFF"/>
+                </a:solidFill>
+              </a:rPr>
+              <a:t>2</a:t>
+            </a:r>
+            <a:endParaRPr lang="en-US" sz="1600" dirty="0"/>
+          </a:p>
+        </p:txBody>
+      </p:sp>
+      <p:sp>
+        <p:nvSpPr>
+          <p:cNvPr id="11" name="Text 9"/>
+          <p:cNvSpPr txBox="1"/>
+          <p:nvPr/>
+        </p:nvSpPr>
+        <p:spPr>
+          <a:xfrm>
+            <a:off x="1371600" y="2212848"/>
+            <a:ext cx="6949440" cy="329184"/>
+          </a:xfrm>
+          <a:prstGeom prst="rect">
+            <a:avLst/>
+          </a:prstGeom>
+          <a:noFill/>
+          <a:ln/>
+        </p:spPr>
+        <p:txBody>
+          <a:bodyPr wrap="square" lIns="0" tIns="0" rIns="0" bIns="0" rtlCol="0" anchor="ctr"/>
+          <a:lstStyle/>
+          <a:p>
+            <a:pPr indent="0" marL="0">
+              <a:buNone/>
+            </a:pPr>
+            <a:r>
+              <a:rPr lang="en-US" sz="1800" b="1" dirty="0">
+                <a:solidFill>
+                  <a:schemeClr val="tx1"/>
+                </a:solidFill>
+              </a:rPr>
+              <a:t>Updates from the walk</a:t>
+            </a:r>
+            <a:endParaRPr lang="en-US" sz="1800" dirty="0"/>
+          </a:p>
+        </p:txBody>
+      </p:sp>
+      <p:sp>
+        <p:nvSpPr>
+          <p:cNvPr id="12" name="Text 10"/>
+          <p:cNvSpPr txBox="1"/>
+          <p:nvPr/>
+        </p:nvSpPr>
+        <p:spPr>
+          <a:xfrm>
+            <a:off x="1371600" y="2560320"/>
+            <a:ext cx="6949440" cy="475488"/>
+          </a:xfrm>
+          <a:prstGeom prst="rect">
+            <a:avLst/>
+          </a:prstGeom>
+          <a:noFill/>
+          <a:ln/>
+        </p:spPr>
+        <p:txBody>
+          <a:bodyPr wrap="square" lIns="0" tIns="0" rIns="0" bIns="0" rtlCol="0" anchor="ctr"/>
+          <a:lstStyle/>
+          <a:p>
+            <a:pPr indent="0" marL="0">
+              <a:buNone/>
+            </a:pPr>
+            <a:r>
+              <a:rPr lang="en-US" sz="1500" dirty="0">
+                <a:solidFill>
+                  <a:schemeClr val="accent6"/>
+                </a:solidFill>
+              </a:rPr>
+              <a:t>When the app records a new landmark or a step milestone.</a:t>
+            </a:r>
+            <a:endParaRPr lang="en-US" sz="1500" dirty="0"/>
+          </a:p>
+        </p:txBody>
+      </p:sp>
+      <p:sp>
+        <p:nvSpPr>
+          <p:cNvPr id="13" name="im-2"/>
+          <p:cNvSpPr/>
+          <p:nvPr/>
+        </p:nvSpPr>
+        <p:spPr>
+          <a:xfrm>
+            <a:off x="457200" y="3273552"/>
+            <a:ext cx="8092440" cy="1060704"/>
+          </a:xfrm>
+          <a:prstGeom prst="roundRect">
+            <a:avLst>
+              <a:gd name="adj" fmla="val 12069"/>
+            </a:avLst>
+          </a:prstGeom>
+          <a:solidFill>
+            <a:srgbClr val="FFFFFF"/>
+          </a:solidFill>
+          <a:ln/>
+          <a:effectLst>
+            <a:outerShdw sx="100000" sy="100000" kx="0" ky="0" algn="bl" rotWithShape="0" blurRad="101600" dist="25400" dir="5400000">
+              <a:srgbClr val="0B1F3A">
+                <a:alpha val="10000"/>
+              </a:srgbClr>
+            </a:outerShdw>
+          </a:effectLst>
+        </p:spPr>
+      </p:sp>
+      <p:sp>
+        <p:nvSpPr>
+          <p:cNvPr id="14" name="im-n-2"/>
+          <p:cNvSpPr/>
+          <p:nvPr/>
+        </p:nvSpPr>
+        <p:spPr>
+          <a:xfrm>
+            <a:off x="640080" y="3529584"/>
+            <a:ext cx="530352" cy="530352"/>
+          </a:xfrm>
+          <a:prstGeom prst="ellipse">
+            <a:avLst/>
+          </a:prstGeom>
+          <a:solidFill>
+            <a:schemeClr val="accent1"/>
+          </a:solidFill>
+          <a:ln/>
+        </p:spPr>
+      </p:sp>
+      <p:sp>
+        <p:nvSpPr>
+          <p:cNvPr id="15" name="Text 13"/>
+          <p:cNvSpPr txBox="1"/>
+          <p:nvPr/>
+        </p:nvSpPr>
+        <p:spPr>
+          <a:xfrm>
+            <a:off x="640080" y="3584448"/>
+            <a:ext cx="530352" cy="420624"/>
+          </a:xfrm>
+          <a:prstGeom prst="rect">
+            <a:avLst/>
+          </a:prstGeom>
+          <a:noFill/>
+          <a:ln/>
+        </p:spPr>
+        <p:txBody>
+          <a:bodyPr wrap="square" lIns="0" tIns="0" rIns="0" bIns="0" rtlCol="0" anchor="ctr"/>
+          <a:lstStyle/>
+          <a:p>
+            <a:pPr algn="ctr" indent="0" marL="0">
+              <a:buNone/>
+            </a:pPr>
+            <a:r>
+              <a:rPr lang="en-US" sz="1600" b="1" dirty="0">
+                <a:solidFill>
+                  <a:srgbClr val="FFFFFF"/>
+                </a:solidFill>
+              </a:rPr>
+              <a:t>3</a:t>
+            </a:r>
+            <a:endParaRPr lang="en-US" sz="1600" dirty="0"/>
+          </a:p>
+        </p:txBody>
+      </p:sp>
+      <p:sp>
+        <p:nvSpPr>
+          <p:cNvPr id="16" name="Text 14"/>
+          <p:cNvSpPr txBox="1"/>
+          <p:nvPr/>
+        </p:nvSpPr>
+        <p:spPr>
+          <a:xfrm>
+            <a:off x="1371600" y="3383280"/>
+            <a:ext cx="6949440" cy="329184"/>
+          </a:xfrm>
+          <a:prstGeom prst="rect">
+            <a:avLst/>
+          </a:prstGeom>
+          <a:noFill/>
+          <a:ln/>
+        </p:spPr>
+        <p:txBody>
+          <a:bodyPr wrap="square" lIns="0" tIns="0" rIns="0" bIns="0" rtlCol="0" anchor="ctr"/>
+          <a:lstStyle/>
+          <a:p>
+            <a:pPr indent="0" marL="0">
+              <a:buNone/>
+            </a:pPr>
+            <a:r>
+              <a:rPr lang="en-US" sz="1800" b="1" dirty="0">
+                <a:solidFill>
+                  <a:schemeClr val="tx1"/>
+                </a:solidFill>
+              </a:rPr>
+              <a:t>Photon Spectrum</a:t>
+            </a:r>
+            <a:endParaRPr lang="en-US" sz="1800" dirty="0"/>
+          </a:p>
+        </p:txBody>
+      </p:sp>
+      <p:sp>
+        <p:nvSpPr>
+          <p:cNvPr id="17" name="Text 15"/>
+          <p:cNvSpPr txBox="1"/>
+          <p:nvPr/>
+        </p:nvSpPr>
+        <p:spPr>
+          <a:xfrm>
+            <a:off x="1371600" y="3730752"/>
+            <a:ext cx="6949440" cy="475488"/>
+          </a:xfrm>
+          <a:prstGeom prst="rect">
+            <a:avLst/>
+          </a:prstGeom>
+          <a:noFill/>
+          <a:ln/>
+        </p:spPr>
+        <p:txBody>
+          <a:bodyPr wrap="square" lIns="0" tIns="0" rIns="0" bIns="0" rtlCol="0" anchor="ctr"/>
+          <a:lstStyle/>
+          <a:p>
+            <a:pPr indent="0" marL="0">
+              <a:buNone/>
+            </a:pPr>
+            <a:r>
+              <a:rPr lang="en-US" sz="1500" dirty="0">
+                <a:solidFill>
+                  <a:schemeClr val="accent6"/>
+                </a:solidFill>
+              </a:rPr>
+              <a:t>Same game logic as the phone. Scout, Storyteller, and Pathfinder are roles.</a:t>
+            </a:r>
+            <a:endParaRPr lang="en-US" sz="1500" dirty="0"/>
+          </a:p>
+        </p:txBody>
+      </p:sp>
+      <p:sp>
+        <p:nvSpPr>
+          <p:cNvPr id="18" name="seq-card"/>
+          <p:cNvSpPr/>
+          <p:nvPr/>
+        </p:nvSpPr>
+        <p:spPr>
+          <a:xfrm>
+            <a:off x="457200" y="4480560"/>
+            <a:ext cx="8092440" cy="1554480"/>
+          </a:xfrm>
+          <a:prstGeom prst="roundRect">
+            <a:avLst>
+              <a:gd name="adj" fmla="val 8235"/>
+            </a:avLst>
+          </a:prstGeom>
+          <a:solidFill>
+            <a:srgbClr val="FFFFFF"/>
+          </a:solidFill>
+          <a:ln/>
+          <a:effectLst>
+            <a:outerShdw sx="100000" sy="100000" kx="0" ky="0" algn="bl" rotWithShape="0" blurRad="101600" dist="25400" dir="5400000">
+              <a:srgbClr val="0B1F3A">
+                <a:alpha val="10000"/>
+              </a:srgbClr>
+            </a:outerShdw>
+          </a:effectLst>
+        </p:spPr>
+      </p:sp>
+      <p:sp>
+        <p:nvSpPr>
+          <p:cNvPr id="19" name="Text 17"/>
+          <p:cNvSpPr txBox="1"/>
+          <p:nvPr/>
+        </p:nvSpPr>
+        <p:spPr>
+          <a:xfrm>
+            <a:off x="640080" y="4590288"/>
+            <a:ext cx="7726680" cy="292608"/>
+          </a:xfrm>
+          <a:prstGeom prst="rect">
+            <a:avLst/>
+          </a:prstGeom>
+          <a:noFill/>
+          <a:ln/>
+        </p:spPr>
+        <p:txBody>
+          <a:bodyPr wrap="square" lIns="0" tIns="0" rIns="0" bIns="0" rtlCol="0" anchor="ctr"/>
+          <a:lstStyle/>
+          <a:p>
+            <a:pPr indent="0" marL="0">
+              <a:buNone/>
+            </a:pPr>
+            <a:r>
+              <a:rPr lang="en-US" sz="1400" b="1" dirty="0">
+                <a:solidFill>
+                  <a:schemeClr val="tx1"/>
+                </a:solidFill>
+              </a:rPr>
+              <a:t>A supported sequence</a:t>
+            </a:r>
+            <a:endParaRPr lang="en-US" sz="1400" dirty="0"/>
+          </a:p>
+        </p:txBody>
+      </p:sp>
+      <p:sp>
+        <p:nvSpPr>
+          <p:cNvPr id="20" name="cmd-0"/>
+          <p:cNvSpPr/>
+          <p:nvPr/>
+        </p:nvSpPr>
+        <p:spPr>
+          <a:xfrm>
+            <a:off x="640080" y="4937760"/>
+            <a:ext cx="2148840" cy="438912"/>
+          </a:xfrm>
+          <a:prstGeom prst="roundRect">
+            <a:avLst>
+              <a:gd name="adj" fmla="val 20833"/>
+            </a:avLst>
+          </a:prstGeom>
+          <a:solidFill>
+            <a:srgbClr val="0B1F3A"/>
+          </a:solidFill>
+          <a:ln/>
+        </p:spPr>
+      </p:sp>
+      <p:sp>
+        <p:nvSpPr>
+          <p:cNvPr id="21" name="Text 19"/>
+          <p:cNvSpPr txBox="1"/>
+          <p:nvPr/>
+        </p:nvSpPr>
+        <p:spPr>
+          <a:xfrm>
+            <a:off x="640080" y="4992624"/>
+            <a:ext cx="2148840" cy="329184"/>
+          </a:xfrm>
+          <a:prstGeom prst="rect">
+            <a:avLst/>
+          </a:prstGeom>
+          <a:noFill/>
+          <a:ln/>
+        </p:spPr>
+        <p:txBody>
+          <a:bodyPr wrap="square" lIns="0" tIns="0" rIns="0" bIns="0" rtlCol="0" anchor="ctr"/>
+          <a:lstStyle/>
+          <a:p>
+            <a:pPr algn="ctr" indent="0" marL="0">
+              <a:buNone/>
+            </a:pPr>
+            <a:r>
+              <a:rPr lang="en-US" sz="1400" b="1" dirty="0">
+                <a:solidFill>
+                  <a:srgbClr val="FFFFFF"/>
+                </a:solidFill>
+              </a:rPr>
+              <a:t>explore</a:t>
+            </a:r>
+            <a:endParaRPr lang="en-US" sz="1400" dirty="0"/>
+          </a:p>
+        </p:txBody>
+      </p:sp>
+      <p:sp>
+        <p:nvSpPr>
+          <p:cNvPr id="22" name="Text 20"/>
+          <p:cNvSpPr txBox="1"/>
+          <p:nvPr/>
+        </p:nvSpPr>
+        <p:spPr>
+          <a:xfrm>
+            <a:off x="2724912" y="4974336"/>
+            <a:ext cx="502920" cy="365760"/>
+          </a:xfrm>
+          <a:prstGeom prst="rect">
+            <a:avLst/>
+          </a:prstGeom>
+          <a:noFill/>
+          <a:ln/>
+        </p:spPr>
+        <p:txBody>
+          <a:bodyPr wrap="square" lIns="0" tIns="0" rIns="0" bIns="0" rtlCol="0" anchor="ctr"/>
+          <a:lstStyle/>
+          <a:p>
+            <a:pPr algn="ctr" indent="0" marL="0">
+              <a:buNone/>
+            </a:pPr>
+            <a:r>
+              <a:rPr lang="en-US" sz="1600" b="1" dirty="0">
+                <a:solidFill>
+                  <a:schemeClr val="accent1"/>
+                </a:solidFill>
+              </a:rPr>
+              <a:t>→</a:t>
+            </a:r>
+            <a:endParaRPr lang="en-US" sz="1600" dirty="0"/>
+          </a:p>
+        </p:txBody>
+      </p:sp>
+      <p:sp>
+        <p:nvSpPr>
+          <p:cNvPr id="23" name="cmd-1"/>
+          <p:cNvSpPr/>
+          <p:nvPr/>
+        </p:nvSpPr>
+        <p:spPr>
+          <a:xfrm>
+            <a:off x="3246120" y="4937760"/>
+            <a:ext cx="2148840" cy="438912"/>
+          </a:xfrm>
+          <a:prstGeom prst="roundRect">
+            <a:avLst>
+              <a:gd name="adj" fmla="val 20833"/>
+            </a:avLst>
+          </a:prstGeom>
+          <a:solidFill>
+            <a:srgbClr val="0B1F3A"/>
+          </a:solidFill>
+          <a:ln/>
+        </p:spPr>
+      </p:sp>
+      <p:sp>
+        <p:nvSpPr>
+          <p:cNvPr id="24" name="Text 22"/>
+          <p:cNvSpPr txBox="1"/>
+          <p:nvPr/>
+        </p:nvSpPr>
+        <p:spPr>
+          <a:xfrm>
+            <a:off x="3246120" y="4992624"/>
+            <a:ext cx="2148840" cy="329184"/>
+          </a:xfrm>
+          <a:prstGeom prst="rect">
+            <a:avLst/>
+          </a:prstGeom>
+          <a:noFill/>
+          <a:ln/>
+        </p:spPr>
+        <p:txBody>
+          <a:bodyPr wrap="square" lIns="0" tIns="0" rIns="0" bIns="0" rtlCol="0" anchor="ctr"/>
+          <a:lstStyle/>
+          <a:p>
+            <a:pPr algn="ctr" indent="0" marL="0">
+              <a:buNone/>
+            </a:pPr>
+            <a:r>
+              <a:rPr lang="en-US" sz="1400" b="1" dirty="0">
+                <a:solidFill>
+                  <a:srgbClr val="FFFFFF"/>
+                </a:solidFill>
+              </a:rPr>
+              <a:t>take me there</a:t>
+            </a:r>
+            <a:endParaRPr lang="en-US" sz="1400" dirty="0"/>
+          </a:p>
+        </p:txBody>
+      </p:sp>
+      <p:sp>
+        <p:nvSpPr>
+          <p:cNvPr id="25" name="Text 23"/>
+          <p:cNvSpPr txBox="1"/>
+          <p:nvPr/>
+        </p:nvSpPr>
+        <p:spPr>
+          <a:xfrm>
+            <a:off x="5330952" y="4974336"/>
+            <a:ext cx="502920" cy="365760"/>
+          </a:xfrm>
+          <a:prstGeom prst="rect">
+            <a:avLst/>
+          </a:prstGeom>
+          <a:noFill/>
+          <a:ln/>
+        </p:spPr>
+        <p:txBody>
+          <a:bodyPr wrap="square" lIns="0" tIns="0" rIns="0" bIns="0" rtlCol="0" anchor="ctr"/>
+          <a:lstStyle/>
+          <a:p>
+            <a:pPr algn="ctr" indent="0" marL="0">
+              <a:buNone/>
+            </a:pPr>
+            <a:r>
+              <a:rPr lang="en-US" sz="1600" b="1" dirty="0">
+                <a:solidFill>
+                  <a:schemeClr val="accent1"/>
+                </a:solidFill>
+              </a:rPr>
+              <a:t>→</a:t>
+            </a:r>
+            <a:endParaRPr lang="en-US" sz="1600" dirty="0"/>
+          </a:p>
+        </p:txBody>
+      </p:sp>
+      <p:sp>
+        <p:nvSpPr>
+          <p:cNvPr id="26" name="cmd-2"/>
+          <p:cNvSpPr/>
+          <p:nvPr/>
+        </p:nvSpPr>
+        <p:spPr>
+          <a:xfrm>
+            <a:off x="5852160" y="4937760"/>
+            <a:ext cx="2148840" cy="438912"/>
+          </a:xfrm>
+          <a:prstGeom prst="roundRect">
+            <a:avLst>
+              <a:gd name="adj" fmla="val 20833"/>
+            </a:avLst>
+          </a:prstGeom>
+          <a:solidFill>
+            <a:srgbClr val="0B1F3A"/>
+          </a:solidFill>
+          <a:ln/>
+        </p:spPr>
+      </p:sp>
+      <p:sp>
+        <p:nvSpPr>
+          <p:cNvPr id="27" name="Text 25"/>
+          <p:cNvSpPr txBox="1"/>
+          <p:nvPr/>
+        </p:nvSpPr>
+        <p:spPr>
+          <a:xfrm>
+            <a:off x="5852160" y="4992624"/>
+            <a:ext cx="2148840" cy="329184"/>
+          </a:xfrm>
+          <a:prstGeom prst="rect">
+            <a:avLst/>
+          </a:prstGeom>
+          <a:noFill/>
+          <a:ln/>
+        </p:spPr>
+        <p:txBody>
+          <a:bodyPr wrap="square" lIns="0" tIns="0" rIns="0" bIns="0" rtlCol="0" anchor="ctr"/>
+          <a:lstStyle/>
+          <a:p>
+            <a:pPr algn="ctr" indent="0" marL="0">
+              <a:buNone/>
+            </a:pPr>
+            <a:r>
+              <a:rPr lang="en-US" sz="1400" b="1" dirty="0">
+                <a:solidFill>
+                  <a:srgbClr val="FFFFFF"/>
+                </a:solidFill>
+              </a:rPr>
+              <a:t>arrived</a:t>
+            </a:r>
+            <a:endParaRPr lang="en-US" sz="1400" dirty="0"/>
+          </a:p>
+        </p:txBody>
+      </p:sp>
+      <p:sp>
+        <p:nvSpPr>
+          <p:cNvPr id="28" name="Text 26"/>
+          <p:cNvSpPr txBox="1"/>
+          <p:nvPr/>
+        </p:nvSpPr>
+        <p:spPr>
+          <a:xfrm>
+            <a:off x="640080" y="5504688"/>
+            <a:ext cx="7726680" cy="365760"/>
+          </a:xfrm>
+          <a:prstGeom prst="rect">
+            <a:avLst/>
+          </a:prstGeom>
+          <a:noFill/>
+          <a:ln/>
+        </p:spPr>
+        <p:txBody>
+          <a:bodyPr wrap="square" lIns="0" tIns="0" rIns="0" bIns="0" rtlCol="0" anchor="ctr"/>
+          <a:lstStyle/>
+          <a:p>
+            <a:pPr indent="0" marL="0">
+              <a:buNone/>
+            </a:pPr>
+            <a:r>
+              <a:rPr lang="en-US" sz="1300" dirty="0">
+                <a:solidFill>
+                  <a:schemeClr val="accent6"/>
+                </a:solidFill>
+              </a:rPr>
+              <a:t>Tested in the companion. Milestone texts are built; live iMessage delivery is not verified.</a:t>
+            </a:r>
+            <a:endParaRPr lang="en-US" sz="1300" dirty="0"/>
+          </a:p>
+        </p:txBody>
+      </p:sp>
+      <p:sp>
+        <p:nvSpPr>
+          <p:cNvPr id="29" name="imessage-shot-frame"/>
+          <p:cNvSpPr/>
+          <p:nvPr/>
+        </p:nvSpPr>
+        <p:spPr>
+          <a:xfrm>
+            <a:off x="8933688" y="886968"/>
+            <a:ext cx="2391674" cy="5038344"/>
+          </a:xfrm>
+          <a:prstGeom prst="roundRect">
+            <a:avLst>
+              <a:gd name="adj" fmla="val 6882"/>
+            </a:avLst>
+          </a:prstGeom>
+          <a:solidFill>
+            <a:srgbClr val="0B1F3A"/>
+          </a:solidFill>
+          <a:ln/>
+        </p:spPr>
       </p:sp>
       <p:pic>
         <p:nvPicPr>
-          <p:cNvPr id="3" name="egg" descr="G:\broswer download\big-red-hacks2026\docs\presentation\app_images\C2EA70B0-0CD6-4D92-AAFE-8EC1C33A2133.jpg">    </p:cNvPr>
+          <p:cNvPr id="30" name="imessage-shot" descr="G:\broswer download\big-red-hacks2026\docs\presentation\app_images\imessage-pip-explore.jpg">    </p:cNvPr>
           <p:cNvPicPr>
             <a:picLocks noChangeAspect="1"/>
           </p:cNvPicPr>
@@ -4500,276 +5943,47 @@
         </p:blipFill>
         <p:spPr>
           <a:xfrm>
-            <a:off x="411480" y="960120"/>
-            <a:ext cx="3246120" cy="2877365"/>
+            <a:off x="9006840" y="960120"/>
+            <a:ext cx="2245370" cy="4892040"/>
           </a:xfrm>
           <a:prstGeom prst="rect">
             <a:avLst/>
           </a:prstGeom>
         </p:spPr>
       </p:pic>
-      <p:pic>
-        <p:nvPicPr>
-          <p:cNvPr id="4" name="mochi" descr="G:\broswer download\big-red-hacks2026\docs\presentation\app_images\0B82DD1F-6522-46CD-8774-F7C4336505D4.jpg">    </p:cNvPr>
-          <p:cNvPicPr>
-            <a:picLocks noChangeAspect="1"/>
-          </p:cNvPicPr>
-          <p:nvPr/>
-        </p:nvPicPr>
-        <p:blipFill>
-          <a:blip r:embed="rId2"/>
-          <a:stretch>
-            <a:fillRect/>
-          </a:stretch>
-        </p:blipFill>
-        <p:spPr>
-          <a:xfrm>
-            <a:off x="3794760" y="960120"/>
-            <a:ext cx="3063240" cy="3807460"/>
-          </a:xfrm>
-          <a:prstGeom prst="rect">
-            <a:avLst/>
-          </a:prstGeom>
-        </p:spPr>
-      </p:pic>
-      <p:sp>
-        <p:nvSpPr>
-          <p:cNvPr id="5" name="captured-frame"/>
-          <p:cNvSpPr/>
-          <p:nvPr/>
-        </p:nvSpPr>
-        <p:spPr>
-          <a:xfrm>
-            <a:off x="6967728" y="886968"/>
-            <a:ext cx="2420049" cy="4352544"/>
-          </a:xfrm>
-          <a:prstGeom prst="roundRect">
-            <a:avLst>
-              <a:gd name="adj" fmla="val 6801"/>
-            </a:avLst>
-          </a:prstGeom>
-          <a:solidFill>
-            <a:srgbClr val="0B1F3A"/>
-          </a:solidFill>
-          <a:ln/>
-        </p:spPr>
-      </p:sp>
-      <p:pic>
-        <p:nvPicPr>
-          <p:cNvPr id="6" name="captured" descr="G:\broswer download\big-red-hacks2026\docs\presentation\app_images\D8BE4252-56A8-4B93-B944-9D82B404BB87.jpg">    </p:cNvPr>
-          <p:cNvPicPr>
-            <a:picLocks noChangeAspect="1"/>
-          </p:cNvPicPr>
-          <p:nvPr/>
-        </p:nvPicPr>
-        <p:blipFill>
-          <a:blip r:embed="rId3"/>
-          <a:stretch>
-            <a:fillRect/>
-          </a:stretch>
-        </p:blipFill>
-        <p:spPr>
-          <a:xfrm>
-            <a:off x="7040880" y="960120"/>
-            <a:ext cx="2273745" cy="4206240"/>
-          </a:xfrm>
-          <a:prstGeom prst="rect">
-            <a:avLst/>
-          </a:prstGeom>
-        </p:spPr>
-      </p:pic>
-      <p:sp>
-        <p:nvSpPr>
-          <p:cNvPr id="7" name="egg-c"/>
-          <p:cNvSpPr/>
-          <p:nvPr/>
-        </p:nvSpPr>
-        <p:spPr>
-          <a:xfrm>
-            <a:off x="411480" y="3947213"/>
-            <a:ext cx="3246120" cy="1051560"/>
-          </a:xfrm>
-          <a:prstGeom prst="roundRect">
-            <a:avLst>
-              <a:gd name="adj" fmla="val 12174"/>
-            </a:avLst>
-          </a:prstGeom>
-          <a:solidFill>
-            <a:srgbClr val="FFFFFF"/>
-          </a:solidFill>
-          <a:ln/>
-          <a:effectLst>
-            <a:outerShdw sx="100000" sy="100000" kx="0" ky="0" algn="bl" rotWithShape="0" blurRad="101600" dist="25400" dir="5400000">
-              <a:srgbClr val="0B1F3A">
-                <a:alpha val="10000"/>
-              </a:srgbClr>
-            </a:outerShdw>
-          </a:effectLst>
-        </p:spPr>
-      </p:sp>
-      <p:sp>
-        <p:nvSpPr>
-          <p:cNvPr id="8" name="Text 3"/>
-          <p:cNvSpPr txBox="1"/>
-          <p:nvPr/>
-        </p:nvSpPr>
-        <p:spPr>
-          <a:xfrm>
-            <a:off x="539496" y="4020365"/>
-            <a:ext cx="2990088" cy="905256"/>
-          </a:xfrm>
-          <a:prstGeom prst="rect">
-            <a:avLst/>
-          </a:prstGeom>
-          <a:noFill/>
-          <a:ln/>
-        </p:spPr>
-        <p:txBody>
-          <a:bodyPr wrap="square" lIns="0" tIns="0" rIns="0" bIns="0" rtlCol="0" anchor="ctr"/>
-          <a:lstStyle/>
-          <a:p>
-            <a:pPr indent="0" marL="0">
-              <a:buNone/>
-            </a:pPr>
-            <a:r>
-              <a:rPr lang="en-US" sz="1400" dirty="0">
-                <a:solidFill>
-                  <a:schemeClr val="tx1"/>
-                </a:solidFill>
-              </a:rPr>
-              <a:t>An egg fills as you walk. Demo walks on.</a:t>
-            </a:r>
-            <a:endParaRPr lang="en-US" sz="1400" dirty="0"/>
-          </a:p>
-        </p:txBody>
-      </p:sp>
-      <p:sp>
-        <p:nvSpPr>
-          <p:cNvPr id="9" name="mochi-c"/>
-          <p:cNvSpPr/>
-          <p:nvPr/>
-        </p:nvSpPr>
-        <p:spPr>
-          <a:xfrm>
-            <a:off x="3794760" y="4877308"/>
-            <a:ext cx="3063240" cy="1051560"/>
-          </a:xfrm>
-          <a:prstGeom prst="roundRect">
-            <a:avLst>
-              <a:gd name="adj" fmla="val 12174"/>
-            </a:avLst>
-          </a:prstGeom>
-          <a:solidFill>
-            <a:srgbClr val="FFFFFF"/>
-          </a:solidFill>
-          <a:ln/>
-          <a:effectLst>
-            <a:outerShdw sx="100000" sy="100000" kx="0" ky="0" algn="bl" rotWithShape="0" blurRad="101600" dist="25400" dir="5400000">
-              <a:srgbClr val="0B1F3A">
-                <a:alpha val="10000"/>
-              </a:srgbClr>
-            </a:outerShdw>
-          </a:effectLst>
-        </p:spPr>
-      </p:sp>
-      <p:sp>
-        <p:nvSpPr>
-          <p:cNvPr id="10" name="Text 5"/>
-          <p:cNvSpPr txBox="1"/>
-          <p:nvPr/>
-        </p:nvSpPr>
-        <p:spPr>
-          <a:xfrm>
-            <a:off x="3922776" y="4950460"/>
-            <a:ext cx="2807208" cy="905256"/>
-          </a:xfrm>
-          <a:prstGeom prst="rect">
-            <a:avLst/>
-          </a:prstGeom>
-          <a:noFill/>
-          <a:ln/>
-        </p:spPr>
-        <p:txBody>
-          <a:bodyPr wrap="square" lIns="0" tIns="0" rIns="0" bIns="0" rtlCol="0" anchor="ctr"/>
-          <a:lstStyle/>
-          <a:p>
-            <a:pPr indent="0" marL="0">
-              <a:buNone/>
-            </a:pPr>
-            <a:r>
-              <a:rPr lang="en-US" sz="1400" dirty="0">
-                <a:solidFill>
-                  <a:schemeClr val="tx1"/>
-                </a:solidFill>
-              </a:rPr>
-              <a:t>Meet Mochi — a rare Storyteller from a hatch.</a:t>
-            </a:r>
-            <a:endParaRPr lang="en-US" sz="1400" dirty="0"/>
-          </a:p>
-        </p:txBody>
-      </p:sp>
-      <p:sp>
-        <p:nvSpPr>
-          <p:cNvPr id="11" name="cap-c"/>
-          <p:cNvSpPr/>
-          <p:nvPr/>
-        </p:nvSpPr>
-        <p:spPr>
-          <a:xfrm>
-            <a:off x="7040880" y="5276088"/>
-            <a:ext cx="4663440" cy="640080"/>
-          </a:xfrm>
-          <a:prstGeom prst="roundRect">
-            <a:avLst>
-              <a:gd name="adj" fmla="val 20000"/>
-            </a:avLst>
-          </a:prstGeom>
-          <a:solidFill>
-            <a:srgbClr val="FFFFFF"/>
-          </a:solidFill>
-          <a:ln/>
-          <a:effectLst>
-            <a:outerShdw sx="100000" sy="100000" kx="0" ky="0" algn="bl" rotWithShape="0" blurRad="101600" dist="25400" dir="5400000">
-              <a:srgbClr val="0B1F3A">
-                <a:alpha val="10000"/>
-              </a:srgbClr>
-            </a:outerShdw>
-          </a:effectLst>
-        </p:spPr>
-      </p:sp>
-      <p:sp>
-        <p:nvSpPr>
-          <p:cNvPr id="12" name="Text 7"/>
-          <p:cNvSpPr txBox="1"/>
-          <p:nvPr/>
-        </p:nvSpPr>
-        <p:spPr>
-          <a:xfrm>
-            <a:off x="7168896" y="5349240"/>
-            <a:ext cx="4407408" cy="493776"/>
-          </a:xfrm>
-          <a:prstGeom prst="rect">
-            <a:avLst/>
-          </a:prstGeom>
-          <a:noFill/>
-          <a:ln/>
-        </p:spPr>
-        <p:txBody>
-          <a:bodyPr wrap="square" lIns="0" tIns="0" rIns="0" bIns="0" rtlCol="0" anchor="ctr"/>
-          <a:lstStyle/>
-          <a:p>
-            <a:pPr indent="0" marL="0">
-              <a:buNone/>
-            </a:pPr>
-            <a:r>
-              <a:rPr lang="en-US" sz="1400" dirty="0">
-                <a:solidFill>
-                  <a:schemeClr val="tx1"/>
-                </a:solidFill>
-              </a:rPr>
-              <a:t>Nova holds Bailey Hall.</a:t>
-            </a:r>
-            <a:endParaRPr lang="en-US" sz="1400" dirty="0"/>
+      <p:sp>
+        <p:nvSpPr>
+          <p:cNvPr id="31" name="Text 28"/>
+          <p:cNvSpPr txBox="1"/>
+          <p:nvPr/>
+        </p:nvSpPr>
+        <p:spPr>
+          <a:xfrm>
+            <a:off x="8803645" y="6053328"/>
+            <a:ext cx="2651760" cy="274320"/>
+          </a:xfrm>
+          <a:prstGeom prst="rect">
+            <a:avLst/>
+          </a:prstGeom>
+          <a:noFill/>
+          <a:ln/>
+        </p:spPr>
+        <p:txBody>
+          <a:bodyPr wrap="square" lIns="0" tIns="0" rIns="0" bIns="0" rtlCol="0" anchor="ctr"/>
+          <a:lstStyle/>
+          <a:p>
+            <a:pPr algn="ctr" indent="0" marL="0">
+              <a:buNone/>
+            </a:pPr>
+            <a:r>
+              <a:rPr lang="en-US" sz="1200" dirty="0">
+                <a:solidFill>
+                  <a:schemeClr val="accent6"/>
+                </a:solidFill>
+              </a:rPr>
+              <a:t>Real iMessage · Explore</a:t>
+            </a:r>
+            <a:endParaRPr lang="en-US" sz="1200" dirty="0"/>
           </a:p>
         </p:txBody>
       </p:sp>
@@ -4784,6 +5998,358 @@
 <file path=ppt/slides/slide7.xml><?xml version="1.0" encoding="utf-8"?>
 <p:sld xmlns:a="http://schemas.openxmlformats.org/drawingml/2006/main" xmlns:r="http://schemas.openxmlformats.org/officeDocument/2006/relationships" xmlns:p="http://schemas.openxmlformats.org/presentationml/2006/main">
   <p:cSld name="Slide 7">
+    <p:spTree>
+      <p:nvGrpSpPr>
+        <p:cNvPr id="1" name=""/>
+        <p:cNvGrpSpPr/>
+        <p:nvPr/>
+      </p:nvGrpSpPr>
+      <p:grpSpPr>
+        <a:xfrm>
+          <a:off x="0" y="0"/>
+          <a:ext cx="0" cy="0"/>
+          <a:chOff x="0" y="0"/>
+          <a:chExt cx="0" cy="0"/>
+        </a:xfrm>
+      </p:grpSpPr>
+      <p:sp>
+        <p:nvSpPr>
+          <p:cNvPr id="2" name="Text 0"/>
+          <p:cNvSpPr txBox="1"/>
+          <p:nvPr>
+            <p:ph idx="100" type="title" hasCustomPrompt="1"/>
+          </p:nvPr>
+        </p:nvSpPr>
+        <p:spPr>
+          <a:xfrm>
+            <a:off x="457200" y="201168"/>
+            <a:ext cx="11247120" cy="566928"/>
+          </a:xfrm>
+          <a:prstGeom prst="rect">
+            <a:avLst/>
+          </a:prstGeom>
+          <a:noFill/>
+          <a:ln/>
+        </p:spPr>
+        <p:txBody>
+          <a:bodyPr wrap="square" lIns="0" tIns="0" rIns="0" bIns="0" rtlCol="0" anchor="ctr"/>
+          <a:lstStyle/>
+          <a:p>
+            <a:pPr algn="l" indent="0" marL="0">
+              <a:buNone/>
+            </a:pPr>
+            <a:r>
+              <a:rPr lang="en-US" sz="3000" b="1" dirty="0">
+                <a:solidFill>
+                  <a:schemeClr val="tx1"/>
+                </a:solidFill>
+              </a:rPr>
+              <a:t>Walking earns creatures and landmarks</a:t>
+            </a:r>
+            <a:endParaRPr lang="en-US" sz="3000" dirty="0"/>
+          </a:p>
+        </p:txBody>
+      </p:sp>
+      <p:pic>
+        <p:nvPicPr>
+          <p:cNvPr id="3" name="egg" descr="G:\broswer download\big-red-hacks2026\docs\presentation\app_images\C2EA70B0-0CD6-4D92-AAFE-8EC1C33A2133.jpg">    </p:cNvPr>
+          <p:cNvPicPr>
+            <a:picLocks noChangeAspect="1"/>
+          </p:cNvPicPr>
+          <p:nvPr/>
+        </p:nvPicPr>
+        <p:blipFill>
+          <a:blip r:embed="rId1"/>
+          <a:stretch>
+            <a:fillRect/>
+          </a:stretch>
+        </p:blipFill>
+        <p:spPr>
+          <a:xfrm>
+            <a:off x="411480" y="960120"/>
+            <a:ext cx="3246120" cy="2877365"/>
+          </a:xfrm>
+          <a:prstGeom prst="rect">
+            <a:avLst/>
+          </a:prstGeom>
+        </p:spPr>
+      </p:pic>
+      <p:pic>
+        <p:nvPicPr>
+          <p:cNvPr id="4" name="mochi" descr="G:\broswer download\big-red-hacks2026\docs\presentation\app_images\0B82DD1F-6522-46CD-8774-F7C4336505D4.jpg">    </p:cNvPr>
+          <p:cNvPicPr>
+            <a:picLocks noChangeAspect="1"/>
+          </p:cNvPicPr>
+          <p:nvPr/>
+        </p:nvPicPr>
+        <p:blipFill>
+          <a:blip r:embed="rId2"/>
+          <a:stretch>
+            <a:fillRect/>
+          </a:stretch>
+        </p:blipFill>
+        <p:spPr>
+          <a:xfrm>
+            <a:off x="3794760" y="960120"/>
+            <a:ext cx="3063240" cy="3807460"/>
+          </a:xfrm>
+          <a:prstGeom prst="rect">
+            <a:avLst/>
+          </a:prstGeom>
+        </p:spPr>
+      </p:pic>
+      <p:sp>
+        <p:nvSpPr>
+          <p:cNvPr id="5" name="captured-frame"/>
+          <p:cNvSpPr/>
+          <p:nvPr/>
+        </p:nvSpPr>
+        <p:spPr>
+          <a:xfrm>
+            <a:off x="6967728" y="886968"/>
+            <a:ext cx="2420049" cy="4352544"/>
+          </a:xfrm>
+          <a:prstGeom prst="roundRect">
+            <a:avLst>
+              <a:gd name="adj" fmla="val 6801"/>
+            </a:avLst>
+          </a:prstGeom>
+          <a:solidFill>
+            <a:srgbClr val="0B1F3A"/>
+          </a:solidFill>
+          <a:ln/>
+        </p:spPr>
+      </p:sp>
+      <p:pic>
+        <p:nvPicPr>
+          <p:cNvPr id="6" name="captured" descr="G:\broswer download\big-red-hacks2026\docs\presentation\app_images\D8BE4252-56A8-4B93-B944-9D82B404BB87.jpg">    </p:cNvPr>
+          <p:cNvPicPr>
+            <a:picLocks noChangeAspect="1"/>
+          </p:cNvPicPr>
+          <p:nvPr/>
+        </p:nvPicPr>
+        <p:blipFill>
+          <a:blip r:embed="rId3"/>
+          <a:stretch>
+            <a:fillRect/>
+          </a:stretch>
+        </p:blipFill>
+        <p:spPr>
+          <a:xfrm>
+            <a:off x="7040880" y="960120"/>
+            <a:ext cx="2273745" cy="4206240"/>
+          </a:xfrm>
+          <a:prstGeom prst="rect">
+            <a:avLst/>
+          </a:prstGeom>
+        </p:spPr>
+      </p:pic>
+      <p:sp>
+        <p:nvSpPr>
+          <p:cNvPr id="7" name="egg-c"/>
+          <p:cNvSpPr/>
+          <p:nvPr/>
+        </p:nvSpPr>
+        <p:spPr>
+          <a:xfrm>
+            <a:off x="411480" y="3947213"/>
+            <a:ext cx="3246120" cy="1051560"/>
+          </a:xfrm>
+          <a:prstGeom prst="roundRect">
+            <a:avLst>
+              <a:gd name="adj" fmla="val 12174"/>
+            </a:avLst>
+          </a:prstGeom>
+          <a:solidFill>
+            <a:srgbClr val="FFFFFF"/>
+          </a:solidFill>
+          <a:ln/>
+          <a:effectLst>
+            <a:outerShdw sx="100000" sy="100000" kx="0" ky="0" algn="bl" rotWithShape="0" blurRad="101600" dist="25400" dir="5400000">
+              <a:srgbClr val="0B1F3A">
+                <a:alpha val="10000"/>
+              </a:srgbClr>
+            </a:outerShdw>
+          </a:effectLst>
+        </p:spPr>
+      </p:sp>
+      <p:sp>
+        <p:nvSpPr>
+          <p:cNvPr id="8" name="Text 3"/>
+          <p:cNvSpPr txBox="1"/>
+          <p:nvPr/>
+        </p:nvSpPr>
+        <p:spPr>
+          <a:xfrm>
+            <a:off x="539496" y="4020365"/>
+            <a:ext cx="2990088" cy="905256"/>
+          </a:xfrm>
+          <a:prstGeom prst="rect">
+            <a:avLst/>
+          </a:prstGeom>
+          <a:noFill/>
+          <a:ln/>
+        </p:spPr>
+        <p:txBody>
+          <a:bodyPr wrap="square" lIns="0" tIns="0" rIns="0" bIns="0" rtlCol="0" anchor="ctr"/>
+          <a:lstStyle/>
+          <a:p>
+            <a:pPr indent="0" marL="0">
+              <a:buNone/>
+            </a:pPr>
+            <a:r>
+              <a:rPr lang="en-US" sz="1400" dirty="0">
+                <a:solidFill>
+                  <a:schemeClr val="tx1"/>
+                </a:solidFill>
+              </a:rPr>
+              <a:t>An egg fills as you walk. Demo walks on.</a:t>
+            </a:r>
+            <a:endParaRPr lang="en-US" sz="1400" dirty="0"/>
+          </a:p>
+        </p:txBody>
+      </p:sp>
+      <p:sp>
+        <p:nvSpPr>
+          <p:cNvPr id="9" name="mochi-c"/>
+          <p:cNvSpPr/>
+          <p:nvPr/>
+        </p:nvSpPr>
+        <p:spPr>
+          <a:xfrm>
+            <a:off x="3794760" y="4877308"/>
+            <a:ext cx="3063240" cy="1051560"/>
+          </a:xfrm>
+          <a:prstGeom prst="roundRect">
+            <a:avLst>
+              <a:gd name="adj" fmla="val 12174"/>
+            </a:avLst>
+          </a:prstGeom>
+          <a:solidFill>
+            <a:srgbClr val="FFFFFF"/>
+          </a:solidFill>
+          <a:ln/>
+          <a:effectLst>
+            <a:outerShdw sx="100000" sy="100000" kx="0" ky="0" algn="bl" rotWithShape="0" blurRad="101600" dist="25400" dir="5400000">
+              <a:srgbClr val="0B1F3A">
+                <a:alpha val="10000"/>
+              </a:srgbClr>
+            </a:outerShdw>
+          </a:effectLst>
+        </p:spPr>
+      </p:sp>
+      <p:sp>
+        <p:nvSpPr>
+          <p:cNvPr id="10" name="Text 5"/>
+          <p:cNvSpPr txBox="1"/>
+          <p:nvPr/>
+        </p:nvSpPr>
+        <p:spPr>
+          <a:xfrm>
+            <a:off x="3922776" y="4950460"/>
+            <a:ext cx="2807208" cy="905256"/>
+          </a:xfrm>
+          <a:prstGeom prst="rect">
+            <a:avLst/>
+          </a:prstGeom>
+          <a:noFill/>
+          <a:ln/>
+        </p:spPr>
+        <p:txBody>
+          <a:bodyPr wrap="square" lIns="0" tIns="0" rIns="0" bIns="0" rtlCol="0" anchor="ctr"/>
+          <a:lstStyle/>
+          <a:p>
+            <a:pPr indent="0" marL="0">
+              <a:buNone/>
+            </a:pPr>
+            <a:r>
+              <a:rPr lang="en-US" sz="1400" dirty="0">
+                <a:solidFill>
+                  <a:schemeClr val="tx1"/>
+                </a:solidFill>
+              </a:rPr>
+              <a:t>Meet Mochi — a rare Storyteller from a hatch.</a:t>
+            </a:r>
+            <a:endParaRPr lang="en-US" sz="1400" dirty="0"/>
+          </a:p>
+        </p:txBody>
+      </p:sp>
+      <p:sp>
+        <p:nvSpPr>
+          <p:cNvPr id="11" name="cap-c"/>
+          <p:cNvSpPr/>
+          <p:nvPr/>
+        </p:nvSpPr>
+        <p:spPr>
+          <a:xfrm>
+            <a:off x="7040880" y="5276088"/>
+            <a:ext cx="4663440" cy="640080"/>
+          </a:xfrm>
+          <a:prstGeom prst="roundRect">
+            <a:avLst>
+              <a:gd name="adj" fmla="val 20000"/>
+            </a:avLst>
+          </a:prstGeom>
+          <a:solidFill>
+            <a:srgbClr val="FFFFFF"/>
+          </a:solidFill>
+          <a:ln/>
+          <a:effectLst>
+            <a:outerShdw sx="100000" sy="100000" kx="0" ky="0" algn="bl" rotWithShape="0" blurRad="101600" dist="25400" dir="5400000">
+              <a:srgbClr val="0B1F3A">
+                <a:alpha val="10000"/>
+              </a:srgbClr>
+            </a:outerShdw>
+          </a:effectLst>
+        </p:spPr>
+      </p:sp>
+      <p:sp>
+        <p:nvSpPr>
+          <p:cNvPr id="12" name="Text 7"/>
+          <p:cNvSpPr txBox="1"/>
+          <p:nvPr/>
+        </p:nvSpPr>
+        <p:spPr>
+          <a:xfrm>
+            <a:off x="7168896" y="5349240"/>
+            <a:ext cx="4407408" cy="493776"/>
+          </a:xfrm>
+          <a:prstGeom prst="rect">
+            <a:avLst/>
+          </a:prstGeom>
+          <a:noFill/>
+          <a:ln/>
+        </p:spPr>
+        <p:txBody>
+          <a:bodyPr wrap="square" lIns="0" tIns="0" rIns="0" bIns="0" rtlCol="0" anchor="ctr"/>
+          <a:lstStyle/>
+          <a:p>
+            <a:pPr indent="0" marL="0">
+              <a:buNone/>
+            </a:pPr>
+            <a:r>
+              <a:rPr lang="en-US" sz="1400" dirty="0">
+                <a:solidFill>
+                  <a:schemeClr val="tx1"/>
+                </a:solidFill>
+              </a:rPr>
+              <a:t>Nova holds Bailey Hall.</a:t>
+            </a:r>
+            <a:endParaRPr lang="en-US" sz="1400" dirty="0"/>
+          </a:p>
+        </p:txBody>
+      </p:sp>
+    </p:spTree>
+  </p:cSld>
+  <p:clrMapOvr>
+    <a:masterClrMapping/>
+  </p:clrMapOvr>
+</p:sld>
+</file>
+
+<file path=ppt/slides/slide8.xml><?xml version="1.0" encoding="utf-8"?>
+<p:sld xmlns:a="http://schemas.openxmlformats.org/drawingml/2006/main" xmlns:r="http://schemas.openxmlformats.org/officeDocument/2006/relationships" xmlns:p="http://schemas.openxmlformats.org/presentationml/2006/main">
+  <p:cSld name="Slide 8">
     <p:spTree>
       <p:nvGrpSpPr>
         <p:cNvPr id="1" name=""/>
